--- a/docs/test/stress/e2e-outputs/trading_basic_pr06.pptx
+++ b/docs/test/stress/e2e-outputs/trading_basic_pr06.pptx
@@ -1658,7 +1658,7 @@
     <p:bg>
       <p:bgPr>
         <a:solidFill>
-          <a:srgbClr val="0F172A"/>
+          <a:srgbClr val="10161F"/>
         </a:solidFill>
       </p:bgPr>
     </p:bg>
@@ -1753,7 +1753,7 @@
           <a:noFill/>
           <a:ln w="10160">
             <a:solidFill>
-              <a:srgbClr val="6B8E00"/>
+              <a:srgbClr val="B98A2E"/>
             </a:solidFill>
             <a:prstDash val="solid"/>
           </a:ln>
@@ -1767,14 +1767,14 @@
         </p:nvSpPr>
         <p:spPr>
           <a:xfrm>
-            <a:off x="7772400" y="0"/>
-            <a:ext cx="4419295" cy="6858000"/>
+            <a:off x="8275320" y="0"/>
+            <a:ext cx="1417320" cy="4041648"/>
           </a:xfrm>
           <a:prstGeom prst="rect">
             <a:avLst/>
           </a:prstGeom>
           <a:solidFill>
-            <a:srgbClr val="6B8E00"/>
+            <a:srgbClr val="1A2030"/>
           </a:solidFill>
           <a:ln/>
         </p:spPr>
@@ -1786,24 +1786,42 @@
           <p:nvPr/>
         </p:nvSpPr>
         <p:spPr>
-          <a:xfrm rot="120000">
-            <a:off x="8412480" y="548640"/>
-            <a:ext cx="3291840" cy="5760720"/>
+          <a:xfrm>
+            <a:off x="9784080" y="868680"/>
+            <a:ext cx="1143000" cy="3172968"/>
           </a:xfrm>
           <a:prstGeom prst="rect">
             <a:avLst/>
           </a:prstGeom>
           <a:solidFill>
-            <a:srgbClr val="0F172A">
-              <a:alpha val="12000"/>
-            </a:srgbClr>
+            <a:srgbClr val="161D2B"/>
           </a:solidFill>
           <a:ln/>
         </p:spPr>
       </p:sp>
       <p:sp>
         <p:nvSpPr>
-          <p:cNvPr id="8" name="Text 6"/>
+          <p:cNvPr id="8" name="Shape 6"/>
+          <p:cNvSpPr/>
+          <p:nvPr/>
+        </p:nvSpPr>
+        <p:spPr>
+          <a:xfrm>
+            <a:off x="11018520" y="1691640"/>
+            <a:ext cx="1170432" cy="2350008"/>
+          </a:xfrm>
+          <a:prstGeom prst="rect">
+            <a:avLst/>
+          </a:prstGeom>
+          <a:solidFill>
+            <a:srgbClr val="2E2718"/>
+          </a:solidFill>
+          <a:ln/>
+        </p:spPr>
+      </p:sp>
+      <p:sp>
+        <p:nvSpPr>
+          <p:cNvPr id="9" name="Text 7"/>
           <p:cNvSpPr/>
           <p:nvPr/>
         </p:nvSpPr>
@@ -1842,7 +1860,7 @@
             <a:r>
               <a:rPr lang="en-US" sz="1500" b="1" dirty="0">
                 <a:solidFill>
-                  <a:srgbClr val="6B8E00"/>
+                  <a:srgbClr val="B98A2E"/>
                 </a:solidFill>
                 <a:latin typeface="Arial" pitchFamily="34" charset="0"/>
                 <a:ea typeface="Arial" pitchFamily="34" charset="-122"/>
@@ -1856,115 +1874,76 @@
       </p:sp>
       <p:sp>
         <p:nvSpPr>
-          <p:cNvPr id="9" name="Text 7"/>
-          <p:cNvSpPr/>
-          <p:nvPr/>
-        </p:nvSpPr>
-        <p:spPr>
-          <a:xfrm>
-            <a:off x="8229600" y="5303520"/>
-            <a:ext cx="3474720" cy="365760"/>
-          </a:xfrm>
-          <a:prstGeom prst="rect">
-            <a:avLst/>
-          </a:prstGeom>
-          <a:noFill/>
-          <a:ln/>
-        </p:spPr>
-        <p:txBody>
-          <a:bodyPr wrap="square" lIns="0" tIns="0" rIns="0" bIns="0" rtlCol="0" anchor="ctr"/>
-          <a:lstStyle/>
-          <a:p>
-            <a:pPr algn="ctr" indent="0" marL="0">
-              <a:buNone/>
-            </a:pPr>
-            <a:r>
-              <a:rPr lang="en-US" sz="1000" dirty="0">
-                <a:solidFill>
-                  <a:srgbClr val="0F172A"/>
+          <p:cNvPr id="10" name="Text 8"/>
+          <p:cNvSpPr/>
+          <p:nvPr/>
+        </p:nvSpPr>
+        <p:spPr>
+          <a:xfrm>
+            <a:off x="566928" y="2029968"/>
+            <a:ext cx="7315200" cy="274320"/>
+          </a:xfrm>
+          <a:prstGeom prst="rect">
+            <a:avLst/>
+          </a:prstGeom>
+          <a:noFill/>
+          <a:ln/>
+        </p:spPr>
+        <p:txBody>
+          <a:bodyPr wrap="square" lIns="0" tIns="0" rIns="0" bIns="0" rtlCol="0" anchor="ctr"/>
+          <a:lstStyle/>
+          <a:p>
+            <a:pPr algn="l" indent="0" marL="0">
+              <a:buNone/>
+            </a:pPr>
+            <a:r>
+              <a:rPr lang="en-US" sz="1000" b="1" spc="250" kern="0" dirty="0">
+                <a:solidFill>
+                  <a:srgbClr val="B98A2E"/>
+                </a:solidFill>
+                <a:latin typeface="Arial" pitchFamily="34" charset="0"/>
+                <a:ea typeface="Arial" pitchFamily="34" charset="-122"/>
+                <a:cs typeface="Arial" pitchFamily="34" charset="-120"/>
+              </a:rPr>
+              <a:t>BASIC IM</a:t>
+            </a:r>
+            <a:endParaRPr lang="en-US" sz="1000" dirty="0"/>
+          </a:p>
+        </p:txBody>
+      </p:sp>
+      <p:sp>
+        <p:nvSpPr>
+          <p:cNvPr id="11" name="Text 9"/>
+          <p:cNvSpPr/>
+          <p:nvPr/>
+        </p:nvSpPr>
+        <p:spPr>
+          <a:xfrm>
+            <a:off x="566928" y="2304288"/>
+            <a:ext cx="7315200" cy="731520"/>
+          </a:xfrm>
+          <a:prstGeom prst="rect">
+            <a:avLst/>
+          </a:prstGeom>
+          <a:noFill/>
+          <a:ln/>
+        </p:spPr>
+        <p:txBody>
+          <a:bodyPr wrap="square" lIns="0" tIns="0" rIns="0" bIns="0" rtlCol="0" anchor="ctr"/>
+          <a:lstStyle/>
+          <a:p>
+            <a:pPr algn="l" indent="0" marL="0">
+              <a:buNone/>
+            </a:pPr>
+            <a:r>
+              <a:rPr lang="en-US" sz="4000" b="1" dirty="0">
+                <a:solidFill>
+                  <a:srgbClr val="FFFFFF"/>
                 </a:solidFill>
                 <a:latin typeface="Pretendard" pitchFamily="34" charset="0"/>
                 <a:ea typeface="Pretendard" pitchFamily="34" charset="-122"/>
                 <a:cs typeface="Pretendard" pitchFamily="34" charset="-120"/>
               </a:rPr>
-              <a:t>상업용 부동산 투자 플랫폼</a:t>
-            </a:r>
-            <a:endParaRPr lang="en-US" sz="1000" dirty="0"/>
-          </a:p>
-        </p:txBody>
-      </p:sp>
-      <p:sp>
-        <p:nvSpPr>
-          <p:cNvPr id="10" name="Text 8"/>
-          <p:cNvSpPr/>
-          <p:nvPr/>
-        </p:nvSpPr>
-        <p:spPr>
-          <a:xfrm>
-            <a:off x="566928" y="2029968"/>
-            <a:ext cx="7315200" cy="274320"/>
-          </a:xfrm>
-          <a:prstGeom prst="rect">
-            <a:avLst/>
-          </a:prstGeom>
-          <a:noFill/>
-          <a:ln/>
-        </p:spPr>
-        <p:txBody>
-          <a:bodyPr wrap="square" lIns="0" tIns="0" rIns="0" bIns="0" rtlCol="0" anchor="ctr"/>
-          <a:lstStyle/>
-          <a:p>
-            <a:pPr algn="l" indent="0" marL="0">
-              <a:buNone/>
-            </a:pPr>
-            <a:r>
-              <a:rPr lang="en-US" sz="1000" b="1" spc="250" kern="0" dirty="0">
-                <a:solidFill>
-                  <a:srgbClr val="6B8E00"/>
-                </a:solidFill>
-                <a:latin typeface="Arial" pitchFamily="34" charset="0"/>
-                <a:ea typeface="Arial" pitchFamily="34" charset="-122"/>
-                <a:cs typeface="Arial" pitchFamily="34" charset="-120"/>
-              </a:rPr>
-              <a:t>BASIC IM</a:t>
-            </a:r>
-            <a:endParaRPr lang="en-US" sz="1000" dirty="0"/>
-          </a:p>
-        </p:txBody>
-      </p:sp>
-      <p:sp>
-        <p:nvSpPr>
-          <p:cNvPr id="11" name="Text 9"/>
-          <p:cNvSpPr/>
-          <p:nvPr/>
-        </p:nvSpPr>
-        <p:spPr>
-          <a:xfrm>
-            <a:off x="566928" y="2304288"/>
-            <a:ext cx="7315200" cy="731520"/>
-          </a:xfrm>
-          <a:prstGeom prst="rect">
-            <a:avLst/>
-          </a:prstGeom>
-          <a:noFill/>
-          <a:ln/>
-        </p:spPr>
-        <p:txBody>
-          <a:bodyPr wrap="square" lIns="0" tIns="0" rIns="0" bIns="0" rtlCol="0" anchor="ctr"/>
-          <a:lstStyle/>
-          <a:p>
-            <a:pPr algn="l" indent="0" marL="0">
-              <a:buNone/>
-            </a:pPr>
-            <a:r>
-              <a:rPr lang="en-US" sz="4000" b="1" dirty="0">
-                <a:solidFill>
-                  <a:srgbClr val="FFFFFF"/>
-                </a:solidFill>
-                <a:latin typeface="Pretendard" pitchFamily="34" charset="0"/>
-                <a:ea typeface="Pretendard" pitchFamily="34" charset="-122"/>
-                <a:cs typeface="Pretendard" pitchFamily="34" charset="-120"/>
-              </a:rPr>
               <a:t>trading 포스처 테스트 문서</a:t>
             </a:r>
             <a:endParaRPr lang="en-US" sz="4000" dirty="0"/>
@@ -1998,7 +1977,7 @@
             <a:r>
               <a:rPr lang="en-US" sz="1400" dirty="0">
                 <a:solidFill>
-                  <a:srgbClr val="F1F5F9"/>
+                  <a:srgbClr val="E2E8F0"/>
                 </a:solidFill>
                 <a:latin typeface="Pretendard" pitchFamily="34" charset="0"/>
                 <a:ea typeface="Pretendard" pitchFamily="34" charset="-122"/>
@@ -2027,7 +2006,7 @@
             </a:avLst>
           </a:prstGeom>
           <a:solidFill>
-            <a:srgbClr val="334155"/>
+            <a:srgbClr val="2D3748"/>
           </a:solidFill>
           <a:ln/>
         </p:spPr>
@@ -2088,7 +2067,7 @@
             </a:avLst>
           </a:prstGeom>
           <a:solidFill>
-            <a:srgbClr val="334155"/>
+            <a:srgbClr val="2D3748"/>
           </a:solidFill>
           <a:ln/>
         </p:spPr>
@@ -2149,11 +2128,11 @@
             </a:avLst>
           </a:prstGeom>
           <a:solidFill>
-            <a:srgbClr val="4F6A00"/>
+            <a:srgbClr val="977024"/>
           </a:solidFill>
           <a:ln w="12700">
             <a:solidFill>
-              <a:srgbClr val="6B8E00"/>
+              <a:srgbClr val="B98A2E"/>
             </a:solidFill>
             <a:prstDash val="solid"/>
           </a:ln>
@@ -2186,7 +2165,7 @@
             <a:r>
               <a:rPr lang="en-US" sz="2200" b="1" dirty="0">
                 <a:solidFill>
-                  <a:srgbClr val="E8F5CC"/>
+                  <a:srgbClr val="F3EBDA"/>
                 </a:solidFill>
                 <a:latin typeface="Pretendard" pitchFamily="34" charset="0"/>
                 <a:ea typeface="Pretendard" pitchFamily="34" charset="-122"/>
@@ -2225,7 +2204,7 @@
             <a:r>
               <a:rPr lang="en-US" sz="950" dirty="0">
                 <a:solidFill>
-                  <a:srgbClr val="64748B"/>
+                  <a:srgbClr val="718096"/>
                 </a:solidFill>
                 <a:latin typeface="Pretendard" pitchFamily="34" charset="0"/>
                 <a:ea typeface="Pretendard" pitchFamily="34" charset="-122"/>
@@ -2264,7 +2243,7 @@
             <a:r>
               <a:rPr lang="en-US" sz="850" dirty="0">
                 <a:solidFill>
-                  <a:srgbClr val="64748B"/>
+                  <a:srgbClr val="718096"/>
                 </a:solidFill>
                 <a:latin typeface="Pretendard" pitchFamily="34" charset="0"/>
                 <a:ea typeface="Pretendard" pitchFamily="34" charset="-122"/>
@@ -2284,59 +2263,75 @@
         </p:nvSpPr>
         <p:spPr>
           <a:xfrm>
-            <a:off x="566928" y="6419088"/>
-            <a:ext cx="11057839" cy="201168"/>
-          </a:xfrm>
-          <a:prstGeom prst="rect">
-            <a:avLst/>
-          </a:prstGeom>
-          <a:noFill/>
-          <a:ln/>
-        </p:spPr>
-        <p:txBody>
-          <a:bodyPr wrap="square" lIns="0" tIns="0" rIns="0" bIns="0" rtlCol="0" anchor="ctr"/>
-          <a:lstStyle/>
-          <a:p>
-            <a:pPr algn="ctr" indent="0" marL="0">
-              <a:buNone/>
-            </a:pPr>
-            <a:r>
-              <a:rPr lang="en-US" sz="750" dirty="0">
-                <a:solidFill>
-                  <a:srgbClr val="64748B"/>
+            <a:off x="566928" y="6382512"/>
+            <a:ext cx="7315200" cy="219456"/>
+          </a:xfrm>
+          <a:prstGeom prst="rect">
+            <a:avLst/>
+          </a:prstGeom>
+          <a:noFill/>
+          <a:ln/>
+        </p:spPr>
+        <p:txBody>
+          <a:bodyPr wrap="square" lIns="0" tIns="0" rIns="0" bIns="0" rtlCol="0" anchor="ctr"/>
+          <a:lstStyle/>
+          <a:p>
+            <a:pPr indent="0" marL="0">
+              <a:buNone/>
+            </a:pPr>
+            <a:r>
+              <a:rPr lang="en-US" sz="800" dirty="0">
+                <a:solidFill>
+                  <a:srgbClr val="718096"/>
                 </a:solidFill>
                 <a:latin typeface="Pretendard" pitchFamily="34" charset="0"/>
                 <a:ea typeface="Pretendard" pitchFamily="34" charset="-122"/>
                 <a:cs typeface="Pretendard" pitchFamily="34" charset="-120"/>
               </a:rPr>
-              <a:t>크리딜  ·    ·  1</a:t>
-            </a:r>
-            <a:endParaRPr lang="en-US" sz="750" dirty="0"/>
-          </a:p>
-        </p:txBody>
-      </p:sp>
-      <p:sp>
-        <p:nvSpPr>
-          <p:cNvPr id="22" name="Shape 20"/>
-          <p:cNvSpPr/>
-          <p:nvPr/>
-        </p:nvSpPr>
-        <p:spPr>
-          <a:xfrm>
-            <a:off x="4437172" y="6382512"/>
-            <a:ext cx="3317352" cy="0"/>
-          </a:xfrm>
-          <a:prstGeom prst="line">
-            <a:avLst/>
-          </a:prstGeom>
-          <a:noFill/>
-          <a:ln w="6350">
-            <a:solidFill>
-              <a:srgbClr val="6B8E00"/>
-            </a:solidFill>
-            <a:prstDash val="solid"/>
-          </a:ln>
-        </p:spPr>
+              <a:t>크리딜   |   </a:t>
+            </a:r>
+            <a:endParaRPr lang="en-US" sz="800" dirty="0"/>
+          </a:p>
+        </p:txBody>
+      </p:sp>
+      <p:sp>
+        <p:nvSpPr>
+          <p:cNvPr id="22" name="Text 20"/>
+          <p:cNvSpPr/>
+          <p:nvPr/>
+        </p:nvSpPr>
+        <p:spPr>
+          <a:xfrm>
+            <a:off x="10710367" y="6382512"/>
+            <a:ext cx="914400" cy="219456"/>
+          </a:xfrm>
+          <a:prstGeom prst="rect">
+            <a:avLst/>
+          </a:prstGeom>
+          <a:noFill/>
+          <a:ln/>
+        </p:spPr>
+        <p:txBody>
+          <a:bodyPr wrap="square" lIns="0" tIns="0" rIns="0" bIns="0" rtlCol="0" anchor="ctr"/>
+          <a:lstStyle/>
+          <a:p>
+            <a:pPr algn="r" indent="0" marL="0">
+              <a:buNone/>
+            </a:pPr>
+            <a:r>
+              <a:rPr lang="en-US" sz="900" b="1" dirty="0">
+                <a:solidFill>
+                  <a:srgbClr val="B98A2E"/>
+                </a:solidFill>
+                <a:latin typeface="Arial" pitchFamily="34" charset="0"/>
+                <a:ea typeface="Arial" pitchFamily="34" charset="-122"/>
+                <a:cs typeface="Arial" pitchFamily="34" charset="-120"/>
+              </a:rPr>
+              <a:t>1</a:t>
+            </a:r>
+            <a:endParaRPr lang="en-US" sz="900" dirty="0"/>
+          </a:p>
+        </p:txBody>
       </p:sp>
     </p:spTree>
   </p:cSld>
@@ -2352,7 +2347,7 @@
     <p:bg>
       <p:bgPr>
         <a:solidFill>
-          <a:srgbClr val="0F172A"/>
+          <a:srgbClr val="10161F"/>
         </a:solidFill>
       </p:bgPr>
     </p:bg>
@@ -2378,14 +2373,14 @@
         </p:nvSpPr>
         <p:spPr>
           <a:xfrm>
-            <a:off x="566928" y="384048"/>
-            <a:ext cx="45720" cy="566928"/>
-          </a:xfrm>
-          <a:prstGeom prst="rect">
+            <a:off x="566928" y="457200"/>
+            <a:ext cx="384048" cy="384048"/>
+          </a:xfrm>
+          <a:prstGeom prst="ellipse">
             <a:avLst/>
           </a:prstGeom>
           <a:solidFill>
-            <a:srgbClr val="6B8E00"/>
+            <a:srgbClr val="B98A2E"/>
           </a:solidFill>
           <a:ln/>
         </p:spPr>
@@ -2398,32 +2393,71 @@
         </p:nvSpPr>
         <p:spPr>
           <a:xfrm>
-            <a:off x="749808" y="384048"/>
-            <a:ext cx="10874959" cy="182880"/>
-          </a:xfrm>
-          <a:prstGeom prst="rect">
-            <a:avLst/>
-          </a:prstGeom>
-          <a:noFill/>
-          <a:ln/>
-        </p:spPr>
-        <p:txBody>
-          <a:bodyPr wrap="square" lIns="0" tIns="0" rIns="0" bIns="0" rtlCol="0" anchor="ctr"/>
-          <a:lstStyle/>
-          <a:p>
-            <a:pPr indent="0" marL="0">
-              <a:buNone/>
-            </a:pPr>
-            <a:r>
-              <a:rPr lang="en-US" sz="950" b="1" spc="200" kern="0" dirty="0">
-                <a:solidFill>
-                  <a:srgbClr val="6B8E00"/>
+            <a:off x="566928" y="457200"/>
+            <a:ext cx="384048" cy="384048"/>
+          </a:xfrm>
+          <a:prstGeom prst="rect">
+            <a:avLst/>
+          </a:prstGeom>
+          <a:noFill/>
+          <a:ln/>
+        </p:spPr>
+        <p:txBody>
+          <a:bodyPr wrap="square" lIns="0" tIns="0" rIns="0" bIns="0" rtlCol="0" anchor="ctr"/>
+          <a:lstStyle/>
+          <a:p>
+            <a:pPr algn="ctr" indent="0" marL="0">
+              <a:buNone/>
+            </a:pPr>
+            <a:r>
+              <a:rPr lang="en-US" sz="1300" b="1" dirty="0">
+                <a:solidFill>
+                  <a:srgbClr val="FFFFFF"/>
                 </a:solidFill>
                 <a:latin typeface="Arial" pitchFamily="34" charset="0"/>
                 <a:ea typeface="Arial" pitchFamily="34" charset="-122"/>
                 <a:cs typeface="Arial" pitchFamily="34" charset="-120"/>
               </a:rPr>
-              <a:t>10  Disclaimer</a:t>
+              <a:t>10</a:t>
+            </a:r>
+            <a:endParaRPr lang="en-US" sz="1300" dirty="0"/>
+          </a:p>
+        </p:txBody>
+      </p:sp>
+      <p:sp>
+        <p:nvSpPr>
+          <p:cNvPr id="4" name="Text 2"/>
+          <p:cNvSpPr/>
+          <p:nvPr/>
+        </p:nvSpPr>
+        <p:spPr>
+          <a:xfrm>
+            <a:off x="1133856" y="457200"/>
+            <a:ext cx="10490911" cy="182880"/>
+          </a:xfrm>
+          <a:prstGeom prst="rect">
+            <a:avLst/>
+          </a:prstGeom>
+          <a:noFill/>
+          <a:ln/>
+        </p:spPr>
+        <p:txBody>
+          <a:bodyPr wrap="square" lIns="0" tIns="0" rIns="0" bIns="0" rtlCol="0" anchor="ctr"/>
+          <a:lstStyle/>
+          <a:p>
+            <a:pPr indent="0" marL="0">
+              <a:buNone/>
+            </a:pPr>
+            <a:r>
+              <a:rPr lang="en-US" sz="950" b="1" spc="200" kern="0" dirty="0">
+                <a:solidFill>
+                  <a:srgbClr val="B98A2E"/>
+                </a:solidFill>
+                <a:latin typeface="Arial" pitchFamily="34" charset="0"/>
+                <a:ea typeface="Arial" pitchFamily="34" charset="-122"/>
+                <a:cs typeface="Arial" pitchFamily="34" charset="-120"/>
+              </a:rPr>
+              <a:t>Disclaimer</a:t>
             </a:r>
             <a:endParaRPr lang="en-US" sz="950" dirty="0"/>
           </a:p>
@@ -2431,14 +2465,14 @@
       </p:sp>
       <p:sp>
         <p:nvSpPr>
-          <p:cNvPr id="4" name="Text 2"/>
-          <p:cNvSpPr/>
-          <p:nvPr/>
-        </p:nvSpPr>
-        <p:spPr>
-          <a:xfrm>
-            <a:off x="749808" y="566928"/>
-            <a:ext cx="10874959" cy="384048"/>
+          <p:cNvPr id="5" name="Text 3"/>
+          <p:cNvSpPr/>
+          <p:nvPr/>
+        </p:nvSpPr>
+        <p:spPr>
+          <a:xfrm>
+            <a:off x="1133856" y="658368"/>
+            <a:ext cx="10490911" cy="420624"/>
           </a:xfrm>
           <a:prstGeom prst="rect">
             <a:avLst/>
@@ -2454,7 +2488,7 @@
               <a:buNone/>
             </a:pPr>
             <a:r>
-              <a:rPr lang="en-US" sz="2200" b="1" dirty="0">
+              <a:rPr lang="en-US" sz="2400" b="1" dirty="0">
                 <a:solidFill>
                   <a:srgbClr val="FFFFFF"/>
                 </a:solidFill>
@@ -2464,20 +2498,101 @@
               </a:rPr>
               <a:t>표기 기준 및 면책</a:t>
             </a:r>
-            <a:endParaRPr lang="en-US" sz="2200" dirty="0"/>
-          </a:p>
-        </p:txBody>
-      </p:sp>
-      <p:sp>
-        <p:nvSpPr>
-          <p:cNvPr id="5" name="Text 3"/>
-          <p:cNvSpPr/>
-          <p:nvPr/>
-        </p:nvSpPr>
-        <p:spPr>
-          <a:xfrm>
-            <a:off x="566928" y="1517904"/>
-            <a:ext cx="5486400" cy="237744"/>
+            <a:endParaRPr lang="en-US" sz="2400" dirty="0"/>
+          </a:p>
+        </p:txBody>
+      </p:sp>
+      <p:sp>
+        <p:nvSpPr>
+          <p:cNvPr id="6" name="Shape 4"/>
+          <p:cNvSpPr/>
+          <p:nvPr/>
+        </p:nvSpPr>
+        <p:spPr>
+          <a:xfrm>
+            <a:off x="566928" y="1463040"/>
+            <a:ext cx="3588410" cy="658368"/>
+          </a:xfrm>
+          <a:prstGeom prst="roundRect">
+            <a:avLst>
+              <a:gd name="adj" fmla="val 5556"/>
+            </a:avLst>
+          </a:prstGeom>
+          <a:solidFill>
+            <a:srgbClr val="2D3748"/>
+          </a:solidFill>
+          <a:ln/>
+        </p:spPr>
+      </p:sp>
+      <p:sp>
+        <p:nvSpPr>
+          <p:cNvPr id="7" name="Shape 5"/>
+          <p:cNvSpPr/>
+          <p:nvPr/>
+        </p:nvSpPr>
+        <p:spPr>
+          <a:xfrm>
+            <a:off x="676656" y="1572768"/>
+            <a:ext cx="438912" cy="438912"/>
+          </a:xfrm>
+          <a:prstGeom prst="ellipse">
+            <a:avLst/>
+          </a:prstGeom>
+          <a:solidFill>
+            <a:srgbClr val="B98A2E"/>
+          </a:solidFill>
+          <a:ln/>
+        </p:spPr>
+      </p:sp>
+      <p:sp>
+        <p:nvSpPr>
+          <p:cNvPr id="8" name="Text 6"/>
+          <p:cNvSpPr/>
+          <p:nvPr/>
+        </p:nvSpPr>
+        <p:spPr>
+          <a:xfrm>
+            <a:off x="676656" y="1572768"/>
+            <a:ext cx="438912" cy="438912"/>
+          </a:xfrm>
+          <a:prstGeom prst="rect">
+            <a:avLst/>
+          </a:prstGeom>
+          <a:noFill/>
+          <a:ln/>
+        </p:spPr>
+        <p:txBody>
+          <a:bodyPr wrap="square" lIns="0" tIns="0" rIns="0" bIns="0" rtlCol="0" anchor="ctr"/>
+          <a:lstStyle/>
+          <a:p>
+            <a:pPr algn="ctr" indent="0" marL="0">
+              <a:buNone/>
+            </a:pPr>
+            <a:r>
+              <a:rPr lang="en-US" sz="1400" b="1" dirty="0">
+                <a:solidFill>
+                  <a:srgbClr val="FFFFFF"/>
+                </a:solidFill>
+                <a:latin typeface="Arial" pitchFamily="34" charset="0"/>
+                <a:ea typeface="Arial" pitchFamily="34" charset="-122"/>
+                <a:cs typeface="Arial" pitchFamily="34" charset="-120"/>
+              </a:rPr>
+              <a:t>01</a:t>
+            </a:r>
+            <a:endParaRPr lang="en-US" sz="1400" dirty="0"/>
+          </a:p>
+        </p:txBody>
+      </p:sp>
+      <p:sp>
+        <p:nvSpPr>
+          <p:cNvPr id="9" name="Text 7"/>
+          <p:cNvSpPr/>
+          <p:nvPr/>
+        </p:nvSpPr>
+        <p:spPr>
+          <a:xfrm>
+            <a:off x="1225296" y="1554480"/>
+            <a:ext cx="2820314" cy="237744"/>
           </a:xfrm>
           <a:prstGeom prst="rect">
             <a:avLst/>
@@ -2501,7 +2616,7 @@
                 <a:ea typeface="Pretendard" pitchFamily="34" charset="-122"/>
                 <a:cs typeface="Pretendard" pitchFamily="34" charset="-120"/>
               </a:rPr>
-              <a:t>데이터 출처 표기</a:t>
+              <a:t>관심 표명</a:t>
             </a:r>
             <a:endParaRPr lang="en-US" sz="1100" dirty="0"/>
           </a:p>
@@ -2509,130 +2624,150 @@
       </p:sp>
       <p:sp>
         <p:nvSpPr>
-          <p:cNvPr id="6" name="Shape 4"/>
-          <p:cNvSpPr/>
-          <p:nvPr/>
-        </p:nvSpPr>
-        <p:spPr>
-          <a:xfrm>
-            <a:off x="566928" y="1847088"/>
-            <a:ext cx="1417320" cy="347472"/>
-          </a:xfrm>
-          <a:prstGeom prst="roundRect">
-            <a:avLst>
-              <a:gd name="adj" fmla="val 10526"/>
-            </a:avLst>
-          </a:prstGeom>
-          <a:solidFill>
-            <a:srgbClr val="334155"/>
-          </a:solidFill>
-          <a:ln/>
-        </p:spPr>
-      </p:sp>
-      <p:sp>
-        <p:nvSpPr>
-          <p:cNvPr id="7" name="Text 5"/>
-          <p:cNvSpPr/>
-          <p:nvPr/>
-        </p:nvSpPr>
-        <p:spPr>
-          <a:xfrm>
-            <a:off x="566928" y="1847088"/>
-            <a:ext cx="1417320" cy="347472"/>
-          </a:xfrm>
-          <a:prstGeom prst="rect">
-            <a:avLst/>
-          </a:prstGeom>
-          <a:noFill/>
-          <a:ln/>
-        </p:spPr>
-        <p:txBody>
-          <a:bodyPr wrap="square" lIns="0" tIns="0" rIns="0" bIns="0" rtlCol="0" anchor="ctr"/>
-          <a:lstStyle/>
-          <a:p>
-            <a:pPr algn="ctr" indent="0" marL="0">
-              <a:buNone/>
-            </a:pPr>
-            <a:r>
-              <a:rPr lang="en-US" sz="950" b="1" dirty="0">
-                <a:solidFill>
-                  <a:srgbClr val="FFFFFF"/>
+          <p:cNvPr id="10" name="Text 8"/>
+          <p:cNvSpPr/>
+          <p:nvPr/>
+        </p:nvSpPr>
+        <p:spPr>
+          <a:xfrm>
+            <a:off x="1225296" y="1792224"/>
+            <a:ext cx="2820314" cy="256032"/>
+          </a:xfrm>
+          <a:prstGeom prst="rect">
+            <a:avLst/>
+          </a:prstGeom>
+          <a:noFill/>
+          <a:ln/>
+        </p:spPr>
+        <p:txBody>
+          <a:bodyPr wrap="square" lIns="0" tIns="0" rIns="0" bIns="0" rtlCol="0" anchor="t"/>
+          <a:lstStyle/>
+          <a:p>
+            <a:pPr indent="0" marL="0">
+              <a:buNone/>
+            </a:pPr>
+            <a:r>
+              <a:rPr lang="en-US" sz="850" dirty="0">
+                <a:solidFill>
+                  <a:srgbClr val="A0AEC0"/>
                 </a:solidFill>
                 <a:latin typeface="Pretendard" pitchFamily="34" charset="0"/>
                 <a:ea typeface="Pretendard" pitchFamily="34" charset="-122"/>
                 <a:cs typeface="Pretendard" pitchFamily="34" charset="-120"/>
               </a:rPr>
-              <a:t>✓ 공부확인</a:t>
-            </a:r>
-            <a:endParaRPr lang="en-US" sz="950" dirty="0"/>
-          </a:p>
-        </p:txBody>
-      </p:sp>
-      <p:sp>
-        <p:nvSpPr>
-          <p:cNvPr id="8" name="Text 6"/>
-          <p:cNvSpPr/>
-          <p:nvPr/>
-        </p:nvSpPr>
-        <p:spPr>
-          <a:xfrm>
-            <a:off x="2139696" y="1828800"/>
-            <a:ext cx="3566160" cy="420624"/>
-          </a:xfrm>
-          <a:prstGeom prst="rect">
-            <a:avLst/>
-          </a:prstGeom>
-          <a:noFill/>
-          <a:ln/>
-        </p:spPr>
-        <p:txBody>
-          <a:bodyPr wrap="square" lIns="0" tIns="0" rIns="0" bIns="0" rtlCol="0" anchor="ctr"/>
-          <a:lstStyle/>
-          <a:p>
-            <a:pPr indent="0" marL="0">
-              <a:buNone/>
-            </a:pPr>
-            <a:r>
-              <a:rPr lang="en-US" sz="1000" dirty="0">
-                <a:solidFill>
-                  <a:srgbClr val="F1F5F9"/>
+              <a:t>담당 중개사에게 초기 관심 표명 및 상담 요청</a:t>
+            </a:r>
+            <a:endParaRPr lang="en-US" sz="850" dirty="0"/>
+          </a:p>
+        </p:txBody>
+      </p:sp>
+      <p:sp>
+        <p:nvSpPr>
+          <p:cNvPr id="11" name="Text 9"/>
+          <p:cNvSpPr/>
+          <p:nvPr/>
+        </p:nvSpPr>
+        <p:spPr>
+          <a:xfrm>
+            <a:off x="4155338" y="1600200"/>
+            <a:ext cx="146304" cy="384048"/>
+          </a:xfrm>
+          <a:prstGeom prst="rect">
+            <a:avLst/>
+          </a:prstGeom>
+          <a:noFill/>
+          <a:ln/>
+        </p:spPr>
+        <p:txBody>
+          <a:bodyPr wrap="square" lIns="0" tIns="0" rIns="0" bIns="0" rtlCol="0" anchor="ctr"/>
+          <a:lstStyle/>
+          <a:p>
+            <a:pPr algn="ctr" indent="0" marL="0">
+              <a:buNone/>
+            </a:pPr>
+            <a:r>
+              <a:rPr lang="en-US" sz="1600" dirty="0">
+                <a:solidFill>
+                  <a:srgbClr val="B98A2E"/>
                 </a:solidFill>
                 <a:latin typeface="Pretendard" pitchFamily="34" charset="0"/>
                 <a:ea typeface="Pretendard" pitchFamily="34" charset="-122"/>
                 <a:cs typeface="Pretendard" pitchFamily="34" charset="-120"/>
               </a:rPr>
-              <a:t>등기부·대장 등 공적 장부 직접 확인</a:t>
-            </a:r>
-            <a:endParaRPr lang="en-US" sz="1000" dirty="0"/>
-          </a:p>
-        </p:txBody>
-      </p:sp>
-      <p:sp>
-        <p:nvSpPr>
-          <p:cNvPr id="9" name="Text 7"/>
-          <p:cNvSpPr/>
-          <p:nvPr/>
-        </p:nvSpPr>
-        <p:spPr>
-          <a:xfrm>
-            <a:off x="5504688" y="1847088"/>
-            <a:ext cx="731520" cy="292608"/>
-          </a:xfrm>
-          <a:prstGeom prst="rect">
-            <a:avLst/>
-          </a:prstGeom>
-          <a:noFill/>
-          <a:ln/>
-        </p:spPr>
-        <p:txBody>
-          <a:bodyPr wrap="square" lIns="0" tIns="0" rIns="0" bIns="0" rtlCol="0" anchor="ctr"/>
-          <a:lstStyle/>
-          <a:p>
-            <a:pPr algn="r" indent="0" marL="0">
-              <a:buNone/>
-            </a:pPr>
-            <a:r>
-              <a:rPr lang="en-US" sz="1200" b="1" dirty="0">
+              <a:t>→</a:t>
+            </a:r>
+            <a:endParaRPr lang="en-US" sz="1600" dirty="0"/>
+          </a:p>
+        </p:txBody>
+      </p:sp>
+      <p:sp>
+        <p:nvSpPr>
+          <p:cNvPr id="12" name="Shape 10"/>
+          <p:cNvSpPr/>
+          <p:nvPr/>
+        </p:nvSpPr>
+        <p:spPr>
+          <a:xfrm>
+            <a:off x="4301642" y="1463040"/>
+            <a:ext cx="3588410" cy="658368"/>
+          </a:xfrm>
+          <a:prstGeom prst="roundRect">
+            <a:avLst>
+              <a:gd name="adj" fmla="val 5556"/>
+            </a:avLst>
+          </a:prstGeom>
+          <a:solidFill>
+            <a:srgbClr val="2D3748"/>
+          </a:solidFill>
+          <a:ln/>
+        </p:spPr>
+      </p:sp>
+      <p:sp>
+        <p:nvSpPr>
+          <p:cNvPr id="13" name="Shape 11"/>
+          <p:cNvSpPr/>
+          <p:nvPr/>
+        </p:nvSpPr>
+        <p:spPr>
+          <a:xfrm>
+            <a:off x="4411370" y="1572768"/>
+            <a:ext cx="438912" cy="438912"/>
+          </a:xfrm>
+          <a:prstGeom prst="ellipse">
+            <a:avLst/>
+          </a:prstGeom>
+          <a:solidFill>
+            <a:srgbClr val="B98A2E"/>
+          </a:solidFill>
+          <a:ln/>
+        </p:spPr>
+      </p:sp>
+      <p:sp>
+        <p:nvSpPr>
+          <p:cNvPr id="14" name="Text 12"/>
+          <p:cNvSpPr/>
+          <p:nvPr/>
+        </p:nvSpPr>
+        <p:spPr>
+          <a:xfrm>
+            <a:off x="4411370" y="1572768"/>
+            <a:ext cx="438912" cy="438912"/>
+          </a:xfrm>
+          <a:prstGeom prst="rect">
+            <a:avLst/>
+          </a:prstGeom>
+          <a:noFill/>
+          <a:ln/>
+        </p:spPr>
+        <p:txBody>
+          <a:bodyPr wrap="square" lIns="0" tIns="0" rIns="0" bIns="0" rtlCol="0" anchor="ctr"/>
+          <a:lstStyle/>
+          <a:p>
+            <a:pPr algn="ctr" indent="0" marL="0">
+              <a:buNone/>
+            </a:pPr>
+            <a:r>
+              <a:rPr lang="en-US" sz="1400" b="1" dirty="0">
                 <a:solidFill>
                   <a:srgbClr val="FFFFFF"/>
                 </a:solidFill>
@@ -2640,60 +2775,38 @@
                 <a:ea typeface="Arial" pitchFamily="34" charset="-122"/>
                 <a:cs typeface="Arial" pitchFamily="34" charset="-120"/>
               </a:rPr>
-              <a:t>1.00</a:t>
-            </a:r>
-            <a:endParaRPr lang="en-US" sz="1200" dirty="0"/>
-          </a:p>
-        </p:txBody>
-      </p:sp>
-      <p:sp>
-        <p:nvSpPr>
-          <p:cNvPr id="10" name="Shape 8"/>
-          <p:cNvSpPr/>
-          <p:nvPr/>
-        </p:nvSpPr>
-        <p:spPr>
-          <a:xfrm>
-            <a:off x="566928" y="2505456"/>
-            <a:ext cx="1417320" cy="347472"/>
-          </a:xfrm>
-          <a:prstGeom prst="roundRect">
-            <a:avLst>
-              <a:gd name="adj" fmla="val 10526"/>
-            </a:avLst>
-          </a:prstGeom>
-          <a:solidFill>
-            <a:srgbClr val="334155"/>
-          </a:solidFill>
-          <a:ln/>
-        </p:spPr>
-      </p:sp>
-      <p:sp>
-        <p:nvSpPr>
-          <p:cNvPr id="11" name="Text 9"/>
-          <p:cNvSpPr/>
-          <p:nvPr/>
-        </p:nvSpPr>
-        <p:spPr>
-          <a:xfrm>
-            <a:off x="566928" y="2505456"/>
-            <a:ext cx="1417320" cy="347472"/>
-          </a:xfrm>
-          <a:prstGeom prst="rect">
-            <a:avLst/>
-          </a:prstGeom>
-          <a:noFill/>
-          <a:ln/>
-        </p:spPr>
-        <p:txBody>
-          <a:bodyPr wrap="square" lIns="0" tIns="0" rIns="0" bIns="0" rtlCol="0" anchor="ctr"/>
-          <a:lstStyle/>
-          <a:p>
-            <a:pPr algn="ctr" indent="0" marL="0">
-              <a:buNone/>
-            </a:pPr>
-            <a:r>
-              <a:rPr lang="en-US" sz="950" b="1" dirty="0">
+              <a:t>02</a:t>
+            </a:r>
+            <a:endParaRPr lang="en-US" sz="1400" dirty="0"/>
+          </a:p>
+        </p:txBody>
+      </p:sp>
+      <p:sp>
+        <p:nvSpPr>
+          <p:cNvPr id="15" name="Text 13"/>
+          <p:cNvSpPr/>
+          <p:nvPr/>
+        </p:nvSpPr>
+        <p:spPr>
+          <a:xfrm>
+            <a:off x="4960010" y="1554480"/>
+            <a:ext cx="2820314" cy="237744"/>
+          </a:xfrm>
+          <a:prstGeom prst="rect">
+            <a:avLst/>
+          </a:prstGeom>
+          <a:noFill/>
+          <a:ln/>
+        </p:spPr>
+        <p:txBody>
+          <a:bodyPr wrap="square" lIns="0" tIns="0" rIns="0" bIns="0" rtlCol="0" anchor="ctr"/>
+          <a:lstStyle/>
+          <a:p>
+            <a:pPr indent="0" marL="0">
+              <a:buNone/>
+            </a:pPr>
+            <a:r>
+              <a:rPr lang="en-US" sz="1100" b="1" dirty="0">
                 <a:solidFill>
                   <a:srgbClr val="FFFFFF"/>
                 </a:solidFill>
@@ -2701,77 +2814,158 @@
                 <a:ea typeface="Pretendard" pitchFamily="34" charset="-122"/>
                 <a:cs typeface="Pretendard" pitchFamily="34" charset="-120"/>
               </a:rPr>
-              <a:t>★ 전문가검증</a:t>
-            </a:r>
-            <a:endParaRPr lang="en-US" sz="950" dirty="0"/>
-          </a:p>
-        </p:txBody>
-      </p:sp>
-      <p:sp>
-        <p:nvSpPr>
-          <p:cNvPr id="12" name="Text 10"/>
-          <p:cNvSpPr/>
-          <p:nvPr/>
-        </p:nvSpPr>
-        <p:spPr>
-          <a:xfrm>
-            <a:off x="2139696" y="2487168"/>
-            <a:ext cx="3566160" cy="420624"/>
-          </a:xfrm>
-          <a:prstGeom prst="rect">
-            <a:avLst/>
-          </a:prstGeom>
-          <a:noFill/>
-          <a:ln/>
-        </p:spPr>
-        <p:txBody>
-          <a:bodyPr wrap="square" lIns="0" tIns="0" rIns="0" bIns="0" rtlCol="0" anchor="ctr"/>
+              <a:t>NDA 체결</a:t>
+            </a:r>
+            <a:endParaRPr lang="en-US" sz="1100" dirty="0"/>
+          </a:p>
+        </p:txBody>
+      </p:sp>
+      <p:sp>
+        <p:nvSpPr>
+          <p:cNvPr id="16" name="Text 14"/>
+          <p:cNvSpPr/>
+          <p:nvPr/>
+        </p:nvSpPr>
+        <p:spPr>
+          <a:xfrm>
+            <a:off x="4960010" y="1792224"/>
+            <a:ext cx="2820314" cy="256032"/>
+          </a:xfrm>
+          <a:prstGeom prst="rect">
+            <a:avLst/>
+          </a:prstGeom>
+          <a:noFill/>
+          <a:ln/>
+        </p:spPr>
+        <p:txBody>
+          <a:bodyPr wrap="square" lIns="0" tIns="0" rIns="0" bIns="0" rtlCol="0" anchor="t"/>
           <a:lstStyle/>
           <a:p>
             <a:pPr indent="0" marL="0">
               <a:buNone/>
             </a:pPr>
             <a:r>
-              <a:rPr lang="en-US" sz="1000" dirty="0">
-                <a:solidFill>
-                  <a:srgbClr val="F1F5F9"/>
+              <a:rPr lang="en-US" sz="850" dirty="0">
+                <a:solidFill>
+                  <a:srgbClr val="A0AEC0"/>
                 </a:solidFill>
                 <a:latin typeface="Pretendard" pitchFamily="34" charset="0"/>
                 <a:ea typeface="Pretendard" pitchFamily="34" charset="-122"/>
                 <a:cs typeface="Pretendard" pitchFamily="34" charset="-120"/>
               </a:rPr>
-              <a:t>세무사·감정평가사 등 전문가 확인</a:t>
-            </a:r>
-            <a:endParaRPr lang="en-US" sz="1000" dirty="0"/>
-          </a:p>
-        </p:txBody>
-      </p:sp>
-      <p:sp>
-        <p:nvSpPr>
-          <p:cNvPr id="13" name="Text 11"/>
-          <p:cNvSpPr/>
-          <p:nvPr/>
-        </p:nvSpPr>
-        <p:spPr>
-          <a:xfrm>
-            <a:off x="5504688" y="2505456"/>
-            <a:ext cx="731520" cy="292608"/>
-          </a:xfrm>
-          <a:prstGeom prst="rect">
-            <a:avLst/>
-          </a:prstGeom>
-          <a:noFill/>
-          <a:ln/>
-        </p:spPr>
-        <p:txBody>
-          <a:bodyPr wrap="square" lIns="0" tIns="0" rIns="0" bIns="0" rtlCol="0" anchor="ctr"/>
-          <a:lstStyle/>
-          <a:p>
-            <a:pPr algn="r" indent="0" marL="0">
-              <a:buNone/>
-            </a:pPr>
-            <a:r>
-              <a:rPr lang="en-US" sz="1200" b="1" dirty="0">
+              <a:t>비밀유지계약 후 상세 임대차·재무 자료 제공</a:t>
+            </a:r>
+            <a:endParaRPr lang="en-US" sz="850" dirty="0"/>
+          </a:p>
+        </p:txBody>
+      </p:sp>
+      <p:sp>
+        <p:nvSpPr>
+          <p:cNvPr id="17" name="Text 15"/>
+          <p:cNvSpPr/>
+          <p:nvPr/>
+        </p:nvSpPr>
+        <p:spPr>
+          <a:xfrm>
+            <a:off x="7890053" y="1600200"/>
+            <a:ext cx="146304" cy="384048"/>
+          </a:xfrm>
+          <a:prstGeom prst="rect">
+            <a:avLst/>
+          </a:prstGeom>
+          <a:noFill/>
+          <a:ln/>
+        </p:spPr>
+        <p:txBody>
+          <a:bodyPr wrap="square" lIns="0" tIns="0" rIns="0" bIns="0" rtlCol="0" anchor="ctr"/>
+          <a:lstStyle/>
+          <a:p>
+            <a:pPr algn="ctr" indent="0" marL="0">
+              <a:buNone/>
+            </a:pPr>
+            <a:r>
+              <a:rPr lang="en-US" sz="1600" dirty="0">
+                <a:solidFill>
+                  <a:srgbClr val="B98A2E"/>
+                </a:solidFill>
+                <a:latin typeface="Pretendard" pitchFamily="34" charset="0"/>
+                <a:ea typeface="Pretendard" pitchFamily="34" charset="-122"/>
+                <a:cs typeface="Pretendard" pitchFamily="34" charset="-120"/>
+              </a:rPr>
+              <a:t>→</a:t>
+            </a:r>
+            <a:endParaRPr lang="en-US" sz="1600" dirty="0"/>
+          </a:p>
+        </p:txBody>
+      </p:sp>
+      <p:sp>
+        <p:nvSpPr>
+          <p:cNvPr id="18" name="Shape 16"/>
+          <p:cNvSpPr/>
+          <p:nvPr/>
+        </p:nvSpPr>
+        <p:spPr>
+          <a:xfrm>
+            <a:off x="8036357" y="1463040"/>
+            <a:ext cx="3588410" cy="658368"/>
+          </a:xfrm>
+          <a:prstGeom prst="roundRect">
+            <a:avLst>
+              <a:gd name="adj" fmla="val 5556"/>
+            </a:avLst>
+          </a:prstGeom>
+          <a:solidFill>
+            <a:srgbClr val="2D3748"/>
+          </a:solidFill>
+          <a:ln/>
+        </p:spPr>
+      </p:sp>
+      <p:sp>
+        <p:nvSpPr>
+          <p:cNvPr id="19" name="Shape 17"/>
+          <p:cNvSpPr/>
+          <p:nvPr/>
+        </p:nvSpPr>
+        <p:spPr>
+          <a:xfrm>
+            <a:off x="8146085" y="1572768"/>
+            <a:ext cx="438912" cy="438912"/>
+          </a:xfrm>
+          <a:prstGeom prst="ellipse">
+            <a:avLst/>
+          </a:prstGeom>
+          <a:solidFill>
+            <a:srgbClr val="B98A2E"/>
+          </a:solidFill>
+          <a:ln/>
+        </p:spPr>
+      </p:sp>
+      <p:sp>
+        <p:nvSpPr>
+          <p:cNvPr id="20" name="Text 18"/>
+          <p:cNvSpPr/>
+          <p:nvPr/>
+        </p:nvSpPr>
+        <p:spPr>
+          <a:xfrm>
+            <a:off x="8146085" y="1572768"/>
+            <a:ext cx="438912" cy="438912"/>
+          </a:xfrm>
+          <a:prstGeom prst="rect">
+            <a:avLst/>
+          </a:prstGeom>
+          <a:noFill/>
+          <a:ln/>
+        </p:spPr>
+        <p:txBody>
+          <a:bodyPr wrap="square" lIns="0" tIns="0" rIns="0" bIns="0" rtlCol="0" anchor="ctr"/>
+          <a:lstStyle/>
+          <a:p>
+            <a:pPr algn="ctr" indent="0" marL="0">
+              <a:buNone/>
+            </a:pPr>
+            <a:r>
+              <a:rPr lang="en-US" sz="1400" b="1" dirty="0">
                 <a:solidFill>
                   <a:srgbClr val="FFFFFF"/>
                 </a:solidFill>
@@ -2779,60 +2973,38 @@
                 <a:ea typeface="Arial" pitchFamily="34" charset="-122"/>
                 <a:cs typeface="Arial" pitchFamily="34" charset="-120"/>
               </a:rPr>
-              <a:t>0.95</a:t>
-            </a:r>
-            <a:endParaRPr lang="en-US" sz="1200" dirty="0"/>
-          </a:p>
-        </p:txBody>
-      </p:sp>
-      <p:sp>
-        <p:nvSpPr>
-          <p:cNvPr id="14" name="Shape 12"/>
-          <p:cNvSpPr/>
-          <p:nvPr/>
-        </p:nvSpPr>
-        <p:spPr>
-          <a:xfrm>
-            <a:off x="566928" y="3163824"/>
-            <a:ext cx="1417320" cy="347472"/>
-          </a:xfrm>
-          <a:prstGeom prst="roundRect">
-            <a:avLst>
-              <a:gd name="adj" fmla="val 10526"/>
-            </a:avLst>
-          </a:prstGeom>
-          <a:solidFill>
-            <a:srgbClr val="334155"/>
-          </a:solidFill>
-          <a:ln/>
-        </p:spPr>
-      </p:sp>
-      <p:sp>
-        <p:nvSpPr>
-          <p:cNvPr id="15" name="Text 13"/>
-          <p:cNvSpPr/>
-          <p:nvPr/>
-        </p:nvSpPr>
-        <p:spPr>
-          <a:xfrm>
-            <a:off x="566928" y="3163824"/>
-            <a:ext cx="1417320" cy="347472"/>
-          </a:xfrm>
-          <a:prstGeom prst="rect">
-            <a:avLst/>
-          </a:prstGeom>
-          <a:noFill/>
-          <a:ln/>
-        </p:spPr>
-        <p:txBody>
-          <a:bodyPr wrap="square" lIns="0" tIns="0" rIns="0" bIns="0" rtlCol="0" anchor="ctr"/>
-          <a:lstStyle/>
-          <a:p>
-            <a:pPr algn="ctr" indent="0" marL="0">
-              <a:buNone/>
-            </a:pPr>
-            <a:r>
-              <a:rPr lang="en-US" sz="950" b="1" dirty="0">
+              <a:t>03</a:t>
+            </a:r>
+            <a:endParaRPr lang="en-US" sz="1400" dirty="0"/>
+          </a:p>
+        </p:txBody>
+      </p:sp>
+      <p:sp>
+        <p:nvSpPr>
+          <p:cNvPr id="21" name="Text 19"/>
+          <p:cNvSpPr/>
+          <p:nvPr/>
+        </p:nvSpPr>
+        <p:spPr>
+          <a:xfrm>
+            <a:off x="8694725" y="1554480"/>
+            <a:ext cx="2820314" cy="237744"/>
+          </a:xfrm>
+          <a:prstGeom prst="rect">
+            <a:avLst/>
+          </a:prstGeom>
+          <a:noFill/>
+          <a:ln/>
+        </p:spPr>
+        <p:txBody>
+          <a:bodyPr wrap="square" lIns="0" tIns="0" rIns="0" bIns="0" rtlCol="0" anchor="ctr"/>
+          <a:lstStyle/>
+          <a:p>
+            <a:pPr indent="0" marL="0">
+              <a:buNone/>
+            </a:pPr>
+            <a:r>
+              <a:rPr lang="en-US" sz="1100" b="1" dirty="0">
                 <a:solidFill>
                   <a:srgbClr val="FFFFFF"/>
                 </a:solidFill>
@@ -2840,138 +3012,77 @@
                 <a:ea typeface="Pretendard" pitchFamily="34" charset="-122"/>
                 <a:cs typeface="Pretendard" pitchFamily="34" charset="-120"/>
               </a:rPr>
-              <a:t>▲ 매도인고지</a:t>
-            </a:r>
-            <a:endParaRPr lang="en-US" sz="950" dirty="0"/>
-          </a:p>
-        </p:txBody>
-      </p:sp>
-      <p:sp>
-        <p:nvSpPr>
-          <p:cNvPr id="16" name="Text 14"/>
-          <p:cNvSpPr/>
-          <p:nvPr/>
-        </p:nvSpPr>
-        <p:spPr>
-          <a:xfrm>
-            <a:off x="2139696" y="3145536"/>
-            <a:ext cx="3566160" cy="420624"/>
-          </a:xfrm>
-          <a:prstGeom prst="rect">
-            <a:avLst/>
-          </a:prstGeom>
-          <a:noFill/>
-          <a:ln/>
-        </p:spPr>
-        <p:txBody>
-          <a:bodyPr wrap="square" lIns="0" tIns="0" rIns="0" bIns="0" rtlCol="0" anchor="ctr"/>
+              <a:t>현장 실사</a:t>
+            </a:r>
+            <a:endParaRPr lang="en-US" sz="1100" dirty="0"/>
+          </a:p>
+        </p:txBody>
+      </p:sp>
+      <p:sp>
+        <p:nvSpPr>
+          <p:cNvPr id="22" name="Text 20"/>
+          <p:cNvSpPr/>
+          <p:nvPr/>
+        </p:nvSpPr>
+        <p:spPr>
+          <a:xfrm>
+            <a:off x="8694725" y="1792224"/>
+            <a:ext cx="2820314" cy="256032"/>
+          </a:xfrm>
+          <a:prstGeom prst="rect">
+            <a:avLst/>
+          </a:prstGeom>
+          <a:noFill/>
+          <a:ln/>
+        </p:spPr>
+        <p:txBody>
+          <a:bodyPr wrap="square" lIns="0" tIns="0" rIns="0" bIns="0" rtlCol="0" anchor="t"/>
           <a:lstStyle/>
           <a:p>
             <a:pPr indent="0" marL="0">
               <a:buNone/>
             </a:pPr>
             <a:r>
-              <a:rPr lang="en-US" sz="1000" dirty="0">
-                <a:solidFill>
-                  <a:srgbClr val="F1F5F9"/>
+              <a:rPr lang="en-US" sz="850" dirty="0">
+                <a:solidFill>
+                  <a:srgbClr val="A0AEC0"/>
                 </a:solidFill>
                 <a:latin typeface="Pretendard" pitchFamily="34" charset="0"/>
                 <a:ea typeface="Pretendard" pitchFamily="34" charset="-122"/>
                 <a:cs typeface="Pretendard" pitchFamily="34" charset="-120"/>
               </a:rPr>
-              <a:t>매도인이 구두 또는 서면으로 고지</a:t>
-            </a:r>
-            <a:endParaRPr lang="en-US" sz="1000" dirty="0"/>
-          </a:p>
-        </p:txBody>
-      </p:sp>
-      <p:sp>
-        <p:nvSpPr>
-          <p:cNvPr id="17" name="Text 15"/>
-          <p:cNvSpPr/>
-          <p:nvPr/>
-        </p:nvSpPr>
-        <p:spPr>
-          <a:xfrm>
-            <a:off x="5504688" y="3163824"/>
-            <a:ext cx="731520" cy="292608"/>
-          </a:xfrm>
-          <a:prstGeom prst="rect">
-            <a:avLst/>
-          </a:prstGeom>
-          <a:noFill/>
-          <a:ln/>
-        </p:spPr>
-        <p:txBody>
-          <a:bodyPr wrap="square" lIns="0" tIns="0" rIns="0" bIns="0" rtlCol="0" anchor="ctr"/>
-          <a:lstStyle/>
-          <a:p>
-            <a:pPr algn="r" indent="0" marL="0">
-              <a:buNone/>
-            </a:pPr>
-            <a:r>
-              <a:rPr lang="en-US" sz="1200" b="1" dirty="0">
-                <a:solidFill>
-                  <a:srgbClr val="FFFFFF"/>
-                </a:solidFill>
-                <a:latin typeface="Arial" pitchFamily="34" charset="0"/>
-                <a:ea typeface="Arial" pitchFamily="34" charset="-122"/>
-                <a:cs typeface="Arial" pitchFamily="34" charset="-120"/>
-              </a:rPr>
-              <a:t>0.65</a:t>
-            </a:r>
-            <a:endParaRPr lang="en-US" sz="1200" dirty="0"/>
-          </a:p>
-        </p:txBody>
-      </p:sp>
-      <p:sp>
-        <p:nvSpPr>
-          <p:cNvPr id="18" name="Shape 16"/>
-          <p:cNvSpPr/>
-          <p:nvPr/>
-        </p:nvSpPr>
-        <p:spPr>
-          <a:xfrm>
-            <a:off x="566928" y="3822192"/>
-            <a:ext cx="1417320" cy="347472"/>
-          </a:xfrm>
-          <a:prstGeom prst="roundRect">
-            <a:avLst>
-              <a:gd name="adj" fmla="val 10526"/>
-            </a:avLst>
-          </a:prstGeom>
-          <a:solidFill>
-            <a:srgbClr val="334155"/>
-          </a:solidFill>
-          <a:ln/>
-        </p:spPr>
-      </p:sp>
-      <p:sp>
-        <p:nvSpPr>
-          <p:cNvPr id="19" name="Text 17"/>
-          <p:cNvSpPr/>
-          <p:nvPr/>
-        </p:nvSpPr>
-        <p:spPr>
-          <a:xfrm>
-            <a:off x="566928" y="3822192"/>
-            <a:ext cx="1417320" cy="347472"/>
-          </a:xfrm>
-          <a:prstGeom prst="rect">
-            <a:avLst/>
-          </a:prstGeom>
-          <a:noFill/>
-          <a:ln/>
-        </p:spPr>
-        <p:txBody>
-          <a:bodyPr wrap="square" lIns="0" tIns="0" rIns="0" bIns="0" rtlCol="0" anchor="ctr"/>
-          <a:lstStyle/>
-          <a:p>
-            <a:pPr algn="ctr" indent="0" marL="0">
-              <a:buNone/>
-            </a:pPr>
-            <a:r>
-              <a:rPr lang="en-US" sz="950" b="1" dirty="0">
+              <a:t>건물 컨디션 및 설비 직접 확인 후 의향서(LOI) 제출</a:t>
+            </a:r>
+            <a:endParaRPr lang="en-US" sz="850" dirty="0"/>
+          </a:p>
+        </p:txBody>
+      </p:sp>
+      <p:sp>
+        <p:nvSpPr>
+          <p:cNvPr id="23" name="Text 21"/>
+          <p:cNvSpPr/>
+          <p:nvPr/>
+        </p:nvSpPr>
+        <p:spPr>
+          <a:xfrm>
+            <a:off x="566928" y="2395728"/>
+            <a:ext cx="5486400" cy="237744"/>
+          </a:xfrm>
+          <a:prstGeom prst="rect">
+            <a:avLst/>
+          </a:prstGeom>
+          <a:noFill/>
+          <a:ln/>
+        </p:spPr>
+        <p:txBody>
+          <a:bodyPr wrap="square" lIns="0" tIns="0" rIns="0" bIns="0" rtlCol="0" anchor="ctr"/>
+          <a:lstStyle/>
+          <a:p>
+            <a:pPr indent="0" marL="0">
+              <a:buNone/>
+            </a:pPr>
+            <a:r>
+              <a:rPr lang="en-US" sz="1100" b="1" dirty="0">
                 <a:solidFill>
                   <a:srgbClr val="FFFFFF"/>
                 </a:solidFill>
@@ -2979,239 +3090,183 @@
                 <a:ea typeface="Pretendard" pitchFamily="34" charset="-122"/>
                 <a:cs typeface="Pretendard" pitchFamily="34" charset="-120"/>
               </a:rPr>
-              <a:t>● 중개인입력</a:t>
-            </a:r>
-            <a:endParaRPr lang="en-US" sz="950" dirty="0"/>
-          </a:p>
-        </p:txBody>
-      </p:sp>
-      <p:sp>
-        <p:nvSpPr>
-          <p:cNvPr id="20" name="Text 18"/>
-          <p:cNvSpPr/>
-          <p:nvPr/>
-        </p:nvSpPr>
-        <p:spPr>
-          <a:xfrm>
-            <a:off x="2139696" y="3803904"/>
-            <a:ext cx="3566160" cy="420624"/>
-          </a:xfrm>
-          <a:prstGeom prst="rect">
-            <a:avLst/>
-          </a:prstGeom>
-          <a:noFill/>
-          <a:ln/>
-        </p:spPr>
-        <p:txBody>
-          <a:bodyPr wrap="square" lIns="0" tIns="0" rIns="0" bIns="0" rtlCol="0" anchor="ctr"/>
-          <a:lstStyle/>
-          <a:p>
-            <a:pPr indent="0" marL="0">
-              <a:buNone/>
-            </a:pPr>
-            <a:r>
-              <a:rPr lang="en-US" sz="1000" dirty="0">
-                <a:solidFill>
-                  <a:srgbClr val="F1F5F9"/>
+              <a:t>데이터 출처 표기</a:t>
+            </a:r>
+            <a:endParaRPr lang="en-US" sz="1100" dirty="0"/>
+          </a:p>
+        </p:txBody>
+      </p:sp>
+      <p:sp>
+        <p:nvSpPr>
+          <p:cNvPr id="24" name="Shape 22"/>
+          <p:cNvSpPr/>
+          <p:nvPr/>
+        </p:nvSpPr>
+        <p:spPr>
+          <a:xfrm>
+            <a:off x="566928" y="2724912"/>
+            <a:ext cx="1280160" cy="292608"/>
+          </a:xfrm>
+          <a:prstGeom prst="roundRect">
+            <a:avLst>
+              <a:gd name="adj" fmla="val 12500"/>
+            </a:avLst>
+          </a:prstGeom>
+          <a:solidFill>
+            <a:srgbClr val="2D3748"/>
+          </a:solidFill>
+          <a:ln/>
+        </p:spPr>
+      </p:sp>
+      <p:sp>
+        <p:nvSpPr>
+          <p:cNvPr id="25" name="Text 23"/>
+          <p:cNvSpPr/>
+          <p:nvPr/>
+        </p:nvSpPr>
+        <p:spPr>
+          <a:xfrm>
+            <a:off x="566928" y="2724912"/>
+            <a:ext cx="1280160" cy="292608"/>
+          </a:xfrm>
+          <a:prstGeom prst="rect">
+            <a:avLst/>
+          </a:prstGeom>
+          <a:noFill/>
+          <a:ln/>
+        </p:spPr>
+        <p:txBody>
+          <a:bodyPr wrap="square" lIns="0" tIns="0" rIns="0" bIns="0" rtlCol="0" anchor="ctr"/>
+          <a:lstStyle/>
+          <a:p>
+            <a:pPr algn="ctr" indent="0" marL="0">
+              <a:buNone/>
+            </a:pPr>
+            <a:r>
+              <a:rPr lang="en-US" sz="850" b="1" dirty="0">
+                <a:solidFill>
+                  <a:srgbClr val="FFFFFF"/>
                 </a:solidFill>
                 <a:latin typeface="Pretendard" pitchFamily="34" charset="0"/>
                 <a:ea typeface="Pretendard" pitchFamily="34" charset="-122"/>
                 <a:cs typeface="Pretendard" pitchFamily="34" charset="-120"/>
               </a:rPr>
-              <a:t>중개인 현장 조사 및 경험 기반 입력</a:t>
-            </a:r>
-            <a:endParaRPr lang="en-US" sz="1000" dirty="0"/>
-          </a:p>
-        </p:txBody>
-      </p:sp>
-      <p:sp>
-        <p:nvSpPr>
-          <p:cNvPr id="21" name="Text 19"/>
-          <p:cNvSpPr/>
-          <p:nvPr/>
-        </p:nvSpPr>
-        <p:spPr>
-          <a:xfrm>
-            <a:off x="5504688" y="3822192"/>
-            <a:ext cx="731520" cy="292608"/>
-          </a:xfrm>
-          <a:prstGeom prst="rect">
-            <a:avLst/>
-          </a:prstGeom>
-          <a:noFill/>
-          <a:ln/>
-        </p:spPr>
-        <p:txBody>
-          <a:bodyPr wrap="square" lIns="0" tIns="0" rIns="0" bIns="0" rtlCol="0" anchor="ctr"/>
-          <a:lstStyle/>
-          <a:p>
-            <a:pPr algn="r" indent="0" marL="0">
-              <a:buNone/>
-            </a:pPr>
-            <a:r>
-              <a:rPr lang="en-US" sz="1200" b="1" dirty="0">
-                <a:solidFill>
-                  <a:srgbClr val="FFFFFF"/>
-                </a:solidFill>
-                <a:latin typeface="Arial" pitchFamily="34" charset="0"/>
-                <a:ea typeface="Arial" pitchFamily="34" charset="-122"/>
-                <a:cs typeface="Arial" pitchFamily="34" charset="-120"/>
-              </a:rPr>
-              <a:t>0.60</a:t>
-            </a:r>
-            <a:endParaRPr lang="en-US" sz="1200" dirty="0"/>
-          </a:p>
-        </p:txBody>
-      </p:sp>
-      <p:sp>
-        <p:nvSpPr>
-          <p:cNvPr id="22" name="Shape 20"/>
-          <p:cNvSpPr/>
-          <p:nvPr/>
-        </p:nvSpPr>
-        <p:spPr>
-          <a:xfrm>
-            <a:off x="566928" y="4480560"/>
-            <a:ext cx="1417320" cy="347472"/>
-          </a:xfrm>
-          <a:prstGeom prst="roundRect">
-            <a:avLst>
-              <a:gd name="adj" fmla="val 10526"/>
-            </a:avLst>
-          </a:prstGeom>
-          <a:solidFill>
-            <a:srgbClr val="334155"/>
-          </a:solidFill>
-          <a:ln/>
-        </p:spPr>
-      </p:sp>
-      <p:sp>
-        <p:nvSpPr>
-          <p:cNvPr id="23" name="Text 21"/>
-          <p:cNvSpPr/>
-          <p:nvPr/>
-        </p:nvSpPr>
-        <p:spPr>
-          <a:xfrm>
-            <a:off x="566928" y="4480560"/>
-            <a:ext cx="1417320" cy="347472"/>
-          </a:xfrm>
-          <a:prstGeom prst="rect">
-            <a:avLst/>
-          </a:prstGeom>
-          <a:noFill/>
-          <a:ln/>
-        </p:spPr>
-        <p:txBody>
-          <a:bodyPr wrap="square" lIns="0" tIns="0" rIns="0" bIns="0" rtlCol="0" anchor="ctr"/>
-          <a:lstStyle/>
-          <a:p>
-            <a:pPr algn="ctr" indent="0" marL="0">
-              <a:buNone/>
-            </a:pPr>
-            <a:r>
-              <a:rPr lang="en-US" sz="950" b="1" dirty="0">
-                <a:solidFill>
-                  <a:srgbClr val="FFFFFF"/>
+              <a:t>✓ 공부확인</a:t>
+            </a:r>
+            <a:endParaRPr lang="en-US" sz="850" dirty="0"/>
+          </a:p>
+        </p:txBody>
+      </p:sp>
+      <p:sp>
+        <p:nvSpPr>
+          <p:cNvPr id="26" name="Text 24"/>
+          <p:cNvSpPr/>
+          <p:nvPr/>
+        </p:nvSpPr>
+        <p:spPr>
+          <a:xfrm>
+            <a:off x="1993392" y="2706624"/>
+            <a:ext cx="3840480" cy="329184"/>
+          </a:xfrm>
+          <a:prstGeom prst="rect">
+            <a:avLst/>
+          </a:prstGeom>
+          <a:noFill/>
+          <a:ln/>
+        </p:spPr>
+        <p:txBody>
+          <a:bodyPr wrap="square" lIns="0" tIns="0" rIns="0" bIns="0" rtlCol="0" anchor="ctr"/>
+          <a:lstStyle/>
+          <a:p>
+            <a:pPr indent="0" marL="0">
+              <a:buNone/>
+            </a:pPr>
+            <a:r>
+              <a:rPr lang="en-US" sz="900" dirty="0">
+                <a:solidFill>
+                  <a:srgbClr val="E2E8F0"/>
                 </a:solidFill>
                 <a:latin typeface="Pretendard" pitchFamily="34" charset="0"/>
                 <a:ea typeface="Pretendard" pitchFamily="34" charset="-122"/>
                 <a:cs typeface="Pretendard" pitchFamily="34" charset="-120"/>
               </a:rPr>
-              <a:t>◇ AI추정·가정</a:t>
-            </a:r>
-            <a:endParaRPr lang="en-US" sz="950" dirty="0"/>
-          </a:p>
-        </p:txBody>
-      </p:sp>
-      <p:sp>
-        <p:nvSpPr>
-          <p:cNvPr id="24" name="Text 22"/>
-          <p:cNvSpPr/>
-          <p:nvPr/>
-        </p:nvSpPr>
-        <p:spPr>
-          <a:xfrm>
-            <a:off x="2139696" y="4462272"/>
-            <a:ext cx="3566160" cy="420624"/>
-          </a:xfrm>
-          <a:prstGeom prst="rect">
-            <a:avLst/>
-          </a:prstGeom>
-          <a:noFill/>
-          <a:ln/>
-        </p:spPr>
-        <p:txBody>
-          <a:bodyPr wrap="square" lIns="0" tIns="0" rIns="0" bIns="0" rtlCol="0" anchor="ctr"/>
-          <a:lstStyle/>
-          <a:p>
-            <a:pPr indent="0" marL="0">
-              <a:buNone/>
-            </a:pPr>
-            <a:r>
-              <a:rPr lang="en-US" sz="1000" dirty="0">
-                <a:solidFill>
-                  <a:srgbClr val="F1F5F9"/>
+              <a:t>등기부·대장 등 공적 장부 직접 확인</a:t>
+            </a:r>
+            <a:endParaRPr lang="en-US" sz="900" dirty="0"/>
+          </a:p>
+        </p:txBody>
+      </p:sp>
+      <p:sp>
+        <p:nvSpPr>
+          <p:cNvPr id="27" name="Shape 25"/>
+          <p:cNvSpPr/>
+          <p:nvPr/>
+        </p:nvSpPr>
+        <p:spPr>
+          <a:xfrm>
+            <a:off x="566928" y="3200400"/>
+            <a:ext cx="1280160" cy="292608"/>
+          </a:xfrm>
+          <a:prstGeom prst="roundRect">
+            <a:avLst>
+              <a:gd name="adj" fmla="val 12500"/>
+            </a:avLst>
+          </a:prstGeom>
+          <a:solidFill>
+            <a:srgbClr val="2D3748"/>
+          </a:solidFill>
+          <a:ln/>
+        </p:spPr>
+      </p:sp>
+      <p:sp>
+        <p:nvSpPr>
+          <p:cNvPr id="28" name="Text 26"/>
+          <p:cNvSpPr/>
+          <p:nvPr/>
+        </p:nvSpPr>
+        <p:spPr>
+          <a:xfrm>
+            <a:off x="566928" y="3200400"/>
+            <a:ext cx="1280160" cy="292608"/>
+          </a:xfrm>
+          <a:prstGeom prst="rect">
+            <a:avLst/>
+          </a:prstGeom>
+          <a:noFill/>
+          <a:ln/>
+        </p:spPr>
+        <p:txBody>
+          <a:bodyPr wrap="square" lIns="0" tIns="0" rIns="0" bIns="0" rtlCol="0" anchor="ctr"/>
+          <a:lstStyle/>
+          <a:p>
+            <a:pPr algn="ctr" indent="0" marL="0">
+              <a:buNone/>
+            </a:pPr>
+            <a:r>
+              <a:rPr lang="en-US" sz="850" b="1" dirty="0">
+                <a:solidFill>
+                  <a:srgbClr val="FFFFFF"/>
                 </a:solidFill>
                 <a:latin typeface="Pretendard" pitchFamily="34" charset="0"/>
                 <a:ea typeface="Pretendard" pitchFamily="34" charset="-122"/>
                 <a:cs typeface="Pretendard" pitchFamily="34" charset="-120"/>
               </a:rPr>
-              <a:t>시나리오 분석 및 AI 모델 추정</a:t>
-            </a:r>
-            <a:endParaRPr lang="en-US" sz="1000" dirty="0"/>
-          </a:p>
-        </p:txBody>
-      </p:sp>
-      <p:sp>
-        <p:nvSpPr>
-          <p:cNvPr id="25" name="Text 23"/>
-          <p:cNvSpPr/>
-          <p:nvPr/>
-        </p:nvSpPr>
-        <p:spPr>
-          <a:xfrm>
-            <a:off x="5504688" y="4480560"/>
-            <a:ext cx="731520" cy="292608"/>
-          </a:xfrm>
-          <a:prstGeom prst="rect">
-            <a:avLst/>
-          </a:prstGeom>
-          <a:noFill/>
-          <a:ln/>
-        </p:spPr>
-        <p:txBody>
-          <a:bodyPr wrap="square" lIns="0" tIns="0" rIns="0" bIns="0" rtlCol="0" anchor="ctr"/>
-          <a:lstStyle/>
-          <a:p>
-            <a:pPr algn="r" indent="0" marL="0">
-              <a:buNone/>
-            </a:pPr>
-            <a:r>
-              <a:rPr lang="en-US" sz="1200" b="1" dirty="0">
-                <a:solidFill>
-                  <a:srgbClr val="FFFFFF"/>
-                </a:solidFill>
-                <a:latin typeface="Arial" pitchFamily="34" charset="0"/>
-                <a:ea typeface="Arial" pitchFamily="34" charset="-122"/>
-                <a:cs typeface="Arial" pitchFamily="34" charset="-120"/>
-              </a:rPr>
-              <a:t>0.30</a:t>
-            </a:r>
-            <a:endParaRPr lang="en-US" sz="1200" dirty="0"/>
-          </a:p>
-        </p:txBody>
-      </p:sp>
-      <p:sp>
-        <p:nvSpPr>
-          <p:cNvPr id="26" name="Text 24"/>
-          <p:cNvSpPr/>
-          <p:nvPr/>
-        </p:nvSpPr>
-        <p:spPr>
-          <a:xfrm>
-            <a:off x="6492240" y="1517904"/>
-            <a:ext cx="5129784" cy="237744"/>
+              <a:t>★ 전문가검증</a:t>
+            </a:r>
+            <a:endParaRPr lang="en-US" sz="850" dirty="0"/>
+          </a:p>
+        </p:txBody>
+      </p:sp>
+      <p:sp>
+        <p:nvSpPr>
+          <p:cNvPr id="29" name="Text 27"/>
+          <p:cNvSpPr/>
+          <p:nvPr/>
+        </p:nvSpPr>
+        <p:spPr>
+          <a:xfrm>
+            <a:off x="1993392" y="3182112"/>
+            <a:ext cx="3840480" cy="329184"/>
           </a:xfrm>
           <a:prstGeom prst="rect">
             <a:avLst/>
@@ -3227,52 +3282,391 @@
               <a:buNone/>
             </a:pPr>
             <a:r>
-              <a:rPr lang="en-US" sz="1100" b="1" dirty="0">
-                <a:solidFill>
-                  <a:srgbClr val="FFFFFF"/>
+              <a:rPr lang="en-US" sz="900" dirty="0">
+                <a:solidFill>
+                  <a:srgbClr val="E2E8F0"/>
                 </a:solidFill>
                 <a:latin typeface="Pretendard" pitchFamily="34" charset="0"/>
                 <a:ea typeface="Pretendard" pitchFamily="34" charset="-122"/>
                 <a:cs typeface="Pretendard" pitchFamily="34" charset="-120"/>
               </a:rPr>
-              <a:t>면책 조항</a:t>
-            </a:r>
-            <a:endParaRPr lang="en-US" sz="1100" dirty="0"/>
-          </a:p>
-        </p:txBody>
-      </p:sp>
-      <p:sp>
-        <p:nvSpPr>
-          <p:cNvPr id="27" name="Shape 25"/>
-          <p:cNvSpPr/>
-          <p:nvPr/>
-        </p:nvSpPr>
-        <p:spPr>
-          <a:xfrm>
-            <a:off x="6492240" y="1847088"/>
-            <a:ext cx="5129784" cy="2615184"/>
+              <a:t>세무사·감정평가사 등 전문가 확인</a:t>
+            </a:r>
+            <a:endParaRPr lang="en-US" sz="900" dirty="0"/>
+          </a:p>
+        </p:txBody>
+      </p:sp>
+      <p:sp>
+        <p:nvSpPr>
+          <p:cNvPr id="30" name="Shape 28"/>
+          <p:cNvSpPr/>
+          <p:nvPr/>
+        </p:nvSpPr>
+        <p:spPr>
+          <a:xfrm>
+            <a:off x="566928" y="3675888"/>
+            <a:ext cx="1280160" cy="292608"/>
           </a:xfrm>
           <a:prstGeom prst="roundRect">
             <a:avLst>
-              <a:gd name="adj" fmla="val 1399"/>
+              <a:gd name="adj" fmla="val 12500"/>
             </a:avLst>
           </a:prstGeom>
           <a:solidFill>
-            <a:srgbClr val="1E293B"/>
+            <a:srgbClr val="2D3748"/>
           </a:solidFill>
           <a:ln/>
         </p:spPr>
       </p:sp>
       <p:sp>
         <p:nvSpPr>
-          <p:cNvPr id="28" name="Text 26"/>
-          <p:cNvSpPr/>
-          <p:nvPr/>
-        </p:nvSpPr>
-        <p:spPr>
-          <a:xfrm>
-            <a:off x="6711696" y="2011680"/>
-            <a:ext cx="4690872" cy="2286000"/>
+          <p:cNvPr id="31" name="Text 29"/>
+          <p:cNvSpPr/>
+          <p:nvPr/>
+        </p:nvSpPr>
+        <p:spPr>
+          <a:xfrm>
+            <a:off x="566928" y="3675888"/>
+            <a:ext cx="1280160" cy="292608"/>
+          </a:xfrm>
+          <a:prstGeom prst="rect">
+            <a:avLst/>
+          </a:prstGeom>
+          <a:noFill/>
+          <a:ln/>
+        </p:spPr>
+        <p:txBody>
+          <a:bodyPr wrap="square" lIns="0" tIns="0" rIns="0" bIns="0" rtlCol="0" anchor="ctr"/>
+          <a:lstStyle/>
+          <a:p>
+            <a:pPr algn="ctr" indent="0" marL="0">
+              <a:buNone/>
+            </a:pPr>
+            <a:r>
+              <a:rPr lang="en-US" sz="850" b="1" dirty="0">
+                <a:solidFill>
+                  <a:srgbClr val="FFFFFF"/>
+                </a:solidFill>
+                <a:latin typeface="Pretendard" pitchFamily="34" charset="0"/>
+                <a:ea typeface="Pretendard" pitchFamily="34" charset="-122"/>
+                <a:cs typeface="Pretendard" pitchFamily="34" charset="-120"/>
+              </a:rPr>
+              <a:t>▲ 매도인고지</a:t>
+            </a:r>
+            <a:endParaRPr lang="en-US" sz="850" dirty="0"/>
+          </a:p>
+        </p:txBody>
+      </p:sp>
+      <p:sp>
+        <p:nvSpPr>
+          <p:cNvPr id="32" name="Text 30"/>
+          <p:cNvSpPr/>
+          <p:nvPr/>
+        </p:nvSpPr>
+        <p:spPr>
+          <a:xfrm>
+            <a:off x="1993392" y="3657600"/>
+            <a:ext cx="3840480" cy="329184"/>
+          </a:xfrm>
+          <a:prstGeom prst="rect">
+            <a:avLst/>
+          </a:prstGeom>
+          <a:noFill/>
+          <a:ln/>
+        </p:spPr>
+        <p:txBody>
+          <a:bodyPr wrap="square" lIns="0" tIns="0" rIns="0" bIns="0" rtlCol="0" anchor="ctr"/>
+          <a:lstStyle/>
+          <a:p>
+            <a:pPr indent="0" marL="0">
+              <a:buNone/>
+            </a:pPr>
+            <a:r>
+              <a:rPr lang="en-US" sz="900" dirty="0">
+                <a:solidFill>
+                  <a:srgbClr val="E2E8F0"/>
+                </a:solidFill>
+                <a:latin typeface="Pretendard" pitchFamily="34" charset="0"/>
+                <a:ea typeface="Pretendard" pitchFamily="34" charset="-122"/>
+                <a:cs typeface="Pretendard" pitchFamily="34" charset="-120"/>
+              </a:rPr>
+              <a:t>매도인이 구두 또는 서면으로 고지</a:t>
+            </a:r>
+            <a:endParaRPr lang="en-US" sz="900" dirty="0"/>
+          </a:p>
+        </p:txBody>
+      </p:sp>
+      <p:sp>
+        <p:nvSpPr>
+          <p:cNvPr id="33" name="Shape 31"/>
+          <p:cNvSpPr/>
+          <p:nvPr/>
+        </p:nvSpPr>
+        <p:spPr>
+          <a:xfrm>
+            <a:off x="566928" y="4151376"/>
+            <a:ext cx="1280160" cy="292608"/>
+          </a:xfrm>
+          <a:prstGeom prst="roundRect">
+            <a:avLst>
+              <a:gd name="adj" fmla="val 12500"/>
+            </a:avLst>
+          </a:prstGeom>
+          <a:solidFill>
+            <a:srgbClr val="2D3748"/>
+          </a:solidFill>
+          <a:ln/>
+        </p:spPr>
+      </p:sp>
+      <p:sp>
+        <p:nvSpPr>
+          <p:cNvPr id="34" name="Text 32"/>
+          <p:cNvSpPr/>
+          <p:nvPr/>
+        </p:nvSpPr>
+        <p:spPr>
+          <a:xfrm>
+            <a:off x="566928" y="4151376"/>
+            <a:ext cx="1280160" cy="292608"/>
+          </a:xfrm>
+          <a:prstGeom prst="rect">
+            <a:avLst/>
+          </a:prstGeom>
+          <a:noFill/>
+          <a:ln/>
+        </p:spPr>
+        <p:txBody>
+          <a:bodyPr wrap="square" lIns="0" tIns="0" rIns="0" bIns="0" rtlCol="0" anchor="ctr"/>
+          <a:lstStyle/>
+          <a:p>
+            <a:pPr algn="ctr" indent="0" marL="0">
+              <a:buNone/>
+            </a:pPr>
+            <a:r>
+              <a:rPr lang="en-US" sz="850" b="1" dirty="0">
+                <a:solidFill>
+                  <a:srgbClr val="FFFFFF"/>
+                </a:solidFill>
+                <a:latin typeface="Pretendard" pitchFamily="34" charset="0"/>
+                <a:ea typeface="Pretendard" pitchFamily="34" charset="-122"/>
+                <a:cs typeface="Pretendard" pitchFamily="34" charset="-120"/>
+              </a:rPr>
+              <a:t>● 중개인입력</a:t>
+            </a:r>
+            <a:endParaRPr lang="en-US" sz="850" dirty="0"/>
+          </a:p>
+        </p:txBody>
+      </p:sp>
+      <p:sp>
+        <p:nvSpPr>
+          <p:cNvPr id="35" name="Text 33"/>
+          <p:cNvSpPr/>
+          <p:nvPr/>
+        </p:nvSpPr>
+        <p:spPr>
+          <a:xfrm>
+            <a:off x="1993392" y="4133088"/>
+            <a:ext cx="3840480" cy="329184"/>
+          </a:xfrm>
+          <a:prstGeom prst="rect">
+            <a:avLst/>
+          </a:prstGeom>
+          <a:noFill/>
+          <a:ln/>
+        </p:spPr>
+        <p:txBody>
+          <a:bodyPr wrap="square" lIns="0" tIns="0" rIns="0" bIns="0" rtlCol="0" anchor="ctr"/>
+          <a:lstStyle/>
+          <a:p>
+            <a:pPr indent="0" marL="0">
+              <a:buNone/>
+            </a:pPr>
+            <a:r>
+              <a:rPr lang="en-US" sz="900" dirty="0">
+                <a:solidFill>
+                  <a:srgbClr val="E2E8F0"/>
+                </a:solidFill>
+                <a:latin typeface="Pretendard" pitchFamily="34" charset="0"/>
+                <a:ea typeface="Pretendard" pitchFamily="34" charset="-122"/>
+                <a:cs typeface="Pretendard" pitchFamily="34" charset="-120"/>
+              </a:rPr>
+              <a:t>중개인 현장 조사 및 경험 기반 입력</a:t>
+            </a:r>
+            <a:endParaRPr lang="en-US" sz="900" dirty="0"/>
+          </a:p>
+        </p:txBody>
+      </p:sp>
+      <p:sp>
+        <p:nvSpPr>
+          <p:cNvPr id="36" name="Shape 34"/>
+          <p:cNvSpPr/>
+          <p:nvPr/>
+        </p:nvSpPr>
+        <p:spPr>
+          <a:xfrm>
+            <a:off x="566928" y="4626864"/>
+            <a:ext cx="1280160" cy="292608"/>
+          </a:xfrm>
+          <a:prstGeom prst="roundRect">
+            <a:avLst>
+              <a:gd name="adj" fmla="val 12500"/>
+            </a:avLst>
+          </a:prstGeom>
+          <a:solidFill>
+            <a:srgbClr val="2D3748"/>
+          </a:solidFill>
+          <a:ln/>
+        </p:spPr>
+      </p:sp>
+      <p:sp>
+        <p:nvSpPr>
+          <p:cNvPr id="37" name="Text 35"/>
+          <p:cNvSpPr/>
+          <p:nvPr/>
+        </p:nvSpPr>
+        <p:spPr>
+          <a:xfrm>
+            <a:off x="566928" y="4626864"/>
+            <a:ext cx="1280160" cy="292608"/>
+          </a:xfrm>
+          <a:prstGeom prst="rect">
+            <a:avLst/>
+          </a:prstGeom>
+          <a:noFill/>
+          <a:ln/>
+        </p:spPr>
+        <p:txBody>
+          <a:bodyPr wrap="square" lIns="0" tIns="0" rIns="0" bIns="0" rtlCol="0" anchor="ctr"/>
+          <a:lstStyle/>
+          <a:p>
+            <a:pPr algn="ctr" indent="0" marL="0">
+              <a:buNone/>
+            </a:pPr>
+            <a:r>
+              <a:rPr lang="en-US" sz="850" b="1" dirty="0">
+                <a:solidFill>
+                  <a:srgbClr val="FFFFFF"/>
+                </a:solidFill>
+                <a:latin typeface="Pretendard" pitchFamily="34" charset="0"/>
+                <a:ea typeface="Pretendard" pitchFamily="34" charset="-122"/>
+                <a:cs typeface="Pretendard" pitchFamily="34" charset="-120"/>
+              </a:rPr>
+              <a:t>◇ AI추정·가정</a:t>
+            </a:r>
+            <a:endParaRPr lang="en-US" sz="850" dirty="0"/>
+          </a:p>
+        </p:txBody>
+      </p:sp>
+      <p:sp>
+        <p:nvSpPr>
+          <p:cNvPr id="38" name="Text 36"/>
+          <p:cNvSpPr/>
+          <p:nvPr/>
+        </p:nvSpPr>
+        <p:spPr>
+          <a:xfrm>
+            <a:off x="1993392" y="4608576"/>
+            <a:ext cx="3840480" cy="329184"/>
+          </a:xfrm>
+          <a:prstGeom prst="rect">
+            <a:avLst/>
+          </a:prstGeom>
+          <a:noFill/>
+          <a:ln/>
+        </p:spPr>
+        <p:txBody>
+          <a:bodyPr wrap="square" lIns="0" tIns="0" rIns="0" bIns="0" rtlCol="0" anchor="ctr"/>
+          <a:lstStyle/>
+          <a:p>
+            <a:pPr indent="0" marL="0">
+              <a:buNone/>
+            </a:pPr>
+            <a:r>
+              <a:rPr lang="en-US" sz="900" dirty="0">
+                <a:solidFill>
+                  <a:srgbClr val="E2E8F0"/>
+                </a:solidFill>
+                <a:latin typeface="Pretendard" pitchFamily="34" charset="0"/>
+                <a:ea typeface="Pretendard" pitchFamily="34" charset="-122"/>
+                <a:cs typeface="Pretendard" pitchFamily="34" charset="-120"/>
+              </a:rPr>
+              <a:t>시나리오 분석 및 AI 모델 추정</a:t>
+            </a:r>
+            <a:endParaRPr lang="en-US" sz="900" dirty="0"/>
+          </a:p>
+        </p:txBody>
+      </p:sp>
+      <p:sp>
+        <p:nvSpPr>
+          <p:cNvPr id="39" name="Text 37"/>
+          <p:cNvSpPr/>
+          <p:nvPr/>
+        </p:nvSpPr>
+        <p:spPr>
+          <a:xfrm>
+            <a:off x="6492240" y="2395728"/>
+            <a:ext cx="5129784" cy="237744"/>
+          </a:xfrm>
+          <a:prstGeom prst="rect">
+            <a:avLst/>
+          </a:prstGeom>
+          <a:noFill/>
+          <a:ln/>
+        </p:spPr>
+        <p:txBody>
+          <a:bodyPr wrap="square" lIns="0" tIns="0" rIns="0" bIns="0" rtlCol="0" anchor="ctr"/>
+          <a:lstStyle/>
+          <a:p>
+            <a:pPr indent="0" marL="0">
+              <a:buNone/>
+            </a:pPr>
+            <a:r>
+              <a:rPr lang="en-US" sz="1100" b="1" dirty="0">
+                <a:solidFill>
+                  <a:srgbClr val="FFFFFF"/>
+                </a:solidFill>
+                <a:latin typeface="Pretendard" pitchFamily="34" charset="0"/>
+                <a:ea typeface="Pretendard" pitchFamily="34" charset="-122"/>
+                <a:cs typeface="Pretendard" pitchFamily="34" charset="-120"/>
+              </a:rPr>
+              <a:t>면책 조항</a:t>
+            </a:r>
+            <a:endParaRPr lang="en-US" sz="1100" dirty="0"/>
+          </a:p>
+        </p:txBody>
+      </p:sp>
+      <p:sp>
+        <p:nvSpPr>
+          <p:cNvPr id="40" name="Shape 38"/>
+          <p:cNvSpPr/>
+          <p:nvPr/>
+        </p:nvSpPr>
+        <p:spPr>
+          <a:xfrm>
+            <a:off x="6492240" y="2724912"/>
+            <a:ext cx="5129784" cy="1645920"/>
+          </a:xfrm>
+          <a:prstGeom prst="roundRect">
+            <a:avLst>
+              <a:gd name="adj" fmla="val 2222"/>
+            </a:avLst>
+          </a:prstGeom>
+          <a:solidFill>
+            <a:srgbClr val="1C2433"/>
+          </a:solidFill>
+          <a:ln/>
+        </p:spPr>
+      </p:sp>
+      <p:sp>
+        <p:nvSpPr>
+          <p:cNvPr id="41" name="Text 39"/>
+          <p:cNvSpPr/>
+          <p:nvPr/>
+        </p:nvSpPr>
+        <p:spPr>
+          <a:xfrm>
+            <a:off x="6675120" y="2834640"/>
+            <a:ext cx="4764024" cy="1426464"/>
           </a:xfrm>
           <a:prstGeom prst="rect">
             <a:avLst/>
@@ -3291,9 +3685,9 @@
               <a:buNone/>
             </a:pPr>
             <a:r>
-              <a:rPr lang="en-US" sz="930" dirty="0">
-                <a:solidFill>
-                  <a:srgbClr val="94A3B8"/>
+              <a:rPr lang="en-US" sz="850" dirty="0">
+                <a:solidFill>
+                  <a:srgbClr val="A0AEC0"/>
                 </a:solidFill>
                 <a:latin typeface="Pretendard" pitchFamily="34" charset="0"/>
                 <a:ea typeface="Pretendard" pitchFamily="34" charset="-122"/>
@@ -3301,40 +3695,40 @@
               </a:rPr>
               <a:t>본 자료는 투자 권유가 아니며, 기재된 정보의 정확성을 보증하지 않습니다.</a:t>
             </a:r>
-            <a:endParaRPr lang="en-US" sz="930" dirty="0"/>
-          </a:p>
-        </p:txBody>
-      </p:sp>
-      <p:sp>
-        <p:nvSpPr>
-          <p:cNvPr id="29" name="Shape 27"/>
-          <p:cNvSpPr/>
-          <p:nvPr/>
-        </p:nvSpPr>
-        <p:spPr>
-          <a:xfrm>
-            <a:off x="566928" y="5230368"/>
-            <a:ext cx="11057839" cy="640080"/>
+            <a:endParaRPr lang="en-US" sz="850" dirty="0"/>
+          </a:p>
+        </p:txBody>
+      </p:sp>
+      <p:sp>
+        <p:nvSpPr>
+          <p:cNvPr id="42" name="Shape 40"/>
+          <p:cNvSpPr/>
+          <p:nvPr/>
+        </p:nvSpPr>
+        <p:spPr>
+          <a:xfrm>
+            <a:off x="566928" y="5760720"/>
+            <a:ext cx="11057839" cy="457200"/>
           </a:xfrm>
           <a:prstGeom prst="rect">
             <a:avLst/>
           </a:prstGeom>
           <a:solidFill>
-            <a:srgbClr val="4F6A00"/>
+            <a:srgbClr val="977024"/>
           </a:solidFill>
           <a:ln/>
         </p:spPr>
       </p:sp>
       <p:sp>
         <p:nvSpPr>
-          <p:cNvPr id="30" name="Text 28"/>
-          <p:cNvSpPr/>
-          <p:nvPr/>
-        </p:nvSpPr>
-        <p:spPr>
-          <a:xfrm>
-            <a:off x="786384" y="5321808"/>
-            <a:ext cx="10618927" cy="457200"/>
+          <p:cNvPr id="43" name="Text 41"/>
+          <p:cNvSpPr/>
+          <p:nvPr/>
+        </p:nvSpPr>
+        <p:spPr>
+          <a:xfrm>
+            <a:off x="749808" y="5806440"/>
+            <a:ext cx="10692079" cy="365760"/>
           </a:xfrm>
           <a:prstGeom prst="rect">
             <a:avLst/>
@@ -3350,9 +3744,9 @@
               <a:buNone/>
             </a:pPr>
             <a:r>
-              <a:rPr lang="en-US" sz="1000" dirty="0">
-                <a:solidFill>
-                  <a:srgbClr val="E8F5CC"/>
+              <a:rPr lang="en-US" sz="900" dirty="0">
+                <a:solidFill>
+                  <a:srgbClr val="F3EBDA"/>
                 </a:solidFill>
                 <a:latin typeface="Pretendard" pitchFamily="34" charset="0"/>
                 <a:ea typeface="Pretendard" pitchFamily="34" charset="-122"/>
@@ -3360,71 +3754,87 @@
               </a:rPr>
               <a:t>리얼티빌딩 · </a:t>
             </a:r>
-            <a:endParaRPr lang="en-US" sz="1000" dirty="0"/>
-          </a:p>
-        </p:txBody>
-      </p:sp>
-      <p:sp>
-        <p:nvSpPr>
-          <p:cNvPr id="31" name="Text 29"/>
-          <p:cNvSpPr/>
-          <p:nvPr/>
-        </p:nvSpPr>
-        <p:spPr>
-          <a:xfrm>
-            <a:off x="566928" y="6419088"/>
-            <a:ext cx="11057839" cy="201168"/>
-          </a:xfrm>
-          <a:prstGeom prst="rect">
-            <a:avLst/>
-          </a:prstGeom>
-          <a:noFill/>
-          <a:ln/>
-        </p:spPr>
-        <p:txBody>
-          <a:bodyPr wrap="square" lIns="0" tIns="0" rIns="0" bIns="0" rtlCol="0" anchor="ctr"/>
-          <a:lstStyle/>
-          <a:p>
-            <a:pPr algn="ctr" indent="0" marL="0">
-              <a:buNone/>
-            </a:pPr>
-            <a:r>
-              <a:rPr lang="en-US" sz="750" dirty="0">
-                <a:solidFill>
-                  <a:srgbClr val="64748B"/>
+            <a:endParaRPr lang="en-US" sz="900" dirty="0"/>
+          </a:p>
+        </p:txBody>
+      </p:sp>
+      <p:sp>
+        <p:nvSpPr>
+          <p:cNvPr id="44" name="Text 42"/>
+          <p:cNvSpPr/>
+          <p:nvPr/>
+        </p:nvSpPr>
+        <p:spPr>
+          <a:xfrm>
+            <a:off x="566928" y="6382512"/>
+            <a:ext cx="7315200" cy="219456"/>
+          </a:xfrm>
+          <a:prstGeom prst="rect">
+            <a:avLst/>
+          </a:prstGeom>
+          <a:noFill/>
+          <a:ln/>
+        </p:spPr>
+        <p:txBody>
+          <a:bodyPr wrap="square" lIns="0" tIns="0" rIns="0" bIns="0" rtlCol="0" anchor="ctr"/>
+          <a:lstStyle/>
+          <a:p>
+            <a:pPr indent="0" marL="0">
+              <a:buNone/>
+            </a:pPr>
+            <a:r>
+              <a:rPr lang="en-US" sz="800" dirty="0">
+                <a:solidFill>
+                  <a:srgbClr val="718096"/>
                 </a:solidFill>
                 <a:latin typeface="Pretendard" pitchFamily="34" charset="0"/>
                 <a:ea typeface="Pretendard" pitchFamily="34" charset="-122"/>
                 <a:cs typeface="Pretendard" pitchFamily="34" charset="-120"/>
               </a:rPr>
-              <a:t>크리딜  ·    ·  10</a:t>
-            </a:r>
-            <a:endParaRPr lang="en-US" sz="750" dirty="0"/>
-          </a:p>
-        </p:txBody>
-      </p:sp>
-      <p:sp>
-        <p:nvSpPr>
-          <p:cNvPr id="32" name="Shape 30"/>
-          <p:cNvSpPr/>
-          <p:nvPr/>
-        </p:nvSpPr>
-        <p:spPr>
-          <a:xfrm>
-            <a:off x="4437172" y="6382512"/>
-            <a:ext cx="3317352" cy="0"/>
-          </a:xfrm>
-          <a:prstGeom prst="line">
-            <a:avLst/>
-          </a:prstGeom>
-          <a:noFill/>
-          <a:ln w="6350">
-            <a:solidFill>
-              <a:srgbClr val="6B8E00"/>
-            </a:solidFill>
-            <a:prstDash val="solid"/>
-          </a:ln>
-        </p:spPr>
+              <a:t>크리딜   |   </a:t>
+            </a:r>
+            <a:endParaRPr lang="en-US" sz="800" dirty="0"/>
+          </a:p>
+        </p:txBody>
+      </p:sp>
+      <p:sp>
+        <p:nvSpPr>
+          <p:cNvPr id="45" name="Text 43"/>
+          <p:cNvSpPr/>
+          <p:nvPr/>
+        </p:nvSpPr>
+        <p:spPr>
+          <a:xfrm>
+            <a:off x="10710367" y="6382512"/>
+            <a:ext cx="914400" cy="219456"/>
+          </a:xfrm>
+          <a:prstGeom prst="rect">
+            <a:avLst/>
+          </a:prstGeom>
+          <a:noFill/>
+          <a:ln/>
+        </p:spPr>
+        <p:txBody>
+          <a:bodyPr wrap="square" lIns="0" tIns="0" rIns="0" bIns="0" rtlCol="0" anchor="ctr"/>
+          <a:lstStyle/>
+          <a:p>
+            <a:pPr algn="r" indent="0" marL="0">
+              <a:buNone/>
+            </a:pPr>
+            <a:r>
+              <a:rPr lang="en-US" sz="900" b="1" dirty="0">
+                <a:solidFill>
+                  <a:srgbClr val="B98A2E"/>
+                </a:solidFill>
+                <a:latin typeface="Arial" pitchFamily="34" charset="0"/>
+                <a:ea typeface="Arial" pitchFamily="34" charset="-122"/>
+                <a:cs typeface="Arial" pitchFamily="34" charset="-120"/>
+              </a:rPr>
+              <a:t>10</a:t>
+            </a:r>
+            <a:endParaRPr lang="en-US" sz="900" dirty="0"/>
+          </a:p>
+        </p:txBody>
       </p:sp>
     </p:spTree>
   </p:cSld>
@@ -3466,14 +3876,14 @@
         </p:nvSpPr>
         <p:spPr>
           <a:xfrm>
-            <a:off x="566928" y="384048"/>
-            <a:ext cx="45720" cy="566928"/>
-          </a:xfrm>
-          <a:prstGeom prst="rect">
+            <a:off x="566928" y="457200"/>
+            <a:ext cx="384048" cy="384048"/>
+          </a:xfrm>
+          <a:prstGeom prst="ellipse">
             <a:avLst/>
           </a:prstGeom>
           <a:solidFill>
-            <a:srgbClr val="6B8E00"/>
+            <a:srgbClr val="B98A2E"/>
           </a:solidFill>
           <a:ln/>
         </p:spPr>
@@ -3486,32 +3896,71 @@
         </p:nvSpPr>
         <p:spPr>
           <a:xfrm>
-            <a:off x="749808" y="384048"/>
-            <a:ext cx="10874959" cy="182880"/>
-          </a:xfrm>
-          <a:prstGeom prst="rect">
-            <a:avLst/>
-          </a:prstGeom>
-          <a:noFill/>
-          <a:ln/>
-        </p:spPr>
-        <p:txBody>
-          <a:bodyPr wrap="square" lIns="0" tIns="0" rIns="0" bIns="0" rtlCol="0" anchor="ctr"/>
-          <a:lstStyle/>
-          <a:p>
-            <a:pPr indent="0" marL="0">
-              <a:buNone/>
-            </a:pPr>
-            <a:r>
-              <a:rPr lang="en-US" sz="950" b="1" spc="200" kern="0" dirty="0">
-                <a:solidFill>
-                  <a:srgbClr val="6B8E00"/>
+            <a:off x="566928" y="457200"/>
+            <a:ext cx="384048" cy="384048"/>
+          </a:xfrm>
+          <a:prstGeom prst="rect">
+            <a:avLst/>
+          </a:prstGeom>
+          <a:noFill/>
+          <a:ln/>
+        </p:spPr>
+        <p:txBody>
+          <a:bodyPr wrap="square" lIns="0" tIns="0" rIns="0" bIns="0" rtlCol="0" anchor="ctr"/>
+          <a:lstStyle/>
+          <a:p>
+            <a:pPr algn="ctr" indent="0" marL="0">
+              <a:buNone/>
+            </a:pPr>
+            <a:r>
+              <a:rPr lang="en-US" sz="1300" b="1" dirty="0">
+                <a:solidFill>
+                  <a:srgbClr val="FFFFFF"/>
                 </a:solidFill>
                 <a:latin typeface="Arial" pitchFamily="34" charset="0"/>
                 <a:ea typeface="Arial" pitchFamily="34" charset="-122"/>
                 <a:cs typeface="Arial" pitchFamily="34" charset="-120"/>
               </a:rPr>
-              <a:t>02  Summary</a:t>
+              <a:t>02</a:t>
+            </a:r>
+            <a:endParaRPr lang="en-US" sz="1300" dirty="0"/>
+          </a:p>
+        </p:txBody>
+      </p:sp>
+      <p:sp>
+        <p:nvSpPr>
+          <p:cNvPr id="4" name="Text 2"/>
+          <p:cNvSpPr/>
+          <p:nvPr/>
+        </p:nvSpPr>
+        <p:spPr>
+          <a:xfrm>
+            <a:off x="1133856" y="457200"/>
+            <a:ext cx="10490911" cy="182880"/>
+          </a:xfrm>
+          <a:prstGeom prst="rect">
+            <a:avLst/>
+          </a:prstGeom>
+          <a:noFill/>
+          <a:ln/>
+        </p:spPr>
+        <p:txBody>
+          <a:bodyPr wrap="square" lIns="0" tIns="0" rIns="0" bIns="0" rtlCol="0" anchor="ctr"/>
+          <a:lstStyle/>
+          <a:p>
+            <a:pPr indent="0" marL="0">
+              <a:buNone/>
+            </a:pPr>
+            <a:r>
+              <a:rPr lang="en-US" sz="950" b="1" spc="200" kern="0" dirty="0">
+                <a:solidFill>
+                  <a:srgbClr val="B98A2E"/>
+                </a:solidFill>
+                <a:latin typeface="Arial" pitchFamily="34" charset="0"/>
+                <a:ea typeface="Arial" pitchFamily="34" charset="-122"/>
+                <a:cs typeface="Arial" pitchFamily="34" charset="-120"/>
+              </a:rPr>
+              <a:t>Summary</a:t>
             </a:r>
             <a:endParaRPr lang="en-US" sz="950" dirty="0"/>
           </a:p>
@@ -3519,14 +3968,14 @@
       </p:sp>
       <p:sp>
         <p:nvSpPr>
-          <p:cNvPr id="4" name="Text 2"/>
-          <p:cNvSpPr/>
-          <p:nvPr/>
-        </p:nvSpPr>
-        <p:spPr>
-          <a:xfrm>
-            <a:off x="749808" y="566928"/>
-            <a:ext cx="10874959" cy="384048"/>
+          <p:cNvPr id="5" name="Text 3"/>
+          <p:cNvSpPr/>
+          <p:nvPr/>
+        </p:nvSpPr>
+        <p:spPr>
+          <a:xfrm>
+            <a:off x="1133856" y="640080"/>
+            <a:ext cx="10490911" cy="365760"/>
           </a:xfrm>
           <a:prstGeom prst="rect">
             <a:avLst/>
@@ -3542,9 +3991,9 @@
               <a:buNone/>
             </a:pPr>
             <a:r>
-              <a:rPr lang="en-US" sz="2200" b="1" dirty="0">
-                <a:solidFill>
-                  <a:srgbClr val="0F172A"/>
+              <a:rPr lang="en-US" sz="2300" b="1" dirty="0">
+                <a:solidFill>
+                  <a:srgbClr val="10161F"/>
                 </a:solidFill>
                 <a:latin typeface="Pretendard" pitchFamily="34" charset="0"/>
                 <a:ea typeface="Pretendard" pitchFamily="34" charset="-122"/>
@@ -3552,13 +4001,13 @@
               </a:rPr>
               <a:t>핵심요약</a:t>
             </a:r>
-            <a:endParaRPr lang="en-US" sz="2200" dirty="0"/>
-          </a:p>
-        </p:txBody>
-      </p:sp>
-      <p:sp>
-        <p:nvSpPr>
-          <p:cNvPr id="5" name="Text 3"/>
+            <a:endParaRPr lang="en-US" sz="2300" dirty="0"/>
+          </a:p>
+        </p:txBody>
+      </p:sp>
+      <p:sp>
+        <p:nvSpPr>
+          <p:cNvPr id="6" name="Text 4"/>
           <p:cNvSpPr/>
           <p:nvPr/>
         </p:nvSpPr>
@@ -3583,7 +4032,7 @@
             <a:r>
               <a:rPr lang="en-US" sz="1500" b="1" dirty="0">
                 <a:solidFill>
-                  <a:srgbClr val="0F172A"/>
+                  <a:srgbClr val="10161F"/>
                 </a:solidFill>
                 <a:latin typeface="Pretendard" pitchFamily="34" charset="0"/>
                 <a:ea typeface="Pretendard" pitchFamily="34" charset="-122"/>
@@ -3597,7 +4046,7 @@
       </p:sp>
       <p:sp>
         <p:nvSpPr>
-          <p:cNvPr id="6" name="Shape 4"/>
+          <p:cNvPr id="7" name="Shape 5"/>
           <p:cNvSpPr/>
           <p:nvPr/>
         </p:nvSpPr>
@@ -3612,7 +4061,7 @@
           <a:noFill/>
           <a:ln w="19050">
             <a:solidFill>
-              <a:srgbClr val="6B8E00"/>
+              <a:srgbClr val="B98A2E"/>
             </a:solidFill>
             <a:prstDash val="solid"/>
           </a:ln>
@@ -3620,7 +4069,7 @@
       </p:sp>
       <p:sp>
         <p:nvSpPr>
-          <p:cNvPr id="7" name="Shape 5"/>
+          <p:cNvPr id="8" name="Shape 6"/>
           <p:cNvSpPr/>
           <p:nvPr/>
         </p:nvSpPr>
@@ -3635,11 +4084,11 @@
             </a:avLst>
           </a:prstGeom>
           <a:solidFill>
-            <a:srgbClr val="F8FAFC"/>
+            <a:srgbClr val="F7FAFC"/>
           </a:solidFill>
           <a:ln w="6350">
             <a:solidFill>
-              <a:srgbClr val="CBD5E1"/>
+              <a:srgbClr val="CBD5E0"/>
             </a:solidFill>
             <a:prstDash val="solid"/>
           </a:ln>
@@ -3647,7 +4096,7 @@
       </p:sp>
       <p:sp>
         <p:nvSpPr>
-          <p:cNvPr id="8" name="Text 6"/>
+          <p:cNvPr id="9" name="Text 7"/>
           <p:cNvSpPr/>
           <p:nvPr/>
         </p:nvSpPr>
@@ -3672,7 +4121,7 @@
             <a:r>
               <a:rPr lang="en-US" sz="950" dirty="0">
                 <a:solidFill>
-                  <a:srgbClr val="64748B"/>
+                  <a:srgbClr val="718096"/>
                 </a:solidFill>
                 <a:latin typeface="Pretendard" pitchFamily="34" charset="0"/>
                 <a:ea typeface="Pretendard" pitchFamily="34" charset="-122"/>
@@ -3686,7 +4135,7 @@
       </p:sp>
       <p:sp>
         <p:nvSpPr>
-          <p:cNvPr id="9" name="Text 7"/>
+          <p:cNvPr id="10" name="Text 8"/>
           <p:cNvSpPr/>
           <p:nvPr/>
         </p:nvSpPr>
@@ -3713,7 +4162,7 @@
             <a:r>
               <a:rPr lang="en-US" sz="2000" b="1" dirty="0">
                 <a:solidFill>
-                  <a:srgbClr val="0F172A"/>
+                  <a:srgbClr val="10161F"/>
                 </a:solidFill>
                 <a:latin typeface="Pretendard" pitchFamily="34" charset="0"/>
                 <a:ea typeface="Pretendard" pitchFamily="34" charset="-122"/>
@@ -3727,7 +4176,7 @@
       </p:sp>
       <p:sp>
         <p:nvSpPr>
-          <p:cNvPr id="10" name="Shape 8"/>
+          <p:cNvPr id="11" name="Shape 9"/>
           <p:cNvSpPr/>
           <p:nvPr/>
         </p:nvSpPr>
@@ -3742,11 +4191,11 @@
             </a:avLst>
           </a:prstGeom>
           <a:solidFill>
-            <a:srgbClr val="F8FAFC"/>
+            <a:srgbClr val="F7FAFC"/>
           </a:solidFill>
           <a:ln w="6350">
             <a:solidFill>
-              <a:srgbClr val="CBD5E1"/>
+              <a:srgbClr val="CBD5E0"/>
             </a:solidFill>
             <a:prstDash val="solid"/>
           </a:ln>
@@ -3754,7 +4203,7 @@
       </p:sp>
       <p:sp>
         <p:nvSpPr>
-          <p:cNvPr id="11" name="Text 9"/>
+          <p:cNvPr id="12" name="Text 10"/>
           <p:cNvSpPr/>
           <p:nvPr/>
         </p:nvSpPr>
@@ -3779,7 +4228,7 @@
             <a:r>
               <a:rPr lang="en-US" sz="950" dirty="0">
                 <a:solidFill>
-                  <a:srgbClr val="64748B"/>
+                  <a:srgbClr val="718096"/>
                 </a:solidFill>
                 <a:latin typeface="Pretendard" pitchFamily="34" charset="0"/>
                 <a:ea typeface="Pretendard" pitchFamily="34" charset="-122"/>
@@ -3793,7 +4242,7 @@
       </p:sp>
       <p:sp>
         <p:nvSpPr>
-          <p:cNvPr id="12" name="Text 10"/>
+          <p:cNvPr id="13" name="Text 11"/>
           <p:cNvSpPr/>
           <p:nvPr/>
         </p:nvSpPr>
@@ -3820,7 +4269,7 @@
             <a:r>
               <a:rPr lang="en-US" sz="2000" b="1" dirty="0">
                 <a:solidFill>
-                  <a:srgbClr val="0F172A"/>
+                  <a:srgbClr val="10161F"/>
                 </a:solidFill>
                 <a:latin typeface="Pretendard" pitchFamily="34" charset="0"/>
                 <a:ea typeface="Pretendard" pitchFamily="34" charset="-122"/>
@@ -3834,7 +4283,7 @@
       </p:sp>
       <p:sp>
         <p:nvSpPr>
-          <p:cNvPr id="13" name="Shape 11"/>
+          <p:cNvPr id="14" name="Shape 12"/>
           <p:cNvSpPr/>
           <p:nvPr/>
         </p:nvSpPr>
@@ -3849,11 +4298,11 @@
             </a:avLst>
           </a:prstGeom>
           <a:solidFill>
-            <a:srgbClr val="F8FAFC"/>
+            <a:srgbClr val="F7FAFC"/>
           </a:solidFill>
           <a:ln w="6350">
             <a:solidFill>
-              <a:srgbClr val="CBD5E1"/>
+              <a:srgbClr val="CBD5E0"/>
             </a:solidFill>
             <a:prstDash val="solid"/>
           </a:ln>
@@ -3861,7 +4310,7 @@
       </p:sp>
       <p:sp>
         <p:nvSpPr>
-          <p:cNvPr id="14" name="Text 12"/>
+          <p:cNvPr id="15" name="Text 13"/>
           <p:cNvSpPr/>
           <p:nvPr/>
         </p:nvSpPr>
@@ -3886,7 +4335,7 @@
             <a:r>
               <a:rPr lang="en-US" sz="950" dirty="0">
                 <a:solidFill>
-                  <a:srgbClr val="64748B"/>
+                  <a:srgbClr val="718096"/>
                 </a:solidFill>
                 <a:latin typeface="Pretendard" pitchFamily="34" charset="0"/>
                 <a:ea typeface="Pretendard" pitchFamily="34" charset="-122"/>
@@ -3900,7 +4349,7 @@
       </p:sp>
       <p:sp>
         <p:nvSpPr>
-          <p:cNvPr id="15" name="Text 13"/>
+          <p:cNvPr id="16" name="Text 14"/>
           <p:cNvSpPr/>
           <p:nvPr/>
         </p:nvSpPr>
@@ -3927,7 +4376,7 @@
             <a:r>
               <a:rPr lang="en-US" sz="2000" b="1" dirty="0">
                 <a:solidFill>
-                  <a:srgbClr val="0F172A"/>
+                  <a:srgbClr val="10161F"/>
                 </a:solidFill>
                 <a:latin typeface="Pretendard" pitchFamily="34" charset="0"/>
                 <a:ea typeface="Pretendard" pitchFamily="34" charset="-122"/>
@@ -3941,65 +4390,516 @@
       </p:sp>
       <p:sp>
         <p:nvSpPr>
-          <p:cNvPr id="16" name="Text 14"/>
-          <p:cNvSpPr/>
-          <p:nvPr/>
-        </p:nvSpPr>
-        <p:spPr>
-          <a:xfrm>
-            <a:off x="566928" y="6419088"/>
-            <a:ext cx="11057839" cy="201168"/>
-          </a:xfrm>
-          <a:prstGeom prst="rect">
-            <a:avLst/>
-          </a:prstGeom>
-          <a:noFill/>
-          <a:ln/>
-        </p:spPr>
-        <p:txBody>
-          <a:bodyPr wrap="square" lIns="0" tIns="0" rIns="0" bIns="0" rtlCol="0" anchor="ctr"/>
-          <a:lstStyle/>
-          <a:p>
-            <a:pPr algn="ctr" indent="0" marL="0">
-              <a:buNone/>
-            </a:pPr>
-            <a:r>
-              <a:rPr lang="en-US" sz="750" dirty="0">
-                <a:solidFill>
-                  <a:srgbClr val="64748B"/>
+          <p:cNvPr id="17" name="Text 15"/>
+          <p:cNvSpPr/>
+          <p:nvPr/>
+        </p:nvSpPr>
+        <p:spPr>
+          <a:xfrm>
+            <a:off x="566928" y="3502152"/>
+            <a:ext cx="11057839" cy="274320"/>
+          </a:xfrm>
+          <a:prstGeom prst="rect">
+            <a:avLst/>
+          </a:prstGeom>
+          <a:noFill/>
+          <a:ln/>
+        </p:spPr>
+        <p:txBody>
+          <a:bodyPr wrap="square" lIns="0" tIns="0" rIns="0" bIns="0" rtlCol="0" anchor="ctr"/>
+          <a:lstStyle/>
+          <a:p>
+            <a:pPr indent="0" marL="0">
+              <a:buNone/>
+            </a:pPr>
+            <a:r>
+              <a:rPr lang="en-US" sz="1250" b="1" dirty="0">
+                <a:solidFill>
+                  <a:srgbClr val="977024"/>
                 </a:solidFill>
                 <a:latin typeface="Pretendard" pitchFamily="34" charset="0"/>
                 <a:ea typeface="Pretendard" pitchFamily="34" charset="-122"/>
                 <a:cs typeface="Pretendard" pitchFamily="34" charset="-120"/>
               </a:rPr>
-              <a:t>크리딜  ·    ·  2</a:t>
-            </a:r>
-            <a:endParaRPr lang="en-US" sz="750" dirty="0"/>
-          </a:p>
-        </p:txBody>
-      </p:sp>
-      <p:sp>
-        <p:nvSpPr>
-          <p:cNvPr id="17" name="Shape 15"/>
-          <p:cNvSpPr/>
-          <p:nvPr/>
-        </p:nvSpPr>
-        <p:spPr>
-          <a:xfrm>
-            <a:off x="4437172" y="6382512"/>
-            <a:ext cx="3317352" cy="0"/>
-          </a:xfrm>
-          <a:prstGeom prst="line">
-            <a:avLst/>
-          </a:prstGeom>
-          <a:noFill/>
-          <a:ln w="6350">
+              <a:t>3대 핵심 투자 포인트 (Investment Highlights)</a:t>
+            </a:r>
+            <a:endParaRPr lang="en-US" sz="1250" dirty="0"/>
+          </a:p>
+        </p:txBody>
+      </p:sp>
+      <p:sp>
+        <p:nvSpPr>
+          <p:cNvPr id="18" name="Shape 16"/>
+          <p:cNvSpPr/>
+          <p:nvPr/>
+        </p:nvSpPr>
+        <p:spPr>
+          <a:xfrm>
+            <a:off x="566928" y="3831336"/>
+            <a:ext cx="11057839" cy="585216"/>
+          </a:xfrm>
+          <a:prstGeom prst="roundRect">
+            <a:avLst>
+              <a:gd name="adj" fmla="val 7813"/>
+            </a:avLst>
+          </a:prstGeom>
+          <a:solidFill>
+            <a:srgbClr val="F8F9FA"/>
+          </a:solidFill>
+          <a:ln w="7620">
             <a:solidFill>
-              <a:srgbClr val="6B8E00"/>
+              <a:srgbClr val="E2E8F0"/>
             </a:solidFill>
             <a:prstDash val="solid"/>
           </a:ln>
         </p:spPr>
+      </p:sp>
+      <p:sp>
+        <p:nvSpPr>
+          <p:cNvPr id="19" name="Shape 17"/>
+          <p:cNvSpPr/>
+          <p:nvPr/>
+        </p:nvSpPr>
+        <p:spPr>
+          <a:xfrm>
+            <a:off x="676656" y="3941064"/>
+            <a:ext cx="411480" cy="365760"/>
+          </a:xfrm>
+          <a:prstGeom prst="roundRect">
+            <a:avLst>
+              <a:gd name="adj" fmla="val 10000"/>
+            </a:avLst>
+          </a:prstGeom>
+          <a:solidFill>
+            <a:srgbClr val="F3EBDA"/>
+          </a:solidFill>
+          <a:ln w="6350">
+            <a:solidFill>
+              <a:srgbClr val="D9B668"/>
+            </a:solidFill>
+            <a:prstDash val="solid"/>
+          </a:ln>
+        </p:spPr>
+      </p:sp>
+      <p:sp>
+        <p:nvSpPr>
+          <p:cNvPr id="20" name="Text 18"/>
+          <p:cNvSpPr/>
+          <p:nvPr/>
+        </p:nvSpPr>
+        <p:spPr>
+          <a:xfrm>
+            <a:off x="676656" y="3941064"/>
+            <a:ext cx="411480" cy="365760"/>
+          </a:xfrm>
+          <a:prstGeom prst="rect">
+            <a:avLst/>
+          </a:prstGeom>
+          <a:noFill/>
+          <a:ln/>
+        </p:spPr>
+        <p:txBody>
+          <a:bodyPr wrap="square" lIns="0" tIns="0" rIns="0" bIns="0" rtlCol="0" anchor="ctr"/>
+          <a:lstStyle/>
+          <a:p>
+            <a:pPr algn="ctr" indent="0" marL="0">
+              <a:buNone/>
+            </a:pPr>
+            <a:r>
+              <a:rPr lang="en-US" sz="1000" b="1" dirty="0">
+                <a:solidFill>
+                  <a:srgbClr val="977024"/>
+                </a:solidFill>
+                <a:latin typeface="Arial" pitchFamily="34" charset="0"/>
+                <a:ea typeface="Arial" pitchFamily="34" charset="-122"/>
+                <a:cs typeface="Arial" pitchFamily="34" charset="-120"/>
+              </a:rPr>
+              <a:t>01</a:t>
+            </a:r>
+            <a:endParaRPr lang="en-US" sz="1000" dirty="0"/>
+          </a:p>
+        </p:txBody>
+      </p:sp>
+      <p:sp>
+        <p:nvSpPr>
+          <p:cNvPr id="21" name="Text 19"/>
+          <p:cNvSpPr/>
+          <p:nvPr/>
+        </p:nvSpPr>
+        <p:spPr>
+          <a:xfrm>
+            <a:off x="1207008" y="3904488"/>
+            <a:ext cx="10280599" cy="438912"/>
+          </a:xfrm>
+          <a:prstGeom prst="rect">
+            <a:avLst/>
+          </a:prstGeom>
+          <a:noFill/>
+          <a:ln/>
+        </p:spPr>
+        <p:txBody>
+          <a:bodyPr wrap="square" lIns="0" tIns="0" rIns="0" bIns="0" rtlCol="0" anchor="ctr"/>
+          <a:lstStyle/>
+          <a:p>
+            <a:pPr indent="0" marL="0">
+              <a:buNone/>
+            </a:pPr>
+            <a:r>
+              <a:rPr lang="en-US" sz="1150" dirty="0">
+                <a:solidFill>
+                  <a:srgbClr val="10161F"/>
+                </a:solidFill>
+                <a:latin typeface="Pretendard" pitchFamily="34" charset="0"/>
+                <a:ea typeface="Pretendard" pitchFamily="34" charset="-122"/>
+                <a:cs typeface="Pretendard" pitchFamily="34" charset="-120"/>
+              </a:rPr>
+              <a:t>원금 안전판: 핵심권역 핵심 입지 및 우량 대지 지분 가치로 하방 경직성 확보</a:t>
+            </a:r>
+            <a:endParaRPr lang="en-US" sz="1150" dirty="0"/>
+          </a:p>
+        </p:txBody>
+      </p:sp>
+      <p:sp>
+        <p:nvSpPr>
+          <p:cNvPr id="22" name="Shape 20"/>
+          <p:cNvSpPr/>
+          <p:nvPr/>
+        </p:nvSpPr>
+        <p:spPr>
+          <a:xfrm>
+            <a:off x="566928" y="4526280"/>
+            <a:ext cx="11057839" cy="585216"/>
+          </a:xfrm>
+          <a:prstGeom prst="roundRect">
+            <a:avLst>
+              <a:gd name="adj" fmla="val 7813"/>
+            </a:avLst>
+          </a:prstGeom>
+          <a:solidFill>
+            <a:srgbClr val="F8F9FA"/>
+          </a:solidFill>
+          <a:ln w="7620">
+            <a:solidFill>
+              <a:srgbClr val="E2E8F0"/>
+            </a:solidFill>
+            <a:prstDash val="solid"/>
+          </a:ln>
+        </p:spPr>
+      </p:sp>
+      <p:sp>
+        <p:nvSpPr>
+          <p:cNvPr id="23" name="Shape 21"/>
+          <p:cNvSpPr/>
+          <p:nvPr/>
+        </p:nvSpPr>
+        <p:spPr>
+          <a:xfrm>
+            <a:off x="676656" y="4636008"/>
+            <a:ext cx="411480" cy="365760"/>
+          </a:xfrm>
+          <a:prstGeom prst="roundRect">
+            <a:avLst>
+              <a:gd name="adj" fmla="val 10000"/>
+            </a:avLst>
+          </a:prstGeom>
+          <a:solidFill>
+            <a:srgbClr val="F3EBDA"/>
+          </a:solidFill>
+          <a:ln w="6350">
+            <a:solidFill>
+              <a:srgbClr val="D9B668"/>
+            </a:solidFill>
+            <a:prstDash val="solid"/>
+          </a:ln>
+        </p:spPr>
+      </p:sp>
+      <p:sp>
+        <p:nvSpPr>
+          <p:cNvPr id="24" name="Text 22"/>
+          <p:cNvSpPr/>
+          <p:nvPr/>
+        </p:nvSpPr>
+        <p:spPr>
+          <a:xfrm>
+            <a:off x="676656" y="4636008"/>
+            <a:ext cx="411480" cy="365760"/>
+          </a:xfrm>
+          <a:prstGeom prst="rect">
+            <a:avLst/>
+          </a:prstGeom>
+          <a:noFill/>
+          <a:ln/>
+        </p:spPr>
+        <p:txBody>
+          <a:bodyPr wrap="square" lIns="0" tIns="0" rIns="0" bIns="0" rtlCol="0" anchor="ctr"/>
+          <a:lstStyle/>
+          <a:p>
+            <a:pPr algn="ctr" indent="0" marL="0">
+              <a:buNone/>
+            </a:pPr>
+            <a:r>
+              <a:rPr lang="en-US" sz="1000" b="1" dirty="0">
+                <a:solidFill>
+                  <a:srgbClr val="977024"/>
+                </a:solidFill>
+                <a:latin typeface="Arial" pitchFamily="34" charset="0"/>
+                <a:ea typeface="Arial" pitchFamily="34" charset="-122"/>
+                <a:cs typeface="Arial" pitchFamily="34" charset="-120"/>
+              </a:rPr>
+              <a:t>02</a:t>
+            </a:r>
+            <a:endParaRPr lang="en-US" sz="1000" dirty="0"/>
+          </a:p>
+        </p:txBody>
+      </p:sp>
+      <p:sp>
+        <p:nvSpPr>
+          <p:cNvPr id="25" name="Text 23"/>
+          <p:cNvSpPr/>
+          <p:nvPr/>
+        </p:nvSpPr>
+        <p:spPr>
+          <a:xfrm>
+            <a:off x="1207008" y="4599432"/>
+            <a:ext cx="10280599" cy="438912"/>
+          </a:xfrm>
+          <a:prstGeom prst="rect">
+            <a:avLst/>
+          </a:prstGeom>
+          <a:noFill/>
+          <a:ln/>
+        </p:spPr>
+        <p:txBody>
+          <a:bodyPr wrap="square" lIns="0" tIns="0" rIns="0" bIns="0" rtlCol="0" anchor="ctr"/>
+          <a:lstStyle/>
+          <a:p>
+            <a:pPr indent="0" marL="0">
+              <a:buNone/>
+            </a:pPr>
+            <a:r>
+              <a:rPr lang="en-US" sz="1150" dirty="0">
+                <a:solidFill>
+                  <a:srgbClr val="10161F"/>
+                </a:solidFill>
+                <a:latin typeface="Pretendard" pitchFamily="34" charset="0"/>
+                <a:ea typeface="Pretendard" pitchFamily="34" charset="-122"/>
+                <a:cs typeface="Pretendard" pitchFamily="34" charset="-120"/>
+              </a:rPr>
+              <a:t>수익 안정성: 매매 시장 적정가 수준 대비 안정적 월 임대수익 창출 기반</a:t>
+            </a:r>
+            <a:endParaRPr lang="en-US" sz="1150" dirty="0"/>
+          </a:p>
+        </p:txBody>
+      </p:sp>
+      <p:sp>
+        <p:nvSpPr>
+          <p:cNvPr id="26" name="Shape 24"/>
+          <p:cNvSpPr/>
+          <p:nvPr/>
+        </p:nvSpPr>
+        <p:spPr>
+          <a:xfrm>
+            <a:off x="566928" y="5221224"/>
+            <a:ext cx="11057839" cy="585216"/>
+          </a:xfrm>
+          <a:prstGeom prst="roundRect">
+            <a:avLst>
+              <a:gd name="adj" fmla="val 7813"/>
+            </a:avLst>
+          </a:prstGeom>
+          <a:solidFill>
+            <a:srgbClr val="F8F9FA"/>
+          </a:solidFill>
+          <a:ln w="7620">
+            <a:solidFill>
+              <a:srgbClr val="E2E8F0"/>
+            </a:solidFill>
+            <a:prstDash val="solid"/>
+          </a:ln>
+        </p:spPr>
+      </p:sp>
+      <p:sp>
+        <p:nvSpPr>
+          <p:cNvPr id="27" name="Shape 25"/>
+          <p:cNvSpPr/>
+          <p:nvPr/>
+        </p:nvSpPr>
+        <p:spPr>
+          <a:xfrm>
+            <a:off x="676656" y="5330952"/>
+            <a:ext cx="411480" cy="365760"/>
+          </a:xfrm>
+          <a:prstGeom prst="roundRect">
+            <a:avLst>
+              <a:gd name="adj" fmla="val 10000"/>
+            </a:avLst>
+          </a:prstGeom>
+          <a:solidFill>
+            <a:srgbClr val="F3EBDA"/>
+          </a:solidFill>
+          <a:ln w="6350">
+            <a:solidFill>
+              <a:srgbClr val="D9B668"/>
+            </a:solidFill>
+            <a:prstDash val="solid"/>
+          </a:ln>
+        </p:spPr>
+      </p:sp>
+      <p:sp>
+        <p:nvSpPr>
+          <p:cNvPr id="28" name="Text 26"/>
+          <p:cNvSpPr/>
+          <p:nvPr/>
+        </p:nvSpPr>
+        <p:spPr>
+          <a:xfrm>
+            <a:off x="676656" y="5330952"/>
+            <a:ext cx="411480" cy="365760"/>
+          </a:xfrm>
+          <a:prstGeom prst="rect">
+            <a:avLst/>
+          </a:prstGeom>
+          <a:noFill/>
+          <a:ln/>
+        </p:spPr>
+        <p:txBody>
+          <a:bodyPr wrap="square" lIns="0" tIns="0" rIns="0" bIns="0" rtlCol="0" anchor="ctr"/>
+          <a:lstStyle/>
+          <a:p>
+            <a:pPr algn="ctr" indent="0" marL="0">
+              <a:buNone/>
+            </a:pPr>
+            <a:r>
+              <a:rPr lang="en-US" sz="1000" b="1" dirty="0">
+                <a:solidFill>
+                  <a:srgbClr val="977024"/>
+                </a:solidFill>
+                <a:latin typeface="Arial" pitchFamily="34" charset="0"/>
+                <a:ea typeface="Arial" pitchFamily="34" charset="-122"/>
+                <a:cs typeface="Arial" pitchFamily="34" charset="-120"/>
+              </a:rPr>
+              <a:t>03</a:t>
+            </a:r>
+            <a:endParaRPr lang="en-US" sz="1000" dirty="0"/>
+          </a:p>
+        </p:txBody>
+      </p:sp>
+      <p:sp>
+        <p:nvSpPr>
+          <p:cNvPr id="29" name="Text 27"/>
+          <p:cNvSpPr/>
+          <p:nvPr/>
+        </p:nvSpPr>
+        <p:spPr>
+          <a:xfrm>
+            <a:off x="1207008" y="5294376"/>
+            <a:ext cx="10280599" cy="438912"/>
+          </a:xfrm>
+          <a:prstGeom prst="rect">
+            <a:avLst/>
+          </a:prstGeom>
+          <a:noFill/>
+          <a:ln/>
+        </p:spPr>
+        <p:txBody>
+          <a:bodyPr wrap="square" lIns="0" tIns="0" rIns="0" bIns="0" rtlCol="0" anchor="ctr"/>
+          <a:lstStyle/>
+          <a:p>
+            <a:pPr indent="0" marL="0">
+              <a:buNone/>
+            </a:pPr>
+            <a:r>
+              <a:rPr lang="en-US" sz="1150" dirty="0">
+                <a:solidFill>
+                  <a:srgbClr val="10161F"/>
+                </a:solidFill>
+                <a:latin typeface="Pretendard" pitchFamily="34" charset="0"/>
+                <a:ea typeface="Pretendard" pitchFamily="34" charset="-122"/>
+                <a:cs typeface="Pretendard" pitchFamily="34" charset="-120"/>
+              </a:rPr>
+              <a:t>미래 가치: 향후 권역 지가 상승 및 공법상 밸류업을 통한 자본이득 실현 가능</a:t>
+            </a:r>
+            <a:endParaRPr lang="en-US" sz="1150" dirty="0"/>
+          </a:p>
+        </p:txBody>
+      </p:sp>
+      <p:sp>
+        <p:nvSpPr>
+          <p:cNvPr id="30" name="Text 28"/>
+          <p:cNvSpPr/>
+          <p:nvPr/>
+        </p:nvSpPr>
+        <p:spPr>
+          <a:xfrm>
+            <a:off x="566928" y="6382512"/>
+            <a:ext cx="7315200" cy="219456"/>
+          </a:xfrm>
+          <a:prstGeom prst="rect">
+            <a:avLst/>
+          </a:prstGeom>
+          <a:noFill/>
+          <a:ln/>
+        </p:spPr>
+        <p:txBody>
+          <a:bodyPr wrap="square" lIns="0" tIns="0" rIns="0" bIns="0" rtlCol="0" anchor="ctr"/>
+          <a:lstStyle/>
+          <a:p>
+            <a:pPr indent="0" marL="0">
+              <a:buNone/>
+            </a:pPr>
+            <a:r>
+              <a:rPr lang="en-US" sz="800" dirty="0">
+                <a:solidFill>
+                  <a:srgbClr val="718096"/>
+                </a:solidFill>
+                <a:latin typeface="Pretendard" pitchFamily="34" charset="0"/>
+                <a:ea typeface="Pretendard" pitchFamily="34" charset="-122"/>
+                <a:cs typeface="Pretendard" pitchFamily="34" charset="-120"/>
+              </a:rPr>
+              <a:t>크리딜   |   </a:t>
+            </a:r>
+            <a:endParaRPr lang="en-US" sz="800" dirty="0"/>
+          </a:p>
+        </p:txBody>
+      </p:sp>
+      <p:sp>
+        <p:nvSpPr>
+          <p:cNvPr id="31" name="Text 29"/>
+          <p:cNvSpPr/>
+          <p:nvPr/>
+        </p:nvSpPr>
+        <p:spPr>
+          <a:xfrm>
+            <a:off x="10710367" y="6382512"/>
+            <a:ext cx="914400" cy="219456"/>
+          </a:xfrm>
+          <a:prstGeom prst="rect">
+            <a:avLst/>
+          </a:prstGeom>
+          <a:noFill/>
+          <a:ln/>
+        </p:spPr>
+        <p:txBody>
+          <a:bodyPr wrap="square" lIns="0" tIns="0" rIns="0" bIns="0" rtlCol="0" anchor="ctr"/>
+          <a:lstStyle/>
+          <a:p>
+            <a:pPr algn="r" indent="0" marL="0">
+              <a:buNone/>
+            </a:pPr>
+            <a:r>
+              <a:rPr lang="en-US" sz="900" b="1" dirty="0">
+                <a:solidFill>
+                  <a:srgbClr val="B98A2E"/>
+                </a:solidFill>
+                <a:latin typeface="Arial" pitchFamily="34" charset="0"/>
+                <a:ea typeface="Arial" pitchFamily="34" charset="-122"/>
+                <a:cs typeface="Arial" pitchFamily="34" charset="-120"/>
+              </a:rPr>
+              <a:t>2</a:t>
+            </a:r>
+            <a:endParaRPr lang="en-US" sz="900" dirty="0"/>
+          </a:p>
+        </p:txBody>
       </p:sp>
     </p:spTree>
   </p:cSld>
@@ -4041,14 +4941,14 @@
         </p:nvSpPr>
         <p:spPr>
           <a:xfrm>
-            <a:off x="566928" y="384048"/>
-            <a:ext cx="45720" cy="566928"/>
-          </a:xfrm>
-          <a:prstGeom prst="rect">
+            <a:off x="566928" y="457200"/>
+            <a:ext cx="384048" cy="384048"/>
+          </a:xfrm>
+          <a:prstGeom prst="ellipse">
             <a:avLst/>
           </a:prstGeom>
           <a:solidFill>
-            <a:srgbClr val="6B8E00"/>
+            <a:srgbClr val="B98A2E"/>
           </a:solidFill>
           <a:ln/>
         </p:spPr>
@@ -4061,32 +4961,71 @@
         </p:nvSpPr>
         <p:spPr>
           <a:xfrm>
-            <a:off x="749808" y="384048"/>
-            <a:ext cx="10874959" cy="182880"/>
-          </a:xfrm>
-          <a:prstGeom prst="rect">
-            <a:avLst/>
-          </a:prstGeom>
-          <a:noFill/>
-          <a:ln/>
-        </p:spPr>
-        <p:txBody>
-          <a:bodyPr wrap="square" lIns="0" tIns="0" rIns="0" bIns="0" rtlCol="0" anchor="ctr"/>
-          <a:lstStyle/>
-          <a:p>
-            <a:pPr indent="0" marL="0">
-              <a:buNone/>
-            </a:pPr>
-            <a:r>
-              <a:rPr lang="en-US" sz="950" b="1" spc="200" kern="0" dirty="0">
-                <a:solidFill>
-                  <a:srgbClr val="6B8E00"/>
+            <a:off x="566928" y="457200"/>
+            <a:ext cx="384048" cy="384048"/>
+          </a:xfrm>
+          <a:prstGeom prst="rect">
+            <a:avLst/>
+          </a:prstGeom>
+          <a:noFill/>
+          <a:ln/>
+        </p:spPr>
+        <p:txBody>
+          <a:bodyPr wrap="square" lIns="0" tIns="0" rIns="0" bIns="0" rtlCol="0" anchor="ctr"/>
+          <a:lstStyle/>
+          <a:p>
+            <a:pPr algn="ctr" indent="0" marL="0">
+              <a:buNone/>
+            </a:pPr>
+            <a:r>
+              <a:rPr lang="en-US" sz="1300" b="1" dirty="0">
+                <a:solidFill>
+                  <a:srgbClr val="FFFFFF"/>
                 </a:solidFill>
                 <a:latin typeface="Arial" pitchFamily="34" charset="0"/>
                 <a:ea typeface="Arial" pitchFamily="34" charset="-122"/>
                 <a:cs typeface="Arial" pitchFamily="34" charset="-120"/>
               </a:rPr>
-              <a:t>03  Location</a:t>
+              <a:t>03</a:t>
+            </a:r>
+            <a:endParaRPr lang="en-US" sz="1300" dirty="0"/>
+          </a:p>
+        </p:txBody>
+      </p:sp>
+      <p:sp>
+        <p:nvSpPr>
+          <p:cNvPr id="4" name="Text 2"/>
+          <p:cNvSpPr/>
+          <p:nvPr/>
+        </p:nvSpPr>
+        <p:spPr>
+          <a:xfrm>
+            <a:off x="1133856" y="457200"/>
+            <a:ext cx="10490911" cy="182880"/>
+          </a:xfrm>
+          <a:prstGeom prst="rect">
+            <a:avLst/>
+          </a:prstGeom>
+          <a:noFill/>
+          <a:ln/>
+        </p:spPr>
+        <p:txBody>
+          <a:bodyPr wrap="square" lIns="0" tIns="0" rIns="0" bIns="0" rtlCol="0" anchor="ctr"/>
+          <a:lstStyle/>
+          <a:p>
+            <a:pPr indent="0" marL="0">
+              <a:buNone/>
+            </a:pPr>
+            <a:r>
+              <a:rPr lang="en-US" sz="950" b="1" spc="200" kern="0" dirty="0">
+                <a:solidFill>
+                  <a:srgbClr val="B98A2E"/>
+                </a:solidFill>
+                <a:latin typeface="Arial" pitchFamily="34" charset="0"/>
+                <a:ea typeface="Arial" pitchFamily="34" charset="-122"/>
+                <a:cs typeface="Arial" pitchFamily="34" charset="-120"/>
+              </a:rPr>
+              <a:t>Location</a:t>
             </a:r>
             <a:endParaRPr lang="en-US" sz="950" dirty="0"/>
           </a:p>
@@ -4094,14 +5033,14 @@
       </p:sp>
       <p:sp>
         <p:nvSpPr>
-          <p:cNvPr id="4" name="Text 2"/>
-          <p:cNvSpPr/>
-          <p:nvPr/>
-        </p:nvSpPr>
-        <p:spPr>
-          <a:xfrm>
-            <a:off x="749808" y="566928"/>
-            <a:ext cx="10874959" cy="384048"/>
+          <p:cNvPr id="5" name="Text 3"/>
+          <p:cNvSpPr/>
+          <p:nvPr/>
+        </p:nvSpPr>
+        <p:spPr>
+          <a:xfrm>
+            <a:off x="1133856" y="640080"/>
+            <a:ext cx="10490911" cy="365760"/>
           </a:xfrm>
           <a:prstGeom prst="rect">
             <a:avLst/>
@@ -4117,9 +5056,9 @@
               <a:buNone/>
             </a:pPr>
             <a:r>
-              <a:rPr lang="en-US" sz="2200" b="1" dirty="0">
-                <a:solidFill>
-                  <a:srgbClr val="0F172A"/>
+              <a:rPr lang="en-US" sz="2300" b="1" dirty="0">
+                <a:solidFill>
+                  <a:srgbClr val="10161F"/>
                 </a:solidFill>
                 <a:latin typeface="Pretendard" pitchFamily="34" charset="0"/>
                 <a:ea typeface="Pretendard" pitchFamily="34" charset="-122"/>
@@ -4127,13 +5066,13 @@
               </a:rPr>
               <a:t>입지 및 교통</a:t>
             </a:r>
-            <a:endParaRPr lang="en-US" sz="2200" dirty="0"/>
+            <a:endParaRPr lang="en-US" sz="2300" dirty="0"/>
           </a:p>
         </p:txBody>
       </p:sp>
       <p:pic>
         <p:nvPicPr>
-          <p:cNvPr id="5" name="Image 0" descr="preencoded.png">    </p:cNvPr>
+          <p:cNvPr id="6" name="Image 0" descr="preencoded.png">    </p:cNvPr>
           <p:cNvPicPr>
             <a:picLocks noChangeAspect="1"/>
           </p:cNvPicPr>
@@ -4157,14 +5096,14 @@
       </p:pic>
       <p:sp>
         <p:nvSpPr>
-          <p:cNvPr id="6" name="Text 3"/>
+          <p:cNvPr id="7" name="Text 4"/>
           <p:cNvSpPr/>
           <p:nvPr/>
         </p:nvSpPr>
         <p:spPr>
           <a:xfrm>
             <a:off x="6053328" y="1481328"/>
-            <a:ext cx="2117147" cy="438912"/>
+            <a:ext cx="2117147" cy="493776"/>
           </a:xfrm>
           <a:prstGeom prst="rect">
             <a:avLst/>
@@ -4183,9 +5122,9 @@
               <a:buNone/>
             </a:pPr>
             <a:r>
-              <a:rPr lang="en-US" sz="1400" dirty="0">
-                <a:solidFill>
-                  <a:srgbClr val="64748B"/>
+              <a:rPr lang="en-US" sz="1300" dirty="0">
+                <a:solidFill>
+                  <a:srgbClr val="718096"/>
                 </a:solidFill>
                 <a:latin typeface="Pretendard" pitchFamily="34" charset="0"/>
                 <a:ea typeface="Pretendard" pitchFamily="34" charset="-122"/>
@@ -4193,20 +5132,20 @@
               </a:rPr>
               <a:t>교통 접근성</a:t>
             </a:r>
-            <a:endParaRPr lang="en-US" sz="1400" dirty="0"/>
-          </a:p>
-        </p:txBody>
-      </p:sp>
-      <p:sp>
-        <p:nvSpPr>
-          <p:cNvPr id="7" name="Text 4"/>
+            <a:endParaRPr lang="en-US" sz="1300" dirty="0"/>
+          </a:p>
+        </p:txBody>
+      </p:sp>
+      <p:sp>
+        <p:nvSpPr>
+          <p:cNvPr id="8" name="Text 5"/>
           <p:cNvSpPr/>
           <p:nvPr/>
         </p:nvSpPr>
         <p:spPr>
           <a:xfrm>
             <a:off x="8170475" y="1481328"/>
-            <a:ext cx="3454292" cy="438912"/>
+            <a:ext cx="3454292" cy="493776"/>
           </a:xfrm>
           <a:prstGeom prst="rect">
             <a:avLst/>
@@ -4225,9 +5164,9 @@
               <a:buNone/>
             </a:pPr>
             <a:r>
-              <a:rPr lang="en-US" sz="1400" b="1" dirty="0">
-                <a:solidFill>
-                  <a:srgbClr val="0F172A"/>
+              <a:rPr lang="en-US" sz="1300" b="1" dirty="0">
+                <a:solidFill>
+                  <a:srgbClr val="10161F"/>
                 </a:solidFill>
                 <a:latin typeface="Pretendard" pitchFamily="34" charset="0"/>
                 <a:ea typeface="Pretendard" pitchFamily="34" charset="-122"/>
@@ -4235,75 +5174,91 @@
               </a:rPr>
               <a:t>신사역 도보 5분, 가로수길 세로수길 상권 접면입니다.</a:t>
             </a:r>
-            <a:endParaRPr lang="en-US" sz="1400" dirty="0"/>
-          </a:p>
-        </p:txBody>
-      </p:sp>
-      <p:sp>
-        <p:nvSpPr>
-          <p:cNvPr id="8" name="Text 5"/>
-          <p:cNvSpPr/>
-          <p:nvPr/>
-        </p:nvSpPr>
-        <p:spPr>
-          <a:xfrm>
-            <a:off x="566928" y="6419088"/>
-            <a:ext cx="11057839" cy="201168"/>
-          </a:xfrm>
-          <a:prstGeom prst="rect">
-            <a:avLst/>
-          </a:prstGeom>
-          <a:noFill/>
-          <a:ln/>
-        </p:spPr>
-        <p:txBody>
-          <a:bodyPr wrap="square" lIns="0" tIns="0" rIns="0" bIns="0" rtlCol="0" anchor="ctr"/>
-          <a:lstStyle/>
-          <a:p>
-            <a:pPr algn="ctr" indent="0" marL="0">
-              <a:buNone/>
-            </a:pPr>
-            <a:r>
-              <a:rPr lang="en-US" sz="750" dirty="0">
-                <a:solidFill>
-                  <a:srgbClr val="64748B"/>
+            <a:endParaRPr lang="en-US" sz="1300" dirty="0"/>
+          </a:p>
+        </p:txBody>
+      </p:sp>
+      <p:sp>
+        <p:nvSpPr>
+          <p:cNvPr id="9" name="Text 6"/>
+          <p:cNvSpPr/>
+          <p:nvPr/>
+        </p:nvSpPr>
+        <p:spPr>
+          <a:xfrm>
+            <a:off x="566928" y="6382512"/>
+            <a:ext cx="7315200" cy="219456"/>
+          </a:xfrm>
+          <a:prstGeom prst="rect">
+            <a:avLst/>
+          </a:prstGeom>
+          <a:noFill/>
+          <a:ln/>
+        </p:spPr>
+        <p:txBody>
+          <a:bodyPr wrap="square" lIns="0" tIns="0" rIns="0" bIns="0" rtlCol="0" anchor="ctr"/>
+          <a:lstStyle/>
+          <a:p>
+            <a:pPr indent="0" marL="0">
+              <a:buNone/>
+            </a:pPr>
+            <a:r>
+              <a:rPr lang="en-US" sz="800" dirty="0">
+                <a:solidFill>
+                  <a:srgbClr val="718096"/>
                 </a:solidFill>
                 <a:latin typeface="Pretendard" pitchFamily="34" charset="0"/>
                 <a:ea typeface="Pretendard" pitchFamily="34" charset="-122"/>
                 <a:cs typeface="Pretendard" pitchFamily="34" charset="-120"/>
               </a:rPr>
-              <a:t>크리딜  ·    ·  3</a:t>
-            </a:r>
-            <a:endParaRPr lang="en-US" sz="750" dirty="0"/>
-          </a:p>
-        </p:txBody>
-      </p:sp>
-      <p:sp>
-        <p:nvSpPr>
-          <p:cNvPr id="9" name="Shape 6"/>
-          <p:cNvSpPr/>
-          <p:nvPr/>
-        </p:nvSpPr>
-        <p:spPr>
-          <a:xfrm>
-            <a:off x="4437172" y="6382512"/>
-            <a:ext cx="3317352" cy="0"/>
-          </a:xfrm>
-          <a:prstGeom prst="line">
-            <a:avLst/>
-          </a:prstGeom>
-          <a:noFill/>
-          <a:ln w="6350">
-            <a:solidFill>
-              <a:srgbClr val="6B8E00"/>
-            </a:solidFill>
-            <a:prstDash val="solid"/>
-          </a:ln>
-        </p:spPr>
+              <a:t>크리딜   |   </a:t>
+            </a:r>
+            <a:endParaRPr lang="en-US" sz="800" dirty="0"/>
+          </a:p>
+        </p:txBody>
       </p:sp>
       <p:sp>
         <p:nvSpPr>
           <p:cNvPr id="10" name="Text 7"/>
+          <p:cNvSpPr/>
+          <p:nvPr/>
+        </p:nvSpPr>
+        <p:spPr>
+          <a:xfrm>
+            <a:off x="10710367" y="6382512"/>
+            <a:ext cx="914400" cy="219456"/>
+          </a:xfrm>
+          <a:prstGeom prst="rect">
+            <a:avLst/>
+          </a:prstGeom>
+          <a:noFill/>
+          <a:ln/>
+        </p:spPr>
+        <p:txBody>
+          <a:bodyPr wrap="square" lIns="0" tIns="0" rIns="0" bIns="0" rtlCol="0" anchor="ctr"/>
+          <a:lstStyle/>
+          <a:p>
+            <a:pPr algn="r" indent="0" marL="0">
+              <a:buNone/>
+            </a:pPr>
+            <a:r>
+              <a:rPr lang="en-US" sz="900" b="1" dirty="0">
+                <a:solidFill>
+                  <a:srgbClr val="B98A2E"/>
+                </a:solidFill>
+                <a:latin typeface="Arial" pitchFamily="34" charset="0"/>
+                <a:ea typeface="Arial" pitchFamily="34" charset="-122"/>
+                <a:cs typeface="Arial" pitchFamily="34" charset="-120"/>
+              </a:rPr>
+              <a:t>3</a:t>
+            </a:r>
+            <a:endParaRPr lang="en-US" sz="900" dirty="0"/>
+          </a:p>
+        </p:txBody>
+      </p:sp>
+      <p:sp>
+        <p:nvSpPr>
+          <p:cNvPr id="11" name="Text 8"/>
           <p:cNvSpPr/>
           <p:nvPr/>
         </p:nvSpPr>
@@ -4328,7 +5283,7 @@
             <a:r>
               <a:rPr lang="en-US" sz="1000" dirty="0">
                 <a:solidFill>
-                  <a:srgbClr val="0F172A"/>
+                  <a:srgbClr val="10161F"/>
                 </a:solidFill>
                 <a:latin typeface="Pretendard" pitchFamily="34" charset="0"/>
                 <a:ea typeface="Pretendard" pitchFamily="34" charset="-122"/>
@@ -4380,14 +5335,14 @@
         </p:nvSpPr>
         <p:spPr>
           <a:xfrm>
-            <a:off x="566928" y="384048"/>
-            <a:ext cx="45720" cy="566928"/>
-          </a:xfrm>
-          <a:prstGeom prst="rect">
+            <a:off x="566928" y="457200"/>
+            <a:ext cx="384048" cy="384048"/>
+          </a:xfrm>
+          <a:prstGeom prst="ellipse">
             <a:avLst/>
           </a:prstGeom>
           <a:solidFill>
-            <a:srgbClr val="6B8E00"/>
+            <a:srgbClr val="B98A2E"/>
           </a:solidFill>
           <a:ln/>
         </p:spPr>
@@ -4400,32 +5355,71 @@
         </p:nvSpPr>
         <p:spPr>
           <a:xfrm>
-            <a:off x="749808" y="384048"/>
-            <a:ext cx="10874959" cy="182880"/>
-          </a:xfrm>
-          <a:prstGeom prst="rect">
-            <a:avLst/>
-          </a:prstGeom>
-          <a:noFill/>
-          <a:ln/>
-        </p:spPr>
-        <p:txBody>
-          <a:bodyPr wrap="square" lIns="0" tIns="0" rIns="0" bIns="0" rtlCol="0" anchor="ctr"/>
-          <a:lstStyle/>
-          <a:p>
-            <a:pPr indent="0" marL="0">
-              <a:buNone/>
-            </a:pPr>
-            <a:r>
-              <a:rPr lang="en-US" sz="950" b="1" spc="200" kern="0" dirty="0">
-                <a:solidFill>
-                  <a:srgbClr val="6B8E00"/>
+            <a:off x="566928" y="457200"/>
+            <a:ext cx="384048" cy="384048"/>
+          </a:xfrm>
+          <a:prstGeom prst="rect">
+            <a:avLst/>
+          </a:prstGeom>
+          <a:noFill/>
+          <a:ln/>
+        </p:spPr>
+        <p:txBody>
+          <a:bodyPr wrap="square" lIns="0" tIns="0" rIns="0" bIns="0" rtlCol="0" anchor="ctr"/>
+          <a:lstStyle/>
+          <a:p>
+            <a:pPr algn="ctr" indent="0" marL="0">
+              <a:buNone/>
+            </a:pPr>
+            <a:r>
+              <a:rPr lang="en-US" sz="1300" b="1" dirty="0">
+                <a:solidFill>
+                  <a:srgbClr val="FFFFFF"/>
                 </a:solidFill>
                 <a:latin typeface="Arial" pitchFamily="34" charset="0"/>
                 <a:ea typeface="Arial" pitchFamily="34" charset="-122"/>
                 <a:cs typeface="Arial" pitchFamily="34" charset="-120"/>
               </a:rPr>
-              <a:t>04  Building</a:t>
+              <a:t>04</a:t>
+            </a:r>
+            <a:endParaRPr lang="en-US" sz="1300" dirty="0"/>
+          </a:p>
+        </p:txBody>
+      </p:sp>
+      <p:sp>
+        <p:nvSpPr>
+          <p:cNvPr id="4" name="Text 2"/>
+          <p:cNvSpPr/>
+          <p:nvPr/>
+        </p:nvSpPr>
+        <p:spPr>
+          <a:xfrm>
+            <a:off x="1133856" y="457200"/>
+            <a:ext cx="10490911" cy="182880"/>
+          </a:xfrm>
+          <a:prstGeom prst="rect">
+            <a:avLst/>
+          </a:prstGeom>
+          <a:noFill/>
+          <a:ln/>
+        </p:spPr>
+        <p:txBody>
+          <a:bodyPr wrap="square" lIns="0" tIns="0" rIns="0" bIns="0" rtlCol="0" anchor="ctr"/>
+          <a:lstStyle/>
+          <a:p>
+            <a:pPr indent="0" marL="0">
+              <a:buNone/>
+            </a:pPr>
+            <a:r>
+              <a:rPr lang="en-US" sz="950" b="1" spc="200" kern="0" dirty="0">
+                <a:solidFill>
+                  <a:srgbClr val="B98A2E"/>
+                </a:solidFill>
+                <a:latin typeface="Arial" pitchFamily="34" charset="0"/>
+                <a:ea typeface="Arial" pitchFamily="34" charset="-122"/>
+                <a:cs typeface="Arial" pitchFamily="34" charset="-120"/>
+              </a:rPr>
+              <a:t>Building</a:t>
             </a:r>
             <a:endParaRPr lang="en-US" sz="950" dirty="0"/>
           </a:p>
@@ -4433,14 +5427,14 @@
       </p:sp>
       <p:sp>
         <p:nvSpPr>
-          <p:cNvPr id="4" name="Text 2"/>
-          <p:cNvSpPr/>
-          <p:nvPr/>
-        </p:nvSpPr>
-        <p:spPr>
-          <a:xfrm>
-            <a:off x="749808" y="566928"/>
-            <a:ext cx="10874959" cy="384048"/>
+          <p:cNvPr id="5" name="Text 3"/>
+          <p:cNvSpPr/>
+          <p:nvPr/>
+        </p:nvSpPr>
+        <p:spPr>
+          <a:xfrm>
+            <a:off x="1133856" y="640080"/>
+            <a:ext cx="10490911" cy="365760"/>
           </a:xfrm>
           <a:prstGeom prst="rect">
             <a:avLst/>
@@ -4456,9 +5450,9 @@
               <a:buNone/>
             </a:pPr>
             <a:r>
-              <a:rPr lang="en-US" sz="2200" b="1" dirty="0">
-                <a:solidFill>
-                  <a:srgbClr val="0F172A"/>
+              <a:rPr lang="en-US" sz="2300" b="1" dirty="0">
+                <a:solidFill>
+                  <a:srgbClr val="10161F"/>
                 </a:solidFill>
                 <a:latin typeface="Pretendard" pitchFamily="34" charset="0"/>
                 <a:ea typeface="Pretendard" pitchFamily="34" charset="-122"/>
@@ -4466,13 +5460,13 @@
               </a:rPr>
               <a:t>물건 개요</a:t>
             </a:r>
-            <a:endParaRPr lang="en-US" sz="2200" dirty="0"/>
-          </a:p>
-        </p:txBody>
-      </p:sp>
-      <p:sp>
-        <p:nvSpPr>
-          <p:cNvPr id="5" name="Text 3"/>
+            <a:endParaRPr lang="en-US" sz="2300" dirty="0"/>
+          </a:p>
+        </p:txBody>
+      </p:sp>
+      <p:sp>
+        <p:nvSpPr>
+          <p:cNvPr id="6" name="Text 4"/>
           <p:cNvSpPr/>
           <p:nvPr/>
         </p:nvSpPr>
@@ -4497,7 +5491,7 @@
             <a:r>
               <a:rPr lang="en-US" sz="1100" b="1" dirty="0">
                 <a:solidFill>
-                  <a:srgbClr val="0F172A"/>
+                  <a:srgbClr val="10161F"/>
                 </a:solidFill>
                 <a:latin typeface="Pretendard" pitchFamily="34" charset="0"/>
                 <a:ea typeface="Pretendard" pitchFamily="34" charset="-122"/>
@@ -4511,7 +5505,7 @@
       </p:sp>
       <p:sp>
         <p:nvSpPr>
-          <p:cNvPr id="6" name="Text 4"/>
+          <p:cNvPr id="7" name="Text 5"/>
           <p:cNvSpPr/>
           <p:nvPr/>
         </p:nvSpPr>
@@ -4539,7 +5533,7 @@
             <a:r>
               <a:rPr lang="en-US" sz="1400" dirty="0">
                 <a:solidFill>
-                  <a:srgbClr val="64748B"/>
+                  <a:srgbClr val="718096"/>
                 </a:solidFill>
                 <a:latin typeface="Pretendard" pitchFamily="34" charset="0"/>
                 <a:ea typeface="Pretendard" pitchFamily="34" charset="-122"/>
@@ -4553,7 +5547,7 @@
       </p:sp>
       <p:sp>
         <p:nvSpPr>
-          <p:cNvPr id="7" name="Text 5"/>
+          <p:cNvPr id="8" name="Text 6"/>
           <p:cNvSpPr/>
           <p:nvPr/>
         </p:nvSpPr>
@@ -4581,7 +5575,7 @@
             <a:r>
               <a:rPr lang="en-US" sz="1400" b="1" dirty="0">
                 <a:solidFill>
-                  <a:srgbClr val="0F172A"/>
+                  <a:srgbClr val="10161F"/>
                 </a:solidFill>
                 <a:latin typeface="Pretendard" pitchFamily="34" charset="0"/>
                 <a:ea typeface="Pretendard" pitchFamily="34" charset="-122"/>
@@ -4595,7 +5589,7 @@
       </p:sp>
       <p:sp>
         <p:nvSpPr>
-          <p:cNvPr id="8" name="Shape 6"/>
+          <p:cNvPr id="9" name="Shape 7"/>
           <p:cNvSpPr/>
           <p:nvPr/>
         </p:nvSpPr>
@@ -4610,7 +5604,7 @@
           <a:noFill/>
           <a:ln w="3810">
             <a:solidFill>
-              <a:srgbClr val="CBD5E1"/>
+              <a:srgbClr val="CBD5E0"/>
             </a:solidFill>
             <a:prstDash val="solid"/>
           </a:ln>
@@ -4618,7 +5612,7 @@
       </p:sp>
       <p:sp>
         <p:nvSpPr>
-          <p:cNvPr id="9" name="Text 7"/>
+          <p:cNvPr id="10" name="Text 8"/>
           <p:cNvSpPr/>
           <p:nvPr/>
         </p:nvSpPr>
@@ -4646,7 +5640,7 @@
             <a:r>
               <a:rPr lang="en-US" sz="1400" dirty="0">
                 <a:solidFill>
-                  <a:srgbClr val="64748B"/>
+                  <a:srgbClr val="718096"/>
                 </a:solidFill>
                 <a:latin typeface="Pretendard" pitchFamily="34" charset="0"/>
                 <a:ea typeface="Pretendard" pitchFamily="34" charset="-122"/>
@@ -4660,7 +5654,7 @@
       </p:sp>
       <p:sp>
         <p:nvSpPr>
-          <p:cNvPr id="10" name="Text 8"/>
+          <p:cNvPr id="11" name="Text 9"/>
           <p:cNvSpPr/>
           <p:nvPr/>
         </p:nvSpPr>
@@ -4688,7 +5682,7 @@
             <a:r>
               <a:rPr lang="en-US" sz="1400" b="1" dirty="0">
                 <a:solidFill>
-                  <a:srgbClr val="0F172A"/>
+                  <a:srgbClr val="10161F"/>
                 </a:solidFill>
                 <a:latin typeface="Pretendard" pitchFamily="34" charset="0"/>
                 <a:ea typeface="Pretendard" pitchFamily="34" charset="-122"/>
@@ -4702,7 +5696,7 @@
       </p:sp>
       <p:sp>
         <p:nvSpPr>
-          <p:cNvPr id="11" name="Shape 9"/>
+          <p:cNvPr id="12" name="Shape 10"/>
           <p:cNvSpPr/>
           <p:nvPr/>
         </p:nvSpPr>
@@ -4717,7 +5711,7 @@
           <a:noFill/>
           <a:ln w="3810">
             <a:solidFill>
-              <a:srgbClr val="CBD5E1"/>
+              <a:srgbClr val="CBD5E0"/>
             </a:solidFill>
             <a:prstDash val="solid"/>
           </a:ln>
@@ -4725,7 +5719,7 @@
       </p:sp>
       <p:sp>
         <p:nvSpPr>
-          <p:cNvPr id="12" name="Text 10"/>
+          <p:cNvPr id="13" name="Text 11"/>
           <p:cNvSpPr/>
           <p:nvPr/>
         </p:nvSpPr>
@@ -4753,7 +5747,7 @@
             <a:r>
               <a:rPr lang="en-US" sz="1400" dirty="0">
                 <a:solidFill>
-                  <a:srgbClr val="64748B"/>
+                  <a:srgbClr val="718096"/>
                 </a:solidFill>
                 <a:latin typeface="Pretendard" pitchFamily="34" charset="0"/>
                 <a:ea typeface="Pretendard" pitchFamily="34" charset="-122"/>
@@ -4767,7 +5761,7 @@
       </p:sp>
       <p:sp>
         <p:nvSpPr>
-          <p:cNvPr id="13" name="Text 11"/>
+          <p:cNvPr id="14" name="Text 12"/>
           <p:cNvSpPr/>
           <p:nvPr/>
         </p:nvSpPr>
@@ -4795,7 +5789,7 @@
             <a:r>
               <a:rPr lang="en-US" sz="1400" b="1" dirty="0">
                 <a:solidFill>
-                  <a:srgbClr val="0F172A"/>
+                  <a:srgbClr val="10161F"/>
                 </a:solidFill>
                 <a:latin typeface="Pretendard" pitchFamily="34" charset="0"/>
                 <a:ea typeface="Pretendard" pitchFamily="34" charset="-122"/>
@@ -4809,7 +5803,7 @@
       </p:sp>
       <p:sp>
         <p:nvSpPr>
-          <p:cNvPr id="14" name="Shape 12"/>
+          <p:cNvPr id="15" name="Shape 13"/>
           <p:cNvSpPr/>
           <p:nvPr/>
         </p:nvSpPr>
@@ -4824,7 +5818,7 @@
           <a:noFill/>
           <a:ln w="8890">
             <a:solidFill>
-              <a:srgbClr val="6B8E00"/>
+              <a:srgbClr val="B98A2E"/>
             </a:solidFill>
             <a:prstDash val="solid"/>
           </a:ln>
@@ -4832,49 +5826,49 @@
       </p:sp>
       <p:sp>
         <p:nvSpPr>
-          <p:cNvPr id="15" name="Shape 13"/>
+          <p:cNvPr id="16" name="Shape 14"/>
           <p:cNvSpPr/>
           <p:nvPr/>
         </p:nvSpPr>
         <p:spPr>
           <a:xfrm>
             <a:off x="7784287" y="1645920"/>
-            <a:ext cx="3840480" cy="2103120"/>
+            <a:ext cx="3840480" cy="1645920"/>
           </a:xfrm>
           <a:prstGeom prst="roundRect">
             <a:avLst>
-              <a:gd name="adj" fmla="val 2609"/>
+              <a:gd name="adj" fmla="val 3333"/>
             </a:avLst>
           </a:prstGeom>
           <a:solidFill>
-            <a:srgbClr val="DBEAFE"/>
+            <a:srgbClr val="F3EBDA"/>
           </a:solidFill>
           <a:ln/>
         </p:spPr>
       </p:sp>
       <p:sp>
         <p:nvSpPr>
-          <p:cNvPr id="16" name="Shape 14"/>
+          <p:cNvPr id="17" name="Shape 15"/>
           <p:cNvSpPr/>
           <p:nvPr/>
         </p:nvSpPr>
         <p:spPr>
           <a:xfrm>
             <a:off x="7784287" y="1700784"/>
-            <a:ext cx="36576" cy="1993392"/>
+            <a:ext cx="36576" cy="1536192"/>
           </a:xfrm>
           <a:prstGeom prst="rect">
             <a:avLst/>
           </a:prstGeom>
           <a:solidFill>
-            <a:srgbClr val="1D4ED8"/>
+            <a:srgbClr val="977024"/>
           </a:solidFill>
           <a:ln/>
         </p:spPr>
       </p:sp>
       <p:sp>
         <p:nvSpPr>
-          <p:cNvPr id="17" name="Text 15"/>
+          <p:cNvPr id="18" name="Text 16"/>
           <p:cNvSpPr/>
           <p:nvPr/>
         </p:nvSpPr>
@@ -4896,147 +5890,90 @@
             <a:pPr indent="0" marL="0">
               <a:buNone/>
             </a:pPr>
-            <a:r>
-              <a:rPr lang="en-US" sz="1050" b="1" dirty="0">
-                <a:solidFill>
-                  <a:srgbClr val="1D4ED8"/>
+            <a:endParaRPr lang="en-US" sz="1050" dirty="0"/>
+          </a:p>
+        </p:txBody>
+      </p:sp>
+      <p:sp>
+        <p:nvSpPr>
+          <p:cNvPr id="19" name="Text 17"/>
+          <p:cNvSpPr/>
+          <p:nvPr/>
+        </p:nvSpPr>
+        <p:spPr>
+          <a:xfrm>
+            <a:off x="7967167" y="1975104"/>
+            <a:ext cx="3511296" cy="1243584"/>
+          </a:xfrm>
+          <a:prstGeom prst="rect">
+            <a:avLst/>
+          </a:prstGeom>
+          <a:noFill/>
+          <a:ln/>
+        </p:spPr>
+        <p:txBody>
+          <a:bodyPr wrap="square" lIns="0" tIns="0" rIns="0" bIns="0" rtlCol="0" anchor="t"/>
+          <a:lstStyle/>
+          <a:p>
+            <a:pPr indent="0" marL="0">
+              <a:lnSpc>
+                <a:spcPct val="120000"/>
+              </a:lnSpc>
+              <a:buNone/>
+            </a:pPr>
+            <a:r>
+              <a:rPr lang="en-US" sz="930" dirty="0">
+                <a:solidFill>
+                  <a:srgbClr val="10161F"/>
                 </a:solidFill>
                 <a:latin typeface="Pretendard" pitchFamily="34" charset="0"/>
                 <a:ea typeface="Pretendard" pitchFamily="34" charset="-122"/>
                 <a:cs typeface="Pretendard" pitchFamily="34" charset="-120"/>
               </a:rPr>
-              <a:t>토지 및 건물 분석 포인트</a:t>
-            </a:r>
-            <a:endParaRPr lang="en-US" sz="1050" dirty="0"/>
-          </a:p>
-        </p:txBody>
-      </p:sp>
-      <p:sp>
-        <p:nvSpPr>
-          <p:cNvPr id="18" name="Text 16"/>
-          <p:cNvSpPr/>
-          <p:nvPr/>
-        </p:nvSpPr>
-        <p:spPr>
-          <a:xfrm>
-            <a:off x="7967167" y="1975104"/>
-            <a:ext cx="3511296" cy="1700784"/>
-          </a:xfrm>
-          <a:prstGeom prst="rect">
-            <a:avLst/>
-          </a:prstGeom>
-          <a:noFill/>
-          <a:ln/>
-        </p:spPr>
-        <p:txBody>
-          <a:bodyPr wrap="square" lIns="0" tIns="0" rIns="0" bIns="0" rtlCol="0" anchor="t"/>
-          <a:lstStyle/>
-          <a:p>
-            <a:pPr marL="342900" indent="-342900">
-              <a:lnSpc>
-                <a:spcPct val="120000"/>
-              </a:lnSpc>
-              <a:buSzPct val="100000"/>
-              <a:buChar char="•"/>
-            </a:pPr>
-            <a:r>
-              <a:rPr lang="en-US" sz="930" dirty="0">
-                <a:solidFill>
-                  <a:srgbClr val="0F172A"/>
+              <a:t>신사동 가로수길 이면 코너 노후 빌딩입니다.</a:t>
+            </a:r>
+            <a:endParaRPr lang="en-US" sz="930" dirty="0"/>
+          </a:p>
+        </p:txBody>
+      </p:sp>
+      <p:sp>
+        <p:nvSpPr>
+          <p:cNvPr id="20" name="Text 18"/>
+          <p:cNvSpPr/>
+          <p:nvPr/>
+        </p:nvSpPr>
+        <p:spPr>
+          <a:xfrm>
+            <a:off x="566928" y="6382512"/>
+            <a:ext cx="7315200" cy="219456"/>
+          </a:xfrm>
+          <a:prstGeom prst="rect">
+            <a:avLst/>
+          </a:prstGeom>
+          <a:noFill/>
+          <a:ln/>
+        </p:spPr>
+        <p:txBody>
+          <a:bodyPr wrap="square" lIns="0" tIns="0" rIns="0" bIns="0" rtlCol="0" anchor="ctr"/>
+          <a:lstStyle/>
+          <a:p>
+            <a:pPr indent="0" marL="0">
+              <a:buNone/>
+            </a:pPr>
+            <a:r>
+              <a:rPr lang="en-US" sz="800" dirty="0">
+                <a:solidFill>
+                  <a:srgbClr val="718096"/>
                 </a:solidFill>
                 <a:latin typeface="Pretendard" pitchFamily="34" charset="0"/>
                 <a:ea typeface="Pretendard" pitchFamily="34" charset="-122"/>
                 <a:cs typeface="Pretendard" pitchFamily="34" charset="-120"/>
               </a:rPr>
-              <a:t>서초대로 25m 메인 도로변 우수한 가시성 확보</a:t>
-            </a:r>
-            <a:endParaRPr lang="en-US" sz="930" dirty="0"/>
-          </a:p>
-          <a:p>
-            <a:pPr marL="342900" indent="-342900">
-              <a:lnSpc>
-                <a:spcPct val="120000"/>
-              </a:lnSpc>
-              <a:buSzPct val="100000"/>
-              <a:buChar char="•"/>
-            </a:pPr>
-            <a:r>
-              <a:rPr lang="en-US" sz="930" dirty="0">
-                <a:solidFill>
-                  <a:srgbClr val="0F172A"/>
-                </a:solidFill>
-                <a:latin typeface="Pretendard" pitchFamily="34" charset="0"/>
-                <a:ea typeface="Pretendard" pitchFamily="34" charset="-122"/>
-                <a:cs typeface="Pretendard" pitchFamily="34" charset="-120"/>
-              </a:rPr>
-              <a:t>제3종일반주거지역 법정 용적률 완비 자산</a:t>
-            </a:r>
-            <a:endParaRPr lang="en-US" sz="930" dirty="0"/>
-          </a:p>
-          <a:p>
-            <a:pPr marL="342900" indent="-342900">
-              <a:lnSpc>
-                <a:spcPct val="120000"/>
-              </a:lnSpc>
-              <a:buSzPct val="100000"/>
-              <a:buChar char="•"/>
-            </a:pPr>
-            <a:r>
-              <a:rPr lang="en-US" sz="930" dirty="0">
-                <a:solidFill>
-                  <a:srgbClr val="0F172A"/>
-                </a:solidFill>
-                <a:latin typeface="Pretendard" pitchFamily="34" charset="0"/>
-                <a:ea typeface="Pretendard" pitchFamily="34" charset="-122"/>
-                <a:cs typeface="Pretendard" pitchFamily="34" charset="-120"/>
-              </a:rPr>
-              <a:t>침대용 승강기 완비로 병의원 입점 최적화 구조</a:t>
-            </a:r>
-            <a:endParaRPr lang="en-US" sz="930" dirty="0"/>
-          </a:p>
-        </p:txBody>
-      </p:sp>
-      <p:sp>
-        <p:nvSpPr>
-          <p:cNvPr id="19" name="Shape 17"/>
-          <p:cNvSpPr/>
-          <p:nvPr/>
-        </p:nvSpPr>
-        <p:spPr>
-          <a:xfrm>
-            <a:off x="7784287" y="3977640"/>
-            <a:ext cx="3840480" cy="2148840"/>
-          </a:xfrm>
-          <a:prstGeom prst="roundRect">
-            <a:avLst>
-              <a:gd name="adj" fmla="val 2553"/>
-            </a:avLst>
-          </a:prstGeom>
-          <a:solidFill>
-            <a:srgbClr val="DBEAFE"/>
-          </a:solidFill>
-          <a:ln/>
-        </p:spPr>
-      </p:sp>
-      <p:sp>
-        <p:nvSpPr>
-          <p:cNvPr id="20" name="Shape 18"/>
-          <p:cNvSpPr/>
-          <p:nvPr/>
-        </p:nvSpPr>
-        <p:spPr>
-          <a:xfrm>
-            <a:off x="7784287" y="4032504"/>
-            <a:ext cx="36576" cy="2039112"/>
-          </a:xfrm>
-          <a:prstGeom prst="rect">
-            <a:avLst/>
-          </a:prstGeom>
-          <a:solidFill>
-            <a:srgbClr val="1D4ED8"/>
-          </a:solidFill>
-          <a:ln/>
-        </p:spPr>
+              <a:t>크리딜   |   </a:t>
+            </a:r>
+            <a:endParaRPr lang="en-US" sz="800" dirty="0"/>
+          </a:p>
+        </p:txBody>
       </p:sp>
       <p:sp>
         <p:nvSpPr>
@@ -5046,183 +5983,36 @@
         </p:nvSpPr>
         <p:spPr>
           <a:xfrm>
-            <a:off x="7967167" y="4087368"/>
-            <a:ext cx="3511296" cy="201168"/>
-          </a:xfrm>
-          <a:prstGeom prst="rect">
-            <a:avLst/>
-          </a:prstGeom>
-          <a:noFill/>
-          <a:ln/>
-        </p:spPr>
-        <p:txBody>
-          <a:bodyPr wrap="square" lIns="0" tIns="0" rIns="0" bIns="0" rtlCol="0" anchor="ctr"/>
-          <a:lstStyle/>
-          <a:p>
-            <a:pPr indent="0" marL="0">
-              <a:buNone/>
-            </a:pPr>
-            <a:r>
-              <a:rPr lang="en-US" sz="1050" b="1" dirty="0">
-                <a:solidFill>
-                  <a:srgbClr val="1D4ED8"/>
-                </a:solidFill>
-                <a:latin typeface="Pretendard" pitchFamily="34" charset="0"/>
-                <a:ea typeface="Pretendard" pitchFamily="34" charset="-122"/>
-                <a:cs typeface="Pretendard" pitchFamily="34" charset="-120"/>
-              </a:rPr>
-              <a:t>물건 실사 및 관리 상태</a:t>
-            </a:r>
-            <a:endParaRPr lang="en-US" sz="1050" dirty="0"/>
-          </a:p>
-        </p:txBody>
-      </p:sp>
-      <p:sp>
-        <p:nvSpPr>
-          <p:cNvPr id="22" name="Text 20"/>
-          <p:cNvSpPr/>
-          <p:nvPr/>
-        </p:nvSpPr>
-        <p:spPr>
-          <a:xfrm>
-            <a:off x="7967167" y="4306824"/>
-            <a:ext cx="3511296" cy="1746504"/>
-          </a:xfrm>
-          <a:prstGeom prst="rect">
-            <a:avLst/>
-          </a:prstGeom>
-          <a:noFill/>
-          <a:ln/>
-        </p:spPr>
-        <p:txBody>
-          <a:bodyPr wrap="square" lIns="0" tIns="0" rIns="0" bIns="0" rtlCol="0" anchor="t"/>
-          <a:lstStyle/>
-          <a:p>
-            <a:pPr marL="342900" indent="-342900">
-              <a:lnSpc>
-                <a:spcPct val="120000"/>
-              </a:lnSpc>
-              <a:buSzPct val="100000"/>
-              <a:buChar char="•"/>
-            </a:pPr>
-            <a:r>
-              <a:rPr lang="en-US" sz="930" dirty="0">
-                <a:solidFill>
-                  <a:srgbClr val="0F172A"/>
-                </a:solidFill>
-                <a:latin typeface="Pretendard" pitchFamily="34" charset="0"/>
-                <a:ea typeface="Pretendard" pitchFamily="34" charset="-122"/>
-                <a:cs typeface="Pretendard" pitchFamily="34" charset="-120"/>
-              </a:rPr>
-              <a:t>2017년 준공 신축급 상태로 누수·균열 0건</a:t>
-            </a:r>
-            <a:endParaRPr lang="en-US" sz="930" dirty="0"/>
-          </a:p>
-          <a:p>
-            <a:pPr marL="342900" indent="-342900">
-              <a:lnSpc>
-                <a:spcPct val="120000"/>
-              </a:lnSpc>
-              <a:buSzPct val="100000"/>
-              <a:buChar char="•"/>
-            </a:pPr>
-            <a:r>
-              <a:rPr lang="en-US" sz="930" dirty="0">
-                <a:solidFill>
-                  <a:srgbClr val="0F172A"/>
-                </a:solidFill>
-                <a:latin typeface="Pretendard" pitchFamily="34" charset="0"/>
-                <a:ea typeface="Pretendard" pitchFamily="34" charset="-122"/>
-                <a:cs typeface="Pretendard" pitchFamily="34" charset="-120"/>
-              </a:rPr>
-              <a:t>단독 법인 소유로 권리관계 투명</a:t>
-            </a:r>
-            <a:endParaRPr lang="en-US" sz="930" dirty="0"/>
-          </a:p>
-          <a:p>
-            <a:pPr marL="342900" indent="-342900">
-              <a:lnSpc>
-                <a:spcPct val="120000"/>
-              </a:lnSpc>
-              <a:buSzPct val="100000"/>
-              <a:buChar char="•"/>
-            </a:pPr>
-            <a:r>
-              <a:rPr lang="en-US" sz="930" dirty="0">
-                <a:solidFill>
-                  <a:srgbClr val="0F172A"/>
-                </a:solidFill>
-                <a:latin typeface="Pretendard" pitchFamily="34" charset="0"/>
-                <a:ea typeface="Pretendard" pitchFamily="34" charset="-122"/>
-                <a:cs typeface="Pretendard" pitchFamily="34" charset="-120"/>
-              </a:rPr>
-              <a:t>1금융권 담보대출 85억 원 승계 적격</a:t>
-            </a:r>
-            <a:endParaRPr lang="en-US" sz="930" dirty="0"/>
-          </a:p>
-        </p:txBody>
-      </p:sp>
-      <p:sp>
-        <p:nvSpPr>
-          <p:cNvPr id="23" name="Text 21"/>
-          <p:cNvSpPr/>
-          <p:nvPr/>
-        </p:nvSpPr>
-        <p:spPr>
-          <a:xfrm>
-            <a:off x="566928" y="6419088"/>
-            <a:ext cx="11057839" cy="201168"/>
-          </a:xfrm>
-          <a:prstGeom prst="rect">
-            <a:avLst/>
-          </a:prstGeom>
-          <a:noFill/>
-          <a:ln/>
-        </p:spPr>
-        <p:txBody>
-          <a:bodyPr wrap="square" lIns="0" tIns="0" rIns="0" bIns="0" rtlCol="0" anchor="ctr"/>
-          <a:lstStyle/>
-          <a:p>
-            <a:pPr algn="ctr" indent="0" marL="0">
-              <a:buNone/>
-            </a:pPr>
-            <a:r>
-              <a:rPr lang="en-US" sz="750" dirty="0">
-                <a:solidFill>
-                  <a:srgbClr val="64748B"/>
-                </a:solidFill>
-                <a:latin typeface="Pretendard" pitchFamily="34" charset="0"/>
-                <a:ea typeface="Pretendard" pitchFamily="34" charset="-122"/>
-                <a:cs typeface="Pretendard" pitchFamily="34" charset="-120"/>
-              </a:rPr>
-              <a:t>크리딜  ·    ·  4</a:t>
-            </a:r>
-            <a:endParaRPr lang="en-US" sz="750" dirty="0"/>
-          </a:p>
-        </p:txBody>
-      </p:sp>
-      <p:sp>
-        <p:nvSpPr>
-          <p:cNvPr id="24" name="Shape 22"/>
-          <p:cNvSpPr/>
-          <p:nvPr/>
-        </p:nvSpPr>
-        <p:spPr>
-          <a:xfrm>
-            <a:off x="4437172" y="6382512"/>
-            <a:ext cx="3317352" cy="0"/>
-          </a:xfrm>
-          <a:prstGeom prst="line">
-            <a:avLst/>
-          </a:prstGeom>
-          <a:noFill/>
-          <a:ln w="6350">
-            <a:solidFill>
-              <a:srgbClr val="6B8E00"/>
-            </a:solidFill>
-            <a:prstDash val="solid"/>
-          </a:ln>
-        </p:spPr>
+            <a:off x="10710367" y="6382512"/>
+            <a:ext cx="914400" cy="219456"/>
+          </a:xfrm>
+          <a:prstGeom prst="rect">
+            <a:avLst/>
+          </a:prstGeom>
+          <a:noFill/>
+          <a:ln/>
+        </p:spPr>
+        <p:txBody>
+          <a:bodyPr wrap="square" lIns="0" tIns="0" rIns="0" bIns="0" rtlCol="0" anchor="ctr"/>
+          <a:lstStyle/>
+          <a:p>
+            <a:pPr algn="r" indent="0" marL="0">
+              <a:buNone/>
+            </a:pPr>
+            <a:r>
+              <a:rPr lang="en-US" sz="900" b="1" dirty="0">
+                <a:solidFill>
+                  <a:srgbClr val="B98A2E"/>
+                </a:solidFill>
+                <a:latin typeface="Arial" pitchFamily="34" charset="0"/>
+                <a:ea typeface="Arial" pitchFamily="34" charset="-122"/>
+                <a:cs typeface="Arial" pitchFamily="34" charset="-120"/>
+              </a:rPr>
+              <a:t>4</a:t>
+            </a:r>
+            <a:endParaRPr lang="en-US" sz="900" dirty="0"/>
+          </a:p>
+        </p:txBody>
       </p:sp>
     </p:spTree>
   </p:cSld>
@@ -5264,14 +6054,14 @@
         </p:nvSpPr>
         <p:spPr>
           <a:xfrm>
-            <a:off x="566928" y="384048"/>
-            <a:ext cx="45720" cy="566928"/>
-          </a:xfrm>
-          <a:prstGeom prst="rect">
+            <a:off x="566928" y="457200"/>
+            <a:ext cx="384048" cy="384048"/>
+          </a:xfrm>
+          <a:prstGeom prst="ellipse">
             <a:avLst/>
           </a:prstGeom>
           <a:solidFill>
-            <a:srgbClr val="6B8E00"/>
+            <a:srgbClr val="B98A2E"/>
           </a:solidFill>
           <a:ln/>
         </p:spPr>
@@ -5284,32 +6074,71 @@
         </p:nvSpPr>
         <p:spPr>
           <a:xfrm>
-            <a:off x="749808" y="384048"/>
-            <a:ext cx="10874959" cy="182880"/>
-          </a:xfrm>
-          <a:prstGeom prst="rect">
-            <a:avLst/>
-          </a:prstGeom>
-          <a:noFill/>
-          <a:ln/>
-        </p:spPr>
-        <p:txBody>
-          <a:bodyPr wrap="square" lIns="0" tIns="0" rIns="0" bIns="0" rtlCol="0" anchor="ctr"/>
-          <a:lstStyle/>
-          <a:p>
-            <a:pPr indent="0" marL="0">
-              <a:buNone/>
-            </a:pPr>
-            <a:r>
-              <a:rPr lang="en-US" sz="950" b="1" spc="200" kern="0" dirty="0">
-                <a:solidFill>
-                  <a:srgbClr val="6B8E00"/>
+            <a:off x="566928" y="457200"/>
+            <a:ext cx="384048" cy="384048"/>
+          </a:xfrm>
+          <a:prstGeom prst="rect">
+            <a:avLst/>
+          </a:prstGeom>
+          <a:noFill/>
+          <a:ln/>
+        </p:spPr>
+        <p:txBody>
+          <a:bodyPr wrap="square" lIns="0" tIns="0" rIns="0" bIns="0" rtlCol="0" anchor="ctr"/>
+          <a:lstStyle/>
+          <a:p>
+            <a:pPr algn="ctr" indent="0" marL="0">
+              <a:buNone/>
+            </a:pPr>
+            <a:r>
+              <a:rPr lang="en-US" sz="1300" b="1" dirty="0">
+                <a:solidFill>
+                  <a:srgbClr val="FFFFFF"/>
                 </a:solidFill>
                 <a:latin typeface="Arial" pitchFamily="34" charset="0"/>
                 <a:ea typeface="Arial" pitchFamily="34" charset="-122"/>
                 <a:cs typeface="Arial" pitchFamily="34" charset="-120"/>
               </a:rPr>
-              <a:t>05  Market Position</a:t>
+              <a:t>05</a:t>
+            </a:r>
+            <a:endParaRPr lang="en-US" sz="1300" dirty="0"/>
+          </a:p>
+        </p:txBody>
+      </p:sp>
+      <p:sp>
+        <p:nvSpPr>
+          <p:cNvPr id="4" name="Text 2"/>
+          <p:cNvSpPr/>
+          <p:nvPr/>
+        </p:nvSpPr>
+        <p:spPr>
+          <a:xfrm>
+            <a:off x="1133856" y="457200"/>
+            <a:ext cx="10490911" cy="182880"/>
+          </a:xfrm>
+          <a:prstGeom prst="rect">
+            <a:avLst/>
+          </a:prstGeom>
+          <a:noFill/>
+          <a:ln/>
+        </p:spPr>
+        <p:txBody>
+          <a:bodyPr wrap="square" lIns="0" tIns="0" rIns="0" bIns="0" rtlCol="0" anchor="ctr"/>
+          <a:lstStyle/>
+          <a:p>
+            <a:pPr indent="0" marL="0">
+              <a:buNone/>
+            </a:pPr>
+            <a:r>
+              <a:rPr lang="en-US" sz="950" b="1" spc="200" kern="0" dirty="0">
+                <a:solidFill>
+                  <a:srgbClr val="B98A2E"/>
+                </a:solidFill>
+                <a:latin typeface="Arial" pitchFamily="34" charset="0"/>
+                <a:ea typeface="Arial" pitchFamily="34" charset="-122"/>
+                <a:cs typeface="Arial" pitchFamily="34" charset="-120"/>
+              </a:rPr>
+              <a:t>Market Position</a:t>
             </a:r>
             <a:endParaRPr lang="en-US" sz="950" dirty="0"/>
           </a:p>
@@ -5317,14 +6146,14 @@
       </p:sp>
       <p:sp>
         <p:nvSpPr>
-          <p:cNvPr id="4" name="Text 2"/>
-          <p:cNvSpPr/>
-          <p:nvPr/>
-        </p:nvSpPr>
-        <p:spPr>
-          <a:xfrm>
-            <a:off x="749808" y="566928"/>
-            <a:ext cx="10874959" cy="384048"/>
+          <p:cNvPr id="5" name="Text 3"/>
+          <p:cNvSpPr/>
+          <p:nvPr/>
+        </p:nvSpPr>
+        <p:spPr>
+          <a:xfrm>
+            <a:off x="1133856" y="640080"/>
+            <a:ext cx="10490911" cy="365760"/>
           </a:xfrm>
           <a:prstGeom prst="rect">
             <a:avLst/>
@@ -5340,9 +6169,9 @@
               <a:buNone/>
             </a:pPr>
             <a:r>
-              <a:rPr lang="en-US" sz="2200" b="1" dirty="0">
-                <a:solidFill>
-                  <a:srgbClr val="0F172A"/>
+              <a:rPr lang="en-US" sz="2300" b="1" dirty="0">
+                <a:solidFill>
+                  <a:srgbClr val="10161F"/>
                 </a:solidFill>
                 <a:latin typeface="Pretendard" pitchFamily="34" charset="0"/>
                 <a:ea typeface="Pretendard" pitchFamily="34" charset="-122"/>
@@ -5350,13 +6179,13 @@
               </a:rPr>
               <a:t>시장 포지션</a:t>
             </a:r>
-            <a:endParaRPr lang="en-US" sz="2200" dirty="0"/>
-          </a:p>
-        </p:txBody>
-      </p:sp>
-      <p:sp>
-        <p:nvSpPr>
-          <p:cNvPr id="5" name="Text 3"/>
+            <a:endParaRPr lang="en-US" sz="2300" dirty="0"/>
+          </a:p>
+        </p:txBody>
+      </p:sp>
+      <p:sp>
+        <p:nvSpPr>
+          <p:cNvPr id="6" name="Text 4"/>
           <p:cNvSpPr/>
           <p:nvPr/>
         </p:nvSpPr>
@@ -5381,7 +6210,7 @@
             <a:r>
               <a:rPr lang="en-US" sz="1100" b="1" dirty="0">
                 <a:solidFill>
-                  <a:srgbClr val="0F172A"/>
+                  <a:srgbClr val="10161F"/>
                 </a:solidFill>
                 <a:latin typeface="Pretendard" pitchFamily="34" charset="0"/>
                 <a:ea typeface="Pretendard" pitchFamily="34" charset="-122"/>
@@ -5395,7 +6224,7 @@
       </p:sp>
       <p:sp>
         <p:nvSpPr>
-          <p:cNvPr id="6" name="Shape 4"/>
+          <p:cNvPr id="7" name="Shape 5"/>
           <p:cNvSpPr/>
           <p:nvPr/>
         </p:nvSpPr>
@@ -5410,14 +6239,14 @@
             </a:avLst>
           </a:prstGeom>
           <a:solidFill>
-            <a:srgbClr val="DBEAFE"/>
+            <a:srgbClr val="BEE3F8"/>
           </a:solidFill>
           <a:ln/>
         </p:spPr>
       </p:sp>
       <p:sp>
         <p:nvSpPr>
-          <p:cNvPr id="7" name="Shape 5"/>
+          <p:cNvPr id="8" name="Shape 6"/>
           <p:cNvSpPr/>
           <p:nvPr/>
         </p:nvSpPr>
@@ -5430,14 +6259,14 @@
             <a:avLst/>
           </a:prstGeom>
           <a:solidFill>
-            <a:srgbClr val="1D4ED8"/>
+            <a:srgbClr val="2B6CB0"/>
           </a:solidFill>
           <a:ln/>
         </p:spPr>
       </p:sp>
       <p:sp>
         <p:nvSpPr>
-          <p:cNvPr id="8" name="Text 6"/>
+          <p:cNvPr id="9" name="Text 7"/>
           <p:cNvSpPr/>
           <p:nvPr/>
         </p:nvSpPr>
@@ -5462,7 +6291,7 @@
             <a:r>
               <a:rPr lang="en-US" sz="1050" b="1" dirty="0">
                 <a:solidFill>
-                  <a:srgbClr val="1D4ED8"/>
+                  <a:srgbClr val="2B6CB0"/>
                 </a:solidFill>
                 <a:latin typeface="Pretendard" pitchFamily="34" charset="0"/>
                 <a:ea typeface="Pretendard" pitchFamily="34" charset="-122"/>
@@ -5476,7 +6305,7 @@
       </p:sp>
       <p:sp>
         <p:nvSpPr>
-          <p:cNvPr id="9" name="Text 7"/>
+          <p:cNvPr id="10" name="Text 8"/>
           <p:cNvSpPr/>
           <p:nvPr/>
         </p:nvSpPr>
@@ -5505,13 +6334,13 @@
             <a:r>
               <a:rPr lang="en-US" sz="930" dirty="0">
                 <a:solidFill>
-                  <a:srgbClr val="0F172A"/>
+                  <a:srgbClr val="10161F"/>
                 </a:solidFill>
                 <a:latin typeface="Pretendard" pitchFamily="34" charset="0"/>
                 <a:ea typeface="Pretendard" pitchFamily="34" charset="-122"/>
                 <a:cs typeface="Pretendard" pitchFamily="34" charset="-120"/>
               </a:rPr>
-              <a:t>대지 142.5평 / 연면적 620.8평</a:t>
+              <a:t>상세 건물 제원은 실사 자료를 참조하시기 바랍니다</a:t>
             </a:r>
             <a:endParaRPr lang="en-US" sz="930" dirty="0"/>
           </a:p>
@@ -5526,13 +6355,13 @@
             <a:r>
               <a:rPr lang="en-US" sz="930" dirty="0">
                 <a:solidFill>
-                  <a:srgbClr val="0F172A"/>
+                  <a:srgbClr val="10161F"/>
                 </a:solidFill>
                 <a:latin typeface="Pretendard" pitchFamily="34" charset="0"/>
                 <a:ea typeface="Pretendard" pitchFamily="34" charset="-122"/>
                 <a:cs typeface="Pretendard" pitchFamily="34" charset="-120"/>
               </a:rPr>
-              <a:t>지하 2층 ~ 지상 7층 (2017년 준공)</a:t>
+              <a:t>건물 현황 및 규모는 첨부 대장을 기준으로 합니다</a:t>
             </a:r>
             <a:endParaRPr lang="en-US" sz="930" dirty="0"/>
           </a:p>
@@ -5547,13 +6376,13 @@
             <a:r>
               <a:rPr lang="en-US" sz="930" dirty="0">
                 <a:solidFill>
-                  <a:srgbClr val="0F172A"/>
+                  <a:srgbClr val="10161F"/>
                 </a:solidFill>
                 <a:latin typeface="Pretendard" pitchFamily="34" charset="0"/>
                 <a:ea typeface="Pretendard" pitchFamily="34" charset="-122"/>
                 <a:cs typeface="Pretendard" pitchFamily="34" charset="-120"/>
               </a:rPr>
-              <a:t>15인승 침대용 승강기 및 자주식 주차 18대 완비</a:t>
+              <a:t>건물 상태 및 설비 현황은 실사 보고서를 참조하십시오</a:t>
             </a:r>
             <a:endParaRPr lang="en-US" sz="930" dirty="0"/>
           </a:p>
@@ -5561,7 +6390,7 @@
       </p:sp>
       <p:sp>
         <p:nvSpPr>
-          <p:cNvPr id="10" name="Shape 8"/>
+          <p:cNvPr id="11" name="Shape 9"/>
           <p:cNvSpPr/>
           <p:nvPr/>
         </p:nvSpPr>
@@ -5576,7 +6405,7 @@
           <a:noFill/>
           <a:ln w="8890">
             <a:solidFill>
-              <a:srgbClr val="6B8E00"/>
+              <a:srgbClr val="B98A2E"/>
             </a:solidFill>
             <a:prstDash val="solid"/>
           </a:ln>
@@ -5584,49 +6413,49 @@
       </p:sp>
       <p:sp>
         <p:nvSpPr>
-          <p:cNvPr id="11" name="Shape 9"/>
+          <p:cNvPr id="12" name="Shape 10"/>
           <p:cNvSpPr/>
           <p:nvPr/>
         </p:nvSpPr>
         <p:spPr>
           <a:xfrm>
             <a:off x="7784287" y="1645920"/>
-            <a:ext cx="3840480" cy="2103120"/>
+            <a:ext cx="3840480" cy="1645920"/>
           </a:xfrm>
           <a:prstGeom prst="roundRect">
             <a:avLst>
-              <a:gd name="adj" fmla="val 2609"/>
+              <a:gd name="adj" fmla="val 3333"/>
             </a:avLst>
           </a:prstGeom>
           <a:solidFill>
-            <a:srgbClr val="DBEAFE"/>
+            <a:srgbClr val="F3EBDA"/>
           </a:solidFill>
           <a:ln/>
         </p:spPr>
       </p:sp>
       <p:sp>
         <p:nvSpPr>
-          <p:cNvPr id="12" name="Shape 10"/>
+          <p:cNvPr id="13" name="Shape 11"/>
           <p:cNvSpPr/>
           <p:nvPr/>
         </p:nvSpPr>
         <p:spPr>
           <a:xfrm>
             <a:off x="7784287" y="1700784"/>
-            <a:ext cx="36576" cy="1993392"/>
+            <a:ext cx="36576" cy="1536192"/>
           </a:xfrm>
           <a:prstGeom prst="rect">
             <a:avLst/>
           </a:prstGeom>
           <a:solidFill>
-            <a:srgbClr val="1D4ED8"/>
+            <a:srgbClr val="977024"/>
           </a:solidFill>
           <a:ln/>
         </p:spPr>
       </p:sp>
       <p:sp>
         <p:nvSpPr>
-          <p:cNvPr id="13" name="Text 11"/>
+          <p:cNvPr id="14" name="Text 12"/>
           <p:cNvSpPr/>
           <p:nvPr/>
         </p:nvSpPr>
@@ -5648,147 +6477,90 @@
             <a:pPr indent="0" marL="0">
               <a:buNone/>
             </a:pPr>
-            <a:r>
-              <a:rPr lang="en-US" sz="1050" b="1" dirty="0">
-                <a:solidFill>
-                  <a:srgbClr val="1D4ED8"/>
+            <a:endParaRPr lang="en-US" sz="1050" dirty="0"/>
+          </a:p>
+        </p:txBody>
+      </p:sp>
+      <p:sp>
+        <p:nvSpPr>
+          <p:cNvPr id="15" name="Text 13"/>
+          <p:cNvSpPr/>
+          <p:nvPr/>
+        </p:nvSpPr>
+        <p:spPr>
+          <a:xfrm>
+            <a:off x="7967167" y="1975104"/>
+            <a:ext cx="3511296" cy="1243584"/>
+          </a:xfrm>
+          <a:prstGeom prst="rect">
+            <a:avLst/>
+          </a:prstGeom>
+          <a:noFill/>
+          <a:ln/>
+        </p:spPr>
+        <p:txBody>
+          <a:bodyPr wrap="square" lIns="0" tIns="0" rIns="0" bIns="0" rtlCol="0" anchor="t"/>
+          <a:lstStyle/>
+          <a:p>
+            <a:pPr indent="0" marL="0">
+              <a:lnSpc>
+                <a:spcPct val="120000"/>
+              </a:lnSpc>
+              <a:buNone/>
+            </a:pPr>
+            <a:r>
+              <a:rPr lang="en-US" sz="930" dirty="0">
+                <a:solidFill>
+                  <a:srgbClr val="10161F"/>
                 </a:solidFill>
                 <a:latin typeface="Pretendard" pitchFamily="34" charset="0"/>
                 <a:ea typeface="Pretendard" pitchFamily="34" charset="-122"/>
                 <a:cs typeface="Pretendard" pitchFamily="34" charset="-120"/>
               </a:rPr>
-              <a:t>토지 및 건물 분석 포인트</a:t>
-            </a:r>
-            <a:endParaRPr lang="en-US" sz="1050" dirty="0"/>
-          </a:p>
-        </p:txBody>
-      </p:sp>
-      <p:sp>
-        <p:nvSpPr>
-          <p:cNvPr id="14" name="Text 12"/>
-          <p:cNvSpPr/>
-          <p:nvPr/>
-        </p:nvSpPr>
-        <p:spPr>
-          <a:xfrm>
-            <a:off x="7967167" y="1975104"/>
-            <a:ext cx="3511296" cy="1700784"/>
-          </a:xfrm>
-          <a:prstGeom prst="rect">
-            <a:avLst/>
-          </a:prstGeom>
-          <a:noFill/>
-          <a:ln/>
-        </p:spPr>
-        <p:txBody>
-          <a:bodyPr wrap="square" lIns="0" tIns="0" rIns="0" bIns="0" rtlCol="0" anchor="t"/>
-          <a:lstStyle/>
-          <a:p>
-            <a:pPr marL="342900" indent="-342900">
-              <a:lnSpc>
-                <a:spcPct val="120000"/>
-              </a:lnSpc>
-              <a:buSzPct val="100000"/>
-              <a:buChar char="•"/>
-            </a:pPr>
-            <a:r>
-              <a:rPr lang="en-US" sz="930" dirty="0">
-                <a:solidFill>
-                  <a:srgbClr val="0F172A"/>
+              <a:t>시세 대비 15% 저평가, 용적률 여유 35% 보유입니다.</a:t>
+            </a:r>
+            <a:endParaRPr lang="en-US" sz="930" dirty="0"/>
+          </a:p>
+        </p:txBody>
+      </p:sp>
+      <p:sp>
+        <p:nvSpPr>
+          <p:cNvPr id="16" name="Text 14"/>
+          <p:cNvSpPr/>
+          <p:nvPr/>
+        </p:nvSpPr>
+        <p:spPr>
+          <a:xfrm>
+            <a:off x="566928" y="6382512"/>
+            <a:ext cx="7315200" cy="219456"/>
+          </a:xfrm>
+          <a:prstGeom prst="rect">
+            <a:avLst/>
+          </a:prstGeom>
+          <a:noFill/>
+          <a:ln/>
+        </p:spPr>
+        <p:txBody>
+          <a:bodyPr wrap="square" lIns="0" tIns="0" rIns="0" bIns="0" rtlCol="0" anchor="ctr"/>
+          <a:lstStyle/>
+          <a:p>
+            <a:pPr indent="0" marL="0">
+              <a:buNone/>
+            </a:pPr>
+            <a:r>
+              <a:rPr lang="en-US" sz="800" dirty="0">
+                <a:solidFill>
+                  <a:srgbClr val="718096"/>
                 </a:solidFill>
                 <a:latin typeface="Pretendard" pitchFamily="34" charset="0"/>
                 <a:ea typeface="Pretendard" pitchFamily="34" charset="-122"/>
                 <a:cs typeface="Pretendard" pitchFamily="34" charset="-120"/>
               </a:rPr>
-              <a:t>서초대로 25m 메인 도로변 우수한 가시성 확보</a:t>
-            </a:r>
-            <a:endParaRPr lang="en-US" sz="930" dirty="0"/>
-          </a:p>
-          <a:p>
-            <a:pPr marL="342900" indent="-342900">
-              <a:lnSpc>
-                <a:spcPct val="120000"/>
-              </a:lnSpc>
-              <a:buSzPct val="100000"/>
-              <a:buChar char="•"/>
-            </a:pPr>
-            <a:r>
-              <a:rPr lang="en-US" sz="930" dirty="0">
-                <a:solidFill>
-                  <a:srgbClr val="0F172A"/>
-                </a:solidFill>
-                <a:latin typeface="Pretendard" pitchFamily="34" charset="0"/>
-                <a:ea typeface="Pretendard" pitchFamily="34" charset="-122"/>
-                <a:cs typeface="Pretendard" pitchFamily="34" charset="-120"/>
-              </a:rPr>
-              <a:t>제3종일반주거지역 법정 용적률 완비 자산</a:t>
-            </a:r>
-            <a:endParaRPr lang="en-US" sz="930" dirty="0"/>
-          </a:p>
-          <a:p>
-            <a:pPr marL="342900" indent="-342900">
-              <a:lnSpc>
-                <a:spcPct val="120000"/>
-              </a:lnSpc>
-              <a:buSzPct val="100000"/>
-              <a:buChar char="•"/>
-            </a:pPr>
-            <a:r>
-              <a:rPr lang="en-US" sz="930" dirty="0">
-                <a:solidFill>
-                  <a:srgbClr val="0F172A"/>
-                </a:solidFill>
-                <a:latin typeface="Pretendard" pitchFamily="34" charset="0"/>
-                <a:ea typeface="Pretendard" pitchFamily="34" charset="-122"/>
-                <a:cs typeface="Pretendard" pitchFamily="34" charset="-120"/>
-              </a:rPr>
-              <a:t>침대용 승강기 완비로 병의원 입점 최적화 구조</a:t>
-            </a:r>
-            <a:endParaRPr lang="en-US" sz="930" dirty="0"/>
-          </a:p>
-        </p:txBody>
-      </p:sp>
-      <p:sp>
-        <p:nvSpPr>
-          <p:cNvPr id="15" name="Shape 13"/>
-          <p:cNvSpPr/>
-          <p:nvPr/>
-        </p:nvSpPr>
-        <p:spPr>
-          <a:xfrm>
-            <a:off x="7784287" y="3977640"/>
-            <a:ext cx="3840480" cy="2148840"/>
-          </a:xfrm>
-          <a:prstGeom prst="roundRect">
-            <a:avLst>
-              <a:gd name="adj" fmla="val 2553"/>
-            </a:avLst>
-          </a:prstGeom>
-          <a:solidFill>
-            <a:srgbClr val="DBEAFE"/>
-          </a:solidFill>
-          <a:ln/>
-        </p:spPr>
-      </p:sp>
-      <p:sp>
-        <p:nvSpPr>
-          <p:cNvPr id="16" name="Shape 14"/>
-          <p:cNvSpPr/>
-          <p:nvPr/>
-        </p:nvSpPr>
-        <p:spPr>
-          <a:xfrm>
-            <a:off x="7784287" y="4032504"/>
-            <a:ext cx="36576" cy="2039112"/>
-          </a:xfrm>
-          <a:prstGeom prst="rect">
-            <a:avLst/>
-          </a:prstGeom>
-          <a:solidFill>
-            <a:srgbClr val="1D4ED8"/>
-          </a:solidFill>
-          <a:ln/>
-        </p:spPr>
+              <a:t>크리딜   |   </a:t>
+            </a:r>
+            <a:endParaRPr lang="en-US" sz="800" dirty="0"/>
+          </a:p>
+        </p:txBody>
       </p:sp>
       <p:sp>
         <p:nvSpPr>
@@ -5798,183 +6570,36 @@
         </p:nvSpPr>
         <p:spPr>
           <a:xfrm>
-            <a:off x="7967167" y="4087368"/>
-            <a:ext cx="3511296" cy="201168"/>
-          </a:xfrm>
-          <a:prstGeom prst="rect">
-            <a:avLst/>
-          </a:prstGeom>
-          <a:noFill/>
-          <a:ln/>
-        </p:spPr>
-        <p:txBody>
-          <a:bodyPr wrap="square" lIns="0" tIns="0" rIns="0" bIns="0" rtlCol="0" anchor="ctr"/>
-          <a:lstStyle/>
-          <a:p>
-            <a:pPr indent="0" marL="0">
-              <a:buNone/>
-            </a:pPr>
-            <a:r>
-              <a:rPr lang="en-US" sz="1050" b="1" dirty="0">
-                <a:solidFill>
-                  <a:srgbClr val="1D4ED8"/>
-                </a:solidFill>
-                <a:latin typeface="Pretendard" pitchFamily="34" charset="0"/>
-                <a:ea typeface="Pretendard" pitchFamily="34" charset="-122"/>
-                <a:cs typeface="Pretendard" pitchFamily="34" charset="-120"/>
-              </a:rPr>
-              <a:t>물건 실사 및 관리 상태</a:t>
-            </a:r>
-            <a:endParaRPr lang="en-US" sz="1050" dirty="0"/>
-          </a:p>
-        </p:txBody>
-      </p:sp>
-      <p:sp>
-        <p:nvSpPr>
-          <p:cNvPr id="18" name="Text 16"/>
-          <p:cNvSpPr/>
-          <p:nvPr/>
-        </p:nvSpPr>
-        <p:spPr>
-          <a:xfrm>
-            <a:off x="7967167" y="4306824"/>
-            <a:ext cx="3511296" cy="1746504"/>
-          </a:xfrm>
-          <a:prstGeom prst="rect">
-            <a:avLst/>
-          </a:prstGeom>
-          <a:noFill/>
-          <a:ln/>
-        </p:spPr>
-        <p:txBody>
-          <a:bodyPr wrap="square" lIns="0" tIns="0" rIns="0" bIns="0" rtlCol="0" anchor="t"/>
-          <a:lstStyle/>
-          <a:p>
-            <a:pPr marL="342900" indent="-342900">
-              <a:lnSpc>
-                <a:spcPct val="120000"/>
-              </a:lnSpc>
-              <a:buSzPct val="100000"/>
-              <a:buChar char="•"/>
-            </a:pPr>
-            <a:r>
-              <a:rPr lang="en-US" sz="930" dirty="0">
-                <a:solidFill>
-                  <a:srgbClr val="0F172A"/>
-                </a:solidFill>
-                <a:latin typeface="Pretendard" pitchFamily="34" charset="0"/>
-                <a:ea typeface="Pretendard" pitchFamily="34" charset="-122"/>
-                <a:cs typeface="Pretendard" pitchFamily="34" charset="-120"/>
-              </a:rPr>
-              <a:t>2017년 준공 신축급 상태로 누수·균열 0건</a:t>
-            </a:r>
-            <a:endParaRPr lang="en-US" sz="930" dirty="0"/>
-          </a:p>
-          <a:p>
-            <a:pPr marL="342900" indent="-342900">
-              <a:lnSpc>
-                <a:spcPct val="120000"/>
-              </a:lnSpc>
-              <a:buSzPct val="100000"/>
-              <a:buChar char="•"/>
-            </a:pPr>
-            <a:r>
-              <a:rPr lang="en-US" sz="930" dirty="0">
-                <a:solidFill>
-                  <a:srgbClr val="0F172A"/>
-                </a:solidFill>
-                <a:latin typeface="Pretendard" pitchFamily="34" charset="0"/>
-                <a:ea typeface="Pretendard" pitchFamily="34" charset="-122"/>
-                <a:cs typeface="Pretendard" pitchFamily="34" charset="-120"/>
-              </a:rPr>
-              <a:t>단독 법인 소유로 권리관계 투명</a:t>
-            </a:r>
-            <a:endParaRPr lang="en-US" sz="930" dirty="0"/>
-          </a:p>
-          <a:p>
-            <a:pPr marL="342900" indent="-342900">
-              <a:lnSpc>
-                <a:spcPct val="120000"/>
-              </a:lnSpc>
-              <a:buSzPct val="100000"/>
-              <a:buChar char="•"/>
-            </a:pPr>
-            <a:r>
-              <a:rPr lang="en-US" sz="930" dirty="0">
-                <a:solidFill>
-                  <a:srgbClr val="0F172A"/>
-                </a:solidFill>
-                <a:latin typeface="Pretendard" pitchFamily="34" charset="0"/>
-                <a:ea typeface="Pretendard" pitchFamily="34" charset="-122"/>
-                <a:cs typeface="Pretendard" pitchFamily="34" charset="-120"/>
-              </a:rPr>
-              <a:t>1금융권 담보대출 85억 원 승계 적격</a:t>
-            </a:r>
-            <a:endParaRPr lang="en-US" sz="930" dirty="0"/>
-          </a:p>
-        </p:txBody>
-      </p:sp>
-      <p:sp>
-        <p:nvSpPr>
-          <p:cNvPr id="19" name="Text 17"/>
-          <p:cNvSpPr/>
-          <p:nvPr/>
-        </p:nvSpPr>
-        <p:spPr>
-          <a:xfrm>
-            <a:off x="566928" y="6419088"/>
-            <a:ext cx="11057839" cy="201168"/>
-          </a:xfrm>
-          <a:prstGeom prst="rect">
-            <a:avLst/>
-          </a:prstGeom>
-          <a:noFill/>
-          <a:ln/>
-        </p:spPr>
-        <p:txBody>
-          <a:bodyPr wrap="square" lIns="0" tIns="0" rIns="0" bIns="0" rtlCol="0" anchor="ctr"/>
-          <a:lstStyle/>
-          <a:p>
-            <a:pPr algn="ctr" indent="0" marL="0">
-              <a:buNone/>
-            </a:pPr>
-            <a:r>
-              <a:rPr lang="en-US" sz="750" dirty="0">
-                <a:solidFill>
-                  <a:srgbClr val="64748B"/>
-                </a:solidFill>
-                <a:latin typeface="Pretendard" pitchFamily="34" charset="0"/>
-                <a:ea typeface="Pretendard" pitchFamily="34" charset="-122"/>
-                <a:cs typeface="Pretendard" pitchFamily="34" charset="-120"/>
-              </a:rPr>
-              <a:t>크리딜  ·    ·  5</a:t>
-            </a:r>
-            <a:endParaRPr lang="en-US" sz="750" dirty="0"/>
-          </a:p>
-        </p:txBody>
-      </p:sp>
-      <p:sp>
-        <p:nvSpPr>
-          <p:cNvPr id="20" name="Shape 18"/>
-          <p:cNvSpPr/>
-          <p:nvPr/>
-        </p:nvSpPr>
-        <p:spPr>
-          <a:xfrm>
-            <a:off x="4437172" y="6382512"/>
-            <a:ext cx="3317352" cy="0"/>
-          </a:xfrm>
-          <a:prstGeom prst="line">
-            <a:avLst/>
-          </a:prstGeom>
-          <a:noFill/>
-          <a:ln w="6350">
-            <a:solidFill>
-              <a:srgbClr val="6B8E00"/>
-            </a:solidFill>
-            <a:prstDash val="solid"/>
-          </a:ln>
-        </p:spPr>
+            <a:off x="10710367" y="6382512"/>
+            <a:ext cx="914400" cy="219456"/>
+          </a:xfrm>
+          <a:prstGeom prst="rect">
+            <a:avLst/>
+          </a:prstGeom>
+          <a:noFill/>
+          <a:ln/>
+        </p:spPr>
+        <p:txBody>
+          <a:bodyPr wrap="square" lIns="0" tIns="0" rIns="0" bIns="0" rtlCol="0" anchor="ctr"/>
+          <a:lstStyle/>
+          <a:p>
+            <a:pPr algn="r" indent="0" marL="0">
+              <a:buNone/>
+            </a:pPr>
+            <a:r>
+              <a:rPr lang="en-US" sz="900" b="1" dirty="0">
+                <a:solidFill>
+                  <a:srgbClr val="B98A2E"/>
+                </a:solidFill>
+                <a:latin typeface="Arial" pitchFamily="34" charset="0"/>
+                <a:ea typeface="Arial" pitchFamily="34" charset="-122"/>
+                <a:cs typeface="Arial" pitchFamily="34" charset="-120"/>
+              </a:rPr>
+              <a:t>5</a:t>
+            </a:r>
+            <a:endParaRPr lang="en-US" sz="900" dirty="0"/>
+          </a:p>
+        </p:txBody>
       </p:sp>
     </p:spTree>
   </p:cSld>
@@ -6016,14 +6641,14 @@
         </p:nvSpPr>
         <p:spPr>
           <a:xfrm>
-            <a:off x="566928" y="384048"/>
-            <a:ext cx="45720" cy="566928"/>
-          </a:xfrm>
-          <a:prstGeom prst="rect">
+            <a:off x="566928" y="457200"/>
+            <a:ext cx="384048" cy="384048"/>
+          </a:xfrm>
+          <a:prstGeom prst="ellipse">
             <a:avLst/>
           </a:prstGeom>
           <a:solidFill>
-            <a:srgbClr val="6B8E00"/>
+            <a:srgbClr val="B98A2E"/>
           </a:solidFill>
           <a:ln/>
         </p:spPr>
@@ -6036,32 +6661,71 @@
         </p:nvSpPr>
         <p:spPr>
           <a:xfrm>
-            <a:off x="749808" y="384048"/>
-            <a:ext cx="10874959" cy="182880"/>
-          </a:xfrm>
-          <a:prstGeom prst="rect">
-            <a:avLst/>
-          </a:prstGeom>
-          <a:noFill/>
-          <a:ln/>
-        </p:spPr>
-        <p:txBody>
-          <a:bodyPr wrap="square" lIns="0" tIns="0" rIns="0" bIns="0" rtlCol="0" anchor="ctr"/>
-          <a:lstStyle/>
-          <a:p>
-            <a:pPr indent="0" marL="0">
-              <a:buNone/>
-            </a:pPr>
-            <a:r>
-              <a:rPr lang="en-US" sz="950" b="1" spc="200" kern="0" dirty="0">
-                <a:solidFill>
-                  <a:srgbClr val="6B8E00"/>
+            <a:off x="566928" y="457200"/>
+            <a:ext cx="384048" cy="384048"/>
+          </a:xfrm>
+          <a:prstGeom prst="rect">
+            <a:avLst/>
+          </a:prstGeom>
+          <a:noFill/>
+          <a:ln/>
+        </p:spPr>
+        <p:txBody>
+          <a:bodyPr wrap="square" lIns="0" tIns="0" rIns="0" bIns="0" rtlCol="0" anchor="ctr"/>
+          <a:lstStyle/>
+          <a:p>
+            <a:pPr algn="ctr" indent="0" marL="0">
+              <a:buNone/>
+            </a:pPr>
+            <a:r>
+              <a:rPr lang="en-US" sz="1300" b="1" dirty="0">
+                <a:solidFill>
+                  <a:srgbClr val="FFFFFF"/>
                 </a:solidFill>
                 <a:latin typeface="Arial" pitchFamily="34" charset="0"/>
                 <a:ea typeface="Arial" pitchFamily="34" charset="-122"/>
                 <a:cs typeface="Arial" pitchFamily="34" charset="-120"/>
               </a:rPr>
-              <a:t>06  Comps</a:t>
+              <a:t>06</a:t>
+            </a:r>
+            <a:endParaRPr lang="en-US" sz="1300" dirty="0"/>
+          </a:p>
+        </p:txBody>
+      </p:sp>
+      <p:sp>
+        <p:nvSpPr>
+          <p:cNvPr id="4" name="Text 2"/>
+          <p:cNvSpPr/>
+          <p:nvPr/>
+        </p:nvSpPr>
+        <p:spPr>
+          <a:xfrm>
+            <a:off x="1133856" y="457200"/>
+            <a:ext cx="10490911" cy="182880"/>
+          </a:xfrm>
+          <a:prstGeom prst="rect">
+            <a:avLst/>
+          </a:prstGeom>
+          <a:noFill/>
+          <a:ln/>
+        </p:spPr>
+        <p:txBody>
+          <a:bodyPr wrap="square" lIns="0" tIns="0" rIns="0" bIns="0" rtlCol="0" anchor="ctr"/>
+          <a:lstStyle/>
+          <a:p>
+            <a:pPr indent="0" marL="0">
+              <a:buNone/>
+            </a:pPr>
+            <a:r>
+              <a:rPr lang="en-US" sz="950" b="1" spc="200" kern="0" dirty="0">
+                <a:solidFill>
+                  <a:srgbClr val="B98A2E"/>
+                </a:solidFill>
+                <a:latin typeface="Arial" pitchFamily="34" charset="0"/>
+                <a:ea typeface="Arial" pitchFamily="34" charset="-122"/>
+                <a:cs typeface="Arial" pitchFamily="34" charset="-120"/>
+              </a:rPr>
+              <a:t>Comps</a:t>
             </a:r>
             <a:endParaRPr lang="en-US" sz="950" dirty="0"/>
           </a:p>
@@ -6069,14 +6733,14 @@
       </p:sp>
       <p:sp>
         <p:nvSpPr>
-          <p:cNvPr id="4" name="Text 2"/>
-          <p:cNvSpPr/>
-          <p:nvPr/>
-        </p:nvSpPr>
-        <p:spPr>
-          <a:xfrm>
-            <a:off x="749808" y="566928"/>
-            <a:ext cx="10874959" cy="384048"/>
+          <p:cNvPr id="5" name="Text 3"/>
+          <p:cNvSpPr/>
+          <p:nvPr/>
+        </p:nvSpPr>
+        <p:spPr>
+          <a:xfrm>
+            <a:off x="1133856" y="640080"/>
+            <a:ext cx="10490911" cy="365760"/>
           </a:xfrm>
           <a:prstGeom prst="rect">
             <a:avLst/>
@@ -6092,9 +6756,9 @@
               <a:buNone/>
             </a:pPr>
             <a:r>
-              <a:rPr lang="en-US" sz="2200" b="1" dirty="0">
-                <a:solidFill>
-                  <a:srgbClr val="0F172A"/>
+              <a:rPr lang="en-US" sz="2300" b="1" dirty="0">
+                <a:solidFill>
+                  <a:srgbClr val="10161F"/>
                 </a:solidFill>
                 <a:latin typeface="Pretendard" pitchFamily="34" charset="0"/>
                 <a:ea typeface="Pretendard" pitchFamily="34" charset="-122"/>
@@ -6102,7 +6766,7 @@
               </a:rPr>
               <a:t>비교 분석</a:t>
             </a:r>
-            <a:endParaRPr lang="en-US" sz="2200" dirty="0"/>
+            <a:endParaRPr lang="en-US" sz="2300" dirty="0"/>
           </a:p>
         </p:txBody>
       </p:sp>
@@ -6145,7 +6809,7 @@
                       <a:r>
                         <a:rPr lang="en-US" sz="1300" b="1" dirty="0">
                           <a:solidFill>
-                            <a:srgbClr val="64748B"/>
+                            <a:srgbClr val="718096"/>
                           </a:solidFill>
                           <a:latin typeface="Pretendard" pitchFamily="34" charset="0"/>
                           <a:ea typeface="Pretendard" pitchFamily="34" charset="-122"/>
@@ -6163,7 +6827,7 @@
                   <a:tcPr marL="50800" marR="50800" marT="25400" marB="25400" anchor="ctr">
                     <a:lnL w="3810" cap="flat" cmpd="sng" algn="ctr">
                       <a:solidFill>
-                        <a:srgbClr val="CBD5E1"/>
+                        <a:srgbClr val="CBD5E0"/>
                       </a:solidFill>
                       <a:prstDash val="solid"/>
                       <a:round/>
@@ -6172,7 +6836,7 @@
                     </a:lnL>
                     <a:lnR w="3810" cap="flat" cmpd="sng" algn="ctr">
                       <a:solidFill>
-                        <a:srgbClr val="CBD5E1"/>
+                        <a:srgbClr val="CBD5E0"/>
                       </a:solidFill>
                       <a:prstDash val="solid"/>
                       <a:round/>
@@ -6181,7 +6845,7 @@
                     </a:lnR>
                     <a:lnT w="3810" cap="flat" cmpd="sng" algn="ctr">
                       <a:solidFill>
-                        <a:srgbClr val="CBD5E1"/>
+                        <a:srgbClr val="CBD5E0"/>
                       </a:solidFill>
                       <a:prstDash val="solid"/>
                       <a:round/>
@@ -6190,7 +6854,7 @@
                     </a:lnT>
                     <a:lnB w="3810" cap="flat" cmpd="sng" algn="ctr">
                       <a:solidFill>
-                        <a:srgbClr val="CBD5E1"/>
+                        <a:srgbClr val="CBD5E0"/>
                       </a:solidFill>
                       <a:prstDash val="solid"/>
                       <a:round/>
@@ -6198,7 +6862,7 @@
                       <a:tailEnd type="none" w="med" len="med"/>
                     </a:lnB>
                     <a:solidFill>
-                      <a:srgbClr val="F8FAFC"/>
+                      <a:srgbClr val="F7FAFC"/>
                     </a:solidFill>
                   </a:tcPr>
                 </a:tc>
@@ -6213,7 +6877,7 @@
                       <a:r>
                         <a:rPr lang="en-US" sz="1300" b="1" dirty="0">
                           <a:solidFill>
-                            <a:srgbClr val="64748B"/>
+                            <a:srgbClr val="718096"/>
                           </a:solidFill>
                           <a:latin typeface="Pretendard" pitchFamily="34" charset="0"/>
                           <a:ea typeface="Pretendard" pitchFamily="34" charset="-122"/>
@@ -6231,7 +6895,7 @@
                   <a:tcPr marL="50800" marR="50800" marT="25400" marB="25400" anchor="ctr">
                     <a:lnL w="3810" cap="flat" cmpd="sng" algn="ctr">
                       <a:solidFill>
-                        <a:srgbClr val="CBD5E1"/>
+                        <a:srgbClr val="CBD5E0"/>
                       </a:solidFill>
                       <a:prstDash val="solid"/>
                       <a:round/>
@@ -6240,7 +6904,7 @@
                     </a:lnL>
                     <a:lnR w="3810" cap="flat" cmpd="sng" algn="ctr">
                       <a:solidFill>
-                        <a:srgbClr val="CBD5E1"/>
+                        <a:srgbClr val="CBD5E0"/>
                       </a:solidFill>
                       <a:prstDash val="solid"/>
                       <a:round/>
@@ -6249,7 +6913,7 @@
                     </a:lnR>
                     <a:lnT w="3810" cap="flat" cmpd="sng" algn="ctr">
                       <a:solidFill>
-                        <a:srgbClr val="CBD5E1"/>
+                        <a:srgbClr val="CBD5E0"/>
                       </a:solidFill>
                       <a:prstDash val="solid"/>
                       <a:round/>
@@ -6258,7 +6922,7 @@
                     </a:lnT>
                     <a:lnB w="3810" cap="flat" cmpd="sng" algn="ctr">
                       <a:solidFill>
-                        <a:srgbClr val="CBD5E1"/>
+                        <a:srgbClr val="CBD5E0"/>
                       </a:solidFill>
                       <a:prstDash val="solid"/>
                       <a:round/>
@@ -6266,7 +6930,7 @@
                       <a:tailEnd type="none" w="med" len="med"/>
                     </a:lnB>
                     <a:solidFill>
-                      <a:srgbClr val="F8FAFC"/>
+                      <a:srgbClr val="F7FAFC"/>
                     </a:solidFill>
                   </a:tcPr>
                 </a:tc>
@@ -6281,7 +6945,7 @@
                       <a:r>
                         <a:rPr lang="en-US" sz="1300" b="1" dirty="0">
                           <a:solidFill>
-                            <a:srgbClr val="64748B"/>
+                            <a:srgbClr val="718096"/>
                           </a:solidFill>
                           <a:latin typeface="Pretendard" pitchFamily="34" charset="0"/>
                           <a:ea typeface="Pretendard" pitchFamily="34" charset="-122"/>
@@ -6295,7 +6959,7 @@
                       <a:r>
                         <a:rPr lang="en-US" sz="1300" b="1" dirty="0">
                           <a:solidFill>
-                            <a:srgbClr val="64748B"/>
+                            <a:srgbClr val="718096"/>
                           </a:solidFill>
                           <a:latin typeface="Pretendard" pitchFamily="34" charset="0"/>
                           <a:ea typeface="Pretendard" pitchFamily="34" charset="-122"/>
@@ -6313,7 +6977,7 @@
                   <a:tcPr marL="50800" marR="50800" marT="25400" marB="25400" anchor="ctr">
                     <a:lnL w="3810" cap="flat" cmpd="sng" algn="ctr">
                       <a:solidFill>
-                        <a:srgbClr val="CBD5E1"/>
+                        <a:srgbClr val="CBD5E0"/>
                       </a:solidFill>
                       <a:prstDash val="solid"/>
                       <a:round/>
@@ -6322,7 +6986,7 @@
                     </a:lnL>
                     <a:lnR w="3810" cap="flat" cmpd="sng" algn="ctr">
                       <a:solidFill>
-                        <a:srgbClr val="CBD5E1"/>
+                        <a:srgbClr val="CBD5E0"/>
                       </a:solidFill>
                       <a:prstDash val="solid"/>
                       <a:round/>
@@ -6331,7 +6995,7 @@
                     </a:lnR>
                     <a:lnT w="3810" cap="flat" cmpd="sng" algn="ctr">
                       <a:solidFill>
-                        <a:srgbClr val="CBD5E1"/>
+                        <a:srgbClr val="CBD5E0"/>
                       </a:solidFill>
                       <a:prstDash val="solid"/>
                       <a:round/>
@@ -6340,7 +7004,7 @@
                     </a:lnT>
                     <a:lnB w="3810" cap="flat" cmpd="sng" algn="ctr">
                       <a:solidFill>
-                        <a:srgbClr val="CBD5E1"/>
+                        <a:srgbClr val="CBD5E0"/>
                       </a:solidFill>
                       <a:prstDash val="solid"/>
                       <a:round/>
@@ -6348,7 +7012,7 @@
                       <a:tailEnd type="none" w="med" len="med"/>
                     </a:lnB>
                     <a:solidFill>
-                      <a:srgbClr val="F8FAFC"/>
+                      <a:srgbClr val="F7FAFC"/>
                     </a:solidFill>
                   </a:tcPr>
                 </a:tc>
@@ -6365,7 +7029,7 @@
                       <a:r>
                         <a:rPr lang="en-US" sz="1300" b="1" dirty="0">
                           <a:solidFill>
-                            <a:srgbClr val="0F172A"/>
+                            <a:srgbClr val="10161F"/>
                           </a:solidFill>
                           <a:latin typeface="Pretendard" pitchFamily="34" charset="0"/>
                           <a:ea typeface="Pretendard" pitchFamily="34" charset="-122"/>
@@ -6379,7 +7043,7 @@
                       <a:r>
                         <a:rPr lang="en-US" sz="1300" b="1" dirty="0">
                           <a:solidFill>
-                            <a:srgbClr val="0F172A"/>
+                            <a:srgbClr val="10161F"/>
                           </a:solidFill>
                           <a:latin typeface="Pretendard" pitchFamily="34" charset="0"/>
                           <a:ea typeface="Pretendard" pitchFamily="34" charset="-122"/>
@@ -6397,7 +7061,7 @@
                   <a:tcPr marL="50800" marR="50800" marT="25400" marB="25400" anchor="ctr">
                     <a:lnL w="3810" cap="flat" cmpd="sng" algn="ctr">
                       <a:solidFill>
-                        <a:srgbClr val="CBD5E1"/>
+                        <a:srgbClr val="CBD5E0"/>
                       </a:solidFill>
                       <a:prstDash val="solid"/>
                       <a:round/>
@@ -6406,7 +7070,7 @@
                     </a:lnL>
                     <a:lnR w="3810" cap="flat" cmpd="sng" algn="ctr">
                       <a:solidFill>
-                        <a:srgbClr val="CBD5E1"/>
+                        <a:srgbClr val="CBD5E0"/>
                       </a:solidFill>
                       <a:prstDash val="solid"/>
                       <a:round/>
@@ -6415,7 +7079,7 @@
                     </a:lnR>
                     <a:lnT w="3810" cap="flat" cmpd="sng" algn="ctr">
                       <a:solidFill>
-                        <a:srgbClr val="CBD5E1"/>
+                        <a:srgbClr val="CBD5E0"/>
                       </a:solidFill>
                       <a:prstDash val="solid"/>
                       <a:round/>
@@ -6424,7 +7088,7 @@
                     </a:lnT>
                     <a:lnB w="3810" cap="flat" cmpd="sng" algn="ctr">
                       <a:solidFill>
-                        <a:srgbClr val="CBD5E1"/>
+                        <a:srgbClr val="CBD5E0"/>
                       </a:solidFill>
                       <a:prstDash val="solid"/>
                       <a:round/>
@@ -6447,7 +7111,7 @@
                       <a:r>
                         <a:rPr lang="en-US" sz="1300" dirty="0">
                           <a:solidFill>
-                            <a:srgbClr val="0F172A"/>
+                            <a:srgbClr val="10161F"/>
                           </a:solidFill>
                           <a:latin typeface="Pretendard" pitchFamily="34" charset="0"/>
                           <a:ea typeface="Pretendard" pitchFamily="34" charset="-122"/>
@@ -6465,7 +7129,7 @@
                   <a:tcPr marL="50800" marR="50800" marT="25400" marB="25400" anchor="ctr">
                     <a:lnL w="3810" cap="flat" cmpd="sng" algn="ctr">
                       <a:solidFill>
-                        <a:srgbClr val="CBD5E1"/>
+                        <a:srgbClr val="CBD5E0"/>
                       </a:solidFill>
                       <a:prstDash val="solid"/>
                       <a:round/>
@@ -6474,7 +7138,7 @@
                     </a:lnL>
                     <a:lnR w="3810" cap="flat" cmpd="sng" algn="ctr">
                       <a:solidFill>
-                        <a:srgbClr val="CBD5E1"/>
+                        <a:srgbClr val="CBD5E0"/>
                       </a:solidFill>
                       <a:prstDash val="solid"/>
                       <a:round/>
@@ -6483,7 +7147,7 @@
                     </a:lnR>
                     <a:lnT w="3810" cap="flat" cmpd="sng" algn="ctr">
                       <a:solidFill>
-                        <a:srgbClr val="CBD5E1"/>
+                        <a:srgbClr val="CBD5E0"/>
                       </a:solidFill>
                       <a:prstDash val="solid"/>
                       <a:round/>
@@ -6492,7 +7156,7 @@
                     </a:lnT>
                     <a:lnB w="3810" cap="flat" cmpd="sng" algn="ctr">
                       <a:solidFill>
-                        <a:srgbClr val="CBD5E1"/>
+                        <a:srgbClr val="CBD5E0"/>
                       </a:solidFill>
                       <a:prstDash val="solid"/>
                       <a:round/>
@@ -6515,7 +7179,7 @@
                       <a:r>
                         <a:rPr lang="en-US" sz="1300" dirty="0">
                           <a:solidFill>
-                            <a:srgbClr val="0F172A"/>
+                            <a:srgbClr val="10161F"/>
                           </a:solidFill>
                           <a:latin typeface="Pretendard" pitchFamily="34" charset="0"/>
                           <a:ea typeface="Pretendard" pitchFamily="34" charset="-122"/>
@@ -6533,7 +7197,7 @@
                   <a:tcPr marL="50800" marR="50800" marT="25400" marB="25400" anchor="ctr">
                     <a:lnL w="3810" cap="flat" cmpd="sng" algn="ctr">
                       <a:solidFill>
-                        <a:srgbClr val="CBD5E1"/>
+                        <a:srgbClr val="CBD5E0"/>
                       </a:solidFill>
                       <a:prstDash val="solid"/>
                       <a:round/>
@@ -6542,7 +7206,7 @@
                     </a:lnL>
                     <a:lnR w="3810" cap="flat" cmpd="sng" algn="ctr">
                       <a:solidFill>
-                        <a:srgbClr val="CBD5E1"/>
+                        <a:srgbClr val="CBD5E0"/>
                       </a:solidFill>
                       <a:prstDash val="solid"/>
                       <a:round/>
@@ -6551,7 +7215,7 @@
                     </a:lnR>
                     <a:lnT w="3810" cap="flat" cmpd="sng" algn="ctr">
                       <a:solidFill>
-                        <a:srgbClr val="CBD5E1"/>
+                        <a:srgbClr val="CBD5E0"/>
                       </a:solidFill>
                       <a:prstDash val="solid"/>
                       <a:round/>
@@ -6560,7 +7224,7 @@
                     </a:lnT>
                     <a:lnB w="3810" cap="flat" cmpd="sng" algn="ctr">
                       <a:solidFill>
-                        <a:srgbClr val="CBD5E1"/>
+                        <a:srgbClr val="CBD5E0"/>
                       </a:solidFill>
                       <a:prstDash val="solid"/>
                       <a:round/>
@@ -6579,65 +7243,81 @@
       </p:graphicFrame>
       <p:sp>
         <p:nvSpPr>
-          <p:cNvPr id="6" name="Text 3"/>
-          <p:cNvSpPr/>
-          <p:nvPr/>
-        </p:nvSpPr>
-        <p:spPr>
-          <a:xfrm>
-            <a:off x="566928" y="6419088"/>
-            <a:ext cx="11057839" cy="201168"/>
-          </a:xfrm>
-          <a:prstGeom prst="rect">
-            <a:avLst/>
-          </a:prstGeom>
-          <a:noFill/>
-          <a:ln/>
-        </p:spPr>
-        <p:txBody>
-          <a:bodyPr wrap="square" lIns="0" tIns="0" rIns="0" bIns="0" rtlCol="0" anchor="ctr"/>
-          <a:lstStyle/>
-          <a:p>
-            <a:pPr algn="ctr" indent="0" marL="0">
-              <a:buNone/>
-            </a:pPr>
-            <a:r>
-              <a:rPr lang="en-US" sz="750" dirty="0">
-                <a:solidFill>
-                  <a:srgbClr val="64748B"/>
+          <p:cNvPr id="7" name="Text 4"/>
+          <p:cNvSpPr/>
+          <p:nvPr/>
+        </p:nvSpPr>
+        <p:spPr>
+          <a:xfrm>
+            <a:off x="566928" y="6382512"/>
+            <a:ext cx="7315200" cy="219456"/>
+          </a:xfrm>
+          <a:prstGeom prst="rect">
+            <a:avLst/>
+          </a:prstGeom>
+          <a:noFill/>
+          <a:ln/>
+        </p:spPr>
+        <p:txBody>
+          <a:bodyPr wrap="square" lIns="0" tIns="0" rIns="0" bIns="0" rtlCol="0" anchor="ctr"/>
+          <a:lstStyle/>
+          <a:p>
+            <a:pPr indent="0" marL="0">
+              <a:buNone/>
+            </a:pPr>
+            <a:r>
+              <a:rPr lang="en-US" sz="800" dirty="0">
+                <a:solidFill>
+                  <a:srgbClr val="718096"/>
                 </a:solidFill>
                 <a:latin typeface="Pretendard" pitchFamily="34" charset="0"/>
                 <a:ea typeface="Pretendard" pitchFamily="34" charset="-122"/>
                 <a:cs typeface="Pretendard" pitchFamily="34" charset="-120"/>
               </a:rPr>
-              <a:t>크리딜  ·    ·  6</a:t>
-            </a:r>
-            <a:endParaRPr lang="en-US" sz="750" dirty="0"/>
-          </a:p>
-        </p:txBody>
-      </p:sp>
-      <p:sp>
-        <p:nvSpPr>
-          <p:cNvPr id="7" name="Shape 4"/>
-          <p:cNvSpPr/>
-          <p:nvPr/>
-        </p:nvSpPr>
-        <p:spPr>
-          <a:xfrm>
-            <a:off x="4437172" y="6382512"/>
-            <a:ext cx="3317352" cy="0"/>
-          </a:xfrm>
-          <a:prstGeom prst="line">
-            <a:avLst/>
-          </a:prstGeom>
-          <a:noFill/>
-          <a:ln w="6350">
-            <a:solidFill>
-              <a:srgbClr val="6B8E00"/>
-            </a:solidFill>
-            <a:prstDash val="solid"/>
-          </a:ln>
-        </p:spPr>
+              <a:t>크리딜   |   </a:t>
+            </a:r>
+            <a:endParaRPr lang="en-US" sz="800" dirty="0"/>
+          </a:p>
+        </p:txBody>
+      </p:sp>
+      <p:sp>
+        <p:nvSpPr>
+          <p:cNvPr id="8" name="Text 5"/>
+          <p:cNvSpPr/>
+          <p:nvPr/>
+        </p:nvSpPr>
+        <p:spPr>
+          <a:xfrm>
+            <a:off x="10710367" y="6382512"/>
+            <a:ext cx="914400" cy="219456"/>
+          </a:xfrm>
+          <a:prstGeom prst="rect">
+            <a:avLst/>
+          </a:prstGeom>
+          <a:noFill/>
+          <a:ln/>
+        </p:spPr>
+        <p:txBody>
+          <a:bodyPr wrap="square" lIns="0" tIns="0" rIns="0" bIns="0" rtlCol="0" anchor="ctr"/>
+          <a:lstStyle/>
+          <a:p>
+            <a:pPr algn="r" indent="0" marL="0">
+              <a:buNone/>
+            </a:pPr>
+            <a:r>
+              <a:rPr lang="en-US" sz="900" b="1" dirty="0">
+                <a:solidFill>
+                  <a:srgbClr val="B98A2E"/>
+                </a:solidFill>
+                <a:latin typeface="Arial" pitchFamily="34" charset="0"/>
+                <a:ea typeface="Arial" pitchFamily="34" charset="-122"/>
+                <a:cs typeface="Arial" pitchFamily="34" charset="-120"/>
+              </a:rPr>
+              <a:t>6</a:t>
+            </a:r>
+            <a:endParaRPr lang="en-US" sz="900" dirty="0"/>
+          </a:p>
+        </p:txBody>
       </p:sp>
     </p:spTree>
   </p:cSld>
@@ -6679,14 +7359,14 @@
         </p:nvSpPr>
         <p:spPr>
           <a:xfrm>
-            <a:off x="566928" y="384048"/>
-            <a:ext cx="45720" cy="566928"/>
-          </a:xfrm>
-          <a:prstGeom prst="rect">
+            <a:off x="566928" y="457200"/>
+            <a:ext cx="384048" cy="384048"/>
+          </a:xfrm>
+          <a:prstGeom prst="ellipse">
             <a:avLst/>
           </a:prstGeom>
           <a:solidFill>
-            <a:srgbClr val="6B8E00"/>
+            <a:srgbClr val="B98A2E"/>
           </a:solidFill>
           <a:ln/>
         </p:spPr>
@@ -6699,32 +7379,71 @@
         </p:nvSpPr>
         <p:spPr>
           <a:xfrm>
-            <a:off x="749808" y="384048"/>
-            <a:ext cx="10874959" cy="182880"/>
-          </a:xfrm>
-          <a:prstGeom prst="rect">
-            <a:avLst/>
-          </a:prstGeom>
-          <a:noFill/>
-          <a:ln/>
-        </p:spPr>
-        <p:txBody>
-          <a:bodyPr wrap="square" lIns="0" tIns="0" rIns="0" bIns="0" rtlCol="0" anchor="ctr"/>
-          <a:lstStyle/>
-          <a:p>
-            <a:pPr indent="0" marL="0">
-              <a:buNone/>
-            </a:pPr>
-            <a:r>
-              <a:rPr lang="en-US" sz="950" b="1" spc="200" kern="0" dirty="0">
-                <a:solidFill>
-                  <a:srgbClr val="6B8E00"/>
+            <a:off x="566928" y="457200"/>
+            <a:ext cx="384048" cy="384048"/>
+          </a:xfrm>
+          <a:prstGeom prst="rect">
+            <a:avLst/>
+          </a:prstGeom>
+          <a:noFill/>
+          <a:ln/>
+        </p:spPr>
+        <p:txBody>
+          <a:bodyPr wrap="square" lIns="0" tIns="0" rIns="0" bIns="0" rtlCol="0" anchor="ctr"/>
+          <a:lstStyle/>
+          <a:p>
+            <a:pPr algn="ctr" indent="0" marL="0">
+              <a:buNone/>
+            </a:pPr>
+            <a:r>
+              <a:rPr lang="en-US" sz="1300" b="1" dirty="0">
+                <a:solidFill>
+                  <a:srgbClr val="FFFFFF"/>
                 </a:solidFill>
                 <a:latin typeface="Arial" pitchFamily="34" charset="0"/>
                 <a:ea typeface="Arial" pitchFamily="34" charset="-122"/>
                 <a:cs typeface="Arial" pitchFamily="34" charset="-120"/>
               </a:rPr>
-              <a:t>07  Risk</a:t>
+              <a:t>07</a:t>
+            </a:r>
+            <a:endParaRPr lang="en-US" sz="1300" dirty="0"/>
+          </a:p>
+        </p:txBody>
+      </p:sp>
+      <p:sp>
+        <p:nvSpPr>
+          <p:cNvPr id="4" name="Text 2"/>
+          <p:cNvSpPr/>
+          <p:nvPr/>
+        </p:nvSpPr>
+        <p:spPr>
+          <a:xfrm>
+            <a:off x="1133856" y="457200"/>
+            <a:ext cx="10490911" cy="182880"/>
+          </a:xfrm>
+          <a:prstGeom prst="rect">
+            <a:avLst/>
+          </a:prstGeom>
+          <a:noFill/>
+          <a:ln/>
+        </p:spPr>
+        <p:txBody>
+          <a:bodyPr wrap="square" lIns="0" tIns="0" rIns="0" bIns="0" rtlCol="0" anchor="ctr"/>
+          <a:lstStyle/>
+          <a:p>
+            <a:pPr indent="0" marL="0">
+              <a:buNone/>
+            </a:pPr>
+            <a:r>
+              <a:rPr lang="en-US" sz="950" b="1" spc="200" kern="0" dirty="0">
+                <a:solidFill>
+                  <a:srgbClr val="B98A2E"/>
+                </a:solidFill>
+                <a:latin typeface="Arial" pitchFamily="34" charset="0"/>
+                <a:ea typeface="Arial" pitchFamily="34" charset="-122"/>
+                <a:cs typeface="Arial" pitchFamily="34" charset="-120"/>
+              </a:rPr>
+              <a:t>Risk</a:t>
             </a:r>
             <a:endParaRPr lang="en-US" sz="950" dirty="0"/>
           </a:p>
@@ -6732,14 +7451,14 @@
       </p:sp>
       <p:sp>
         <p:nvSpPr>
-          <p:cNvPr id="4" name="Text 2"/>
-          <p:cNvSpPr/>
-          <p:nvPr/>
-        </p:nvSpPr>
-        <p:spPr>
-          <a:xfrm>
-            <a:off x="749808" y="566928"/>
-            <a:ext cx="10874959" cy="384048"/>
+          <p:cNvPr id="5" name="Text 3"/>
+          <p:cNvSpPr/>
+          <p:nvPr/>
+        </p:nvSpPr>
+        <p:spPr>
+          <a:xfrm>
+            <a:off x="1133856" y="640080"/>
+            <a:ext cx="10490911" cy="365760"/>
           </a:xfrm>
           <a:prstGeom prst="rect">
             <a:avLst/>
@@ -6755,9 +7474,9 @@
               <a:buNone/>
             </a:pPr>
             <a:r>
-              <a:rPr lang="en-US" sz="2200" b="1" dirty="0">
-                <a:solidFill>
-                  <a:srgbClr val="0F172A"/>
+              <a:rPr lang="en-US" sz="2300" b="1" dirty="0">
+                <a:solidFill>
+                  <a:srgbClr val="10161F"/>
                 </a:solidFill>
                 <a:latin typeface="Pretendard" pitchFamily="34" charset="0"/>
                 <a:ea typeface="Pretendard" pitchFamily="34" charset="-122"/>
@@ -6765,30 +7484,32 @@
               </a:rPr>
               <a:t>리스크 점검</a:t>
             </a:r>
-            <a:endParaRPr lang="en-US" sz="2200" dirty="0"/>
-          </a:p>
-        </p:txBody>
-      </p:sp>
-      <p:sp>
-        <p:nvSpPr>
-          <p:cNvPr id="5" name="Shape 3"/>
+            <a:endParaRPr lang="en-US" sz="2300" dirty="0"/>
+          </a:p>
+        </p:txBody>
+      </p:sp>
+      <p:sp>
+        <p:nvSpPr>
+          <p:cNvPr id="6" name="Shape 4"/>
           <p:cNvSpPr/>
           <p:nvPr/>
         </p:nvSpPr>
         <p:spPr>
           <a:xfrm>
             <a:off x="566928" y="1417320"/>
-            <a:ext cx="3503066" cy="3611880"/>
-          </a:xfrm>
-          <a:prstGeom prst="rect">
-            <a:avLst/>
+            <a:ext cx="11057839" cy="3611880"/>
+          </a:xfrm>
+          <a:prstGeom prst="roundRect">
+            <a:avLst>
+              <a:gd name="adj" fmla="val 1519"/>
+            </a:avLst>
           </a:prstGeom>
           <a:solidFill>
-            <a:srgbClr val="F8FAFC"/>
+            <a:srgbClr val="F7FAFC"/>
           </a:solidFill>
-          <a:ln w="3810">
+          <a:ln w="6350">
             <a:solidFill>
-              <a:srgbClr val="CBD5E1"/>
+              <a:srgbClr val="CBD5E0"/>
             </a:solidFill>
             <a:prstDash val="solid"/>
           </a:ln>
@@ -6796,46 +7517,26 @@
       </p:sp>
       <p:sp>
         <p:nvSpPr>
-          <p:cNvPr id="6" name="Shape 4"/>
+          <p:cNvPr id="7" name="Shape 5"/>
           <p:cNvSpPr/>
           <p:nvPr/>
         </p:nvSpPr>
         <p:spPr>
           <a:xfrm>
             <a:off x="566928" y="1417320"/>
-            <a:ext cx="3503066" cy="36576"/>
+            <a:ext cx="11057839" cy="45720"/>
           </a:xfrm>
           <a:prstGeom prst="rect">
             <a:avLst/>
           </a:prstGeom>
           <a:solidFill>
-            <a:srgbClr val="6B8E00"/>
+            <a:srgbClr val="B98A2E"/>
           </a:solidFill>
           <a:ln/>
         </p:spPr>
       </p:sp>
       <p:sp>
         <p:nvSpPr>
-          <p:cNvPr id="7" name="Shape 5"/>
-          <p:cNvSpPr/>
-          <p:nvPr/>
-        </p:nvSpPr>
-        <p:spPr>
-          <a:xfrm>
-            <a:off x="566928" y="1417320"/>
-            <a:ext cx="3503066" cy="45720"/>
-          </a:xfrm>
-          <a:prstGeom prst="rect">
-            <a:avLst/>
-          </a:prstGeom>
-          <a:solidFill>
-            <a:srgbClr val="6B8E00"/>
-          </a:solidFill>
-          <a:ln/>
-        </p:spPr>
-      </p:sp>
-      <p:sp>
-        <p:nvSpPr>
           <p:cNvPr id="8" name="Text 6"/>
           <p:cNvSpPr/>
           <p:nvPr/>
@@ -6843,7 +7544,7 @@
         <p:spPr>
           <a:xfrm>
             <a:off x="795528" y="1618488"/>
-            <a:ext cx="3045866" cy="292608"/>
+            <a:ext cx="10600639" cy="292608"/>
           </a:xfrm>
           <a:prstGeom prst="rect">
             <a:avLst/>
@@ -6861,7 +7562,7 @@
             <a:r>
               <a:rPr lang="en-US" sz="1350" b="1" dirty="0">
                 <a:solidFill>
-                  <a:srgbClr val="4F6A00"/>
+                  <a:srgbClr val="977024"/>
                 </a:solidFill>
                 <a:latin typeface="Pretendard" pitchFamily="34" charset="0"/>
                 <a:ea typeface="Pretendard" pitchFamily="34" charset="-122"/>
@@ -6881,26 +7582,28 @@
         </p:nvSpPr>
         <p:spPr>
           <a:xfrm>
-            <a:off x="795528" y="1929384"/>
-            <a:ext cx="3045866" cy="347472"/>
-          </a:xfrm>
-          <a:prstGeom prst="rect">
-            <a:avLst/>
-          </a:prstGeom>
-          <a:noFill/>
-          <a:ln/>
-        </p:spPr>
-        <p:txBody>
-          <a:bodyPr wrap="square" lIns="0" tIns="0" rIns="0" bIns="0" rtlCol="0" anchor="ctr"/>
+            <a:off x="795528" y="1911096"/>
+            <a:ext cx="10600639" cy="402336"/>
+          </a:xfrm>
+          <a:prstGeom prst="rect">
+            <a:avLst/>
+          </a:prstGeom>
+          <a:noFill/>
+          <a:ln/>
+        </p:spPr>
+        <p:txBody>
+          <a:bodyPr wrap="square" lIns="0" tIns="0" rIns="0" bIns="0" rtlCol="0" anchor="ctr">
+            <a:normAutofit/>
+          </a:bodyPr>
           <a:lstStyle/>
           <a:p>
             <a:pPr indent="0" marL="0">
               <a:buNone/>
             </a:pPr>
             <a:r>
-              <a:rPr lang="en-US" sz="1500" b="1" dirty="0">
-                <a:solidFill>
-                  <a:srgbClr val="0F172A"/>
+              <a:rPr lang="en-US" sz="1350" b="1" dirty="0">
+                <a:solidFill>
+                  <a:srgbClr val="10161F"/>
                 </a:solidFill>
                 <a:latin typeface="Pretendard" pitchFamily="34" charset="0"/>
                 <a:ea typeface="Pretendard" pitchFamily="34" charset="-122"/>
@@ -6908,7 +7611,7 @@
               </a:rPr>
               <a:t>36년</a:t>
             </a:r>
-            <a:endParaRPr lang="en-US" sz="1500" dirty="0"/>
+            <a:endParaRPr lang="en-US" sz="1350" dirty="0"/>
           </a:p>
         </p:txBody>
       </p:sp>
@@ -6920,27 +7623,32 @@
         </p:nvSpPr>
         <p:spPr>
           <a:xfrm>
-            <a:off x="795528" y="2313432"/>
-            <a:ext cx="3045866" cy="2606040"/>
-          </a:xfrm>
-          <a:prstGeom prst="rect">
-            <a:avLst/>
-          </a:prstGeom>
-          <a:noFill/>
-          <a:ln/>
-        </p:spPr>
-        <p:txBody>
-          <a:bodyPr wrap="square" lIns="0" tIns="0" rIns="0" bIns="0" rtlCol="0" anchor="t"/>
+            <a:off x="795528" y="2377440"/>
+            <a:ext cx="10600639" cy="2560320"/>
+          </a:xfrm>
+          <a:prstGeom prst="rect">
+            <a:avLst/>
+          </a:prstGeom>
+          <a:noFill/>
+          <a:ln/>
+        </p:spPr>
+        <p:txBody>
+          <a:bodyPr wrap="square" lIns="0" tIns="0" rIns="0" bIns="0" rtlCol="0" anchor="t">
+            <a:normAutofit/>
+          </a:bodyPr>
           <a:lstStyle/>
           <a:p>
             <a:pPr marL="342900" indent="-342900">
+              <a:lnSpc>
+                <a:spcPct val="125000"/>
+              </a:lnSpc>
               <a:buSzPct val="100000"/>
               <a:buChar char="•"/>
             </a:pPr>
             <a:r>
-              <a:rPr lang="en-US" sz="1250" dirty="0">
-                <a:solidFill>
-                  <a:srgbClr val="0F172A"/>
+              <a:rPr lang="en-US" sz="1200" dirty="0">
+                <a:solidFill>
+                  <a:srgbClr val="10161F"/>
                 </a:solidFill>
                 <a:latin typeface="Pretendard" pitchFamily="34" charset="0"/>
                 <a:ea typeface="Pretendard" pitchFamily="34" charset="-122"/>
@@ -6948,7 +7656,7 @@
               </a:rPr>
               <a:t>대수선 예산 반영</a:t>
             </a:r>
-            <a:endParaRPr lang="en-US" sz="1250" dirty="0"/>
+            <a:endParaRPr lang="en-US" sz="1200" dirty="0"/>
           </a:p>
         </p:txBody>
       </p:sp>
@@ -6960,59 +7668,75 @@
         </p:nvSpPr>
         <p:spPr>
           <a:xfrm>
-            <a:off x="566928" y="6419088"/>
-            <a:ext cx="11057839" cy="201168"/>
-          </a:xfrm>
-          <a:prstGeom prst="rect">
-            <a:avLst/>
-          </a:prstGeom>
-          <a:noFill/>
-          <a:ln/>
-        </p:spPr>
-        <p:txBody>
-          <a:bodyPr wrap="square" lIns="0" tIns="0" rIns="0" bIns="0" rtlCol="0" anchor="ctr"/>
-          <a:lstStyle/>
-          <a:p>
-            <a:pPr algn="ctr" indent="0" marL="0">
-              <a:buNone/>
-            </a:pPr>
-            <a:r>
-              <a:rPr lang="en-US" sz="750" dirty="0">
-                <a:solidFill>
-                  <a:srgbClr val="64748B"/>
+            <a:off x="566928" y="6382512"/>
+            <a:ext cx="7315200" cy="219456"/>
+          </a:xfrm>
+          <a:prstGeom prst="rect">
+            <a:avLst/>
+          </a:prstGeom>
+          <a:noFill/>
+          <a:ln/>
+        </p:spPr>
+        <p:txBody>
+          <a:bodyPr wrap="square" lIns="0" tIns="0" rIns="0" bIns="0" rtlCol="0" anchor="ctr"/>
+          <a:lstStyle/>
+          <a:p>
+            <a:pPr indent="0" marL="0">
+              <a:buNone/>
+            </a:pPr>
+            <a:r>
+              <a:rPr lang="en-US" sz="800" dirty="0">
+                <a:solidFill>
+                  <a:srgbClr val="718096"/>
                 </a:solidFill>
                 <a:latin typeface="Pretendard" pitchFamily="34" charset="0"/>
                 <a:ea typeface="Pretendard" pitchFamily="34" charset="-122"/>
                 <a:cs typeface="Pretendard" pitchFamily="34" charset="-120"/>
               </a:rPr>
-              <a:t>크리딜  ·    ·  7</a:t>
-            </a:r>
-            <a:endParaRPr lang="en-US" sz="750" dirty="0"/>
-          </a:p>
-        </p:txBody>
-      </p:sp>
-      <p:sp>
-        <p:nvSpPr>
-          <p:cNvPr id="12" name="Shape 10"/>
-          <p:cNvSpPr/>
-          <p:nvPr/>
-        </p:nvSpPr>
-        <p:spPr>
-          <a:xfrm>
-            <a:off x="4437172" y="6382512"/>
-            <a:ext cx="3317352" cy="0"/>
-          </a:xfrm>
-          <a:prstGeom prst="line">
-            <a:avLst/>
-          </a:prstGeom>
-          <a:noFill/>
-          <a:ln w="6350">
-            <a:solidFill>
-              <a:srgbClr val="6B8E00"/>
-            </a:solidFill>
-            <a:prstDash val="solid"/>
-          </a:ln>
-        </p:spPr>
+              <a:t>크리딜   |   </a:t>
+            </a:r>
+            <a:endParaRPr lang="en-US" sz="800" dirty="0"/>
+          </a:p>
+        </p:txBody>
+      </p:sp>
+      <p:sp>
+        <p:nvSpPr>
+          <p:cNvPr id="12" name="Text 10"/>
+          <p:cNvSpPr/>
+          <p:nvPr/>
+        </p:nvSpPr>
+        <p:spPr>
+          <a:xfrm>
+            <a:off x="10710367" y="6382512"/>
+            <a:ext cx="914400" cy="219456"/>
+          </a:xfrm>
+          <a:prstGeom prst="rect">
+            <a:avLst/>
+          </a:prstGeom>
+          <a:noFill/>
+          <a:ln/>
+        </p:spPr>
+        <p:txBody>
+          <a:bodyPr wrap="square" lIns="0" tIns="0" rIns="0" bIns="0" rtlCol="0" anchor="ctr"/>
+          <a:lstStyle/>
+          <a:p>
+            <a:pPr algn="r" indent="0" marL="0">
+              <a:buNone/>
+            </a:pPr>
+            <a:r>
+              <a:rPr lang="en-US" sz="900" b="1" dirty="0">
+                <a:solidFill>
+                  <a:srgbClr val="B98A2E"/>
+                </a:solidFill>
+                <a:latin typeface="Arial" pitchFamily="34" charset="0"/>
+                <a:ea typeface="Arial" pitchFamily="34" charset="-122"/>
+                <a:cs typeface="Arial" pitchFamily="34" charset="-120"/>
+              </a:rPr>
+              <a:t>7</a:t>
+            </a:r>
+            <a:endParaRPr lang="en-US" sz="900" dirty="0"/>
+          </a:p>
+        </p:txBody>
       </p:sp>
     </p:spTree>
   </p:cSld>
@@ -7054,14 +7778,14 @@
         </p:nvSpPr>
         <p:spPr>
           <a:xfrm>
-            <a:off x="566928" y="384048"/>
-            <a:ext cx="45720" cy="566928"/>
-          </a:xfrm>
-          <a:prstGeom prst="rect">
+            <a:off x="566928" y="457200"/>
+            <a:ext cx="384048" cy="384048"/>
+          </a:xfrm>
+          <a:prstGeom prst="ellipse">
             <a:avLst/>
           </a:prstGeom>
           <a:solidFill>
-            <a:srgbClr val="6B8E00"/>
+            <a:srgbClr val="B98A2E"/>
           </a:solidFill>
           <a:ln/>
         </p:spPr>
@@ -7074,32 +7798,71 @@
         </p:nvSpPr>
         <p:spPr>
           <a:xfrm>
-            <a:off x="749808" y="384048"/>
-            <a:ext cx="10874959" cy="182880"/>
-          </a:xfrm>
-          <a:prstGeom prst="rect">
-            <a:avLst/>
-          </a:prstGeom>
-          <a:noFill/>
-          <a:ln/>
-        </p:spPr>
-        <p:txBody>
-          <a:bodyPr wrap="square" lIns="0" tIns="0" rIns="0" bIns="0" rtlCol="0" anchor="ctr"/>
-          <a:lstStyle/>
-          <a:p>
-            <a:pPr indent="0" marL="0">
-              <a:buNone/>
-            </a:pPr>
-            <a:r>
-              <a:rPr lang="en-US" sz="950" b="1" spc="200" kern="0" dirty="0">
-                <a:solidFill>
-                  <a:srgbClr val="6B8E00"/>
+            <a:off x="566928" y="457200"/>
+            <a:ext cx="384048" cy="384048"/>
+          </a:xfrm>
+          <a:prstGeom prst="rect">
+            <a:avLst/>
+          </a:prstGeom>
+          <a:noFill/>
+          <a:ln/>
+        </p:spPr>
+        <p:txBody>
+          <a:bodyPr wrap="square" lIns="0" tIns="0" rIns="0" bIns="0" rtlCol="0" anchor="ctr"/>
+          <a:lstStyle/>
+          <a:p>
+            <a:pPr algn="ctr" indent="0" marL="0">
+              <a:buNone/>
+            </a:pPr>
+            <a:r>
+              <a:rPr lang="en-US" sz="1300" b="1" dirty="0">
+                <a:solidFill>
+                  <a:srgbClr val="FFFFFF"/>
                 </a:solidFill>
                 <a:latin typeface="Arial" pitchFamily="34" charset="0"/>
                 <a:ea typeface="Arial" pitchFamily="34" charset="-122"/>
                 <a:cs typeface="Arial" pitchFamily="34" charset="-120"/>
               </a:rPr>
-              <a:t>08  Thesis</a:t>
+              <a:t>08</a:t>
+            </a:r>
+            <a:endParaRPr lang="en-US" sz="1300" dirty="0"/>
+          </a:p>
+        </p:txBody>
+      </p:sp>
+      <p:sp>
+        <p:nvSpPr>
+          <p:cNvPr id="4" name="Text 2"/>
+          <p:cNvSpPr/>
+          <p:nvPr/>
+        </p:nvSpPr>
+        <p:spPr>
+          <a:xfrm>
+            <a:off x="1133856" y="457200"/>
+            <a:ext cx="10490911" cy="182880"/>
+          </a:xfrm>
+          <a:prstGeom prst="rect">
+            <a:avLst/>
+          </a:prstGeom>
+          <a:noFill/>
+          <a:ln/>
+        </p:spPr>
+        <p:txBody>
+          <a:bodyPr wrap="square" lIns="0" tIns="0" rIns="0" bIns="0" rtlCol="0" anchor="ctr"/>
+          <a:lstStyle/>
+          <a:p>
+            <a:pPr indent="0" marL="0">
+              <a:buNone/>
+            </a:pPr>
+            <a:r>
+              <a:rPr lang="en-US" sz="950" b="1" spc="200" kern="0" dirty="0">
+                <a:solidFill>
+                  <a:srgbClr val="B98A2E"/>
+                </a:solidFill>
+                <a:latin typeface="Arial" pitchFamily="34" charset="0"/>
+                <a:ea typeface="Arial" pitchFamily="34" charset="-122"/>
+                <a:cs typeface="Arial" pitchFamily="34" charset="-120"/>
+              </a:rPr>
+              <a:t>Thesis</a:t>
             </a:r>
             <a:endParaRPr lang="en-US" sz="950" dirty="0"/>
           </a:p>
@@ -7107,14 +7870,14 @@
       </p:sp>
       <p:sp>
         <p:nvSpPr>
-          <p:cNvPr id="4" name="Text 2"/>
-          <p:cNvSpPr/>
-          <p:nvPr/>
-        </p:nvSpPr>
-        <p:spPr>
-          <a:xfrm>
-            <a:off x="749808" y="566928"/>
-            <a:ext cx="10874959" cy="384048"/>
+          <p:cNvPr id="5" name="Text 3"/>
+          <p:cNvSpPr/>
+          <p:nvPr/>
+        </p:nvSpPr>
+        <p:spPr>
+          <a:xfrm>
+            <a:off x="1133856" y="640080"/>
+            <a:ext cx="10490911" cy="365760"/>
           </a:xfrm>
           <a:prstGeom prst="rect">
             <a:avLst/>
@@ -7130,9 +7893,9 @@
               <a:buNone/>
             </a:pPr>
             <a:r>
-              <a:rPr lang="en-US" sz="2200" b="1" dirty="0">
-                <a:solidFill>
-                  <a:srgbClr val="0F172A"/>
+              <a:rPr lang="en-US" sz="2300" b="1" dirty="0">
+                <a:solidFill>
+                  <a:srgbClr val="10161F"/>
                 </a:solidFill>
                 <a:latin typeface="Pretendard" pitchFamily="34" charset="0"/>
                 <a:ea typeface="Pretendard" pitchFamily="34" charset="-122"/>
@@ -7140,13 +7903,13 @@
               </a:rPr>
               <a:t>투자 포인트</a:t>
             </a:r>
-            <a:endParaRPr lang="en-US" sz="2200" dirty="0"/>
-          </a:p>
-        </p:txBody>
-      </p:sp>
-      <p:sp>
-        <p:nvSpPr>
-          <p:cNvPr id="5" name="Shape 3"/>
+            <a:endParaRPr lang="en-US" sz="2300" dirty="0"/>
+          </a:p>
+        </p:txBody>
+      </p:sp>
+      <p:sp>
+        <p:nvSpPr>
+          <p:cNvPr id="6" name="Shape 4"/>
           <p:cNvSpPr/>
           <p:nvPr/>
         </p:nvSpPr>
@@ -7161,11 +7924,11 @@
             </a:avLst>
           </a:prstGeom>
           <a:solidFill>
-            <a:srgbClr val="E8F5CC"/>
+            <a:srgbClr val="F3EBDA"/>
           </a:solidFill>
           <a:ln w="10160">
             <a:solidFill>
-              <a:srgbClr val="A3D900"/>
+              <a:srgbClr val="D9B668"/>
             </a:solidFill>
             <a:prstDash val="solid"/>
           </a:ln>
@@ -7173,14 +7936,14 @@
       </p:sp>
       <p:sp>
         <p:nvSpPr>
-          <p:cNvPr id="6" name="Text 4"/>
+          <p:cNvPr id="7" name="Text 5"/>
           <p:cNvSpPr/>
           <p:nvPr/>
         </p:nvSpPr>
         <p:spPr>
           <a:xfrm>
             <a:off x="749808" y="5093208"/>
-            <a:ext cx="1645920" cy="219456"/>
+            <a:ext cx="1691640" cy="256032"/>
           </a:xfrm>
           <a:prstGeom prst="rect">
             <a:avLst/>
@@ -7196,30 +7959,30 @@
               <a:buNone/>
             </a:pPr>
             <a:r>
-              <a:rPr lang="en-US" sz="950" b="1" dirty="0">
-                <a:solidFill>
-                  <a:srgbClr val="4F6A00"/>
+              <a:rPr lang="en-US" sz="1050" b="1" dirty="0">
+                <a:solidFill>
+                  <a:srgbClr val="977024"/>
                 </a:solidFill>
                 <a:latin typeface="Pretendard" pitchFamily="34" charset="0"/>
                 <a:ea typeface="Pretendard" pitchFamily="34" charset="-122"/>
                 <a:cs typeface="Pretendard" pitchFamily="34" charset="-120"/>
               </a:rPr>
-              <a:t>💡 종합 가치 제안</a:t>
-            </a:r>
-            <a:endParaRPr lang="en-US" sz="950" dirty="0"/>
-          </a:p>
-        </p:txBody>
-      </p:sp>
-      <p:sp>
-        <p:nvSpPr>
-          <p:cNvPr id="7" name="Text 5"/>
-          <p:cNvSpPr/>
-          <p:nvPr/>
-        </p:nvSpPr>
-        <p:spPr>
-          <a:xfrm>
-            <a:off x="2441448" y="5074920"/>
-            <a:ext cx="9000439" cy="621792"/>
+              <a:t>종합 가치 제안</a:t>
+            </a:r>
+            <a:endParaRPr lang="en-US" sz="1050" dirty="0"/>
+          </a:p>
+        </p:txBody>
+      </p:sp>
+      <p:sp>
+        <p:nvSpPr>
+          <p:cNvPr id="8" name="Text 6"/>
+          <p:cNvSpPr/>
+          <p:nvPr/>
+        </p:nvSpPr>
+        <p:spPr>
+          <a:xfrm>
+            <a:off x="2487168" y="5056632"/>
+            <a:ext cx="8954719" cy="658368"/>
           </a:xfrm>
           <a:prstGeom prst="rect">
             <a:avLst/>
@@ -7233,14 +7996,14 @@
           <a:p>
             <a:pPr indent="0" marL="0">
               <a:lnSpc>
-                <a:spcPct val="120000"/>
+                <a:spcPct val="125000"/>
               </a:lnSpc>
               <a:buNone/>
             </a:pPr>
             <a:r>
-              <a:rPr lang="en-US" sz="1000" dirty="0">
-                <a:solidFill>
-                  <a:srgbClr val="334155"/>
+              <a:rPr lang="en-US" sz="1100" dirty="0">
+                <a:solidFill>
+                  <a:srgbClr val="10161F"/>
                 </a:solidFill>
                 <a:latin typeface="Pretendard" pitchFamily="34" charset="0"/>
                 <a:ea typeface="Pretendard" pitchFamily="34" charset="-122"/>
@@ -7248,71 +8011,87 @@
               </a:rPr>
               <a:t>가로수길 프리미엄 입지의 저평가 기회와 증축/리모델링 밸류애드 잠재력이 핵심입니다.</a:t>
             </a:r>
-            <a:endParaRPr lang="en-US" sz="1000" dirty="0"/>
-          </a:p>
-        </p:txBody>
-      </p:sp>
-      <p:sp>
-        <p:nvSpPr>
-          <p:cNvPr id="8" name="Text 6"/>
-          <p:cNvSpPr/>
-          <p:nvPr/>
-        </p:nvSpPr>
-        <p:spPr>
-          <a:xfrm>
-            <a:off x="566928" y="6419088"/>
-            <a:ext cx="11057839" cy="201168"/>
-          </a:xfrm>
-          <a:prstGeom prst="rect">
-            <a:avLst/>
-          </a:prstGeom>
-          <a:noFill/>
-          <a:ln/>
-        </p:spPr>
-        <p:txBody>
-          <a:bodyPr wrap="square" lIns="0" tIns="0" rIns="0" bIns="0" rtlCol="0" anchor="ctr"/>
-          <a:lstStyle/>
-          <a:p>
-            <a:pPr algn="ctr" indent="0" marL="0">
-              <a:buNone/>
-            </a:pPr>
-            <a:r>
-              <a:rPr lang="en-US" sz="750" dirty="0">
-                <a:solidFill>
-                  <a:srgbClr val="64748B"/>
+            <a:endParaRPr lang="en-US" sz="1100" dirty="0"/>
+          </a:p>
+        </p:txBody>
+      </p:sp>
+      <p:sp>
+        <p:nvSpPr>
+          <p:cNvPr id="9" name="Text 7"/>
+          <p:cNvSpPr/>
+          <p:nvPr/>
+        </p:nvSpPr>
+        <p:spPr>
+          <a:xfrm>
+            <a:off x="566928" y="6382512"/>
+            <a:ext cx="7315200" cy="219456"/>
+          </a:xfrm>
+          <a:prstGeom prst="rect">
+            <a:avLst/>
+          </a:prstGeom>
+          <a:noFill/>
+          <a:ln/>
+        </p:spPr>
+        <p:txBody>
+          <a:bodyPr wrap="square" lIns="0" tIns="0" rIns="0" bIns="0" rtlCol="0" anchor="ctr"/>
+          <a:lstStyle/>
+          <a:p>
+            <a:pPr indent="0" marL="0">
+              <a:buNone/>
+            </a:pPr>
+            <a:r>
+              <a:rPr lang="en-US" sz="800" dirty="0">
+                <a:solidFill>
+                  <a:srgbClr val="718096"/>
                 </a:solidFill>
                 <a:latin typeface="Pretendard" pitchFamily="34" charset="0"/>
                 <a:ea typeface="Pretendard" pitchFamily="34" charset="-122"/>
                 <a:cs typeface="Pretendard" pitchFamily="34" charset="-120"/>
               </a:rPr>
-              <a:t>크리딜  ·    ·  8</a:t>
-            </a:r>
-            <a:endParaRPr lang="en-US" sz="750" dirty="0"/>
-          </a:p>
-        </p:txBody>
-      </p:sp>
-      <p:sp>
-        <p:nvSpPr>
-          <p:cNvPr id="9" name="Shape 7"/>
-          <p:cNvSpPr/>
-          <p:nvPr/>
-        </p:nvSpPr>
-        <p:spPr>
-          <a:xfrm>
-            <a:off x="4437172" y="6382512"/>
-            <a:ext cx="3317352" cy="0"/>
-          </a:xfrm>
-          <a:prstGeom prst="line">
-            <a:avLst/>
-          </a:prstGeom>
-          <a:noFill/>
-          <a:ln w="6350">
-            <a:solidFill>
-              <a:srgbClr val="6B8E00"/>
-            </a:solidFill>
-            <a:prstDash val="solid"/>
-          </a:ln>
-        </p:spPr>
+              <a:t>크리딜   |   </a:t>
+            </a:r>
+            <a:endParaRPr lang="en-US" sz="800" dirty="0"/>
+          </a:p>
+        </p:txBody>
+      </p:sp>
+      <p:sp>
+        <p:nvSpPr>
+          <p:cNvPr id="10" name="Text 8"/>
+          <p:cNvSpPr/>
+          <p:nvPr/>
+        </p:nvSpPr>
+        <p:spPr>
+          <a:xfrm>
+            <a:off x="10710367" y="6382512"/>
+            <a:ext cx="914400" cy="219456"/>
+          </a:xfrm>
+          <a:prstGeom prst="rect">
+            <a:avLst/>
+          </a:prstGeom>
+          <a:noFill/>
+          <a:ln/>
+        </p:spPr>
+        <p:txBody>
+          <a:bodyPr wrap="square" lIns="0" tIns="0" rIns="0" bIns="0" rtlCol="0" anchor="ctr"/>
+          <a:lstStyle/>
+          <a:p>
+            <a:pPr algn="r" indent="0" marL="0">
+              <a:buNone/>
+            </a:pPr>
+            <a:r>
+              <a:rPr lang="en-US" sz="900" b="1" dirty="0">
+                <a:solidFill>
+                  <a:srgbClr val="B98A2E"/>
+                </a:solidFill>
+                <a:latin typeface="Arial" pitchFamily="34" charset="0"/>
+                <a:ea typeface="Arial" pitchFamily="34" charset="-122"/>
+                <a:cs typeface="Arial" pitchFamily="34" charset="-120"/>
+              </a:rPr>
+              <a:t>8</a:t>
+            </a:r>
+            <a:endParaRPr lang="en-US" sz="900" dirty="0"/>
+          </a:p>
+        </p:txBody>
       </p:sp>
     </p:spTree>
   </p:cSld>
@@ -7354,14 +8133,14 @@
         </p:nvSpPr>
         <p:spPr>
           <a:xfrm>
-            <a:off x="566928" y="384048"/>
-            <a:ext cx="45720" cy="566928"/>
-          </a:xfrm>
-          <a:prstGeom prst="rect">
+            <a:off x="566928" y="457200"/>
+            <a:ext cx="384048" cy="384048"/>
+          </a:xfrm>
+          <a:prstGeom prst="ellipse">
             <a:avLst/>
           </a:prstGeom>
           <a:solidFill>
-            <a:srgbClr val="6B8E00"/>
+            <a:srgbClr val="B98A2E"/>
           </a:solidFill>
           <a:ln/>
         </p:spPr>
@@ -7374,32 +8153,71 @@
         </p:nvSpPr>
         <p:spPr>
           <a:xfrm>
-            <a:off x="749808" y="384048"/>
-            <a:ext cx="10874959" cy="182880"/>
-          </a:xfrm>
-          <a:prstGeom prst="rect">
-            <a:avLst/>
-          </a:prstGeom>
-          <a:noFill/>
-          <a:ln/>
-        </p:spPr>
-        <p:txBody>
-          <a:bodyPr wrap="square" lIns="0" tIns="0" rIns="0" bIns="0" rtlCol="0" anchor="ctr"/>
-          <a:lstStyle/>
-          <a:p>
-            <a:pPr indent="0" marL="0">
-              <a:buNone/>
-            </a:pPr>
-            <a:r>
-              <a:rPr lang="en-US" sz="950" b="1" spc="200" kern="0" dirty="0">
-                <a:solidFill>
-                  <a:srgbClr val="6B8E00"/>
+            <a:off x="566928" y="457200"/>
+            <a:ext cx="384048" cy="384048"/>
+          </a:xfrm>
+          <a:prstGeom prst="rect">
+            <a:avLst/>
+          </a:prstGeom>
+          <a:noFill/>
+          <a:ln/>
+        </p:spPr>
+        <p:txBody>
+          <a:bodyPr wrap="square" lIns="0" tIns="0" rIns="0" bIns="0" rtlCol="0" anchor="ctr"/>
+          <a:lstStyle/>
+          <a:p>
+            <a:pPr algn="ctr" indent="0" marL="0">
+              <a:buNone/>
+            </a:pPr>
+            <a:r>
+              <a:rPr lang="en-US" sz="1300" b="1" dirty="0">
+                <a:solidFill>
+                  <a:srgbClr val="FFFFFF"/>
                 </a:solidFill>
                 <a:latin typeface="Arial" pitchFamily="34" charset="0"/>
                 <a:ea typeface="Arial" pitchFamily="34" charset="-122"/>
                 <a:cs typeface="Arial" pitchFamily="34" charset="-120"/>
               </a:rPr>
-              <a:t>09  Process</a:t>
+              <a:t>09</a:t>
+            </a:r>
+            <a:endParaRPr lang="en-US" sz="1300" dirty="0"/>
+          </a:p>
+        </p:txBody>
+      </p:sp>
+      <p:sp>
+        <p:nvSpPr>
+          <p:cNvPr id="4" name="Text 2"/>
+          <p:cNvSpPr/>
+          <p:nvPr/>
+        </p:nvSpPr>
+        <p:spPr>
+          <a:xfrm>
+            <a:off x="1133856" y="457200"/>
+            <a:ext cx="10490911" cy="182880"/>
+          </a:xfrm>
+          <a:prstGeom prst="rect">
+            <a:avLst/>
+          </a:prstGeom>
+          <a:noFill/>
+          <a:ln/>
+        </p:spPr>
+        <p:txBody>
+          <a:bodyPr wrap="square" lIns="0" tIns="0" rIns="0" bIns="0" rtlCol="0" anchor="ctr"/>
+          <a:lstStyle/>
+          <a:p>
+            <a:pPr indent="0" marL="0">
+              <a:buNone/>
+            </a:pPr>
+            <a:r>
+              <a:rPr lang="en-US" sz="950" b="1" spc="200" kern="0" dirty="0">
+                <a:solidFill>
+                  <a:srgbClr val="B98A2E"/>
+                </a:solidFill>
+                <a:latin typeface="Arial" pitchFamily="34" charset="0"/>
+                <a:ea typeface="Arial" pitchFamily="34" charset="-122"/>
+                <a:cs typeface="Arial" pitchFamily="34" charset="-120"/>
+              </a:rPr>
+              <a:t>Process</a:t>
             </a:r>
             <a:endParaRPr lang="en-US" sz="950" dirty="0"/>
           </a:p>
@@ -7407,14 +8225,14 @@
       </p:sp>
       <p:sp>
         <p:nvSpPr>
-          <p:cNvPr id="4" name="Text 2"/>
-          <p:cNvSpPr/>
-          <p:nvPr/>
-        </p:nvSpPr>
-        <p:spPr>
-          <a:xfrm>
-            <a:off x="749808" y="566928"/>
-            <a:ext cx="10874959" cy="384048"/>
+          <p:cNvPr id="5" name="Text 3"/>
+          <p:cNvSpPr/>
+          <p:nvPr/>
+        </p:nvSpPr>
+        <p:spPr>
+          <a:xfrm>
+            <a:off x="1133856" y="640080"/>
+            <a:ext cx="10490911" cy="365760"/>
           </a:xfrm>
           <a:prstGeom prst="rect">
             <a:avLst/>
@@ -7430,9 +8248,9 @@
               <a:buNone/>
             </a:pPr>
             <a:r>
-              <a:rPr lang="en-US" sz="2200" b="1" dirty="0">
-                <a:solidFill>
-                  <a:srgbClr val="0F172A"/>
+              <a:rPr lang="en-US" sz="2300" b="1" dirty="0">
+                <a:solidFill>
+                  <a:srgbClr val="10161F"/>
                 </a:solidFill>
                 <a:latin typeface="Pretendard" pitchFamily="34" charset="0"/>
                 <a:ea typeface="Pretendard" pitchFamily="34" charset="-122"/>
@@ -7440,13 +8258,13 @@
               </a:rPr>
               <a:t>다음 단계</a:t>
             </a:r>
-            <a:endParaRPr lang="en-US" sz="2200" dirty="0"/>
-          </a:p>
-        </p:txBody>
-      </p:sp>
-      <p:sp>
-        <p:nvSpPr>
-          <p:cNvPr id="5" name="Shape 3"/>
+            <a:endParaRPr lang="en-US" sz="2300" dirty="0"/>
+          </a:p>
+        </p:txBody>
+      </p:sp>
+      <p:sp>
+        <p:nvSpPr>
+          <p:cNvPr id="6" name="Shape 4"/>
           <p:cNvSpPr/>
           <p:nvPr/>
         </p:nvSpPr>
@@ -7455,15 +8273,17 @@
             <a:off x="566928" y="1572768"/>
             <a:ext cx="11057839" cy="3200400"/>
           </a:xfrm>
-          <a:prstGeom prst="rect">
-            <a:avLst/>
+          <a:prstGeom prst="roundRect">
+            <a:avLst>
+              <a:gd name="adj" fmla="val 1714"/>
+            </a:avLst>
           </a:prstGeom>
           <a:solidFill>
-            <a:srgbClr val="F8FAFC"/>
+            <a:srgbClr val="F7FAFC"/>
           </a:solidFill>
-          <a:ln w="3810">
+          <a:ln w="6350">
             <a:solidFill>
-              <a:srgbClr val="CBD5E1"/>
+              <a:srgbClr val="CBD5E0"/>
             </a:solidFill>
             <a:prstDash val="solid"/>
           </a:ln>
@@ -7471,26 +8291,6 @@
       </p:sp>
       <p:sp>
         <p:nvSpPr>
-          <p:cNvPr id="6" name="Shape 4"/>
-          <p:cNvSpPr/>
-          <p:nvPr/>
-        </p:nvSpPr>
-        <p:spPr>
-          <a:xfrm>
-            <a:off x="566928" y="1572768"/>
-            <a:ext cx="11057839" cy="36576"/>
-          </a:xfrm>
-          <a:prstGeom prst="rect">
-            <a:avLst/>
-          </a:prstGeom>
-          <a:solidFill>
-            <a:srgbClr val="6B8E00"/>
-          </a:solidFill>
-          <a:ln/>
-        </p:spPr>
-      </p:sp>
-      <p:sp>
-        <p:nvSpPr>
           <p:cNvPr id="7" name="Shape 5"/>
           <p:cNvSpPr/>
           <p:nvPr/>
@@ -7504,7 +8304,7 @@
             <a:avLst/>
           </a:prstGeom>
           <a:solidFill>
-            <a:srgbClr val="6B8E00"/>
+            <a:srgbClr val="B98A2E"/>
           </a:solidFill>
           <a:ln/>
         </p:spPr>
@@ -7575,7 +8375,7 @@
             <a:r>
               <a:rPr lang="en-US" sz="1600" b="1" dirty="0">
                 <a:solidFill>
-                  <a:srgbClr val="0F172A"/>
+                  <a:srgbClr val="10161F"/>
                 </a:solidFill>
                 <a:latin typeface="Pretendard" pitchFamily="34" charset="0"/>
                 <a:ea typeface="Pretendard" pitchFamily="34" charset="-122"/>
@@ -7614,7 +8414,7 @@
             <a:r>
               <a:rPr lang="en-US" sz="1100" dirty="0">
                 <a:solidFill>
-                  <a:srgbClr val="0F172A"/>
+                  <a:srgbClr val="10161F"/>
                 </a:solidFill>
                 <a:latin typeface="Pretendard" pitchFamily="34" charset="0"/>
                 <a:ea typeface="Pretendard" pitchFamily="34" charset="-122"/>
@@ -7634,59 +8434,75 @@
         </p:nvSpPr>
         <p:spPr>
           <a:xfrm>
-            <a:off x="566928" y="6419088"/>
-            <a:ext cx="11057839" cy="201168"/>
-          </a:xfrm>
-          <a:prstGeom prst="rect">
-            <a:avLst/>
-          </a:prstGeom>
-          <a:noFill/>
-          <a:ln/>
-        </p:spPr>
-        <p:txBody>
-          <a:bodyPr wrap="square" lIns="0" tIns="0" rIns="0" bIns="0" rtlCol="0" anchor="ctr"/>
-          <a:lstStyle/>
-          <a:p>
-            <a:pPr algn="ctr" indent="0" marL="0">
-              <a:buNone/>
-            </a:pPr>
-            <a:r>
-              <a:rPr lang="en-US" sz="750" dirty="0">
-                <a:solidFill>
-                  <a:srgbClr val="64748B"/>
+            <a:off x="566928" y="6382512"/>
+            <a:ext cx="7315200" cy="219456"/>
+          </a:xfrm>
+          <a:prstGeom prst="rect">
+            <a:avLst/>
+          </a:prstGeom>
+          <a:noFill/>
+          <a:ln/>
+        </p:spPr>
+        <p:txBody>
+          <a:bodyPr wrap="square" lIns="0" tIns="0" rIns="0" bIns="0" rtlCol="0" anchor="ctr"/>
+          <a:lstStyle/>
+          <a:p>
+            <a:pPr indent="0" marL="0">
+              <a:buNone/>
+            </a:pPr>
+            <a:r>
+              <a:rPr lang="en-US" sz="800" dirty="0">
+                <a:solidFill>
+                  <a:srgbClr val="718096"/>
                 </a:solidFill>
                 <a:latin typeface="Pretendard" pitchFamily="34" charset="0"/>
                 <a:ea typeface="Pretendard" pitchFamily="34" charset="-122"/>
                 <a:cs typeface="Pretendard" pitchFamily="34" charset="-120"/>
               </a:rPr>
-              <a:t>크리딜  ·    ·  9</a:t>
-            </a:r>
-            <a:endParaRPr lang="en-US" sz="750" dirty="0"/>
-          </a:p>
-        </p:txBody>
-      </p:sp>
-      <p:sp>
-        <p:nvSpPr>
-          <p:cNvPr id="12" name="Shape 10"/>
-          <p:cNvSpPr/>
-          <p:nvPr/>
-        </p:nvSpPr>
-        <p:spPr>
-          <a:xfrm>
-            <a:off x="4437172" y="6382512"/>
-            <a:ext cx="3317352" cy="0"/>
-          </a:xfrm>
-          <a:prstGeom prst="line">
-            <a:avLst/>
-          </a:prstGeom>
-          <a:noFill/>
-          <a:ln w="6350">
-            <a:solidFill>
-              <a:srgbClr val="6B8E00"/>
-            </a:solidFill>
-            <a:prstDash val="solid"/>
-          </a:ln>
-        </p:spPr>
+              <a:t>크리딜   |   </a:t>
+            </a:r>
+            <a:endParaRPr lang="en-US" sz="800" dirty="0"/>
+          </a:p>
+        </p:txBody>
+      </p:sp>
+      <p:sp>
+        <p:nvSpPr>
+          <p:cNvPr id="12" name="Text 10"/>
+          <p:cNvSpPr/>
+          <p:nvPr/>
+        </p:nvSpPr>
+        <p:spPr>
+          <a:xfrm>
+            <a:off x="10710367" y="6382512"/>
+            <a:ext cx="914400" cy="219456"/>
+          </a:xfrm>
+          <a:prstGeom prst="rect">
+            <a:avLst/>
+          </a:prstGeom>
+          <a:noFill/>
+          <a:ln/>
+        </p:spPr>
+        <p:txBody>
+          <a:bodyPr wrap="square" lIns="0" tIns="0" rIns="0" bIns="0" rtlCol="0" anchor="ctr"/>
+          <a:lstStyle/>
+          <a:p>
+            <a:pPr algn="r" indent="0" marL="0">
+              <a:buNone/>
+            </a:pPr>
+            <a:r>
+              <a:rPr lang="en-US" sz="900" b="1" dirty="0">
+                <a:solidFill>
+                  <a:srgbClr val="B98A2E"/>
+                </a:solidFill>
+                <a:latin typeface="Arial" pitchFamily="34" charset="0"/>
+                <a:ea typeface="Arial" pitchFamily="34" charset="-122"/>
+                <a:cs typeface="Arial" pitchFamily="34" charset="-120"/>
+              </a:rPr>
+              <a:t>9</a:t>
+            </a:r>
+            <a:endParaRPr lang="en-US" sz="900" dirty="0"/>
+          </a:p>
+        </p:txBody>
       </p:sp>
     </p:spTree>
   </p:cSld>

--- a/docs/test/stress/e2e-outputs/trading_basic_pr06.pptx
+++ b/docs/test/stress/e2e-outputs/trading_basic_pr06.pptx
@@ -6797,7 +6797,7 @@
                 <a:gridCol w="3685946"/>
                 <a:gridCol w="3685946"/>
               </a:tblGrid>
-              <a:tr h="457200">
+              <a:tr h="438912">
                 <a:tc>
                   <a:txBody>
                     <a:bodyPr/>
@@ -7017,7 +7017,7 @@
                   </a:tcPr>
                 </a:tc>
               </a:tr>
-              <a:tr h="457200">
+              <a:tr h="438912">
                 <a:tc>
                   <a:txBody>
                     <a:bodyPr/>
@@ -7497,11 +7497,11 @@
         <p:spPr>
           <a:xfrm>
             <a:off x="566928" y="1417320"/>
-            <a:ext cx="11057839" cy="3611880"/>
+            <a:ext cx="11057839" cy="3657600"/>
           </a:xfrm>
           <a:prstGeom prst="roundRect">
             <a:avLst>
-              <a:gd name="adj" fmla="val 1519"/>
+              <a:gd name="adj" fmla="val 1500"/>
             </a:avLst>
           </a:prstGeom>
           <a:solidFill>
@@ -7582,8 +7582,8 @@
         </p:nvSpPr>
         <p:spPr>
           <a:xfrm>
-            <a:off x="795528" y="1911096"/>
-            <a:ext cx="10600639" cy="402336"/>
+            <a:off x="795528" y="1947672"/>
+            <a:ext cx="10600639" cy="365760"/>
           </a:xfrm>
           <a:prstGeom prst="rect">
             <a:avLst/>
@@ -7601,7 +7601,7 @@
               <a:buNone/>
             </a:pPr>
             <a:r>
-              <a:rPr lang="en-US" sz="1350" b="1" dirty="0">
+              <a:rPr lang="en-US" sz="1250" b="1" dirty="0">
                 <a:solidFill>
                   <a:srgbClr val="10161F"/>
                 </a:solidFill>
@@ -7611,7 +7611,7 @@
               </a:rPr>
               <a:t>36년</a:t>
             </a:r>
-            <a:endParaRPr lang="en-US" sz="1350" dirty="0"/>
+            <a:endParaRPr lang="en-US" sz="1250" dirty="0"/>
           </a:p>
         </p:txBody>
       </p:sp>
@@ -7624,7 +7624,7 @@
         <p:spPr>
           <a:xfrm>
             <a:off x="795528" y="2377440"/>
-            <a:ext cx="10600639" cy="2560320"/>
+            <a:ext cx="10600639" cy="2606040"/>
           </a:xfrm>
           <a:prstGeom prst="rect">
             <a:avLst/>
@@ -7646,7 +7646,7 @@
               <a:buChar char="•"/>
             </a:pPr>
             <a:r>
-              <a:rPr lang="en-US" sz="1200" dirty="0">
+              <a:rPr lang="en-US" sz="1100" dirty="0">
                 <a:solidFill>
                   <a:srgbClr val="10161F"/>
                 </a:solidFill>
@@ -7656,20 +7656,47 @@
               </a:rPr>
               <a:t>대수선 예산 반영</a:t>
             </a:r>
-            <a:endParaRPr lang="en-US" sz="1200" dirty="0"/>
-          </a:p>
-        </p:txBody>
-      </p:sp>
-      <p:sp>
-        <p:nvSpPr>
-          <p:cNvPr id="11" name="Text 9"/>
-          <p:cNvSpPr/>
-          <p:nvPr/>
-        </p:nvSpPr>
-        <p:spPr>
-          <a:xfrm>
-            <a:off x="566928" y="6382512"/>
-            <a:ext cx="7315200" cy="219456"/>
+            <a:endParaRPr lang="en-US" sz="1100" dirty="0"/>
+          </a:p>
+        </p:txBody>
+      </p:sp>
+      <p:sp>
+        <p:nvSpPr>
+          <p:cNvPr id="11" name="Shape 9"/>
+          <p:cNvSpPr/>
+          <p:nvPr/>
+        </p:nvSpPr>
+        <p:spPr>
+          <a:xfrm>
+            <a:off x="566928" y="5193792"/>
+            <a:ext cx="11057839" cy="621792"/>
+          </a:xfrm>
+          <a:prstGeom prst="roundRect">
+            <a:avLst>
+              <a:gd name="adj" fmla="val 8824"/>
+            </a:avLst>
+          </a:prstGeom>
+          <a:solidFill>
+            <a:srgbClr val="F7FAFC"/>
+          </a:solidFill>
+          <a:ln w="6350">
+            <a:solidFill>
+              <a:srgbClr val="CBD5E0"/>
+            </a:solidFill>
+            <a:prstDash val="solid"/>
+          </a:ln>
+        </p:spPr>
+      </p:sp>
+      <p:sp>
+        <p:nvSpPr>
+          <p:cNvPr id="12" name="Text 10"/>
+          <p:cNvSpPr/>
+          <p:nvPr/>
+        </p:nvSpPr>
+        <p:spPr>
+          <a:xfrm>
+            <a:off x="795528" y="5193792"/>
+            <a:ext cx="10600639" cy="621792"/>
           </a:xfrm>
           <a:prstGeom prst="rect">
             <a:avLst/>
@@ -7685,14 +7712,53 @@
               <a:buNone/>
             </a:pPr>
             <a:r>
-              <a:rPr lang="en-US" sz="800" dirty="0">
-                <a:solidFill>
-                  <a:srgbClr val="718096"/>
+              <a:rPr lang="en-US" sz="1100" dirty="0">
+                <a:solidFill>
+                  <a:srgbClr val="10161F"/>
                 </a:solidFill>
                 <a:latin typeface="Pretendard" pitchFamily="34" charset="0"/>
                 <a:ea typeface="Pretendard" pitchFamily="34" charset="-122"/>
                 <a:cs typeface="Pretendard" pitchFamily="34" charset="-120"/>
               </a:rPr>
+              <a:t>※ 본 리스크 체크는 공부 및 브로커 확인 기반이며, 매수 전 전문 실사팀(변호사/건축사)을 통한 정밀 실사가 필요합니다.</a:t>
+            </a:r>
+            <a:endParaRPr lang="en-US" sz="1100" dirty="0"/>
+          </a:p>
+        </p:txBody>
+      </p:sp>
+      <p:sp>
+        <p:nvSpPr>
+          <p:cNvPr id="13" name="Text 11"/>
+          <p:cNvSpPr/>
+          <p:nvPr/>
+        </p:nvSpPr>
+        <p:spPr>
+          <a:xfrm>
+            <a:off x="566928" y="6382512"/>
+            <a:ext cx="7315200" cy="219456"/>
+          </a:xfrm>
+          <a:prstGeom prst="rect">
+            <a:avLst/>
+          </a:prstGeom>
+          <a:noFill/>
+          <a:ln/>
+        </p:spPr>
+        <p:txBody>
+          <a:bodyPr wrap="square" lIns="0" tIns="0" rIns="0" bIns="0" rtlCol="0" anchor="ctr"/>
+          <a:lstStyle/>
+          <a:p>
+            <a:pPr indent="0" marL="0">
+              <a:buNone/>
+            </a:pPr>
+            <a:r>
+              <a:rPr lang="en-US" sz="800" dirty="0">
+                <a:solidFill>
+                  <a:srgbClr val="718096"/>
+                </a:solidFill>
+                <a:latin typeface="Pretendard" pitchFamily="34" charset="0"/>
+                <a:ea typeface="Pretendard" pitchFamily="34" charset="-122"/>
+                <a:cs typeface="Pretendard" pitchFamily="34" charset="-120"/>
+              </a:rPr>
               <a:t>크리딜   |   </a:t>
             </a:r>
             <a:endParaRPr lang="en-US" sz="800" dirty="0"/>
@@ -7701,7 +7767,7 @@
       </p:sp>
       <p:sp>
         <p:nvSpPr>
-          <p:cNvPr id="12" name="Text 10"/>
+          <p:cNvPr id="14" name="Text 12"/>
           <p:cNvSpPr/>
           <p:nvPr/>
         </p:nvSpPr>

--- a/docs/test/stress/e2e-outputs/trading_basic_pr06.pptx
+++ b/docs/test/stress/e2e-outputs/trading_basic_pr06.pptx
@@ -1905,7 +1905,7 @@
                 <a:ea typeface="Arial" pitchFamily="34" charset="-122"/>
                 <a:cs typeface="Arial" pitchFamily="34" charset="-120"/>
               </a:rPr>
-              <a:t>BASIC IM</a:t>
+              <a:t>INVESTMENT MEMORANDUM</a:t>
             </a:r>
             <a:endParaRPr lang="en-US" sz="1000" dirty="0"/>
           </a:p>
@@ -4553,7 +4553,7 @@
                 <a:ea typeface="Pretendard" pitchFamily="34" charset="-122"/>
                 <a:cs typeface="Pretendard" pitchFamily="34" charset="-120"/>
               </a:rPr>
-              <a:t>원금 안전판: 핵심권역 핵심 입지 및 우량 대지 지분 가치로 하방 경직성 확보</a:t>
+              <a:t>입지 분석: 핵심권역 소재 자산의 입지 특성 및 대지 지분 가치 확인 필요</a:t>
             </a:r>
             <a:endParaRPr lang="en-US" sz="1150" dirty="0"/>
           </a:p>
@@ -4685,7 +4685,7 @@
                 <a:ea typeface="Pretendard" pitchFamily="34" charset="-122"/>
                 <a:cs typeface="Pretendard" pitchFamily="34" charset="-120"/>
               </a:rPr>
-              <a:t>수익 안정성: 매매 시장 적정가 수준 대비 안정적 월 임대수익 창출 기반</a:t>
+              <a:t>수익 구조: 매매 시장 적정가 수준 대비 임대수익 현황 분석 필요</a:t>
             </a:r>
             <a:endParaRPr lang="en-US" sz="1150" dirty="0"/>
           </a:p>
@@ -4817,7 +4817,7 @@
                 <a:ea typeface="Pretendard" pitchFamily="34" charset="-122"/>
                 <a:cs typeface="Pretendard" pitchFamily="34" charset="-120"/>
               </a:rPr>
-              <a:t>미래 가치: 향후 권역 지가 상승 및 공법상 밸류업을 통한 자본이득 실현 가능</a:t>
+              <a:t>향후 검토: 권역 개발 동향 및 공법상 변경 가능성 확인 필요</a:t>
             </a:r>
             <a:endParaRPr lang="en-US" sz="1150" dirty="0"/>
           </a:p>
@@ -8364,7 +8364,7 @@
         <p:spPr>
           <a:xfrm>
             <a:off x="786384" y="1792224"/>
-            <a:ext cx="384048" cy="384048"/>
+            <a:ext cx="438912" cy="438912"/>
           </a:xfrm>
           <a:prstGeom prst="ellipse">
             <a:avLst/>
@@ -8384,7 +8384,7 @@
         <p:spPr>
           <a:xfrm>
             <a:off x="786384" y="1792224"/>
-            <a:ext cx="384048" cy="384048"/>
+            <a:ext cx="438912" cy="438912"/>
           </a:xfrm>
           <a:prstGeom prst="rect">
             <a:avLst/>
@@ -8400,7 +8400,7 @@
               <a:buNone/>
             </a:pPr>
             <a:r>
-              <a:rPr lang="en-US" sz="1300" b="1" dirty="0">
+              <a:rPr lang="en-US" sz="1400" b="1" dirty="0">
                 <a:solidFill>
                   <a:srgbClr val="FFFFFF"/>
                 </a:solidFill>
@@ -8408,9 +8408,9 @@
                 <a:ea typeface="Arial" pitchFamily="34" charset="-122"/>
                 <a:cs typeface="Arial" pitchFamily="34" charset="-120"/>
               </a:rPr>
-              <a:t>STEP 1</a:t>
-            </a:r>
-            <a:endParaRPr lang="en-US" sz="1300" dirty="0"/>
+              <a:t>01</a:t>
+            </a:r>
+            <a:endParaRPr lang="en-US" sz="1400" dirty="0"/>
           </a:p>
         </p:txBody>
       </p:sp>
@@ -8447,7 +8447,7 @@
                 <a:ea typeface="Pretendard" pitchFamily="34" charset="-122"/>
                 <a:cs typeface="Pretendard" pitchFamily="34" charset="-120"/>
               </a:rPr>
-              <a:t>건축사 사전 상담 및 대수선 비용 산정을 권장합니다.</a:t>
+              <a:t>1단계</a:t>
             </a:r>
             <a:endParaRPr lang="en-US" sz="1600" dirty="0"/>
           </a:p>
@@ -8473,6 +8473,23 @@
         <p:txBody>
           <a:bodyPr wrap="square" rtlCol="0" anchor="t"/>
           <a:lstStyle/>
+          <a:p>
+            <a:pPr indent="0" marL="0">
+              <a:buNone/>
+            </a:pPr>
+            <a:r>
+              <a:rPr lang="en-US" sz="1100" dirty="0">
+                <a:solidFill>
+                  <a:srgbClr val="10161F"/>
+                </a:solidFill>
+                <a:latin typeface="Pretendard" pitchFamily="34" charset="0"/>
+                <a:ea typeface="Pretendard" pitchFamily="34" charset="-122"/>
+                <a:cs typeface="Pretendard" pitchFamily="34" charset="-120"/>
+              </a:rPr>
+              <a:t>건축사 사전 상담 및 대수선 비용 산정을 권장합니다.</a:t>
+            </a:r>
+            <a:endParaRPr lang="en-US" sz="1100" dirty="0"/>
+          </a:p>
           <a:p>
             <a:pPr indent="0" marL="0">
               <a:buNone/>

--- a/docs/test/stress/e2e-outputs/trading_basic_pr06.pptx
+++ b/docs/test/stress/e2e-outputs/trading_basic_pr06.pptx
@@ -15,9 +15,14 @@
     <p:sldId id="263" r:id="rId9"/>
     <p:sldId id="264" r:id="rId10"/>
     <p:sldId id="265" r:id="rId11"/>
+    <p:sldId id="266" r:id="rId12"/>
+    <p:sldId id="267" r:id="rId13"/>
+    <p:sldId id="268" r:id="rId14"/>
+    <p:sldId id="269" r:id="rId15"/>
+    <p:sldId id="270" r:id="rId16"/>
   </p:sldIdLst>
   <p:notesMasterIdLst>
-    <p:notesMasterId r:id="rId12"/>
+    <p:notesMasterId r:id="rId17"/>
   </p:notesMasterIdLst>
   <p:sldSz cx="12192000" cy="6858000"/>
   <p:notesSz cx="6858000" cy="12192000"/>
@@ -623,6 +628,446 @@
             <a:fld id="{F7021451-1387-4CA6-816F-3879F97B5CBC}" type="slidenum">
               <a:rPr lang="en-US"/>
               <a:t>10</a:t>
+            </a:fld>
+            <a:endParaRPr lang="en-US"/>
+          </a:p>
+        </p:txBody>
+      </p:sp>
+    </p:spTree>
+    <p:extLst>
+      <p:ext uri="{BB962C8B-B14F-4D97-AF65-F5344CB8AC3E}">
+        <p14:creationId xmlns:p14="http://schemas.microsoft.com/office/powerpoint/2010/main" val="1024086991"/>
+      </p:ext>
+    </p:extLst>
+  </p:cSld>
+  <p:clrMapOvr>
+    <a:masterClrMapping/>
+  </p:clrMapOvr>
+</p:notes>
+</file>
+
+<file path=ppt/notesSlides/notesSlide11.xml><?xml version="1.0" encoding="utf-8"?>
+<p:notes xmlns:a="http://schemas.openxmlformats.org/drawingml/2006/main" xmlns:r="http://schemas.openxmlformats.org/officeDocument/2006/relationships" xmlns:p="http://schemas.openxmlformats.org/presentationml/2006/main">
+  <p:cSld>
+    <p:spTree>
+      <p:nvGrpSpPr>
+        <p:cNvPr id="1" name=""/>
+        <p:cNvGrpSpPr/>
+        <p:nvPr/>
+      </p:nvGrpSpPr>
+      <p:grpSpPr>
+        <a:xfrm>
+          <a:off x="0" y="0"/>
+          <a:ext cx="0" cy="0"/>
+          <a:chOff x="0" y="0"/>
+          <a:chExt cx="0" cy="0"/>
+        </a:xfrm>
+      </p:grpSpPr>
+      <p:sp>
+        <p:nvSpPr>
+          <p:cNvPr id="2" name="Slide Image Placeholder 1"/>
+          <p:cNvSpPr>
+            <a:spLocks noGrp="1" noRot="1" noChangeAspect="1"/>
+          </p:cNvSpPr>
+          <p:nvPr>
+            <p:ph type="sldImg"/>
+          </p:nvPr>
+        </p:nvSpPr>
+        <p:spPr/>
+      </p:sp>
+      <p:sp>
+        <p:nvSpPr>
+          <p:cNvPr id="3" name="Notes Placeholder 2"/>
+          <p:cNvSpPr>
+            <a:spLocks noGrp="1"/>
+          </p:cNvSpPr>
+          <p:nvPr>
+            <p:ph type="body" idx="1"/>
+          </p:nvPr>
+        </p:nvSpPr>
+        <p:spPr/>
+        <p:txBody>
+          <a:bodyPr/>
+          <a:lstStyle/>
+          <a:p>
+            <a:r>
+              <a:rPr lang="en-US" dirty="0"/>
+              <a:t/>
+            </a:r>
+            <a:endParaRPr lang="en-US" dirty="0"/>
+          </a:p>
+        </p:txBody>
+      </p:sp>
+      <p:sp>
+        <p:nvSpPr>
+          <p:cNvPr id="4" name="Slide Number Placeholder 3"/>
+          <p:cNvSpPr>
+            <a:spLocks noGrp="1"/>
+          </p:cNvSpPr>
+          <p:nvPr>
+            <p:ph type="sldNum" sz="quarter" idx="10"/>
+          </p:nvPr>
+        </p:nvSpPr>
+        <p:spPr/>
+        <p:txBody>
+          <a:bodyPr/>
+          <a:lstStyle/>
+          <a:p>
+            <a:fld id="{F7021451-1387-4CA6-816F-3879F97B5CBC}" type="slidenum">
+              <a:rPr lang="en-US"/>
+              <a:t>11</a:t>
+            </a:fld>
+            <a:endParaRPr lang="en-US"/>
+          </a:p>
+        </p:txBody>
+      </p:sp>
+    </p:spTree>
+    <p:extLst>
+      <p:ext uri="{BB962C8B-B14F-4D97-AF65-F5344CB8AC3E}">
+        <p14:creationId xmlns:p14="http://schemas.microsoft.com/office/powerpoint/2010/main" val="1024086991"/>
+      </p:ext>
+    </p:extLst>
+  </p:cSld>
+  <p:clrMapOvr>
+    <a:masterClrMapping/>
+  </p:clrMapOvr>
+</p:notes>
+</file>
+
+<file path=ppt/notesSlides/notesSlide12.xml><?xml version="1.0" encoding="utf-8"?>
+<p:notes xmlns:a="http://schemas.openxmlformats.org/drawingml/2006/main" xmlns:r="http://schemas.openxmlformats.org/officeDocument/2006/relationships" xmlns:p="http://schemas.openxmlformats.org/presentationml/2006/main">
+  <p:cSld>
+    <p:spTree>
+      <p:nvGrpSpPr>
+        <p:cNvPr id="1" name=""/>
+        <p:cNvGrpSpPr/>
+        <p:nvPr/>
+      </p:nvGrpSpPr>
+      <p:grpSpPr>
+        <a:xfrm>
+          <a:off x="0" y="0"/>
+          <a:ext cx="0" cy="0"/>
+          <a:chOff x="0" y="0"/>
+          <a:chExt cx="0" cy="0"/>
+        </a:xfrm>
+      </p:grpSpPr>
+      <p:sp>
+        <p:nvSpPr>
+          <p:cNvPr id="2" name="Slide Image Placeholder 1"/>
+          <p:cNvSpPr>
+            <a:spLocks noGrp="1" noRot="1" noChangeAspect="1"/>
+          </p:cNvSpPr>
+          <p:nvPr>
+            <p:ph type="sldImg"/>
+          </p:nvPr>
+        </p:nvSpPr>
+        <p:spPr/>
+      </p:sp>
+      <p:sp>
+        <p:nvSpPr>
+          <p:cNvPr id="3" name="Notes Placeholder 2"/>
+          <p:cNvSpPr>
+            <a:spLocks noGrp="1"/>
+          </p:cNvSpPr>
+          <p:nvPr>
+            <p:ph type="body" idx="1"/>
+          </p:nvPr>
+        </p:nvSpPr>
+        <p:spPr/>
+        <p:txBody>
+          <a:bodyPr/>
+          <a:lstStyle/>
+          <a:p>
+            <a:r>
+              <a:rPr lang="en-US" dirty="0"/>
+              <a:t/>
+            </a:r>
+            <a:endParaRPr lang="en-US" dirty="0"/>
+          </a:p>
+        </p:txBody>
+      </p:sp>
+      <p:sp>
+        <p:nvSpPr>
+          <p:cNvPr id="4" name="Slide Number Placeholder 3"/>
+          <p:cNvSpPr>
+            <a:spLocks noGrp="1"/>
+          </p:cNvSpPr>
+          <p:nvPr>
+            <p:ph type="sldNum" sz="quarter" idx="10"/>
+          </p:nvPr>
+        </p:nvSpPr>
+        <p:spPr/>
+        <p:txBody>
+          <a:bodyPr/>
+          <a:lstStyle/>
+          <a:p>
+            <a:fld id="{F7021451-1387-4CA6-816F-3879F97B5CBC}" type="slidenum">
+              <a:rPr lang="en-US"/>
+              <a:t>12</a:t>
+            </a:fld>
+            <a:endParaRPr lang="en-US"/>
+          </a:p>
+        </p:txBody>
+      </p:sp>
+    </p:spTree>
+    <p:extLst>
+      <p:ext uri="{BB962C8B-B14F-4D97-AF65-F5344CB8AC3E}">
+        <p14:creationId xmlns:p14="http://schemas.microsoft.com/office/powerpoint/2010/main" val="1024086991"/>
+      </p:ext>
+    </p:extLst>
+  </p:cSld>
+  <p:clrMapOvr>
+    <a:masterClrMapping/>
+  </p:clrMapOvr>
+</p:notes>
+</file>
+
+<file path=ppt/notesSlides/notesSlide13.xml><?xml version="1.0" encoding="utf-8"?>
+<p:notes xmlns:a="http://schemas.openxmlformats.org/drawingml/2006/main" xmlns:r="http://schemas.openxmlformats.org/officeDocument/2006/relationships" xmlns:p="http://schemas.openxmlformats.org/presentationml/2006/main">
+  <p:cSld>
+    <p:spTree>
+      <p:nvGrpSpPr>
+        <p:cNvPr id="1" name=""/>
+        <p:cNvGrpSpPr/>
+        <p:nvPr/>
+      </p:nvGrpSpPr>
+      <p:grpSpPr>
+        <a:xfrm>
+          <a:off x="0" y="0"/>
+          <a:ext cx="0" cy="0"/>
+          <a:chOff x="0" y="0"/>
+          <a:chExt cx="0" cy="0"/>
+        </a:xfrm>
+      </p:grpSpPr>
+      <p:sp>
+        <p:nvSpPr>
+          <p:cNvPr id="2" name="Slide Image Placeholder 1"/>
+          <p:cNvSpPr>
+            <a:spLocks noGrp="1" noRot="1" noChangeAspect="1"/>
+          </p:cNvSpPr>
+          <p:nvPr>
+            <p:ph type="sldImg"/>
+          </p:nvPr>
+        </p:nvSpPr>
+        <p:spPr/>
+      </p:sp>
+      <p:sp>
+        <p:nvSpPr>
+          <p:cNvPr id="3" name="Notes Placeholder 2"/>
+          <p:cNvSpPr>
+            <a:spLocks noGrp="1"/>
+          </p:cNvSpPr>
+          <p:nvPr>
+            <p:ph type="body" idx="1"/>
+          </p:nvPr>
+        </p:nvSpPr>
+        <p:spPr/>
+        <p:txBody>
+          <a:bodyPr/>
+          <a:lstStyle/>
+          <a:p>
+            <a:r>
+              <a:rPr lang="en-US" dirty="0"/>
+              <a:t/>
+            </a:r>
+            <a:endParaRPr lang="en-US" dirty="0"/>
+          </a:p>
+        </p:txBody>
+      </p:sp>
+      <p:sp>
+        <p:nvSpPr>
+          <p:cNvPr id="4" name="Slide Number Placeholder 3"/>
+          <p:cNvSpPr>
+            <a:spLocks noGrp="1"/>
+          </p:cNvSpPr>
+          <p:nvPr>
+            <p:ph type="sldNum" sz="quarter" idx="10"/>
+          </p:nvPr>
+        </p:nvSpPr>
+        <p:spPr/>
+        <p:txBody>
+          <a:bodyPr/>
+          <a:lstStyle/>
+          <a:p>
+            <a:fld id="{F7021451-1387-4CA6-816F-3879F97B5CBC}" type="slidenum">
+              <a:rPr lang="en-US"/>
+              <a:t>13</a:t>
+            </a:fld>
+            <a:endParaRPr lang="en-US"/>
+          </a:p>
+        </p:txBody>
+      </p:sp>
+    </p:spTree>
+    <p:extLst>
+      <p:ext uri="{BB962C8B-B14F-4D97-AF65-F5344CB8AC3E}">
+        <p14:creationId xmlns:p14="http://schemas.microsoft.com/office/powerpoint/2010/main" val="1024086991"/>
+      </p:ext>
+    </p:extLst>
+  </p:cSld>
+  <p:clrMapOvr>
+    <a:masterClrMapping/>
+  </p:clrMapOvr>
+</p:notes>
+</file>
+
+<file path=ppt/notesSlides/notesSlide14.xml><?xml version="1.0" encoding="utf-8"?>
+<p:notes xmlns:a="http://schemas.openxmlformats.org/drawingml/2006/main" xmlns:r="http://schemas.openxmlformats.org/officeDocument/2006/relationships" xmlns:p="http://schemas.openxmlformats.org/presentationml/2006/main">
+  <p:cSld>
+    <p:spTree>
+      <p:nvGrpSpPr>
+        <p:cNvPr id="1" name=""/>
+        <p:cNvGrpSpPr/>
+        <p:nvPr/>
+      </p:nvGrpSpPr>
+      <p:grpSpPr>
+        <a:xfrm>
+          <a:off x="0" y="0"/>
+          <a:ext cx="0" cy="0"/>
+          <a:chOff x="0" y="0"/>
+          <a:chExt cx="0" cy="0"/>
+        </a:xfrm>
+      </p:grpSpPr>
+      <p:sp>
+        <p:nvSpPr>
+          <p:cNvPr id="2" name="Slide Image Placeholder 1"/>
+          <p:cNvSpPr>
+            <a:spLocks noGrp="1" noRot="1" noChangeAspect="1"/>
+          </p:cNvSpPr>
+          <p:nvPr>
+            <p:ph type="sldImg"/>
+          </p:nvPr>
+        </p:nvSpPr>
+        <p:spPr/>
+      </p:sp>
+      <p:sp>
+        <p:nvSpPr>
+          <p:cNvPr id="3" name="Notes Placeholder 2"/>
+          <p:cNvSpPr>
+            <a:spLocks noGrp="1"/>
+          </p:cNvSpPr>
+          <p:nvPr>
+            <p:ph type="body" idx="1"/>
+          </p:nvPr>
+        </p:nvSpPr>
+        <p:spPr/>
+        <p:txBody>
+          <a:bodyPr/>
+          <a:lstStyle/>
+          <a:p>
+            <a:r>
+              <a:rPr lang="en-US" dirty="0"/>
+              <a:t/>
+            </a:r>
+            <a:endParaRPr lang="en-US" dirty="0"/>
+          </a:p>
+        </p:txBody>
+      </p:sp>
+      <p:sp>
+        <p:nvSpPr>
+          <p:cNvPr id="4" name="Slide Number Placeholder 3"/>
+          <p:cNvSpPr>
+            <a:spLocks noGrp="1"/>
+          </p:cNvSpPr>
+          <p:nvPr>
+            <p:ph type="sldNum" sz="quarter" idx="10"/>
+          </p:nvPr>
+        </p:nvSpPr>
+        <p:spPr/>
+        <p:txBody>
+          <a:bodyPr/>
+          <a:lstStyle/>
+          <a:p>
+            <a:fld id="{F7021451-1387-4CA6-816F-3879F97B5CBC}" type="slidenum">
+              <a:rPr lang="en-US"/>
+              <a:t>14</a:t>
+            </a:fld>
+            <a:endParaRPr lang="en-US"/>
+          </a:p>
+        </p:txBody>
+      </p:sp>
+    </p:spTree>
+    <p:extLst>
+      <p:ext uri="{BB962C8B-B14F-4D97-AF65-F5344CB8AC3E}">
+        <p14:creationId xmlns:p14="http://schemas.microsoft.com/office/powerpoint/2010/main" val="1024086991"/>
+      </p:ext>
+    </p:extLst>
+  </p:cSld>
+  <p:clrMapOvr>
+    <a:masterClrMapping/>
+  </p:clrMapOvr>
+</p:notes>
+</file>
+
+<file path=ppt/notesSlides/notesSlide15.xml><?xml version="1.0" encoding="utf-8"?>
+<p:notes xmlns:a="http://schemas.openxmlformats.org/drawingml/2006/main" xmlns:r="http://schemas.openxmlformats.org/officeDocument/2006/relationships" xmlns:p="http://schemas.openxmlformats.org/presentationml/2006/main">
+  <p:cSld>
+    <p:spTree>
+      <p:nvGrpSpPr>
+        <p:cNvPr id="1" name=""/>
+        <p:cNvGrpSpPr/>
+        <p:nvPr/>
+      </p:nvGrpSpPr>
+      <p:grpSpPr>
+        <a:xfrm>
+          <a:off x="0" y="0"/>
+          <a:ext cx="0" cy="0"/>
+          <a:chOff x="0" y="0"/>
+          <a:chExt cx="0" cy="0"/>
+        </a:xfrm>
+      </p:grpSpPr>
+      <p:sp>
+        <p:nvSpPr>
+          <p:cNvPr id="2" name="Slide Image Placeholder 1"/>
+          <p:cNvSpPr>
+            <a:spLocks noGrp="1" noRot="1" noChangeAspect="1"/>
+          </p:cNvSpPr>
+          <p:nvPr>
+            <p:ph type="sldImg"/>
+          </p:nvPr>
+        </p:nvSpPr>
+        <p:spPr/>
+      </p:sp>
+      <p:sp>
+        <p:nvSpPr>
+          <p:cNvPr id="3" name="Notes Placeholder 2"/>
+          <p:cNvSpPr>
+            <a:spLocks noGrp="1"/>
+          </p:cNvSpPr>
+          <p:nvPr>
+            <p:ph type="body" idx="1"/>
+          </p:nvPr>
+        </p:nvSpPr>
+        <p:spPr/>
+        <p:txBody>
+          <a:bodyPr/>
+          <a:lstStyle/>
+          <a:p>
+            <a:r>
+              <a:rPr lang="en-US" dirty="0"/>
+              <a:t/>
+            </a:r>
+            <a:endParaRPr lang="en-US" dirty="0"/>
+          </a:p>
+        </p:txBody>
+      </p:sp>
+      <p:sp>
+        <p:nvSpPr>
+          <p:cNvPr id="4" name="Slide Number Placeholder 3"/>
+          <p:cNvSpPr>
+            <a:spLocks noGrp="1"/>
+          </p:cNvSpPr>
+          <p:nvPr>
+            <p:ph type="sldNum" sz="quarter" idx="10"/>
+          </p:nvPr>
+        </p:nvSpPr>
+        <p:spPr/>
+        <p:txBody>
+          <a:bodyPr/>
+          <a:lstStyle/>
+          <a:p>
+            <a:fld id="{F7021451-1387-4CA6-816F-3879F97B5CBC}" type="slidenum">
+              <a:rPr lang="en-US"/>
+              <a:t>15</a:t>
             </a:fld>
             <a:endParaRPr lang="en-US"/>
           </a:p>
@@ -2241,7 +2686,7 @@
               <a:buNone/>
             </a:pPr>
             <a:r>
-              <a:rPr lang="en-US" sz="850" dirty="0">
+              <a:rPr lang="en-US" sz="900" dirty="0">
                 <a:solidFill>
                   <a:srgbClr val="718096"/>
                 </a:solidFill>
@@ -2251,7 +2696,7 @@
               </a:rPr>
               <a:t>이수민  |  리얼티빌딩</a:t>
             </a:r>
-            <a:endParaRPr lang="en-US" sz="850" dirty="0"/>
+            <a:endParaRPr lang="en-US" sz="900" dirty="0"/>
           </a:p>
         </p:txBody>
       </p:sp>
@@ -2344,6 +2789,5117 @@
 <file path=ppt/slides/slide10.xml><?xml version="1.0" encoding="utf-8"?>
 <p:sld xmlns:a="http://schemas.openxmlformats.org/drawingml/2006/main" xmlns:r="http://schemas.openxmlformats.org/officeDocument/2006/relationships" xmlns:p="http://schemas.openxmlformats.org/presentationml/2006/main">
   <p:cSld name="Slide 10">
+    <p:bg>
+      <p:bgPr>
+        <a:solidFill>
+          <a:srgbClr val="FFFFFF"/>
+        </a:solidFill>
+      </p:bgPr>
+    </p:bg>
+    <p:spTree>
+      <p:nvGrpSpPr>
+        <p:cNvPr id="1" name=""/>
+        <p:cNvGrpSpPr/>
+        <p:nvPr/>
+      </p:nvGrpSpPr>
+      <p:grpSpPr>
+        <a:xfrm>
+          <a:off x="0" y="0"/>
+          <a:ext cx="0" cy="0"/>
+          <a:chOff x="0" y="0"/>
+          <a:chExt cx="0" cy="0"/>
+        </a:xfrm>
+      </p:grpSpPr>
+      <p:sp>
+        <p:nvSpPr>
+          <p:cNvPr id="2" name="Shape 0"/>
+          <p:cNvSpPr/>
+          <p:nvPr/>
+        </p:nvSpPr>
+        <p:spPr>
+          <a:xfrm>
+            <a:off x="566928" y="457200"/>
+            <a:ext cx="384048" cy="384048"/>
+          </a:xfrm>
+          <a:prstGeom prst="ellipse">
+            <a:avLst/>
+          </a:prstGeom>
+          <a:solidFill>
+            <a:srgbClr val="B98A2E"/>
+          </a:solidFill>
+          <a:ln/>
+        </p:spPr>
+      </p:sp>
+      <p:sp>
+        <p:nvSpPr>
+          <p:cNvPr id="3" name="Text 1"/>
+          <p:cNvSpPr/>
+          <p:nvPr/>
+        </p:nvSpPr>
+        <p:spPr>
+          <a:xfrm>
+            <a:off x="566928" y="457200"/>
+            <a:ext cx="384048" cy="384048"/>
+          </a:xfrm>
+          <a:prstGeom prst="rect">
+            <a:avLst/>
+          </a:prstGeom>
+          <a:noFill/>
+          <a:ln/>
+        </p:spPr>
+        <p:txBody>
+          <a:bodyPr wrap="square" lIns="0" tIns="0" rIns="0" bIns="0" rtlCol="0" anchor="ctr"/>
+          <a:lstStyle/>
+          <a:p>
+            <a:pPr algn="ctr" indent="0" marL="0">
+              <a:buNone/>
+            </a:pPr>
+            <a:r>
+              <a:rPr lang="en-US" sz="1300" b="1" dirty="0">
+                <a:solidFill>
+                  <a:srgbClr val="FFFFFF"/>
+                </a:solidFill>
+                <a:latin typeface="Arial" pitchFamily="34" charset="0"/>
+                <a:ea typeface="Arial" pitchFamily="34" charset="-122"/>
+                <a:cs typeface="Arial" pitchFamily="34" charset="-120"/>
+              </a:rPr>
+              <a:t>09</a:t>
+            </a:r>
+            <a:endParaRPr lang="en-US" sz="1300" dirty="0"/>
+          </a:p>
+        </p:txBody>
+      </p:sp>
+      <p:sp>
+        <p:nvSpPr>
+          <p:cNvPr id="4" name="Text 2"/>
+          <p:cNvSpPr/>
+          <p:nvPr/>
+        </p:nvSpPr>
+        <p:spPr>
+          <a:xfrm>
+            <a:off x="1133856" y="457200"/>
+            <a:ext cx="10490911" cy="182880"/>
+          </a:xfrm>
+          <a:prstGeom prst="rect">
+            <a:avLst/>
+          </a:prstGeom>
+          <a:noFill/>
+          <a:ln/>
+        </p:spPr>
+        <p:txBody>
+          <a:bodyPr wrap="square" lIns="0" tIns="0" rIns="0" bIns="0" rtlCol="0" anchor="ctr"/>
+          <a:lstStyle/>
+          <a:p>
+            <a:pPr indent="0" marL="0">
+              <a:buNone/>
+            </a:pPr>
+            <a:r>
+              <a:rPr lang="en-US" sz="950" b="1" spc="200" kern="0" dirty="0">
+                <a:solidFill>
+                  <a:srgbClr val="B98A2E"/>
+                </a:solidFill>
+                <a:latin typeface="Arial" pitchFamily="34" charset="0"/>
+                <a:ea typeface="Arial" pitchFamily="34" charset="-122"/>
+                <a:cs typeface="Arial" pitchFamily="34" charset="-120"/>
+              </a:rPr>
+              <a:t>Capital</a:t>
+            </a:r>
+            <a:endParaRPr lang="en-US" sz="950" dirty="0"/>
+          </a:p>
+        </p:txBody>
+      </p:sp>
+      <p:sp>
+        <p:nvSpPr>
+          <p:cNvPr id="5" name="Text 3"/>
+          <p:cNvSpPr/>
+          <p:nvPr/>
+        </p:nvSpPr>
+        <p:spPr>
+          <a:xfrm>
+            <a:off x="1133856" y="640080"/>
+            <a:ext cx="10490911" cy="365760"/>
+          </a:xfrm>
+          <a:prstGeom prst="rect">
+            <a:avLst/>
+          </a:prstGeom>
+          <a:noFill/>
+          <a:ln/>
+        </p:spPr>
+        <p:txBody>
+          <a:bodyPr wrap="square" lIns="0" tIns="0" rIns="0" bIns="0" rtlCol="0" anchor="ctr"/>
+          <a:lstStyle/>
+          <a:p>
+            <a:pPr indent="0" marL="0">
+              <a:buNone/>
+            </a:pPr>
+            <a:r>
+              <a:rPr lang="en-US" sz="2300" b="1" dirty="0">
+                <a:solidFill>
+                  <a:srgbClr val="10161F"/>
+                </a:solidFill>
+                <a:latin typeface="Pretendard" pitchFamily="34" charset="0"/>
+                <a:ea typeface="Pretendard" pitchFamily="34" charset="-122"/>
+                <a:cs typeface="Pretendard" pitchFamily="34" charset="-120"/>
+              </a:rPr>
+              <a:t>투자 및 자본 조달 구조 분석</a:t>
+            </a:r>
+            <a:endParaRPr lang="en-US" sz="2300" dirty="0"/>
+          </a:p>
+        </p:txBody>
+      </p:sp>
+      <p:sp>
+        <p:nvSpPr>
+          <p:cNvPr id="6" name="Shape 4"/>
+          <p:cNvSpPr/>
+          <p:nvPr/>
+        </p:nvSpPr>
+        <p:spPr>
+          <a:xfrm>
+            <a:off x="566928" y="1417320"/>
+            <a:ext cx="5391760" cy="4389120"/>
+          </a:xfrm>
+          <a:prstGeom prst="roundRect">
+            <a:avLst>
+              <a:gd name="adj" fmla="val 1250"/>
+            </a:avLst>
+          </a:prstGeom>
+          <a:solidFill>
+            <a:srgbClr val="F7FAFC"/>
+          </a:solidFill>
+          <a:ln w="6350">
+            <a:solidFill>
+              <a:srgbClr val="CBD5E0"/>
+            </a:solidFill>
+            <a:prstDash val="solid"/>
+          </a:ln>
+        </p:spPr>
+      </p:sp>
+      <p:sp>
+        <p:nvSpPr>
+          <p:cNvPr id="7" name="Text 5"/>
+          <p:cNvSpPr/>
+          <p:nvPr/>
+        </p:nvSpPr>
+        <p:spPr>
+          <a:xfrm>
+            <a:off x="795528" y="1618488"/>
+            <a:ext cx="4934560" cy="320040"/>
+          </a:xfrm>
+          <a:prstGeom prst="rect">
+            <a:avLst/>
+          </a:prstGeom>
+          <a:noFill/>
+          <a:ln/>
+        </p:spPr>
+        <p:txBody>
+          <a:bodyPr wrap="square" lIns="0" tIns="0" rIns="0" bIns="0" rtlCol="0" anchor="ctr"/>
+          <a:lstStyle/>
+          <a:p>
+            <a:pPr indent="0" marL="0">
+              <a:buNone/>
+            </a:pPr>
+            <a:r>
+              <a:rPr lang="en-US" sz="1350" b="1" dirty="0">
+                <a:solidFill>
+                  <a:srgbClr val="977024"/>
+                </a:solidFill>
+                <a:latin typeface="Pretendard" pitchFamily="34" charset="0"/>
+                <a:ea typeface="Pretendard" pitchFamily="34" charset="-122"/>
+                <a:cs typeface="Pretendard" pitchFamily="34" charset="-120"/>
+              </a:rPr>
+              <a:t>1. 총취득원가 및 자기자본 소요</a:t>
+            </a:r>
+            <a:endParaRPr lang="en-US" sz="1350" dirty="0"/>
+          </a:p>
+        </p:txBody>
+      </p:sp>
+      <p:sp>
+        <p:nvSpPr>
+          <p:cNvPr id="8" name="Text 6"/>
+          <p:cNvSpPr/>
+          <p:nvPr/>
+        </p:nvSpPr>
+        <p:spPr>
+          <a:xfrm>
+            <a:off x="795528" y="2011680"/>
+            <a:ext cx="1875133" cy="475488"/>
+          </a:xfrm>
+          <a:prstGeom prst="rect">
+            <a:avLst/>
+          </a:prstGeom>
+          <a:noFill/>
+          <a:ln/>
+        </p:spPr>
+        <p:txBody>
+          <a:bodyPr wrap="square" lIns="0" tIns="0" rIns="0" bIns="0" rtlCol="0" anchor="ctr"/>
+          <a:lstStyle/>
+          <a:p>
+            <a:pPr indent="0" marL="0">
+              <a:lnSpc>
+                <a:spcPct val="120000"/>
+              </a:lnSpc>
+              <a:buNone/>
+            </a:pPr>
+            <a:r>
+              <a:rPr lang="en-US" sz="1150" dirty="0">
+                <a:solidFill>
+                  <a:srgbClr val="718096"/>
+                </a:solidFill>
+                <a:latin typeface="Pretendard" pitchFamily="34" charset="0"/>
+                <a:ea typeface="Pretendard" pitchFamily="34" charset="-122"/>
+                <a:cs typeface="Pretendard" pitchFamily="34" charset="-120"/>
+              </a:rPr>
+              <a:t>매매 희망가 (A)</a:t>
+            </a:r>
+            <a:endParaRPr lang="en-US" sz="1150" dirty="0"/>
+          </a:p>
+        </p:txBody>
+      </p:sp>
+      <p:sp>
+        <p:nvSpPr>
+          <p:cNvPr id="9" name="Text 7"/>
+          <p:cNvSpPr/>
+          <p:nvPr/>
+        </p:nvSpPr>
+        <p:spPr>
+          <a:xfrm>
+            <a:off x="2670661" y="2011680"/>
+            <a:ext cx="3059427" cy="475488"/>
+          </a:xfrm>
+          <a:prstGeom prst="rect">
+            <a:avLst/>
+          </a:prstGeom>
+          <a:noFill/>
+          <a:ln/>
+        </p:spPr>
+        <p:txBody>
+          <a:bodyPr wrap="square" lIns="0" tIns="0" rIns="0" bIns="0" rtlCol="0" anchor="ctr"/>
+          <a:lstStyle/>
+          <a:p>
+            <a:pPr indent="0" marL="0">
+              <a:lnSpc>
+                <a:spcPct val="120000"/>
+              </a:lnSpc>
+              <a:buNone/>
+            </a:pPr>
+            <a:r>
+              <a:rPr lang="en-US" sz="1150" b="1" dirty="0">
+                <a:solidFill>
+                  <a:srgbClr val="10161F"/>
+                </a:solidFill>
+                <a:latin typeface="Pretendard" pitchFamily="34" charset="0"/>
+                <a:ea typeface="Pretendard" pitchFamily="34" charset="-122"/>
+                <a:cs typeface="Pretendard" pitchFamily="34" charset="-120"/>
+              </a:rPr>
+              <a:t>98.0억 원</a:t>
+            </a:r>
+            <a:endParaRPr lang="en-US" sz="1150" dirty="0"/>
+          </a:p>
+        </p:txBody>
+      </p:sp>
+      <p:sp>
+        <p:nvSpPr>
+          <p:cNvPr id="10" name="Shape 8"/>
+          <p:cNvSpPr/>
+          <p:nvPr/>
+        </p:nvSpPr>
+        <p:spPr>
+          <a:xfrm>
+            <a:off x="795528" y="2487168"/>
+            <a:ext cx="4934560" cy="0"/>
+          </a:xfrm>
+          <a:prstGeom prst="line">
+            <a:avLst/>
+          </a:prstGeom>
+          <a:noFill/>
+          <a:ln w="3810">
+            <a:solidFill>
+              <a:srgbClr val="CBD5E0"/>
+            </a:solidFill>
+            <a:prstDash val="solid"/>
+          </a:ln>
+        </p:spPr>
+      </p:sp>
+      <p:sp>
+        <p:nvSpPr>
+          <p:cNvPr id="11" name="Text 9"/>
+          <p:cNvSpPr/>
+          <p:nvPr/>
+        </p:nvSpPr>
+        <p:spPr>
+          <a:xfrm>
+            <a:off x="795528" y="2487168"/>
+            <a:ext cx="1875133" cy="475488"/>
+          </a:xfrm>
+          <a:prstGeom prst="rect">
+            <a:avLst/>
+          </a:prstGeom>
+          <a:noFill/>
+          <a:ln/>
+        </p:spPr>
+        <p:txBody>
+          <a:bodyPr wrap="square" lIns="0" tIns="0" rIns="0" bIns="0" rtlCol="0" anchor="ctr"/>
+          <a:lstStyle/>
+          <a:p>
+            <a:pPr indent="0" marL="0">
+              <a:lnSpc>
+                <a:spcPct val="120000"/>
+              </a:lnSpc>
+              <a:buNone/>
+            </a:pPr>
+            <a:r>
+              <a:rPr lang="en-US" sz="1150" dirty="0">
+                <a:solidFill>
+                  <a:srgbClr val="718096"/>
+                </a:solidFill>
+                <a:latin typeface="Pretendard" pitchFamily="34" charset="0"/>
+                <a:ea typeface="Pretendard" pitchFamily="34" charset="-122"/>
+                <a:cs typeface="Pretendard" pitchFamily="34" charset="-120"/>
+              </a:rPr>
+              <a:t>취득세 (4.6% 법정)</a:t>
+            </a:r>
+            <a:endParaRPr lang="en-US" sz="1150" dirty="0"/>
+          </a:p>
+        </p:txBody>
+      </p:sp>
+      <p:sp>
+        <p:nvSpPr>
+          <p:cNvPr id="12" name="Text 10"/>
+          <p:cNvSpPr/>
+          <p:nvPr/>
+        </p:nvSpPr>
+        <p:spPr>
+          <a:xfrm>
+            <a:off x="2670661" y="2487168"/>
+            <a:ext cx="3059427" cy="475488"/>
+          </a:xfrm>
+          <a:prstGeom prst="rect">
+            <a:avLst/>
+          </a:prstGeom>
+          <a:noFill/>
+          <a:ln/>
+        </p:spPr>
+        <p:txBody>
+          <a:bodyPr wrap="square" lIns="0" tIns="0" rIns="0" bIns="0" rtlCol="0" anchor="ctr"/>
+          <a:lstStyle/>
+          <a:p>
+            <a:pPr indent="0" marL="0">
+              <a:lnSpc>
+                <a:spcPct val="120000"/>
+              </a:lnSpc>
+              <a:buNone/>
+            </a:pPr>
+            <a:r>
+              <a:rPr lang="en-US" sz="1150" b="1" dirty="0">
+                <a:solidFill>
+                  <a:srgbClr val="10161F"/>
+                </a:solidFill>
+                <a:latin typeface="Pretendard" pitchFamily="34" charset="0"/>
+                <a:ea typeface="Pretendard" pitchFamily="34" charset="-122"/>
+                <a:cs typeface="Pretendard" pitchFamily="34" charset="-120"/>
+              </a:rPr>
+              <a:t>4.51억 원</a:t>
+            </a:r>
+            <a:endParaRPr lang="en-US" sz="1150" dirty="0"/>
+          </a:p>
+        </p:txBody>
+      </p:sp>
+      <p:sp>
+        <p:nvSpPr>
+          <p:cNvPr id="13" name="Shape 11"/>
+          <p:cNvSpPr/>
+          <p:nvPr/>
+        </p:nvSpPr>
+        <p:spPr>
+          <a:xfrm>
+            <a:off x="795528" y="2962656"/>
+            <a:ext cx="4934560" cy="0"/>
+          </a:xfrm>
+          <a:prstGeom prst="line">
+            <a:avLst/>
+          </a:prstGeom>
+          <a:noFill/>
+          <a:ln w="3810">
+            <a:solidFill>
+              <a:srgbClr val="CBD5E0"/>
+            </a:solidFill>
+            <a:prstDash val="solid"/>
+          </a:ln>
+        </p:spPr>
+      </p:sp>
+      <p:sp>
+        <p:nvSpPr>
+          <p:cNvPr id="14" name="Text 12"/>
+          <p:cNvSpPr/>
+          <p:nvPr/>
+        </p:nvSpPr>
+        <p:spPr>
+          <a:xfrm>
+            <a:off x="795528" y="2962656"/>
+            <a:ext cx="1875133" cy="475488"/>
+          </a:xfrm>
+          <a:prstGeom prst="rect">
+            <a:avLst/>
+          </a:prstGeom>
+          <a:noFill/>
+          <a:ln/>
+        </p:spPr>
+        <p:txBody>
+          <a:bodyPr wrap="square" lIns="0" tIns="0" rIns="0" bIns="0" rtlCol="0" anchor="ctr"/>
+          <a:lstStyle/>
+          <a:p>
+            <a:pPr indent="0" marL="0">
+              <a:lnSpc>
+                <a:spcPct val="120000"/>
+              </a:lnSpc>
+              <a:buNone/>
+            </a:pPr>
+            <a:r>
+              <a:rPr lang="en-US" sz="1150" dirty="0">
+                <a:solidFill>
+                  <a:srgbClr val="718096"/>
+                </a:solidFill>
+                <a:latin typeface="Pretendard" pitchFamily="34" charset="0"/>
+                <a:ea typeface="Pretendard" pitchFamily="34" charset="-122"/>
+                <a:cs typeface="Pretendard" pitchFamily="34" charset="-120"/>
+              </a:rPr>
+              <a:t>중개보수 (0.9% 한도)</a:t>
+            </a:r>
+            <a:endParaRPr lang="en-US" sz="1150" dirty="0"/>
+          </a:p>
+        </p:txBody>
+      </p:sp>
+      <p:sp>
+        <p:nvSpPr>
+          <p:cNvPr id="15" name="Text 13"/>
+          <p:cNvSpPr/>
+          <p:nvPr/>
+        </p:nvSpPr>
+        <p:spPr>
+          <a:xfrm>
+            <a:off x="2670661" y="2962656"/>
+            <a:ext cx="3059427" cy="475488"/>
+          </a:xfrm>
+          <a:prstGeom prst="rect">
+            <a:avLst/>
+          </a:prstGeom>
+          <a:noFill/>
+          <a:ln/>
+        </p:spPr>
+        <p:txBody>
+          <a:bodyPr wrap="square" lIns="0" tIns="0" rIns="0" bIns="0" rtlCol="0" anchor="ctr"/>
+          <a:lstStyle/>
+          <a:p>
+            <a:pPr indent="0" marL="0">
+              <a:lnSpc>
+                <a:spcPct val="120000"/>
+              </a:lnSpc>
+              <a:buNone/>
+            </a:pPr>
+            <a:r>
+              <a:rPr lang="en-US" sz="1150" b="1" dirty="0">
+                <a:solidFill>
+                  <a:srgbClr val="10161F"/>
+                </a:solidFill>
+                <a:latin typeface="Pretendard" pitchFamily="34" charset="0"/>
+                <a:ea typeface="Pretendard" pitchFamily="34" charset="-122"/>
+                <a:cs typeface="Pretendard" pitchFamily="34" charset="-120"/>
+              </a:rPr>
+              <a:t>0.88억 원</a:t>
+            </a:r>
+            <a:endParaRPr lang="en-US" sz="1150" dirty="0"/>
+          </a:p>
+        </p:txBody>
+      </p:sp>
+      <p:sp>
+        <p:nvSpPr>
+          <p:cNvPr id="16" name="Shape 14"/>
+          <p:cNvSpPr/>
+          <p:nvPr/>
+        </p:nvSpPr>
+        <p:spPr>
+          <a:xfrm>
+            <a:off x="795528" y="3438144"/>
+            <a:ext cx="4934560" cy="0"/>
+          </a:xfrm>
+          <a:prstGeom prst="line">
+            <a:avLst/>
+          </a:prstGeom>
+          <a:noFill/>
+          <a:ln w="3810">
+            <a:solidFill>
+              <a:srgbClr val="CBD5E0"/>
+            </a:solidFill>
+            <a:prstDash val="solid"/>
+          </a:ln>
+        </p:spPr>
+      </p:sp>
+      <p:sp>
+        <p:nvSpPr>
+          <p:cNvPr id="17" name="Text 15"/>
+          <p:cNvSpPr/>
+          <p:nvPr/>
+        </p:nvSpPr>
+        <p:spPr>
+          <a:xfrm>
+            <a:off x="795528" y="3438144"/>
+            <a:ext cx="1875133" cy="475488"/>
+          </a:xfrm>
+          <a:prstGeom prst="rect">
+            <a:avLst/>
+          </a:prstGeom>
+          <a:noFill/>
+          <a:ln/>
+        </p:spPr>
+        <p:txBody>
+          <a:bodyPr wrap="square" lIns="0" tIns="0" rIns="0" bIns="0" rtlCol="0" anchor="ctr"/>
+          <a:lstStyle/>
+          <a:p>
+            <a:pPr indent="0" marL="0">
+              <a:lnSpc>
+                <a:spcPct val="120000"/>
+              </a:lnSpc>
+              <a:buNone/>
+            </a:pPr>
+            <a:r>
+              <a:rPr lang="en-US" sz="1150" dirty="0">
+                <a:solidFill>
+                  <a:srgbClr val="718096"/>
+                </a:solidFill>
+                <a:latin typeface="Pretendard" pitchFamily="34" charset="0"/>
+                <a:ea typeface="Pretendard" pitchFamily="34" charset="-122"/>
+                <a:cs typeface="Pretendard" pitchFamily="34" charset="-120"/>
+              </a:rPr>
+              <a:t>총취득원가 (A + 세/비용)</a:t>
+            </a:r>
+            <a:endParaRPr lang="en-US" sz="1150" dirty="0"/>
+          </a:p>
+        </p:txBody>
+      </p:sp>
+      <p:sp>
+        <p:nvSpPr>
+          <p:cNvPr id="18" name="Text 16"/>
+          <p:cNvSpPr/>
+          <p:nvPr/>
+        </p:nvSpPr>
+        <p:spPr>
+          <a:xfrm>
+            <a:off x="2670661" y="3438144"/>
+            <a:ext cx="3059427" cy="475488"/>
+          </a:xfrm>
+          <a:prstGeom prst="rect">
+            <a:avLst/>
+          </a:prstGeom>
+          <a:noFill/>
+          <a:ln/>
+        </p:spPr>
+        <p:txBody>
+          <a:bodyPr wrap="square" lIns="0" tIns="0" rIns="0" bIns="0" rtlCol="0" anchor="ctr"/>
+          <a:lstStyle/>
+          <a:p>
+            <a:pPr indent="0" marL="0">
+              <a:lnSpc>
+                <a:spcPct val="120000"/>
+              </a:lnSpc>
+              <a:buNone/>
+            </a:pPr>
+            <a:r>
+              <a:rPr lang="en-US" sz="1150" b="1" dirty="0">
+                <a:solidFill>
+                  <a:srgbClr val="10161F"/>
+                </a:solidFill>
+                <a:latin typeface="Pretendard" pitchFamily="34" charset="0"/>
+                <a:ea typeface="Pretendard" pitchFamily="34" charset="-122"/>
+                <a:cs typeface="Pretendard" pitchFamily="34" charset="-120"/>
+              </a:rPr>
+              <a:t>103.4억 원</a:t>
+            </a:r>
+            <a:endParaRPr lang="en-US" sz="1150" dirty="0"/>
+          </a:p>
+        </p:txBody>
+      </p:sp>
+      <p:sp>
+        <p:nvSpPr>
+          <p:cNvPr id="19" name="Shape 17"/>
+          <p:cNvSpPr/>
+          <p:nvPr/>
+        </p:nvSpPr>
+        <p:spPr>
+          <a:xfrm>
+            <a:off x="795528" y="3913632"/>
+            <a:ext cx="4934560" cy="0"/>
+          </a:xfrm>
+          <a:prstGeom prst="line">
+            <a:avLst/>
+          </a:prstGeom>
+          <a:noFill/>
+          <a:ln w="3810">
+            <a:solidFill>
+              <a:srgbClr val="CBD5E0"/>
+            </a:solidFill>
+            <a:prstDash val="solid"/>
+          </a:ln>
+        </p:spPr>
+      </p:sp>
+      <p:sp>
+        <p:nvSpPr>
+          <p:cNvPr id="20" name="Text 18"/>
+          <p:cNvSpPr/>
+          <p:nvPr/>
+        </p:nvSpPr>
+        <p:spPr>
+          <a:xfrm>
+            <a:off x="795528" y="3913632"/>
+            <a:ext cx="1875133" cy="475488"/>
+          </a:xfrm>
+          <a:prstGeom prst="rect">
+            <a:avLst/>
+          </a:prstGeom>
+          <a:noFill/>
+          <a:ln/>
+        </p:spPr>
+        <p:txBody>
+          <a:bodyPr wrap="square" lIns="0" tIns="0" rIns="0" bIns="0" rtlCol="0" anchor="ctr"/>
+          <a:lstStyle/>
+          <a:p>
+            <a:pPr indent="0" marL="0">
+              <a:lnSpc>
+                <a:spcPct val="120000"/>
+              </a:lnSpc>
+              <a:buNone/>
+            </a:pPr>
+            <a:r>
+              <a:rPr lang="en-US" sz="1150" dirty="0">
+                <a:solidFill>
+                  <a:srgbClr val="718096"/>
+                </a:solidFill>
+                <a:latin typeface="Pretendard" pitchFamily="34" charset="0"/>
+                <a:ea typeface="Pretendard" pitchFamily="34" charset="-122"/>
+                <a:cs typeface="Pretendard" pitchFamily="34" charset="-120"/>
+              </a:rPr>
+              <a:t>(-) 임대보증금 승계</a:t>
+            </a:r>
+            <a:endParaRPr lang="en-US" sz="1150" dirty="0"/>
+          </a:p>
+        </p:txBody>
+      </p:sp>
+      <p:sp>
+        <p:nvSpPr>
+          <p:cNvPr id="21" name="Text 19"/>
+          <p:cNvSpPr/>
+          <p:nvPr/>
+        </p:nvSpPr>
+        <p:spPr>
+          <a:xfrm>
+            <a:off x="2670661" y="3913632"/>
+            <a:ext cx="3059427" cy="475488"/>
+          </a:xfrm>
+          <a:prstGeom prst="rect">
+            <a:avLst/>
+          </a:prstGeom>
+          <a:noFill/>
+          <a:ln/>
+        </p:spPr>
+        <p:txBody>
+          <a:bodyPr wrap="square" lIns="0" tIns="0" rIns="0" bIns="0" rtlCol="0" anchor="ctr"/>
+          <a:lstStyle/>
+          <a:p>
+            <a:pPr indent="0" marL="0">
+              <a:lnSpc>
+                <a:spcPct val="120000"/>
+              </a:lnSpc>
+              <a:buNone/>
+            </a:pPr>
+            <a:r>
+              <a:rPr lang="en-US" sz="1150" b="1" dirty="0">
+                <a:solidFill>
+                  <a:srgbClr val="10161F"/>
+                </a:solidFill>
+                <a:latin typeface="Pretendard" pitchFamily="34" charset="0"/>
+                <a:ea typeface="Pretendard" pitchFamily="34" charset="-122"/>
+                <a:cs typeface="Pretendard" pitchFamily="34" charset="-120"/>
+              </a:rPr>
+              <a:t>4.9억 원</a:t>
+            </a:r>
+            <a:endParaRPr lang="en-US" sz="1150" dirty="0"/>
+          </a:p>
+        </p:txBody>
+      </p:sp>
+      <p:sp>
+        <p:nvSpPr>
+          <p:cNvPr id="22" name="Shape 20"/>
+          <p:cNvSpPr/>
+          <p:nvPr/>
+        </p:nvSpPr>
+        <p:spPr>
+          <a:xfrm>
+            <a:off x="795528" y="4389120"/>
+            <a:ext cx="4934560" cy="0"/>
+          </a:xfrm>
+          <a:prstGeom prst="line">
+            <a:avLst/>
+          </a:prstGeom>
+          <a:noFill/>
+          <a:ln w="3810">
+            <a:solidFill>
+              <a:srgbClr val="CBD5E0"/>
+            </a:solidFill>
+            <a:prstDash val="solid"/>
+          </a:ln>
+        </p:spPr>
+      </p:sp>
+      <p:sp>
+        <p:nvSpPr>
+          <p:cNvPr id="23" name="Text 21"/>
+          <p:cNvSpPr/>
+          <p:nvPr/>
+        </p:nvSpPr>
+        <p:spPr>
+          <a:xfrm>
+            <a:off x="795528" y="4389120"/>
+            <a:ext cx="1875133" cy="475488"/>
+          </a:xfrm>
+          <a:prstGeom prst="rect">
+            <a:avLst/>
+          </a:prstGeom>
+          <a:noFill/>
+          <a:ln/>
+        </p:spPr>
+        <p:txBody>
+          <a:bodyPr wrap="square" lIns="0" tIns="0" rIns="0" bIns="0" rtlCol="0" anchor="ctr"/>
+          <a:lstStyle/>
+          <a:p>
+            <a:pPr indent="0" marL="0">
+              <a:lnSpc>
+                <a:spcPct val="120000"/>
+              </a:lnSpc>
+              <a:buNone/>
+            </a:pPr>
+            <a:r>
+              <a:rPr lang="en-US" sz="1150" dirty="0">
+                <a:solidFill>
+                  <a:srgbClr val="718096"/>
+                </a:solidFill>
+                <a:latin typeface="Pretendard" pitchFamily="34" charset="0"/>
+                <a:ea typeface="Pretendard" pitchFamily="34" charset="-122"/>
+                <a:cs typeface="Pretendard" pitchFamily="34" charset="-120"/>
+              </a:rPr>
+              <a:t>(-) 담보대출 조달</a:t>
+            </a:r>
+            <a:endParaRPr lang="en-US" sz="1150" dirty="0"/>
+          </a:p>
+        </p:txBody>
+      </p:sp>
+      <p:sp>
+        <p:nvSpPr>
+          <p:cNvPr id="24" name="Text 22"/>
+          <p:cNvSpPr/>
+          <p:nvPr/>
+        </p:nvSpPr>
+        <p:spPr>
+          <a:xfrm>
+            <a:off x="2670661" y="4389120"/>
+            <a:ext cx="3059427" cy="475488"/>
+          </a:xfrm>
+          <a:prstGeom prst="rect">
+            <a:avLst/>
+          </a:prstGeom>
+          <a:noFill/>
+          <a:ln/>
+        </p:spPr>
+        <p:txBody>
+          <a:bodyPr wrap="square" lIns="0" tIns="0" rIns="0" bIns="0" rtlCol="0" anchor="ctr"/>
+          <a:lstStyle/>
+          <a:p>
+            <a:pPr indent="0" marL="0">
+              <a:lnSpc>
+                <a:spcPct val="120000"/>
+              </a:lnSpc>
+              <a:buNone/>
+            </a:pPr>
+            <a:r>
+              <a:rPr lang="en-US" sz="1150" b="1" dirty="0">
+                <a:solidFill>
+                  <a:srgbClr val="10161F"/>
+                </a:solidFill>
+                <a:latin typeface="Pretendard" pitchFamily="34" charset="0"/>
+                <a:ea typeface="Pretendard" pitchFamily="34" charset="-122"/>
+                <a:cs typeface="Pretendard" pitchFamily="34" charset="-120"/>
+              </a:rPr>
+              <a:t>49.0억 원</a:t>
+            </a:r>
+            <a:endParaRPr lang="en-US" sz="1150" dirty="0"/>
+          </a:p>
+        </p:txBody>
+      </p:sp>
+      <p:sp>
+        <p:nvSpPr>
+          <p:cNvPr id="25" name="Shape 23"/>
+          <p:cNvSpPr/>
+          <p:nvPr/>
+        </p:nvSpPr>
+        <p:spPr>
+          <a:xfrm>
+            <a:off x="795528" y="4864608"/>
+            <a:ext cx="4934560" cy="0"/>
+          </a:xfrm>
+          <a:prstGeom prst="line">
+            <a:avLst/>
+          </a:prstGeom>
+          <a:noFill/>
+          <a:ln w="3810">
+            <a:solidFill>
+              <a:srgbClr val="CBD5E0"/>
+            </a:solidFill>
+            <a:prstDash val="solid"/>
+          </a:ln>
+        </p:spPr>
+      </p:sp>
+      <p:sp>
+        <p:nvSpPr>
+          <p:cNvPr id="26" name="Text 24"/>
+          <p:cNvSpPr/>
+          <p:nvPr/>
+        </p:nvSpPr>
+        <p:spPr>
+          <a:xfrm>
+            <a:off x="795528" y="4864608"/>
+            <a:ext cx="1875133" cy="475488"/>
+          </a:xfrm>
+          <a:prstGeom prst="rect">
+            <a:avLst/>
+          </a:prstGeom>
+          <a:noFill/>
+          <a:ln/>
+        </p:spPr>
+        <p:txBody>
+          <a:bodyPr wrap="square" lIns="0" tIns="0" rIns="0" bIns="0" rtlCol="0" anchor="ctr"/>
+          <a:lstStyle/>
+          <a:p>
+            <a:pPr indent="0" marL="0">
+              <a:lnSpc>
+                <a:spcPct val="120000"/>
+              </a:lnSpc>
+              <a:buNone/>
+            </a:pPr>
+            <a:r>
+              <a:rPr lang="en-US" sz="1150" dirty="0">
+                <a:solidFill>
+                  <a:srgbClr val="718096"/>
+                </a:solidFill>
+                <a:latin typeface="Pretendard" pitchFamily="34" charset="0"/>
+                <a:ea typeface="Pretendard" pitchFamily="34" charset="-122"/>
+                <a:cs typeface="Pretendard" pitchFamily="34" charset="-120"/>
+              </a:rPr>
+              <a:t>실투자금 (Net Equity)</a:t>
+            </a:r>
+            <a:endParaRPr lang="en-US" sz="1150" dirty="0"/>
+          </a:p>
+        </p:txBody>
+      </p:sp>
+      <p:sp>
+        <p:nvSpPr>
+          <p:cNvPr id="27" name="Text 25"/>
+          <p:cNvSpPr/>
+          <p:nvPr/>
+        </p:nvSpPr>
+        <p:spPr>
+          <a:xfrm>
+            <a:off x="2670661" y="4864608"/>
+            <a:ext cx="3059427" cy="475488"/>
+          </a:xfrm>
+          <a:prstGeom prst="rect">
+            <a:avLst/>
+          </a:prstGeom>
+          <a:noFill/>
+          <a:ln/>
+        </p:spPr>
+        <p:txBody>
+          <a:bodyPr wrap="square" lIns="0" tIns="0" rIns="0" bIns="0" rtlCol="0" anchor="ctr"/>
+          <a:lstStyle/>
+          <a:p>
+            <a:pPr indent="0" marL="0">
+              <a:lnSpc>
+                <a:spcPct val="120000"/>
+              </a:lnSpc>
+              <a:buNone/>
+            </a:pPr>
+            <a:r>
+              <a:rPr lang="en-US" sz="1150" b="1" dirty="0">
+                <a:solidFill>
+                  <a:srgbClr val="10161F"/>
+                </a:solidFill>
+                <a:latin typeface="Pretendard" pitchFamily="34" charset="0"/>
+                <a:ea typeface="Pretendard" pitchFamily="34" charset="-122"/>
+                <a:cs typeface="Pretendard" pitchFamily="34" charset="-120"/>
+              </a:rPr>
+              <a:t>49.5억 원</a:t>
+            </a:r>
+            <a:endParaRPr lang="en-US" sz="1150" dirty="0"/>
+          </a:p>
+        </p:txBody>
+      </p:sp>
+      <p:sp>
+        <p:nvSpPr>
+          <p:cNvPr id="28" name="Shape 26"/>
+          <p:cNvSpPr/>
+          <p:nvPr/>
+        </p:nvSpPr>
+        <p:spPr>
+          <a:xfrm>
+            <a:off x="6233008" y="1417320"/>
+            <a:ext cx="5391760" cy="4389120"/>
+          </a:xfrm>
+          <a:prstGeom prst="roundRect">
+            <a:avLst>
+              <a:gd name="adj" fmla="val 1250"/>
+            </a:avLst>
+          </a:prstGeom>
+          <a:solidFill>
+            <a:srgbClr val="F7FAFC"/>
+          </a:solidFill>
+          <a:ln w="6350">
+            <a:solidFill>
+              <a:srgbClr val="CBD5E0"/>
+            </a:solidFill>
+            <a:prstDash val="solid"/>
+          </a:ln>
+        </p:spPr>
+      </p:sp>
+      <p:sp>
+        <p:nvSpPr>
+          <p:cNvPr id="29" name="Text 27"/>
+          <p:cNvSpPr/>
+          <p:nvPr/>
+        </p:nvSpPr>
+        <p:spPr>
+          <a:xfrm>
+            <a:off x="6461608" y="1618488"/>
+            <a:ext cx="4934560" cy="320040"/>
+          </a:xfrm>
+          <a:prstGeom prst="rect">
+            <a:avLst/>
+          </a:prstGeom>
+          <a:noFill/>
+          <a:ln/>
+        </p:spPr>
+        <p:txBody>
+          <a:bodyPr wrap="square" lIns="0" tIns="0" rIns="0" bIns="0" rtlCol="0" anchor="ctr"/>
+          <a:lstStyle/>
+          <a:p>
+            <a:pPr indent="0" marL="0">
+              <a:buNone/>
+            </a:pPr>
+            <a:r>
+              <a:rPr lang="en-US" sz="1350" b="1" dirty="0">
+                <a:solidFill>
+                  <a:srgbClr val="977024"/>
+                </a:solidFill>
+                <a:latin typeface="Pretendard" pitchFamily="34" charset="0"/>
+                <a:ea typeface="Pretendard" pitchFamily="34" charset="-122"/>
+                <a:cs typeface="Pretendard" pitchFamily="34" charset="-120"/>
+              </a:rPr>
+              <a:t>2. LTV 시나리오별 레버리지 효과</a:t>
+            </a:r>
+            <a:endParaRPr lang="en-US" sz="1350" dirty="0"/>
+          </a:p>
+        </p:txBody>
+      </p:sp>
+      <p:graphicFrame>
+        <p:nvGraphicFramePr>
+          <p:cNvPr id="11" name="Table 0"/>
+          <p:cNvGraphicFramePr>
+            <a:graphicFrameLocks noGrp="1"/>
+          </p:cNvGraphicFramePr>
+          <p:nvPr>
+            <p:extLst>
+              <p:ext uri="{D42A27DB-BD31-4B8C-83A1-F6EECF244321}">
+                <p14:modId xmlns:p14="http://schemas.microsoft.com/office/powerpoint/2010/main" val="1579011935"/>
+              </p:ext>
+            </p:extLst>
+          </p:nvPr>
+        </p:nvGraphicFramePr>
+        <p:xfrm>
+          <a:off x="6461608" y="2057400"/>
+          <a:ext cx="4934560" cy="914400"/>
+        </p:xfrm>
+        <a:graphic>
+          <a:graphicData uri="http://schemas.openxmlformats.org/drawingml/2006/table">
+            <a:tbl>
+              <a:tblPr/>
+              <a:tblGrid>
+                <a:gridCol w="1463040"/>
+                <a:gridCol w="1005840"/>
+                <a:gridCol w="1280160"/>
+                <a:gridCol w="1280160"/>
+              </a:tblGrid>
+              <a:tr h="457200">
+                <a:tc>
+                  <a:txBody>
+                    <a:bodyPr/>
+                    <a:lstStyle/>
+                    <a:p>
+                      <a:pPr indent="0" marL="0">
+                        <a:buNone/>
+                      </a:pPr>
+                      <a:r>
+                        <a:rPr lang="en-US" sz="1100" b="1" dirty="0">
+                          <a:solidFill>
+                            <a:srgbClr val="718096"/>
+                          </a:solidFill>
+                          <a:latin typeface="Pretendard" pitchFamily="34" charset="0"/>
+                          <a:ea typeface="Pretendard" pitchFamily="34" charset="-122"/>
+                          <a:cs typeface="Pretendard" pitchFamily="34" charset="-120"/>
+                        </a:rPr>
+                        <a:t>구분</a:t>
+                      </a:r>
+                      <a:endParaRPr lang="en-US" sz="1100" dirty="0">
+                        <a:latin typeface="Pretendard" charset="0"/>
+                        <a:ea typeface="Pretendard" charset="0"/>
+                        <a:cs typeface="Pretendard" charset="0"/>
+                      </a:endParaRPr>
+                    </a:p>
+                  </a:txBody>
+                  <a:tcPr marL="50800" marR="50800" marT="25400" marB="25400" anchor="ctr">
+                    <a:lnL w="3810" cap="flat" cmpd="sng" algn="ctr">
+                      <a:solidFill>
+                        <a:srgbClr val="CBD5E0"/>
+                      </a:solidFill>
+                      <a:prstDash val="solid"/>
+                      <a:round/>
+                      <a:headEnd type="none" w="med" len="med"/>
+                      <a:tailEnd type="none" w="med" len="med"/>
+                    </a:lnL>
+                    <a:lnR w="3810" cap="flat" cmpd="sng" algn="ctr">
+                      <a:solidFill>
+                        <a:srgbClr val="CBD5E0"/>
+                      </a:solidFill>
+                      <a:prstDash val="solid"/>
+                      <a:round/>
+                      <a:headEnd type="none" w="med" len="med"/>
+                      <a:tailEnd type="none" w="med" len="med"/>
+                    </a:lnR>
+                    <a:lnT w="3810" cap="flat" cmpd="sng" algn="ctr">
+                      <a:solidFill>
+                        <a:srgbClr val="CBD5E0"/>
+                      </a:solidFill>
+                      <a:prstDash val="solid"/>
+                      <a:round/>
+                      <a:headEnd type="none" w="med" len="med"/>
+                      <a:tailEnd type="none" w="med" len="med"/>
+                    </a:lnT>
+                    <a:lnB w="3810" cap="flat" cmpd="sng" algn="ctr">
+                      <a:solidFill>
+                        <a:srgbClr val="CBD5E0"/>
+                      </a:solidFill>
+                      <a:prstDash val="solid"/>
+                      <a:round/>
+                      <a:headEnd type="none" w="med" len="med"/>
+                      <a:tailEnd type="none" w="med" len="med"/>
+                    </a:lnB>
+                    <a:solidFill>
+                      <a:srgbClr val="F7FAFC"/>
+                    </a:solidFill>
+                  </a:tcPr>
+                </a:tc>
+                <a:tc>
+                  <a:txBody>
+                    <a:bodyPr/>
+                    <a:lstStyle/>
+                    <a:p>
+                      <a:pPr indent="0" marL="0">
+                        <a:buNone/>
+                      </a:pPr>
+                      <a:r>
+                        <a:rPr lang="en-US" sz="1100" b="1" dirty="0">
+                          <a:solidFill>
+                            <a:srgbClr val="718096"/>
+                          </a:solidFill>
+                          <a:latin typeface="Pretendard" pitchFamily="34" charset="0"/>
+                          <a:ea typeface="Pretendard" pitchFamily="34" charset="-122"/>
+                          <a:cs typeface="Pretendard" pitchFamily="34" charset="-120"/>
+                        </a:rPr>
+                        <a:t>대출비율</a:t>
+                      </a:r>
+                      <a:endParaRPr lang="en-US" sz="1100" dirty="0">
+                        <a:latin typeface="Pretendard" charset="0"/>
+                        <a:ea typeface="Pretendard" charset="0"/>
+                        <a:cs typeface="Pretendard" charset="0"/>
+                      </a:endParaRPr>
+                    </a:p>
+                  </a:txBody>
+                  <a:tcPr marL="50800" marR="50800" marT="25400" marB="25400" anchor="ctr">
+                    <a:lnL w="3810" cap="flat" cmpd="sng" algn="ctr">
+                      <a:solidFill>
+                        <a:srgbClr val="CBD5E0"/>
+                      </a:solidFill>
+                      <a:prstDash val="solid"/>
+                      <a:round/>
+                      <a:headEnd type="none" w="med" len="med"/>
+                      <a:tailEnd type="none" w="med" len="med"/>
+                    </a:lnL>
+                    <a:lnR w="3810" cap="flat" cmpd="sng" algn="ctr">
+                      <a:solidFill>
+                        <a:srgbClr val="CBD5E0"/>
+                      </a:solidFill>
+                      <a:prstDash val="solid"/>
+                      <a:round/>
+                      <a:headEnd type="none" w="med" len="med"/>
+                      <a:tailEnd type="none" w="med" len="med"/>
+                    </a:lnR>
+                    <a:lnT w="3810" cap="flat" cmpd="sng" algn="ctr">
+                      <a:solidFill>
+                        <a:srgbClr val="CBD5E0"/>
+                      </a:solidFill>
+                      <a:prstDash val="solid"/>
+                      <a:round/>
+                      <a:headEnd type="none" w="med" len="med"/>
+                      <a:tailEnd type="none" w="med" len="med"/>
+                    </a:lnT>
+                    <a:lnB w="3810" cap="flat" cmpd="sng" algn="ctr">
+                      <a:solidFill>
+                        <a:srgbClr val="CBD5E0"/>
+                      </a:solidFill>
+                      <a:prstDash val="solid"/>
+                      <a:round/>
+                      <a:headEnd type="none" w="med" len="med"/>
+                      <a:tailEnd type="none" w="med" len="med"/>
+                    </a:lnB>
+                    <a:solidFill>
+                      <a:srgbClr val="F7FAFC"/>
+                    </a:solidFill>
+                  </a:tcPr>
+                </a:tc>
+                <a:tc>
+                  <a:txBody>
+                    <a:bodyPr/>
+                    <a:lstStyle/>
+                    <a:p>
+                      <a:pPr indent="0" marL="0">
+                        <a:buNone/>
+                      </a:pPr>
+                      <a:r>
+                        <a:rPr lang="en-US" sz="1100" b="1" dirty="0">
+                          <a:solidFill>
+                            <a:srgbClr val="718096"/>
+                          </a:solidFill>
+                          <a:latin typeface="Pretendard" pitchFamily="34" charset="0"/>
+                          <a:ea typeface="Pretendard" pitchFamily="34" charset="-122"/>
+                          <a:cs typeface="Pretendard" pitchFamily="34" charset="-120"/>
+                        </a:rPr>
+                        <a:t>실투자금</a:t>
+                      </a:r>
+                      <a:endParaRPr lang="en-US" sz="1100" dirty="0">
+                        <a:latin typeface="Pretendard" charset="0"/>
+                        <a:ea typeface="Pretendard" charset="0"/>
+                        <a:cs typeface="Pretendard" charset="0"/>
+                      </a:endParaRPr>
+                    </a:p>
+                  </a:txBody>
+                  <a:tcPr marL="50800" marR="50800" marT="25400" marB="25400" anchor="ctr">
+                    <a:lnL w="3810" cap="flat" cmpd="sng" algn="ctr">
+                      <a:solidFill>
+                        <a:srgbClr val="CBD5E0"/>
+                      </a:solidFill>
+                      <a:prstDash val="solid"/>
+                      <a:round/>
+                      <a:headEnd type="none" w="med" len="med"/>
+                      <a:tailEnd type="none" w="med" len="med"/>
+                    </a:lnL>
+                    <a:lnR w="3810" cap="flat" cmpd="sng" algn="ctr">
+                      <a:solidFill>
+                        <a:srgbClr val="CBD5E0"/>
+                      </a:solidFill>
+                      <a:prstDash val="solid"/>
+                      <a:round/>
+                      <a:headEnd type="none" w="med" len="med"/>
+                      <a:tailEnd type="none" w="med" len="med"/>
+                    </a:lnR>
+                    <a:lnT w="3810" cap="flat" cmpd="sng" algn="ctr">
+                      <a:solidFill>
+                        <a:srgbClr val="CBD5E0"/>
+                      </a:solidFill>
+                      <a:prstDash val="solid"/>
+                      <a:round/>
+                      <a:headEnd type="none" w="med" len="med"/>
+                      <a:tailEnd type="none" w="med" len="med"/>
+                    </a:lnT>
+                    <a:lnB w="3810" cap="flat" cmpd="sng" algn="ctr">
+                      <a:solidFill>
+                        <a:srgbClr val="CBD5E0"/>
+                      </a:solidFill>
+                      <a:prstDash val="solid"/>
+                      <a:round/>
+                      <a:headEnd type="none" w="med" len="med"/>
+                      <a:tailEnd type="none" w="med" len="med"/>
+                    </a:lnB>
+                    <a:solidFill>
+                      <a:srgbClr val="F7FAFC"/>
+                    </a:solidFill>
+                  </a:tcPr>
+                </a:tc>
+                <a:tc>
+                  <a:txBody>
+                    <a:bodyPr/>
+                    <a:lstStyle/>
+                    <a:p>
+                      <a:pPr indent="0" marL="0">
+                        <a:buNone/>
+                      </a:pPr>
+                      <a:r>
+                        <a:rPr lang="en-US" sz="1100" b="1" dirty="0">
+                          <a:solidFill>
+                            <a:srgbClr val="718096"/>
+                          </a:solidFill>
+                          <a:latin typeface="Pretendard" pitchFamily="34" charset="0"/>
+                          <a:ea typeface="Pretendard" pitchFamily="34" charset="-122"/>
+                          <a:cs typeface="Pretendard" pitchFamily="34" charset="-120"/>
+                        </a:rPr>
+                        <a:t>예상수익률</a:t>
+                      </a:r>
+                      <a:endParaRPr lang="en-US" sz="1100" dirty="0">
+                        <a:latin typeface="Pretendard" charset="0"/>
+                        <a:ea typeface="Pretendard" charset="0"/>
+                        <a:cs typeface="Pretendard" charset="0"/>
+                      </a:endParaRPr>
+                    </a:p>
+                  </a:txBody>
+                  <a:tcPr marL="50800" marR="50800" marT="25400" marB="25400" anchor="ctr">
+                    <a:lnL w="3810" cap="flat" cmpd="sng" algn="ctr">
+                      <a:solidFill>
+                        <a:srgbClr val="CBD5E0"/>
+                      </a:solidFill>
+                      <a:prstDash val="solid"/>
+                      <a:round/>
+                      <a:headEnd type="none" w="med" len="med"/>
+                      <a:tailEnd type="none" w="med" len="med"/>
+                    </a:lnL>
+                    <a:lnR w="3810" cap="flat" cmpd="sng" algn="ctr">
+                      <a:solidFill>
+                        <a:srgbClr val="CBD5E0"/>
+                      </a:solidFill>
+                      <a:prstDash val="solid"/>
+                      <a:round/>
+                      <a:headEnd type="none" w="med" len="med"/>
+                      <a:tailEnd type="none" w="med" len="med"/>
+                    </a:lnR>
+                    <a:lnT w="3810" cap="flat" cmpd="sng" algn="ctr">
+                      <a:solidFill>
+                        <a:srgbClr val="CBD5E0"/>
+                      </a:solidFill>
+                      <a:prstDash val="solid"/>
+                      <a:round/>
+                      <a:headEnd type="none" w="med" len="med"/>
+                      <a:tailEnd type="none" w="med" len="med"/>
+                    </a:lnT>
+                    <a:lnB w="3810" cap="flat" cmpd="sng" algn="ctr">
+                      <a:solidFill>
+                        <a:srgbClr val="CBD5E0"/>
+                      </a:solidFill>
+                      <a:prstDash val="solid"/>
+                      <a:round/>
+                      <a:headEnd type="none" w="med" len="med"/>
+                      <a:tailEnd type="none" w="med" len="med"/>
+                    </a:lnB>
+                    <a:solidFill>
+                      <a:srgbClr val="F7FAFC"/>
+                    </a:solidFill>
+                  </a:tcPr>
+                </a:tc>
+              </a:tr>
+              <a:tr h="457200">
+                <a:tc>
+                  <a:txBody>
+                    <a:bodyPr/>
+                    <a:lstStyle/>
+                    <a:p>
+                      <a:pPr indent="0" marL="0">
+                        <a:buNone/>
+                      </a:pPr>
+                      <a:r>
+                        <a:rPr lang="en-US" sz="1100" b="1" dirty="0">
+                          <a:solidFill>
+                            <a:srgbClr val="10161F"/>
+                          </a:solidFill>
+                          <a:latin typeface="Pretendard" pitchFamily="34" charset="0"/>
+                          <a:ea typeface="Pretendard" pitchFamily="34" charset="-122"/>
+                          <a:cs typeface="Pretendard" pitchFamily="34" charset="-120"/>
+                        </a:rPr>
+                        <a:t>전액 </a:t>
+                      </a:r>
+                      <a:pPr indent="0" marL="0">
+                        <a:buNone/>
+                      </a:pPr>
+                      <a:r>
+                        <a:rPr lang="en-US" sz="1100" b="1" dirty="0">
+                          <a:solidFill>
+                            <a:srgbClr val="10161F"/>
+                          </a:solidFill>
+                          <a:latin typeface="Pretendard" pitchFamily="34" charset="0"/>
+                          <a:ea typeface="Pretendard" pitchFamily="34" charset="-122"/>
+                          <a:cs typeface="Pretendard" pitchFamily="34" charset="-120"/>
+                        </a:rPr>
+                        <a:t>자기자본 </a:t>
+                      </a:r>
+                      <a:pPr indent="0" marL="0">
+                        <a:buNone/>
+                      </a:pPr>
+                      <a:r>
+                        <a:rPr lang="en-US" sz="1100" b="1" dirty="0">
+                          <a:solidFill>
+                            <a:srgbClr val="10161F"/>
+                          </a:solidFill>
+                          <a:latin typeface="Pretendard" pitchFamily="34" charset="0"/>
+                          <a:ea typeface="Pretendard" pitchFamily="34" charset="-122"/>
+                          <a:cs typeface="Pretendard" pitchFamily="34" charset="-120"/>
+                        </a:rPr>
+                        <a:t>(무차입)</a:t>
+                      </a:r>
+                      <a:endParaRPr lang="en-US" sz="1100" dirty="0">
+                        <a:latin typeface="Pretendard" charset="0"/>
+                        <a:ea typeface="Pretendard" charset="0"/>
+                        <a:cs typeface="Pretendard" charset="0"/>
+                      </a:endParaRPr>
+                    </a:p>
+                  </a:txBody>
+                  <a:tcPr marL="50800" marR="50800" marT="25400" marB="25400" anchor="ctr">
+                    <a:lnL w="3810" cap="flat" cmpd="sng" algn="ctr">
+                      <a:solidFill>
+                        <a:srgbClr val="CBD5E0"/>
+                      </a:solidFill>
+                      <a:prstDash val="solid"/>
+                      <a:round/>
+                      <a:headEnd type="none" w="med" len="med"/>
+                      <a:tailEnd type="none" w="med" len="med"/>
+                    </a:lnL>
+                    <a:lnR w="3810" cap="flat" cmpd="sng" algn="ctr">
+                      <a:solidFill>
+                        <a:srgbClr val="CBD5E0"/>
+                      </a:solidFill>
+                      <a:prstDash val="solid"/>
+                      <a:round/>
+                      <a:headEnd type="none" w="med" len="med"/>
+                      <a:tailEnd type="none" w="med" len="med"/>
+                    </a:lnR>
+                    <a:lnT w="3810" cap="flat" cmpd="sng" algn="ctr">
+                      <a:solidFill>
+                        <a:srgbClr val="CBD5E0"/>
+                      </a:solidFill>
+                      <a:prstDash val="solid"/>
+                      <a:round/>
+                      <a:headEnd type="none" w="med" len="med"/>
+                      <a:tailEnd type="none" w="med" len="med"/>
+                    </a:lnT>
+                    <a:lnB w="3810" cap="flat" cmpd="sng" algn="ctr">
+                      <a:solidFill>
+                        <a:srgbClr val="CBD5E0"/>
+                      </a:solidFill>
+                      <a:prstDash val="solid"/>
+                      <a:round/>
+                      <a:headEnd type="none" w="med" len="med"/>
+                      <a:tailEnd type="none" w="med" len="med"/>
+                    </a:lnB>
+                    <a:solidFill>
+                      <a:srgbClr val="FFFFFF"/>
+                    </a:solidFill>
+                  </a:tcPr>
+                </a:tc>
+                <a:tc>
+                  <a:txBody>
+                    <a:bodyPr/>
+                    <a:lstStyle/>
+                    <a:p>
+                      <a:pPr indent="0" marL="0">
+                        <a:buNone/>
+                      </a:pPr>
+                      <a:r>
+                        <a:rPr lang="en-US" sz="1100" dirty="0">
+                          <a:solidFill>
+                            <a:srgbClr val="10161F"/>
+                          </a:solidFill>
+                          <a:latin typeface="Pretendard" pitchFamily="34" charset="0"/>
+                          <a:ea typeface="Pretendard" pitchFamily="34" charset="-122"/>
+                          <a:cs typeface="Pretendard" pitchFamily="34" charset="-120"/>
+                        </a:rPr>
+                        <a:t>0%</a:t>
+                      </a:r>
+                      <a:endParaRPr lang="en-US" sz="1100" dirty="0">
+                        <a:latin typeface="Pretendard" charset="0"/>
+                        <a:ea typeface="Pretendard" charset="0"/>
+                        <a:cs typeface="Pretendard" charset="0"/>
+                      </a:endParaRPr>
+                    </a:p>
+                  </a:txBody>
+                  <a:tcPr marL="50800" marR="50800" marT="25400" marB="25400" anchor="ctr">
+                    <a:lnL w="3810" cap="flat" cmpd="sng" algn="ctr">
+                      <a:solidFill>
+                        <a:srgbClr val="CBD5E0"/>
+                      </a:solidFill>
+                      <a:prstDash val="solid"/>
+                      <a:round/>
+                      <a:headEnd type="none" w="med" len="med"/>
+                      <a:tailEnd type="none" w="med" len="med"/>
+                    </a:lnL>
+                    <a:lnR w="3810" cap="flat" cmpd="sng" algn="ctr">
+                      <a:solidFill>
+                        <a:srgbClr val="CBD5E0"/>
+                      </a:solidFill>
+                      <a:prstDash val="solid"/>
+                      <a:round/>
+                      <a:headEnd type="none" w="med" len="med"/>
+                      <a:tailEnd type="none" w="med" len="med"/>
+                    </a:lnR>
+                    <a:lnT w="3810" cap="flat" cmpd="sng" algn="ctr">
+                      <a:solidFill>
+                        <a:srgbClr val="CBD5E0"/>
+                      </a:solidFill>
+                      <a:prstDash val="solid"/>
+                      <a:round/>
+                      <a:headEnd type="none" w="med" len="med"/>
+                      <a:tailEnd type="none" w="med" len="med"/>
+                    </a:lnT>
+                    <a:lnB w="3810" cap="flat" cmpd="sng" algn="ctr">
+                      <a:solidFill>
+                        <a:srgbClr val="CBD5E0"/>
+                      </a:solidFill>
+                      <a:prstDash val="solid"/>
+                      <a:round/>
+                      <a:headEnd type="none" w="med" len="med"/>
+                      <a:tailEnd type="none" w="med" len="med"/>
+                    </a:lnB>
+                    <a:solidFill>
+                      <a:srgbClr val="FFFFFF"/>
+                    </a:solidFill>
+                  </a:tcPr>
+                </a:tc>
+                <a:tc>
+                  <a:txBody>
+                    <a:bodyPr/>
+                    <a:lstStyle/>
+                    <a:p>
+                      <a:pPr indent="0" marL="0">
+                        <a:buNone/>
+                      </a:pPr>
+                      <a:r>
+                        <a:rPr lang="en-US" sz="1100" dirty="0">
+                          <a:solidFill>
+                            <a:srgbClr val="10161F"/>
+                          </a:solidFill>
+                          <a:latin typeface="Pretendard" pitchFamily="34" charset="0"/>
+                          <a:ea typeface="Pretendard" pitchFamily="34" charset="-122"/>
+                          <a:cs typeface="Pretendard" pitchFamily="34" charset="-120"/>
+                        </a:rPr>
+                        <a:t>98.5억</a:t>
+                      </a:r>
+                      <a:endParaRPr lang="en-US" sz="1100" dirty="0">
+                        <a:latin typeface="Pretendard" charset="0"/>
+                        <a:ea typeface="Pretendard" charset="0"/>
+                        <a:cs typeface="Pretendard" charset="0"/>
+                      </a:endParaRPr>
+                    </a:p>
+                  </a:txBody>
+                  <a:tcPr marL="50800" marR="50800" marT="25400" marB="25400" anchor="ctr">
+                    <a:lnL w="3810" cap="flat" cmpd="sng" algn="ctr">
+                      <a:solidFill>
+                        <a:srgbClr val="CBD5E0"/>
+                      </a:solidFill>
+                      <a:prstDash val="solid"/>
+                      <a:round/>
+                      <a:headEnd type="none" w="med" len="med"/>
+                      <a:tailEnd type="none" w="med" len="med"/>
+                    </a:lnL>
+                    <a:lnR w="3810" cap="flat" cmpd="sng" algn="ctr">
+                      <a:solidFill>
+                        <a:srgbClr val="CBD5E0"/>
+                      </a:solidFill>
+                      <a:prstDash val="solid"/>
+                      <a:round/>
+                      <a:headEnd type="none" w="med" len="med"/>
+                      <a:tailEnd type="none" w="med" len="med"/>
+                    </a:lnR>
+                    <a:lnT w="3810" cap="flat" cmpd="sng" algn="ctr">
+                      <a:solidFill>
+                        <a:srgbClr val="CBD5E0"/>
+                      </a:solidFill>
+                      <a:prstDash val="solid"/>
+                      <a:round/>
+                      <a:headEnd type="none" w="med" len="med"/>
+                      <a:tailEnd type="none" w="med" len="med"/>
+                    </a:lnT>
+                    <a:lnB w="3810" cap="flat" cmpd="sng" algn="ctr">
+                      <a:solidFill>
+                        <a:srgbClr val="CBD5E0"/>
+                      </a:solidFill>
+                      <a:prstDash val="solid"/>
+                      <a:round/>
+                      <a:headEnd type="none" w="med" len="med"/>
+                      <a:tailEnd type="none" w="med" len="med"/>
+                    </a:lnB>
+                    <a:solidFill>
+                      <a:srgbClr val="FFFFFF"/>
+                    </a:solidFill>
+                  </a:tcPr>
+                </a:tc>
+                <a:tc>
+                  <a:txBody>
+                    <a:bodyPr/>
+                    <a:lstStyle/>
+                    <a:p>
+                      <a:pPr indent="0" marL="0">
+                        <a:buNone/>
+                      </a:pPr>
+                      <a:r>
+                        <a:rPr lang="en-US" sz="1100" dirty="0">
+                          <a:solidFill>
+                            <a:srgbClr val="10161F"/>
+                          </a:solidFill>
+                          <a:latin typeface="Pretendard" pitchFamily="34" charset="0"/>
+                          <a:ea typeface="Pretendard" pitchFamily="34" charset="-122"/>
+                          <a:cs typeface="Pretendard" pitchFamily="34" charset="-120"/>
+                        </a:rPr>
+                        <a:t>3.78%</a:t>
+                      </a:r>
+                      <a:endParaRPr lang="en-US" sz="1100" dirty="0">
+                        <a:latin typeface="Pretendard" charset="0"/>
+                        <a:ea typeface="Pretendard" charset="0"/>
+                        <a:cs typeface="Pretendard" charset="0"/>
+                      </a:endParaRPr>
+                    </a:p>
+                  </a:txBody>
+                  <a:tcPr marL="50800" marR="50800" marT="25400" marB="25400" anchor="ctr">
+                    <a:lnL w="3810" cap="flat" cmpd="sng" algn="ctr">
+                      <a:solidFill>
+                        <a:srgbClr val="CBD5E0"/>
+                      </a:solidFill>
+                      <a:prstDash val="solid"/>
+                      <a:round/>
+                      <a:headEnd type="none" w="med" len="med"/>
+                      <a:tailEnd type="none" w="med" len="med"/>
+                    </a:lnL>
+                    <a:lnR w="3810" cap="flat" cmpd="sng" algn="ctr">
+                      <a:solidFill>
+                        <a:srgbClr val="CBD5E0"/>
+                      </a:solidFill>
+                      <a:prstDash val="solid"/>
+                      <a:round/>
+                      <a:headEnd type="none" w="med" len="med"/>
+                      <a:tailEnd type="none" w="med" len="med"/>
+                    </a:lnR>
+                    <a:lnT w="3810" cap="flat" cmpd="sng" algn="ctr">
+                      <a:solidFill>
+                        <a:srgbClr val="CBD5E0"/>
+                      </a:solidFill>
+                      <a:prstDash val="solid"/>
+                      <a:round/>
+                      <a:headEnd type="none" w="med" len="med"/>
+                      <a:tailEnd type="none" w="med" len="med"/>
+                    </a:lnT>
+                    <a:lnB w="3810" cap="flat" cmpd="sng" algn="ctr">
+                      <a:solidFill>
+                        <a:srgbClr val="CBD5E0"/>
+                      </a:solidFill>
+                      <a:prstDash val="solid"/>
+                      <a:round/>
+                      <a:headEnd type="none" w="med" len="med"/>
+                      <a:tailEnd type="none" w="med" len="med"/>
+                    </a:lnB>
+                    <a:solidFill>
+                      <a:srgbClr val="FFFFFF"/>
+                    </a:solidFill>
+                  </a:tcPr>
+                </a:tc>
+              </a:tr>
+              <a:tr h="457200">
+                <a:tc>
+                  <a:txBody>
+                    <a:bodyPr/>
+                    <a:lstStyle/>
+                    <a:p>
+                      <a:pPr indent="0" marL="0">
+                        <a:buNone/>
+                      </a:pPr>
+                      <a:r>
+                        <a:rPr lang="en-US" sz="1100" b="1" dirty="0">
+                          <a:solidFill>
+                            <a:srgbClr val="10161F"/>
+                          </a:solidFill>
+                          <a:latin typeface="Pretendard" pitchFamily="34" charset="0"/>
+                          <a:ea typeface="Pretendard" pitchFamily="34" charset="-122"/>
+                          <a:cs typeface="Pretendard" pitchFamily="34" charset="-120"/>
+                        </a:rPr>
+                        <a:t>보수적 </a:t>
+                      </a:r>
+                      <a:pPr indent="0" marL="0">
+                        <a:buNone/>
+                      </a:pPr>
+                      <a:r>
+                        <a:rPr lang="en-US" sz="1100" b="1" dirty="0">
+                          <a:solidFill>
+                            <a:srgbClr val="10161F"/>
+                          </a:solidFill>
+                          <a:latin typeface="Pretendard" pitchFamily="34" charset="0"/>
+                          <a:ea typeface="Pretendard" pitchFamily="34" charset="-122"/>
+                          <a:cs typeface="Pretendard" pitchFamily="34" charset="-120"/>
+                        </a:rPr>
+                        <a:t>차입 </a:t>
+                      </a:r>
+                      <a:pPr indent="0" marL="0">
+                        <a:buNone/>
+                      </a:pPr>
+                      <a:r>
+                        <a:rPr lang="en-US" sz="1100" b="1" dirty="0">
+                          <a:solidFill>
+                            <a:srgbClr val="10161F"/>
+                          </a:solidFill>
+                          <a:latin typeface="Pretendard" pitchFamily="34" charset="0"/>
+                          <a:ea typeface="Pretendard" pitchFamily="34" charset="-122"/>
+                          <a:cs typeface="Pretendard" pitchFamily="34" charset="-120"/>
+                        </a:rPr>
+                        <a:t>(안정형)</a:t>
+                      </a:r>
+                      <a:endParaRPr lang="en-US" sz="1100" dirty="0">
+                        <a:latin typeface="Pretendard" charset="0"/>
+                        <a:ea typeface="Pretendard" charset="0"/>
+                        <a:cs typeface="Pretendard" charset="0"/>
+                      </a:endParaRPr>
+                    </a:p>
+                  </a:txBody>
+                  <a:tcPr marL="50800" marR="50800" marT="25400" marB="25400" anchor="ctr">
+                    <a:lnL w="3810" cap="flat" cmpd="sng" algn="ctr">
+                      <a:solidFill>
+                        <a:srgbClr val="CBD5E0"/>
+                      </a:solidFill>
+                      <a:prstDash val="solid"/>
+                      <a:round/>
+                      <a:headEnd type="none" w="med" len="med"/>
+                      <a:tailEnd type="none" w="med" len="med"/>
+                    </a:lnL>
+                    <a:lnR w="3810" cap="flat" cmpd="sng" algn="ctr">
+                      <a:solidFill>
+                        <a:srgbClr val="CBD5E0"/>
+                      </a:solidFill>
+                      <a:prstDash val="solid"/>
+                      <a:round/>
+                      <a:headEnd type="none" w="med" len="med"/>
+                      <a:tailEnd type="none" w="med" len="med"/>
+                    </a:lnR>
+                    <a:lnT w="3810" cap="flat" cmpd="sng" algn="ctr">
+                      <a:solidFill>
+                        <a:srgbClr val="CBD5E0"/>
+                      </a:solidFill>
+                      <a:prstDash val="solid"/>
+                      <a:round/>
+                      <a:headEnd type="none" w="med" len="med"/>
+                      <a:tailEnd type="none" w="med" len="med"/>
+                    </a:lnT>
+                    <a:lnB w="3810" cap="flat" cmpd="sng" algn="ctr">
+                      <a:solidFill>
+                        <a:srgbClr val="CBD5E0"/>
+                      </a:solidFill>
+                      <a:prstDash val="solid"/>
+                      <a:round/>
+                      <a:headEnd type="none" w="med" len="med"/>
+                      <a:tailEnd type="none" w="med" len="med"/>
+                    </a:lnB>
+                    <a:solidFill>
+                      <a:srgbClr val="F7FAFC"/>
+                    </a:solidFill>
+                  </a:tcPr>
+                </a:tc>
+                <a:tc>
+                  <a:txBody>
+                    <a:bodyPr/>
+                    <a:lstStyle/>
+                    <a:p>
+                      <a:pPr indent="0" marL="0">
+                        <a:buNone/>
+                      </a:pPr>
+                      <a:r>
+                        <a:rPr lang="en-US" sz="1100" dirty="0">
+                          <a:solidFill>
+                            <a:srgbClr val="10161F"/>
+                          </a:solidFill>
+                          <a:latin typeface="Pretendard" pitchFamily="34" charset="0"/>
+                          <a:ea typeface="Pretendard" pitchFamily="34" charset="-122"/>
+                          <a:cs typeface="Pretendard" pitchFamily="34" charset="-120"/>
+                        </a:rPr>
+                        <a:t>40%</a:t>
+                      </a:r>
+                      <a:endParaRPr lang="en-US" sz="1100" dirty="0">
+                        <a:latin typeface="Pretendard" charset="0"/>
+                        <a:ea typeface="Pretendard" charset="0"/>
+                        <a:cs typeface="Pretendard" charset="0"/>
+                      </a:endParaRPr>
+                    </a:p>
+                  </a:txBody>
+                  <a:tcPr marL="50800" marR="50800" marT="25400" marB="25400" anchor="ctr">
+                    <a:lnL w="3810" cap="flat" cmpd="sng" algn="ctr">
+                      <a:solidFill>
+                        <a:srgbClr val="CBD5E0"/>
+                      </a:solidFill>
+                      <a:prstDash val="solid"/>
+                      <a:round/>
+                      <a:headEnd type="none" w="med" len="med"/>
+                      <a:tailEnd type="none" w="med" len="med"/>
+                    </a:lnL>
+                    <a:lnR w="3810" cap="flat" cmpd="sng" algn="ctr">
+                      <a:solidFill>
+                        <a:srgbClr val="CBD5E0"/>
+                      </a:solidFill>
+                      <a:prstDash val="solid"/>
+                      <a:round/>
+                      <a:headEnd type="none" w="med" len="med"/>
+                      <a:tailEnd type="none" w="med" len="med"/>
+                    </a:lnR>
+                    <a:lnT w="3810" cap="flat" cmpd="sng" algn="ctr">
+                      <a:solidFill>
+                        <a:srgbClr val="CBD5E0"/>
+                      </a:solidFill>
+                      <a:prstDash val="solid"/>
+                      <a:round/>
+                      <a:headEnd type="none" w="med" len="med"/>
+                      <a:tailEnd type="none" w="med" len="med"/>
+                    </a:lnT>
+                    <a:lnB w="3810" cap="flat" cmpd="sng" algn="ctr">
+                      <a:solidFill>
+                        <a:srgbClr val="CBD5E0"/>
+                      </a:solidFill>
+                      <a:prstDash val="solid"/>
+                      <a:round/>
+                      <a:headEnd type="none" w="med" len="med"/>
+                      <a:tailEnd type="none" w="med" len="med"/>
+                    </a:lnB>
+                    <a:solidFill>
+                      <a:srgbClr val="F7FAFC"/>
+                    </a:solidFill>
+                  </a:tcPr>
+                </a:tc>
+                <a:tc>
+                  <a:txBody>
+                    <a:bodyPr/>
+                    <a:lstStyle/>
+                    <a:p>
+                      <a:pPr indent="0" marL="0">
+                        <a:buNone/>
+                      </a:pPr>
+                      <a:r>
+                        <a:rPr lang="en-US" sz="1100" dirty="0">
+                          <a:solidFill>
+                            <a:srgbClr val="10161F"/>
+                          </a:solidFill>
+                          <a:latin typeface="Pretendard" pitchFamily="34" charset="0"/>
+                          <a:ea typeface="Pretendard" pitchFamily="34" charset="-122"/>
+                          <a:cs typeface="Pretendard" pitchFamily="34" charset="-120"/>
+                        </a:rPr>
+                        <a:t>59.3억</a:t>
+                      </a:r>
+                      <a:endParaRPr lang="en-US" sz="1100" dirty="0">
+                        <a:latin typeface="Pretendard" charset="0"/>
+                        <a:ea typeface="Pretendard" charset="0"/>
+                        <a:cs typeface="Pretendard" charset="0"/>
+                      </a:endParaRPr>
+                    </a:p>
+                  </a:txBody>
+                  <a:tcPr marL="50800" marR="50800" marT="25400" marB="25400" anchor="ctr">
+                    <a:lnL w="3810" cap="flat" cmpd="sng" algn="ctr">
+                      <a:solidFill>
+                        <a:srgbClr val="CBD5E0"/>
+                      </a:solidFill>
+                      <a:prstDash val="solid"/>
+                      <a:round/>
+                      <a:headEnd type="none" w="med" len="med"/>
+                      <a:tailEnd type="none" w="med" len="med"/>
+                    </a:lnL>
+                    <a:lnR w="3810" cap="flat" cmpd="sng" algn="ctr">
+                      <a:solidFill>
+                        <a:srgbClr val="CBD5E0"/>
+                      </a:solidFill>
+                      <a:prstDash val="solid"/>
+                      <a:round/>
+                      <a:headEnd type="none" w="med" len="med"/>
+                      <a:tailEnd type="none" w="med" len="med"/>
+                    </a:lnR>
+                    <a:lnT w="3810" cap="flat" cmpd="sng" algn="ctr">
+                      <a:solidFill>
+                        <a:srgbClr val="CBD5E0"/>
+                      </a:solidFill>
+                      <a:prstDash val="solid"/>
+                      <a:round/>
+                      <a:headEnd type="none" w="med" len="med"/>
+                      <a:tailEnd type="none" w="med" len="med"/>
+                    </a:lnT>
+                    <a:lnB w="3810" cap="flat" cmpd="sng" algn="ctr">
+                      <a:solidFill>
+                        <a:srgbClr val="CBD5E0"/>
+                      </a:solidFill>
+                      <a:prstDash val="solid"/>
+                      <a:round/>
+                      <a:headEnd type="none" w="med" len="med"/>
+                      <a:tailEnd type="none" w="med" len="med"/>
+                    </a:lnB>
+                    <a:solidFill>
+                      <a:srgbClr val="F7FAFC"/>
+                    </a:solidFill>
+                  </a:tcPr>
+                </a:tc>
+                <a:tc>
+                  <a:txBody>
+                    <a:bodyPr/>
+                    <a:lstStyle/>
+                    <a:p>
+                      <a:pPr indent="0" marL="0">
+                        <a:buNone/>
+                      </a:pPr>
+                      <a:r>
+                        <a:rPr lang="en-US" sz="1100" dirty="0">
+                          <a:solidFill>
+                            <a:srgbClr val="10161F"/>
+                          </a:solidFill>
+                          <a:latin typeface="Pretendard" pitchFamily="34" charset="0"/>
+                          <a:ea typeface="Pretendard" pitchFamily="34" charset="-122"/>
+                          <a:cs typeface="Pretendard" pitchFamily="34" charset="-120"/>
+                        </a:rPr>
+                        <a:t>3.11%</a:t>
+                      </a:r>
+                      <a:endParaRPr lang="en-US" sz="1100" dirty="0">
+                        <a:latin typeface="Pretendard" charset="0"/>
+                        <a:ea typeface="Pretendard" charset="0"/>
+                        <a:cs typeface="Pretendard" charset="0"/>
+                      </a:endParaRPr>
+                    </a:p>
+                  </a:txBody>
+                  <a:tcPr marL="50800" marR="50800" marT="25400" marB="25400" anchor="ctr">
+                    <a:lnL w="3810" cap="flat" cmpd="sng" algn="ctr">
+                      <a:solidFill>
+                        <a:srgbClr val="CBD5E0"/>
+                      </a:solidFill>
+                      <a:prstDash val="solid"/>
+                      <a:round/>
+                      <a:headEnd type="none" w="med" len="med"/>
+                      <a:tailEnd type="none" w="med" len="med"/>
+                    </a:lnL>
+                    <a:lnR w="3810" cap="flat" cmpd="sng" algn="ctr">
+                      <a:solidFill>
+                        <a:srgbClr val="CBD5E0"/>
+                      </a:solidFill>
+                      <a:prstDash val="solid"/>
+                      <a:round/>
+                      <a:headEnd type="none" w="med" len="med"/>
+                      <a:tailEnd type="none" w="med" len="med"/>
+                    </a:lnR>
+                    <a:lnT w="3810" cap="flat" cmpd="sng" algn="ctr">
+                      <a:solidFill>
+                        <a:srgbClr val="CBD5E0"/>
+                      </a:solidFill>
+                      <a:prstDash val="solid"/>
+                      <a:round/>
+                      <a:headEnd type="none" w="med" len="med"/>
+                      <a:tailEnd type="none" w="med" len="med"/>
+                    </a:lnT>
+                    <a:lnB w="3810" cap="flat" cmpd="sng" algn="ctr">
+                      <a:solidFill>
+                        <a:srgbClr val="CBD5E0"/>
+                      </a:solidFill>
+                      <a:prstDash val="solid"/>
+                      <a:round/>
+                      <a:headEnd type="none" w="med" len="med"/>
+                      <a:tailEnd type="none" w="med" len="med"/>
+                    </a:lnB>
+                    <a:solidFill>
+                      <a:srgbClr val="F7FAFC"/>
+                    </a:solidFill>
+                  </a:tcPr>
+                </a:tc>
+              </a:tr>
+              <a:tr h="457200">
+                <a:tc>
+                  <a:txBody>
+                    <a:bodyPr/>
+                    <a:lstStyle/>
+                    <a:p>
+                      <a:pPr indent="0" marL="0">
+                        <a:buNone/>
+                      </a:pPr>
+                      <a:r>
+                        <a:rPr lang="en-US" sz="1100" b="1" dirty="0">
+                          <a:solidFill>
+                            <a:srgbClr val="10161F"/>
+                          </a:solidFill>
+                          <a:latin typeface="Pretendard" pitchFamily="34" charset="0"/>
+                          <a:ea typeface="Pretendard" pitchFamily="34" charset="-122"/>
+                          <a:cs typeface="Pretendard" pitchFamily="34" charset="-120"/>
+                        </a:rPr>
+                        <a:t>표준 </a:t>
+                      </a:r>
+                      <a:pPr indent="0" marL="0">
+                        <a:buNone/>
+                      </a:pPr>
+                      <a:r>
+                        <a:rPr lang="en-US" sz="1100" b="1" dirty="0">
+                          <a:solidFill>
+                            <a:srgbClr val="10161F"/>
+                          </a:solidFill>
+                          <a:latin typeface="Pretendard" pitchFamily="34" charset="0"/>
+                          <a:ea typeface="Pretendard" pitchFamily="34" charset="-122"/>
+                          <a:cs typeface="Pretendard" pitchFamily="34" charset="-120"/>
+                        </a:rPr>
+                        <a:t>차입 </a:t>
+                      </a:r>
+                      <a:pPr indent="0" marL="0">
+                        <a:buNone/>
+                      </a:pPr>
+                      <a:r>
+                        <a:rPr lang="en-US" sz="1100" b="1" dirty="0">
+                          <a:solidFill>
+                            <a:srgbClr val="10161F"/>
+                          </a:solidFill>
+                          <a:latin typeface="Pretendard" pitchFamily="34" charset="0"/>
+                          <a:ea typeface="Pretendard" pitchFamily="34" charset="-122"/>
+                          <a:cs typeface="Pretendard" pitchFamily="34" charset="-120"/>
+                        </a:rPr>
+                        <a:t>(기본형)</a:t>
+                      </a:r>
+                      <a:endParaRPr lang="en-US" sz="1100" dirty="0">
+                        <a:latin typeface="Pretendard" charset="0"/>
+                        <a:ea typeface="Pretendard" charset="0"/>
+                        <a:cs typeface="Pretendard" charset="0"/>
+                      </a:endParaRPr>
+                    </a:p>
+                  </a:txBody>
+                  <a:tcPr marL="50800" marR="50800" marT="25400" marB="25400" anchor="ctr">
+                    <a:lnL w="3810" cap="flat" cmpd="sng" algn="ctr">
+                      <a:solidFill>
+                        <a:srgbClr val="CBD5E0"/>
+                      </a:solidFill>
+                      <a:prstDash val="solid"/>
+                      <a:round/>
+                      <a:headEnd type="none" w="med" len="med"/>
+                      <a:tailEnd type="none" w="med" len="med"/>
+                    </a:lnL>
+                    <a:lnR w="3810" cap="flat" cmpd="sng" algn="ctr">
+                      <a:solidFill>
+                        <a:srgbClr val="CBD5E0"/>
+                      </a:solidFill>
+                      <a:prstDash val="solid"/>
+                      <a:round/>
+                      <a:headEnd type="none" w="med" len="med"/>
+                      <a:tailEnd type="none" w="med" len="med"/>
+                    </a:lnR>
+                    <a:lnT w="3810" cap="flat" cmpd="sng" algn="ctr">
+                      <a:solidFill>
+                        <a:srgbClr val="CBD5E0"/>
+                      </a:solidFill>
+                      <a:prstDash val="solid"/>
+                      <a:round/>
+                      <a:headEnd type="none" w="med" len="med"/>
+                      <a:tailEnd type="none" w="med" len="med"/>
+                    </a:lnT>
+                    <a:lnB w="3810" cap="flat" cmpd="sng" algn="ctr">
+                      <a:solidFill>
+                        <a:srgbClr val="CBD5E0"/>
+                      </a:solidFill>
+                      <a:prstDash val="solid"/>
+                      <a:round/>
+                      <a:headEnd type="none" w="med" len="med"/>
+                      <a:tailEnd type="none" w="med" len="med"/>
+                    </a:lnB>
+                    <a:solidFill>
+                      <a:srgbClr val="FFFFFF"/>
+                    </a:solidFill>
+                  </a:tcPr>
+                </a:tc>
+                <a:tc>
+                  <a:txBody>
+                    <a:bodyPr/>
+                    <a:lstStyle/>
+                    <a:p>
+                      <a:pPr indent="0" marL="0">
+                        <a:buNone/>
+                      </a:pPr>
+                      <a:r>
+                        <a:rPr lang="en-US" sz="1100" dirty="0">
+                          <a:solidFill>
+                            <a:srgbClr val="10161F"/>
+                          </a:solidFill>
+                          <a:latin typeface="Pretendard" pitchFamily="34" charset="0"/>
+                          <a:ea typeface="Pretendard" pitchFamily="34" charset="-122"/>
+                          <a:cs typeface="Pretendard" pitchFamily="34" charset="-120"/>
+                        </a:rPr>
+                        <a:t>50%</a:t>
+                      </a:r>
+                      <a:endParaRPr lang="en-US" sz="1100" dirty="0">
+                        <a:latin typeface="Pretendard" charset="0"/>
+                        <a:ea typeface="Pretendard" charset="0"/>
+                        <a:cs typeface="Pretendard" charset="0"/>
+                      </a:endParaRPr>
+                    </a:p>
+                  </a:txBody>
+                  <a:tcPr marL="50800" marR="50800" marT="25400" marB="25400" anchor="ctr">
+                    <a:lnL w="3810" cap="flat" cmpd="sng" algn="ctr">
+                      <a:solidFill>
+                        <a:srgbClr val="CBD5E0"/>
+                      </a:solidFill>
+                      <a:prstDash val="solid"/>
+                      <a:round/>
+                      <a:headEnd type="none" w="med" len="med"/>
+                      <a:tailEnd type="none" w="med" len="med"/>
+                    </a:lnL>
+                    <a:lnR w="3810" cap="flat" cmpd="sng" algn="ctr">
+                      <a:solidFill>
+                        <a:srgbClr val="CBD5E0"/>
+                      </a:solidFill>
+                      <a:prstDash val="solid"/>
+                      <a:round/>
+                      <a:headEnd type="none" w="med" len="med"/>
+                      <a:tailEnd type="none" w="med" len="med"/>
+                    </a:lnR>
+                    <a:lnT w="3810" cap="flat" cmpd="sng" algn="ctr">
+                      <a:solidFill>
+                        <a:srgbClr val="CBD5E0"/>
+                      </a:solidFill>
+                      <a:prstDash val="solid"/>
+                      <a:round/>
+                      <a:headEnd type="none" w="med" len="med"/>
+                      <a:tailEnd type="none" w="med" len="med"/>
+                    </a:lnT>
+                    <a:lnB w="3810" cap="flat" cmpd="sng" algn="ctr">
+                      <a:solidFill>
+                        <a:srgbClr val="CBD5E0"/>
+                      </a:solidFill>
+                      <a:prstDash val="solid"/>
+                      <a:round/>
+                      <a:headEnd type="none" w="med" len="med"/>
+                      <a:tailEnd type="none" w="med" len="med"/>
+                    </a:lnB>
+                    <a:solidFill>
+                      <a:srgbClr val="FFFFFF"/>
+                    </a:solidFill>
+                  </a:tcPr>
+                </a:tc>
+                <a:tc>
+                  <a:txBody>
+                    <a:bodyPr/>
+                    <a:lstStyle/>
+                    <a:p>
+                      <a:pPr indent="0" marL="0">
+                        <a:buNone/>
+                      </a:pPr>
+                      <a:r>
+                        <a:rPr lang="en-US" sz="1100" dirty="0">
+                          <a:solidFill>
+                            <a:srgbClr val="10161F"/>
+                          </a:solidFill>
+                          <a:latin typeface="Pretendard" pitchFamily="34" charset="0"/>
+                          <a:ea typeface="Pretendard" pitchFamily="34" charset="-122"/>
+                          <a:cs typeface="Pretendard" pitchFamily="34" charset="-120"/>
+                        </a:rPr>
+                        <a:t>49.5억</a:t>
+                      </a:r>
+                      <a:endParaRPr lang="en-US" sz="1100" dirty="0">
+                        <a:latin typeface="Pretendard" charset="0"/>
+                        <a:ea typeface="Pretendard" charset="0"/>
+                        <a:cs typeface="Pretendard" charset="0"/>
+                      </a:endParaRPr>
+                    </a:p>
+                  </a:txBody>
+                  <a:tcPr marL="50800" marR="50800" marT="25400" marB="25400" anchor="ctr">
+                    <a:lnL w="3810" cap="flat" cmpd="sng" algn="ctr">
+                      <a:solidFill>
+                        <a:srgbClr val="CBD5E0"/>
+                      </a:solidFill>
+                      <a:prstDash val="solid"/>
+                      <a:round/>
+                      <a:headEnd type="none" w="med" len="med"/>
+                      <a:tailEnd type="none" w="med" len="med"/>
+                    </a:lnL>
+                    <a:lnR w="3810" cap="flat" cmpd="sng" algn="ctr">
+                      <a:solidFill>
+                        <a:srgbClr val="CBD5E0"/>
+                      </a:solidFill>
+                      <a:prstDash val="solid"/>
+                      <a:round/>
+                      <a:headEnd type="none" w="med" len="med"/>
+                      <a:tailEnd type="none" w="med" len="med"/>
+                    </a:lnR>
+                    <a:lnT w="3810" cap="flat" cmpd="sng" algn="ctr">
+                      <a:solidFill>
+                        <a:srgbClr val="CBD5E0"/>
+                      </a:solidFill>
+                      <a:prstDash val="solid"/>
+                      <a:round/>
+                      <a:headEnd type="none" w="med" len="med"/>
+                      <a:tailEnd type="none" w="med" len="med"/>
+                    </a:lnT>
+                    <a:lnB w="3810" cap="flat" cmpd="sng" algn="ctr">
+                      <a:solidFill>
+                        <a:srgbClr val="CBD5E0"/>
+                      </a:solidFill>
+                      <a:prstDash val="solid"/>
+                      <a:round/>
+                      <a:headEnd type="none" w="med" len="med"/>
+                      <a:tailEnd type="none" w="med" len="med"/>
+                    </a:lnB>
+                    <a:solidFill>
+                      <a:srgbClr val="FFFFFF"/>
+                    </a:solidFill>
+                  </a:tcPr>
+                </a:tc>
+                <a:tc>
+                  <a:txBody>
+                    <a:bodyPr/>
+                    <a:lstStyle/>
+                    <a:p>
+                      <a:pPr indent="0" marL="0">
+                        <a:buNone/>
+                      </a:pPr>
+                      <a:r>
+                        <a:rPr lang="en-US" sz="1100" dirty="0">
+                          <a:solidFill>
+                            <a:srgbClr val="10161F"/>
+                          </a:solidFill>
+                          <a:latin typeface="Pretendard" pitchFamily="34" charset="0"/>
+                          <a:ea typeface="Pretendard" pitchFamily="34" charset="-122"/>
+                          <a:cs typeface="Pretendard" pitchFamily="34" charset="-120"/>
+                        </a:rPr>
+                        <a:t>2.77%</a:t>
+                      </a:r>
+                      <a:endParaRPr lang="en-US" sz="1100" dirty="0">
+                        <a:latin typeface="Pretendard" charset="0"/>
+                        <a:ea typeface="Pretendard" charset="0"/>
+                        <a:cs typeface="Pretendard" charset="0"/>
+                      </a:endParaRPr>
+                    </a:p>
+                  </a:txBody>
+                  <a:tcPr marL="50800" marR="50800" marT="25400" marB="25400" anchor="ctr">
+                    <a:lnL w="3810" cap="flat" cmpd="sng" algn="ctr">
+                      <a:solidFill>
+                        <a:srgbClr val="CBD5E0"/>
+                      </a:solidFill>
+                      <a:prstDash val="solid"/>
+                      <a:round/>
+                      <a:headEnd type="none" w="med" len="med"/>
+                      <a:tailEnd type="none" w="med" len="med"/>
+                    </a:lnL>
+                    <a:lnR w="3810" cap="flat" cmpd="sng" algn="ctr">
+                      <a:solidFill>
+                        <a:srgbClr val="CBD5E0"/>
+                      </a:solidFill>
+                      <a:prstDash val="solid"/>
+                      <a:round/>
+                      <a:headEnd type="none" w="med" len="med"/>
+                      <a:tailEnd type="none" w="med" len="med"/>
+                    </a:lnR>
+                    <a:lnT w="3810" cap="flat" cmpd="sng" algn="ctr">
+                      <a:solidFill>
+                        <a:srgbClr val="CBD5E0"/>
+                      </a:solidFill>
+                      <a:prstDash val="solid"/>
+                      <a:round/>
+                      <a:headEnd type="none" w="med" len="med"/>
+                      <a:tailEnd type="none" w="med" len="med"/>
+                    </a:lnT>
+                    <a:lnB w="3810" cap="flat" cmpd="sng" algn="ctr">
+                      <a:solidFill>
+                        <a:srgbClr val="CBD5E0"/>
+                      </a:solidFill>
+                      <a:prstDash val="solid"/>
+                      <a:round/>
+                      <a:headEnd type="none" w="med" len="med"/>
+                      <a:tailEnd type="none" w="med" len="med"/>
+                    </a:lnB>
+                    <a:solidFill>
+                      <a:srgbClr val="FFFFFF"/>
+                    </a:solidFill>
+                  </a:tcPr>
+                </a:tc>
+              </a:tr>
+              <a:tr h="457200">
+                <a:tc>
+                  <a:txBody>
+                    <a:bodyPr/>
+                    <a:lstStyle/>
+                    <a:p>
+                      <a:pPr indent="0" marL="0">
+                        <a:buNone/>
+                      </a:pPr>
+                      <a:r>
+                        <a:rPr lang="en-US" sz="1100" b="1" dirty="0">
+                          <a:solidFill>
+                            <a:srgbClr val="10161F"/>
+                          </a:solidFill>
+                          <a:latin typeface="Pretendard" pitchFamily="34" charset="0"/>
+                          <a:ea typeface="Pretendard" pitchFamily="34" charset="-122"/>
+                          <a:cs typeface="Pretendard" pitchFamily="34" charset="-120"/>
+                        </a:rPr>
+                        <a:t>적극적 </a:t>
+                      </a:r>
+                      <a:pPr indent="0" marL="0">
+                        <a:buNone/>
+                      </a:pPr>
+                      <a:r>
+                        <a:rPr lang="en-US" sz="1100" b="1" dirty="0">
+                          <a:solidFill>
+                            <a:srgbClr val="10161F"/>
+                          </a:solidFill>
+                          <a:latin typeface="Pretendard" pitchFamily="34" charset="0"/>
+                          <a:ea typeface="Pretendard" pitchFamily="34" charset="-122"/>
+                          <a:cs typeface="Pretendard" pitchFamily="34" charset="-120"/>
+                        </a:rPr>
+                        <a:t>차입 </a:t>
+                      </a:r>
+                      <a:pPr indent="0" marL="0">
+                        <a:buNone/>
+                      </a:pPr>
+                      <a:r>
+                        <a:rPr lang="en-US" sz="1100" b="1" dirty="0">
+                          <a:solidFill>
+                            <a:srgbClr val="10161F"/>
+                          </a:solidFill>
+                          <a:latin typeface="Pretendard" pitchFamily="34" charset="0"/>
+                          <a:ea typeface="Pretendard" pitchFamily="34" charset="-122"/>
+                          <a:cs typeface="Pretendard" pitchFamily="34" charset="-120"/>
+                        </a:rPr>
+                        <a:t>(레버리지)</a:t>
+                      </a:r>
+                      <a:endParaRPr lang="en-US" sz="1100" dirty="0">
+                        <a:latin typeface="Pretendard" charset="0"/>
+                        <a:ea typeface="Pretendard" charset="0"/>
+                        <a:cs typeface="Pretendard" charset="0"/>
+                      </a:endParaRPr>
+                    </a:p>
+                  </a:txBody>
+                  <a:tcPr marL="50800" marR="50800" marT="25400" marB="25400" anchor="ctr">
+                    <a:lnL w="3810" cap="flat" cmpd="sng" algn="ctr">
+                      <a:solidFill>
+                        <a:srgbClr val="CBD5E0"/>
+                      </a:solidFill>
+                      <a:prstDash val="solid"/>
+                      <a:round/>
+                      <a:headEnd type="none" w="med" len="med"/>
+                      <a:tailEnd type="none" w="med" len="med"/>
+                    </a:lnL>
+                    <a:lnR w="3810" cap="flat" cmpd="sng" algn="ctr">
+                      <a:solidFill>
+                        <a:srgbClr val="CBD5E0"/>
+                      </a:solidFill>
+                      <a:prstDash val="solid"/>
+                      <a:round/>
+                      <a:headEnd type="none" w="med" len="med"/>
+                      <a:tailEnd type="none" w="med" len="med"/>
+                    </a:lnR>
+                    <a:lnT w="3810" cap="flat" cmpd="sng" algn="ctr">
+                      <a:solidFill>
+                        <a:srgbClr val="CBD5E0"/>
+                      </a:solidFill>
+                      <a:prstDash val="solid"/>
+                      <a:round/>
+                      <a:headEnd type="none" w="med" len="med"/>
+                      <a:tailEnd type="none" w="med" len="med"/>
+                    </a:lnT>
+                    <a:lnB w="3810" cap="flat" cmpd="sng" algn="ctr">
+                      <a:solidFill>
+                        <a:srgbClr val="CBD5E0"/>
+                      </a:solidFill>
+                      <a:prstDash val="solid"/>
+                      <a:round/>
+                      <a:headEnd type="none" w="med" len="med"/>
+                      <a:tailEnd type="none" w="med" len="med"/>
+                    </a:lnB>
+                    <a:solidFill>
+                      <a:srgbClr val="F7FAFC"/>
+                    </a:solidFill>
+                  </a:tcPr>
+                </a:tc>
+                <a:tc>
+                  <a:txBody>
+                    <a:bodyPr/>
+                    <a:lstStyle/>
+                    <a:p>
+                      <a:pPr indent="0" marL="0">
+                        <a:buNone/>
+                      </a:pPr>
+                      <a:r>
+                        <a:rPr lang="en-US" sz="1100" dirty="0">
+                          <a:solidFill>
+                            <a:srgbClr val="10161F"/>
+                          </a:solidFill>
+                          <a:latin typeface="Pretendard" pitchFamily="34" charset="0"/>
+                          <a:ea typeface="Pretendard" pitchFamily="34" charset="-122"/>
+                          <a:cs typeface="Pretendard" pitchFamily="34" charset="-120"/>
+                        </a:rPr>
+                        <a:t>60%</a:t>
+                      </a:r>
+                      <a:endParaRPr lang="en-US" sz="1100" dirty="0">
+                        <a:latin typeface="Pretendard" charset="0"/>
+                        <a:ea typeface="Pretendard" charset="0"/>
+                        <a:cs typeface="Pretendard" charset="0"/>
+                      </a:endParaRPr>
+                    </a:p>
+                  </a:txBody>
+                  <a:tcPr marL="50800" marR="50800" marT="25400" marB="25400" anchor="ctr">
+                    <a:lnL w="3810" cap="flat" cmpd="sng" algn="ctr">
+                      <a:solidFill>
+                        <a:srgbClr val="CBD5E0"/>
+                      </a:solidFill>
+                      <a:prstDash val="solid"/>
+                      <a:round/>
+                      <a:headEnd type="none" w="med" len="med"/>
+                      <a:tailEnd type="none" w="med" len="med"/>
+                    </a:lnL>
+                    <a:lnR w="3810" cap="flat" cmpd="sng" algn="ctr">
+                      <a:solidFill>
+                        <a:srgbClr val="CBD5E0"/>
+                      </a:solidFill>
+                      <a:prstDash val="solid"/>
+                      <a:round/>
+                      <a:headEnd type="none" w="med" len="med"/>
+                      <a:tailEnd type="none" w="med" len="med"/>
+                    </a:lnR>
+                    <a:lnT w="3810" cap="flat" cmpd="sng" algn="ctr">
+                      <a:solidFill>
+                        <a:srgbClr val="CBD5E0"/>
+                      </a:solidFill>
+                      <a:prstDash val="solid"/>
+                      <a:round/>
+                      <a:headEnd type="none" w="med" len="med"/>
+                      <a:tailEnd type="none" w="med" len="med"/>
+                    </a:lnT>
+                    <a:lnB w="3810" cap="flat" cmpd="sng" algn="ctr">
+                      <a:solidFill>
+                        <a:srgbClr val="CBD5E0"/>
+                      </a:solidFill>
+                      <a:prstDash val="solid"/>
+                      <a:round/>
+                      <a:headEnd type="none" w="med" len="med"/>
+                      <a:tailEnd type="none" w="med" len="med"/>
+                    </a:lnB>
+                    <a:solidFill>
+                      <a:srgbClr val="F7FAFC"/>
+                    </a:solidFill>
+                  </a:tcPr>
+                </a:tc>
+                <a:tc>
+                  <a:txBody>
+                    <a:bodyPr/>
+                    <a:lstStyle/>
+                    <a:p>
+                      <a:pPr indent="0" marL="0">
+                        <a:buNone/>
+                      </a:pPr>
+                      <a:r>
+                        <a:rPr lang="en-US" sz="1100" dirty="0">
+                          <a:solidFill>
+                            <a:srgbClr val="10161F"/>
+                          </a:solidFill>
+                          <a:latin typeface="Pretendard" pitchFamily="34" charset="0"/>
+                          <a:ea typeface="Pretendard" pitchFamily="34" charset="-122"/>
+                          <a:cs typeface="Pretendard" pitchFamily="34" charset="-120"/>
+                        </a:rPr>
+                        <a:t>39.7억</a:t>
+                      </a:r>
+                      <a:endParaRPr lang="en-US" sz="1100" dirty="0">
+                        <a:latin typeface="Pretendard" charset="0"/>
+                        <a:ea typeface="Pretendard" charset="0"/>
+                        <a:cs typeface="Pretendard" charset="0"/>
+                      </a:endParaRPr>
+                    </a:p>
+                  </a:txBody>
+                  <a:tcPr marL="50800" marR="50800" marT="25400" marB="25400" anchor="ctr">
+                    <a:lnL w="3810" cap="flat" cmpd="sng" algn="ctr">
+                      <a:solidFill>
+                        <a:srgbClr val="CBD5E0"/>
+                      </a:solidFill>
+                      <a:prstDash val="solid"/>
+                      <a:round/>
+                      <a:headEnd type="none" w="med" len="med"/>
+                      <a:tailEnd type="none" w="med" len="med"/>
+                    </a:lnL>
+                    <a:lnR w="3810" cap="flat" cmpd="sng" algn="ctr">
+                      <a:solidFill>
+                        <a:srgbClr val="CBD5E0"/>
+                      </a:solidFill>
+                      <a:prstDash val="solid"/>
+                      <a:round/>
+                      <a:headEnd type="none" w="med" len="med"/>
+                      <a:tailEnd type="none" w="med" len="med"/>
+                    </a:lnR>
+                    <a:lnT w="3810" cap="flat" cmpd="sng" algn="ctr">
+                      <a:solidFill>
+                        <a:srgbClr val="CBD5E0"/>
+                      </a:solidFill>
+                      <a:prstDash val="solid"/>
+                      <a:round/>
+                      <a:headEnd type="none" w="med" len="med"/>
+                      <a:tailEnd type="none" w="med" len="med"/>
+                    </a:lnT>
+                    <a:lnB w="3810" cap="flat" cmpd="sng" algn="ctr">
+                      <a:solidFill>
+                        <a:srgbClr val="CBD5E0"/>
+                      </a:solidFill>
+                      <a:prstDash val="solid"/>
+                      <a:round/>
+                      <a:headEnd type="none" w="med" len="med"/>
+                      <a:tailEnd type="none" w="med" len="med"/>
+                    </a:lnB>
+                    <a:solidFill>
+                      <a:srgbClr val="F7FAFC"/>
+                    </a:solidFill>
+                  </a:tcPr>
+                </a:tc>
+                <a:tc>
+                  <a:txBody>
+                    <a:bodyPr/>
+                    <a:lstStyle/>
+                    <a:p>
+                      <a:pPr indent="0" marL="0">
+                        <a:buNone/>
+                      </a:pPr>
+                      <a:r>
+                        <a:rPr lang="en-US" sz="1100" dirty="0">
+                          <a:solidFill>
+                            <a:srgbClr val="10161F"/>
+                          </a:solidFill>
+                          <a:latin typeface="Pretendard" pitchFamily="34" charset="0"/>
+                          <a:ea typeface="Pretendard" pitchFamily="34" charset="-122"/>
+                          <a:cs typeface="Pretendard" pitchFamily="34" charset="-120"/>
+                        </a:rPr>
+                        <a:t>2.27%</a:t>
+                      </a:r>
+                      <a:endParaRPr lang="en-US" sz="1100" dirty="0">
+                        <a:latin typeface="Pretendard" charset="0"/>
+                        <a:ea typeface="Pretendard" charset="0"/>
+                        <a:cs typeface="Pretendard" charset="0"/>
+                      </a:endParaRPr>
+                    </a:p>
+                  </a:txBody>
+                  <a:tcPr marL="50800" marR="50800" marT="25400" marB="25400" anchor="ctr">
+                    <a:lnL w="3810" cap="flat" cmpd="sng" algn="ctr">
+                      <a:solidFill>
+                        <a:srgbClr val="CBD5E0"/>
+                      </a:solidFill>
+                      <a:prstDash val="solid"/>
+                      <a:round/>
+                      <a:headEnd type="none" w="med" len="med"/>
+                      <a:tailEnd type="none" w="med" len="med"/>
+                    </a:lnL>
+                    <a:lnR w="3810" cap="flat" cmpd="sng" algn="ctr">
+                      <a:solidFill>
+                        <a:srgbClr val="CBD5E0"/>
+                      </a:solidFill>
+                      <a:prstDash val="solid"/>
+                      <a:round/>
+                      <a:headEnd type="none" w="med" len="med"/>
+                      <a:tailEnd type="none" w="med" len="med"/>
+                    </a:lnR>
+                    <a:lnT w="3810" cap="flat" cmpd="sng" algn="ctr">
+                      <a:solidFill>
+                        <a:srgbClr val="CBD5E0"/>
+                      </a:solidFill>
+                      <a:prstDash val="solid"/>
+                      <a:round/>
+                      <a:headEnd type="none" w="med" len="med"/>
+                      <a:tailEnd type="none" w="med" len="med"/>
+                    </a:lnT>
+                    <a:lnB w="3810" cap="flat" cmpd="sng" algn="ctr">
+                      <a:solidFill>
+                        <a:srgbClr val="CBD5E0"/>
+                      </a:solidFill>
+                      <a:prstDash val="solid"/>
+                      <a:round/>
+                      <a:headEnd type="none" w="med" len="med"/>
+                      <a:tailEnd type="none" w="med" len="med"/>
+                    </a:lnB>
+                    <a:solidFill>
+                      <a:srgbClr val="F7FAFC"/>
+                    </a:solidFill>
+                  </a:tcPr>
+                </a:tc>
+              </a:tr>
+            </a:tbl>
+          </a:graphicData>
+        </a:graphic>
+      </p:graphicFrame>
+      <p:sp>
+        <p:nvSpPr>
+          <p:cNvPr id="31" name="Shape 28"/>
+          <p:cNvSpPr/>
+          <p:nvPr/>
+        </p:nvSpPr>
+        <p:spPr>
+          <a:xfrm>
+            <a:off x="6461608" y="4069080"/>
+            <a:ext cx="4934560" cy="1463040"/>
+          </a:xfrm>
+          <a:prstGeom prst="roundRect">
+            <a:avLst>
+              <a:gd name="adj" fmla="val 3750"/>
+            </a:avLst>
+          </a:prstGeom>
+          <a:solidFill>
+            <a:srgbClr val="FEEBC8"/>
+          </a:solidFill>
+          <a:ln/>
+        </p:spPr>
+      </p:sp>
+      <p:sp>
+        <p:nvSpPr>
+          <p:cNvPr id="32" name="Shape 29"/>
+          <p:cNvSpPr/>
+          <p:nvPr/>
+        </p:nvSpPr>
+        <p:spPr>
+          <a:xfrm>
+            <a:off x="6461608" y="4123944"/>
+            <a:ext cx="36576" cy="1353312"/>
+          </a:xfrm>
+          <a:prstGeom prst="rect">
+            <a:avLst/>
+          </a:prstGeom>
+          <a:solidFill>
+            <a:srgbClr val="9C4221"/>
+          </a:solidFill>
+          <a:ln/>
+        </p:spPr>
+      </p:sp>
+      <p:sp>
+        <p:nvSpPr>
+          <p:cNvPr id="33" name="Text 30"/>
+          <p:cNvSpPr/>
+          <p:nvPr/>
+        </p:nvSpPr>
+        <p:spPr>
+          <a:xfrm>
+            <a:off x="6644488" y="4178808"/>
+            <a:ext cx="4605376" cy="201168"/>
+          </a:xfrm>
+          <a:prstGeom prst="rect">
+            <a:avLst/>
+          </a:prstGeom>
+          <a:noFill/>
+          <a:ln/>
+        </p:spPr>
+        <p:txBody>
+          <a:bodyPr wrap="square" lIns="0" tIns="0" rIns="0" bIns="0" rtlCol="0" anchor="ctr"/>
+          <a:lstStyle/>
+          <a:p>
+            <a:pPr indent="0" marL="0">
+              <a:buNone/>
+            </a:pPr>
+            <a:r>
+              <a:rPr lang="en-US" sz="1050" b="1" dirty="0">
+                <a:solidFill>
+                  <a:srgbClr val="9C4221"/>
+                </a:solidFill>
+                <a:latin typeface="Pretendard" pitchFamily="34" charset="0"/>
+                <a:ea typeface="Pretendard" pitchFamily="34" charset="-122"/>
+                <a:cs typeface="Pretendard" pitchFamily="34" charset="-120"/>
+              </a:rPr>
+              <a:t>역레버리지 유의 구간</a:t>
+            </a:r>
+            <a:endParaRPr lang="en-US" sz="1050" dirty="0"/>
+          </a:p>
+        </p:txBody>
+      </p:sp>
+      <p:sp>
+        <p:nvSpPr>
+          <p:cNvPr id="34" name="Text 31"/>
+          <p:cNvSpPr/>
+          <p:nvPr/>
+        </p:nvSpPr>
+        <p:spPr>
+          <a:xfrm>
+            <a:off x="6644488" y="4398264"/>
+            <a:ext cx="4605376" cy="1060704"/>
+          </a:xfrm>
+          <a:prstGeom prst="rect">
+            <a:avLst/>
+          </a:prstGeom>
+          <a:noFill/>
+          <a:ln/>
+        </p:spPr>
+        <p:txBody>
+          <a:bodyPr wrap="square" lIns="0" tIns="0" rIns="0" bIns="0" rtlCol="0" anchor="t"/>
+          <a:lstStyle/>
+          <a:p>
+            <a:pPr indent="0" marL="0">
+              <a:lnSpc>
+                <a:spcPct val="120000"/>
+              </a:lnSpc>
+              <a:buNone/>
+            </a:pPr>
+            <a:r>
+              <a:rPr lang="en-US" sz="930" dirty="0">
+                <a:solidFill>
+                  <a:srgbClr val="10161F"/>
+                </a:solidFill>
+                <a:latin typeface="Pretendard" pitchFamily="34" charset="0"/>
+                <a:ea typeface="Pretendard" pitchFamily="34" charset="-122"/>
+                <a:cs typeface="Pretendard" pitchFamily="34" charset="-120"/>
+              </a:rPr>
+              <a:t>차입 금리가 자산 총수익률을 상회하여 대출 실행 시 자기자본수익률이 하락할 수 있습니다. 에쿼티 비중 확대를 권장합니다.</a:t>
+            </a:r>
+            <a:endParaRPr lang="en-US" sz="930" dirty="0"/>
+          </a:p>
+        </p:txBody>
+      </p:sp>
+      <p:sp>
+        <p:nvSpPr>
+          <p:cNvPr id="35" name="Text 32"/>
+          <p:cNvSpPr/>
+          <p:nvPr/>
+        </p:nvSpPr>
+        <p:spPr>
+          <a:xfrm>
+            <a:off x="566928" y="6382512"/>
+            <a:ext cx="7315200" cy="219456"/>
+          </a:xfrm>
+          <a:prstGeom prst="rect">
+            <a:avLst/>
+          </a:prstGeom>
+          <a:noFill/>
+          <a:ln/>
+        </p:spPr>
+        <p:txBody>
+          <a:bodyPr wrap="square" lIns="0" tIns="0" rIns="0" bIns="0" rtlCol="0" anchor="ctr"/>
+          <a:lstStyle/>
+          <a:p>
+            <a:pPr indent="0" marL="0">
+              <a:buNone/>
+            </a:pPr>
+            <a:r>
+              <a:rPr lang="en-US" sz="800" dirty="0">
+                <a:solidFill>
+                  <a:srgbClr val="718096"/>
+                </a:solidFill>
+                <a:latin typeface="Pretendard" pitchFamily="34" charset="0"/>
+                <a:ea typeface="Pretendard" pitchFamily="34" charset="-122"/>
+                <a:cs typeface="Pretendard" pitchFamily="34" charset="-120"/>
+              </a:rPr>
+              <a:t>크리딜   |   </a:t>
+            </a:r>
+            <a:endParaRPr lang="en-US" sz="800" dirty="0"/>
+          </a:p>
+        </p:txBody>
+      </p:sp>
+      <p:sp>
+        <p:nvSpPr>
+          <p:cNvPr id="36" name="Text 33"/>
+          <p:cNvSpPr/>
+          <p:nvPr/>
+        </p:nvSpPr>
+        <p:spPr>
+          <a:xfrm>
+            <a:off x="10710367" y="6382512"/>
+            <a:ext cx="914400" cy="219456"/>
+          </a:xfrm>
+          <a:prstGeom prst="rect">
+            <a:avLst/>
+          </a:prstGeom>
+          <a:noFill/>
+          <a:ln/>
+        </p:spPr>
+        <p:txBody>
+          <a:bodyPr wrap="square" lIns="0" tIns="0" rIns="0" bIns="0" rtlCol="0" anchor="ctr"/>
+          <a:lstStyle/>
+          <a:p>
+            <a:pPr algn="r" indent="0" marL="0">
+              <a:buNone/>
+            </a:pPr>
+            <a:r>
+              <a:rPr lang="en-US" sz="900" b="1" dirty="0">
+                <a:solidFill>
+                  <a:srgbClr val="B98A2E"/>
+                </a:solidFill>
+                <a:latin typeface="Arial" pitchFamily="34" charset="0"/>
+                <a:ea typeface="Arial" pitchFamily="34" charset="-122"/>
+                <a:cs typeface="Arial" pitchFamily="34" charset="-120"/>
+              </a:rPr>
+              <a:t>9</a:t>
+            </a:r>
+            <a:endParaRPr lang="en-US" sz="900" dirty="0"/>
+          </a:p>
+        </p:txBody>
+      </p:sp>
+    </p:spTree>
+  </p:cSld>
+  <p:clrMapOvr>
+    <a:masterClrMapping/>
+  </p:clrMapOvr>
+</p:sld>
+</file>
+
+<file path=ppt/slides/slide11.xml><?xml version="1.0" encoding="utf-8"?>
+<p:sld xmlns:a="http://schemas.openxmlformats.org/drawingml/2006/main" xmlns:r="http://schemas.openxmlformats.org/officeDocument/2006/relationships" xmlns:p="http://schemas.openxmlformats.org/presentationml/2006/main">
+  <p:cSld name="Slide 11">
+    <p:bg>
+      <p:bgPr>
+        <a:solidFill>
+          <a:srgbClr val="FFFFFF"/>
+        </a:solidFill>
+      </p:bgPr>
+    </p:bg>
+    <p:spTree>
+      <p:nvGrpSpPr>
+        <p:cNvPr id="1" name=""/>
+        <p:cNvGrpSpPr/>
+        <p:nvPr/>
+      </p:nvGrpSpPr>
+      <p:grpSpPr>
+        <a:xfrm>
+          <a:off x="0" y="0"/>
+          <a:ext cx="0" cy="0"/>
+          <a:chOff x="0" y="0"/>
+          <a:chExt cx="0" cy="0"/>
+        </a:xfrm>
+      </p:grpSpPr>
+      <p:sp>
+        <p:nvSpPr>
+          <p:cNvPr id="2" name="Shape 0"/>
+          <p:cNvSpPr/>
+          <p:nvPr/>
+        </p:nvSpPr>
+        <p:spPr>
+          <a:xfrm>
+            <a:off x="566928" y="457200"/>
+            <a:ext cx="384048" cy="384048"/>
+          </a:xfrm>
+          <a:prstGeom prst="ellipse">
+            <a:avLst/>
+          </a:prstGeom>
+          <a:solidFill>
+            <a:srgbClr val="B98A2E"/>
+          </a:solidFill>
+          <a:ln/>
+        </p:spPr>
+      </p:sp>
+      <p:sp>
+        <p:nvSpPr>
+          <p:cNvPr id="3" name="Text 1"/>
+          <p:cNvSpPr/>
+          <p:nvPr/>
+        </p:nvSpPr>
+        <p:spPr>
+          <a:xfrm>
+            <a:off x="566928" y="457200"/>
+            <a:ext cx="384048" cy="384048"/>
+          </a:xfrm>
+          <a:prstGeom prst="rect">
+            <a:avLst/>
+          </a:prstGeom>
+          <a:noFill/>
+          <a:ln/>
+        </p:spPr>
+        <p:txBody>
+          <a:bodyPr wrap="square" lIns="0" tIns="0" rIns="0" bIns="0" rtlCol="0" anchor="ctr"/>
+          <a:lstStyle/>
+          <a:p>
+            <a:pPr algn="ctr" indent="0" marL="0">
+              <a:buNone/>
+            </a:pPr>
+            <a:r>
+              <a:rPr lang="en-US" sz="1300" b="1" dirty="0">
+                <a:solidFill>
+                  <a:srgbClr val="FFFFFF"/>
+                </a:solidFill>
+                <a:latin typeface="Arial" pitchFamily="34" charset="0"/>
+                <a:ea typeface="Arial" pitchFamily="34" charset="-122"/>
+                <a:cs typeface="Arial" pitchFamily="34" charset="-120"/>
+              </a:rPr>
+              <a:t>10</a:t>
+            </a:r>
+            <a:endParaRPr lang="en-US" sz="1300" dirty="0"/>
+          </a:p>
+        </p:txBody>
+      </p:sp>
+      <p:sp>
+        <p:nvSpPr>
+          <p:cNvPr id="4" name="Text 2"/>
+          <p:cNvSpPr/>
+          <p:nvPr/>
+        </p:nvSpPr>
+        <p:spPr>
+          <a:xfrm>
+            <a:off x="1133856" y="457200"/>
+            <a:ext cx="10490911" cy="182880"/>
+          </a:xfrm>
+          <a:prstGeom prst="rect">
+            <a:avLst/>
+          </a:prstGeom>
+          <a:noFill/>
+          <a:ln/>
+        </p:spPr>
+        <p:txBody>
+          <a:bodyPr wrap="square" lIns="0" tIns="0" rIns="0" bIns="0" rtlCol="0" anchor="ctr"/>
+          <a:lstStyle/>
+          <a:p>
+            <a:pPr indent="0" marL="0">
+              <a:buNone/>
+            </a:pPr>
+            <a:r>
+              <a:rPr lang="en-US" sz="950" b="1" spc="200" kern="0" dirty="0">
+                <a:solidFill>
+                  <a:srgbClr val="B98A2E"/>
+                </a:solidFill>
+                <a:latin typeface="Arial" pitchFamily="34" charset="0"/>
+                <a:ea typeface="Arial" pitchFamily="34" charset="-122"/>
+                <a:cs typeface="Arial" pitchFamily="34" charset="-120"/>
+              </a:rPr>
+              <a:t>Thesis</a:t>
+            </a:r>
+            <a:endParaRPr lang="en-US" sz="950" dirty="0"/>
+          </a:p>
+        </p:txBody>
+      </p:sp>
+      <p:sp>
+        <p:nvSpPr>
+          <p:cNvPr id="5" name="Text 3"/>
+          <p:cNvSpPr/>
+          <p:nvPr/>
+        </p:nvSpPr>
+        <p:spPr>
+          <a:xfrm>
+            <a:off x="1133856" y="640080"/>
+            <a:ext cx="10490911" cy="365760"/>
+          </a:xfrm>
+          <a:prstGeom prst="rect">
+            <a:avLst/>
+          </a:prstGeom>
+          <a:noFill/>
+          <a:ln/>
+        </p:spPr>
+        <p:txBody>
+          <a:bodyPr wrap="square" lIns="0" tIns="0" rIns="0" bIns="0" rtlCol="0" anchor="ctr"/>
+          <a:lstStyle/>
+          <a:p>
+            <a:pPr indent="0" marL="0">
+              <a:buNone/>
+            </a:pPr>
+            <a:r>
+              <a:rPr lang="en-US" sz="2300" b="1" dirty="0">
+                <a:solidFill>
+                  <a:srgbClr val="10161F"/>
+                </a:solidFill>
+                <a:latin typeface="Pretendard" pitchFamily="34" charset="0"/>
+                <a:ea typeface="Pretendard" pitchFamily="34" charset="-122"/>
+                <a:cs typeface="Pretendard" pitchFamily="34" charset="-120"/>
+              </a:rPr>
+              <a:t>투자 포인트</a:t>
+            </a:r>
+            <a:endParaRPr lang="en-US" sz="2300" dirty="0"/>
+          </a:p>
+        </p:txBody>
+      </p:sp>
+      <p:sp>
+        <p:nvSpPr>
+          <p:cNvPr id="6" name="Shape 4"/>
+          <p:cNvSpPr/>
+          <p:nvPr/>
+        </p:nvSpPr>
+        <p:spPr>
+          <a:xfrm>
+            <a:off x="566928" y="4983480"/>
+            <a:ext cx="11057839" cy="804672"/>
+          </a:xfrm>
+          <a:prstGeom prst="roundRect">
+            <a:avLst>
+              <a:gd name="adj" fmla="val 6818"/>
+            </a:avLst>
+          </a:prstGeom>
+          <a:solidFill>
+            <a:srgbClr val="F3EBDA"/>
+          </a:solidFill>
+          <a:ln w="10160">
+            <a:solidFill>
+              <a:srgbClr val="D9B668"/>
+            </a:solidFill>
+            <a:prstDash val="solid"/>
+          </a:ln>
+        </p:spPr>
+      </p:sp>
+      <p:sp>
+        <p:nvSpPr>
+          <p:cNvPr id="7" name="Text 5"/>
+          <p:cNvSpPr/>
+          <p:nvPr/>
+        </p:nvSpPr>
+        <p:spPr>
+          <a:xfrm>
+            <a:off x="749808" y="5093208"/>
+            <a:ext cx="1691640" cy="256032"/>
+          </a:xfrm>
+          <a:prstGeom prst="rect">
+            <a:avLst/>
+          </a:prstGeom>
+          <a:noFill/>
+          <a:ln/>
+        </p:spPr>
+        <p:txBody>
+          <a:bodyPr wrap="square" lIns="0" tIns="0" rIns="0" bIns="0" rtlCol="0" anchor="ctr"/>
+          <a:lstStyle/>
+          <a:p>
+            <a:pPr indent="0" marL="0">
+              <a:buNone/>
+            </a:pPr>
+            <a:r>
+              <a:rPr lang="en-US" sz="1050" b="1" dirty="0">
+                <a:solidFill>
+                  <a:srgbClr val="977024"/>
+                </a:solidFill>
+                <a:latin typeface="Pretendard" pitchFamily="34" charset="0"/>
+                <a:ea typeface="Pretendard" pitchFamily="34" charset="-122"/>
+                <a:cs typeface="Pretendard" pitchFamily="34" charset="-120"/>
+              </a:rPr>
+              <a:t>종합 가치 제안</a:t>
+            </a:r>
+            <a:endParaRPr lang="en-US" sz="1050" dirty="0"/>
+          </a:p>
+        </p:txBody>
+      </p:sp>
+      <p:sp>
+        <p:nvSpPr>
+          <p:cNvPr id="8" name="Text 6"/>
+          <p:cNvSpPr/>
+          <p:nvPr/>
+        </p:nvSpPr>
+        <p:spPr>
+          <a:xfrm>
+            <a:off x="2487168" y="5056632"/>
+            <a:ext cx="8954719" cy="658368"/>
+          </a:xfrm>
+          <a:prstGeom prst="rect">
+            <a:avLst/>
+          </a:prstGeom>
+          <a:noFill/>
+          <a:ln/>
+        </p:spPr>
+        <p:txBody>
+          <a:bodyPr wrap="square" lIns="0" tIns="0" rIns="0" bIns="0" rtlCol="0" anchor="ctr"/>
+          <a:lstStyle/>
+          <a:p>
+            <a:pPr indent="0" marL="0">
+              <a:lnSpc>
+                <a:spcPct val="125000"/>
+              </a:lnSpc>
+              <a:buNone/>
+            </a:pPr>
+            <a:r>
+              <a:rPr lang="en-US" sz="1100" dirty="0">
+                <a:solidFill>
+                  <a:srgbClr val="10161F"/>
+                </a:solidFill>
+                <a:latin typeface="Pretendard" pitchFamily="34" charset="0"/>
+                <a:ea typeface="Pretendard" pitchFamily="34" charset="-122"/>
+                <a:cs typeface="Pretendard" pitchFamily="34" charset="-120"/>
+              </a:rPr>
+              <a:t>가로수길 프리미엄 입지의 저평가 기회와 증축/리모델링 밸류애드 잠재력이 핵심입니다.</a:t>
+            </a:r>
+            <a:endParaRPr lang="en-US" sz="1100" dirty="0"/>
+          </a:p>
+        </p:txBody>
+      </p:sp>
+      <p:sp>
+        <p:nvSpPr>
+          <p:cNvPr id="9" name="Text 7"/>
+          <p:cNvSpPr/>
+          <p:nvPr/>
+        </p:nvSpPr>
+        <p:spPr>
+          <a:xfrm>
+            <a:off x="566928" y="6382512"/>
+            <a:ext cx="7315200" cy="219456"/>
+          </a:xfrm>
+          <a:prstGeom prst="rect">
+            <a:avLst/>
+          </a:prstGeom>
+          <a:noFill/>
+          <a:ln/>
+        </p:spPr>
+        <p:txBody>
+          <a:bodyPr wrap="square" lIns="0" tIns="0" rIns="0" bIns="0" rtlCol="0" anchor="ctr"/>
+          <a:lstStyle/>
+          <a:p>
+            <a:pPr indent="0" marL="0">
+              <a:buNone/>
+            </a:pPr>
+            <a:r>
+              <a:rPr lang="en-US" sz="800" dirty="0">
+                <a:solidFill>
+                  <a:srgbClr val="718096"/>
+                </a:solidFill>
+                <a:latin typeface="Pretendard" pitchFamily="34" charset="0"/>
+                <a:ea typeface="Pretendard" pitchFamily="34" charset="-122"/>
+                <a:cs typeface="Pretendard" pitchFamily="34" charset="-120"/>
+              </a:rPr>
+              <a:t>크리딜   |   </a:t>
+            </a:r>
+            <a:endParaRPr lang="en-US" sz="800" dirty="0"/>
+          </a:p>
+        </p:txBody>
+      </p:sp>
+      <p:sp>
+        <p:nvSpPr>
+          <p:cNvPr id="10" name="Text 8"/>
+          <p:cNvSpPr/>
+          <p:nvPr/>
+        </p:nvSpPr>
+        <p:spPr>
+          <a:xfrm>
+            <a:off x="10710367" y="6382512"/>
+            <a:ext cx="914400" cy="219456"/>
+          </a:xfrm>
+          <a:prstGeom prst="rect">
+            <a:avLst/>
+          </a:prstGeom>
+          <a:noFill/>
+          <a:ln/>
+        </p:spPr>
+        <p:txBody>
+          <a:bodyPr wrap="square" lIns="0" tIns="0" rIns="0" bIns="0" rtlCol="0" anchor="ctr"/>
+          <a:lstStyle/>
+          <a:p>
+            <a:pPr algn="r" indent="0" marL="0">
+              <a:buNone/>
+            </a:pPr>
+            <a:r>
+              <a:rPr lang="en-US" sz="900" b="1" dirty="0">
+                <a:solidFill>
+                  <a:srgbClr val="B98A2E"/>
+                </a:solidFill>
+                <a:latin typeface="Arial" pitchFamily="34" charset="0"/>
+                <a:ea typeface="Arial" pitchFamily="34" charset="-122"/>
+                <a:cs typeface="Arial" pitchFamily="34" charset="-120"/>
+              </a:rPr>
+              <a:t>10</a:t>
+            </a:r>
+            <a:endParaRPr lang="en-US" sz="900" dirty="0"/>
+          </a:p>
+        </p:txBody>
+      </p:sp>
+    </p:spTree>
+  </p:cSld>
+  <p:clrMapOvr>
+    <a:masterClrMapping/>
+  </p:clrMapOvr>
+</p:sld>
+</file>
+
+<file path=ppt/slides/slide12.xml><?xml version="1.0" encoding="utf-8"?>
+<p:sld xmlns:a="http://schemas.openxmlformats.org/drawingml/2006/main" xmlns:r="http://schemas.openxmlformats.org/officeDocument/2006/relationships" xmlns:p="http://schemas.openxmlformats.org/presentationml/2006/main">
+  <p:cSld name="Slide 12">
+    <p:bg>
+      <p:bgPr>
+        <a:solidFill>
+          <a:srgbClr val="FFFFFF"/>
+        </a:solidFill>
+      </p:bgPr>
+    </p:bg>
+    <p:spTree>
+      <p:nvGrpSpPr>
+        <p:cNvPr id="1" name=""/>
+        <p:cNvGrpSpPr/>
+        <p:nvPr/>
+      </p:nvGrpSpPr>
+      <p:grpSpPr>
+        <a:xfrm>
+          <a:off x="0" y="0"/>
+          <a:ext cx="0" cy="0"/>
+          <a:chOff x="0" y="0"/>
+          <a:chExt cx="0" cy="0"/>
+        </a:xfrm>
+      </p:grpSpPr>
+      <p:sp>
+        <p:nvSpPr>
+          <p:cNvPr id="2" name="Shape 0"/>
+          <p:cNvSpPr/>
+          <p:nvPr/>
+        </p:nvSpPr>
+        <p:spPr>
+          <a:xfrm>
+            <a:off x="566928" y="457200"/>
+            <a:ext cx="384048" cy="384048"/>
+          </a:xfrm>
+          <a:prstGeom prst="ellipse">
+            <a:avLst/>
+          </a:prstGeom>
+          <a:solidFill>
+            <a:srgbClr val="B98A2E"/>
+          </a:solidFill>
+          <a:ln/>
+        </p:spPr>
+      </p:sp>
+      <p:sp>
+        <p:nvSpPr>
+          <p:cNvPr id="3" name="Text 1"/>
+          <p:cNvSpPr/>
+          <p:nvPr/>
+        </p:nvSpPr>
+        <p:spPr>
+          <a:xfrm>
+            <a:off x="566928" y="457200"/>
+            <a:ext cx="384048" cy="384048"/>
+          </a:xfrm>
+          <a:prstGeom prst="rect">
+            <a:avLst/>
+          </a:prstGeom>
+          <a:noFill/>
+          <a:ln/>
+        </p:spPr>
+        <p:txBody>
+          <a:bodyPr wrap="square" lIns="0" tIns="0" rIns="0" bIns="0" rtlCol="0" anchor="ctr"/>
+          <a:lstStyle/>
+          <a:p>
+            <a:pPr algn="ctr" indent="0" marL="0">
+              <a:buNone/>
+            </a:pPr>
+            <a:r>
+              <a:rPr lang="en-US" sz="1300" b="1" dirty="0">
+                <a:solidFill>
+                  <a:srgbClr val="FFFFFF"/>
+                </a:solidFill>
+                <a:latin typeface="Arial" pitchFamily="34" charset="0"/>
+                <a:ea typeface="Arial" pitchFamily="34" charset="-122"/>
+                <a:cs typeface="Arial" pitchFamily="34" charset="-120"/>
+              </a:rPr>
+              <a:t>11</a:t>
+            </a:r>
+            <a:endParaRPr lang="en-US" sz="1300" dirty="0"/>
+          </a:p>
+        </p:txBody>
+      </p:sp>
+      <p:sp>
+        <p:nvSpPr>
+          <p:cNvPr id="4" name="Text 2"/>
+          <p:cNvSpPr/>
+          <p:nvPr/>
+        </p:nvSpPr>
+        <p:spPr>
+          <a:xfrm>
+            <a:off x="1133856" y="457200"/>
+            <a:ext cx="10490911" cy="182880"/>
+          </a:xfrm>
+          <a:prstGeom prst="rect">
+            <a:avLst/>
+          </a:prstGeom>
+          <a:noFill/>
+          <a:ln/>
+        </p:spPr>
+        <p:txBody>
+          <a:bodyPr wrap="square" lIns="0" tIns="0" rIns="0" bIns="0" rtlCol="0" anchor="ctr"/>
+          <a:lstStyle/>
+          <a:p>
+            <a:pPr indent="0" marL="0">
+              <a:buNone/>
+            </a:pPr>
+            <a:r>
+              <a:rPr lang="en-US" sz="950" b="1" spc="200" kern="0" dirty="0">
+                <a:solidFill>
+                  <a:srgbClr val="B98A2E"/>
+                </a:solidFill>
+                <a:latin typeface="Arial" pitchFamily="34" charset="0"/>
+                <a:ea typeface="Arial" pitchFamily="34" charset="-122"/>
+                <a:cs typeface="Arial" pitchFamily="34" charset="-120"/>
+              </a:rPr>
+              <a:t>Risk</a:t>
+            </a:r>
+            <a:endParaRPr lang="en-US" sz="950" dirty="0"/>
+          </a:p>
+        </p:txBody>
+      </p:sp>
+      <p:sp>
+        <p:nvSpPr>
+          <p:cNvPr id="5" name="Text 3"/>
+          <p:cNvSpPr/>
+          <p:nvPr/>
+        </p:nvSpPr>
+        <p:spPr>
+          <a:xfrm>
+            <a:off x="1133856" y="640080"/>
+            <a:ext cx="10490911" cy="365760"/>
+          </a:xfrm>
+          <a:prstGeom prst="rect">
+            <a:avLst/>
+          </a:prstGeom>
+          <a:noFill/>
+          <a:ln/>
+        </p:spPr>
+        <p:txBody>
+          <a:bodyPr wrap="square" lIns="0" tIns="0" rIns="0" bIns="0" rtlCol="0" anchor="ctr"/>
+          <a:lstStyle/>
+          <a:p>
+            <a:pPr indent="0" marL="0">
+              <a:buNone/>
+            </a:pPr>
+            <a:r>
+              <a:rPr lang="en-US" sz="2300" b="1" dirty="0">
+                <a:solidFill>
+                  <a:srgbClr val="10161F"/>
+                </a:solidFill>
+                <a:latin typeface="Pretendard" pitchFamily="34" charset="0"/>
+                <a:ea typeface="Pretendard" pitchFamily="34" charset="-122"/>
+                <a:cs typeface="Pretendard" pitchFamily="34" charset="-120"/>
+              </a:rPr>
+              <a:t>리스크 점검</a:t>
+            </a:r>
+            <a:endParaRPr lang="en-US" sz="2300" dirty="0"/>
+          </a:p>
+        </p:txBody>
+      </p:sp>
+      <p:sp>
+        <p:nvSpPr>
+          <p:cNvPr id="6" name="Shape 4"/>
+          <p:cNvSpPr/>
+          <p:nvPr/>
+        </p:nvSpPr>
+        <p:spPr>
+          <a:xfrm>
+            <a:off x="566928" y="1417320"/>
+            <a:ext cx="11057839" cy="3657600"/>
+          </a:xfrm>
+          <a:prstGeom prst="roundRect">
+            <a:avLst>
+              <a:gd name="adj" fmla="val 1500"/>
+            </a:avLst>
+          </a:prstGeom>
+          <a:solidFill>
+            <a:srgbClr val="F7FAFC"/>
+          </a:solidFill>
+          <a:ln w="6350">
+            <a:solidFill>
+              <a:srgbClr val="CBD5E0"/>
+            </a:solidFill>
+            <a:prstDash val="solid"/>
+          </a:ln>
+        </p:spPr>
+      </p:sp>
+      <p:sp>
+        <p:nvSpPr>
+          <p:cNvPr id="7" name="Shape 5"/>
+          <p:cNvSpPr/>
+          <p:nvPr/>
+        </p:nvSpPr>
+        <p:spPr>
+          <a:xfrm>
+            <a:off x="566928" y="1417320"/>
+            <a:ext cx="11057839" cy="45720"/>
+          </a:xfrm>
+          <a:prstGeom prst="rect">
+            <a:avLst/>
+          </a:prstGeom>
+          <a:solidFill>
+            <a:srgbClr val="B98A2E"/>
+          </a:solidFill>
+          <a:ln/>
+        </p:spPr>
+      </p:sp>
+      <p:sp>
+        <p:nvSpPr>
+          <p:cNvPr id="8" name="Text 6"/>
+          <p:cNvSpPr/>
+          <p:nvPr/>
+        </p:nvSpPr>
+        <p:spPr>
+          <a:xfrm>
+            <a:off x="795528" y="1618488"/>
+            <a:ext cx="10600639" cy="292608"/>
+          </a:xfrm>
+          <a:prstGeom prst="rect">
+            <a:avLst/>
+          </a:prstGeom>
+          <a:noFill/>
+          <a:ln/>
+        </p:spPr>
+        <p:txBody>
+          <a:bodyPr wrap="square" lIns="0" tIns="0" rIns="0" bIns="0" rtlCol="0" anchor="ctr"/>
+          <a:lstStyle/>
+          <a:p>
+            <a:pPr indent="0" marL="0">
+              <a:buNone/>
+            </a:pPr>
+            <a:r>
+              <a:rPr lang="en-US" sz="1350" b="1" dirty="0">
+                <a:solidFill>
+                  <a:srgbClr val="977024"/>
+                </a:solidFill>
+                <a:latin typeface="Pretendard" pitchFamily="34" charset="0"/>
+                <a:ea typeface="Pretendard" pitchFamily="34" charset="-122"/>
+                <a:cs typeface="Pretendard" pitchFamily="34" charset="-120"/>
+              </a:rPr>
+              <a:t>노후 설비</a:t>
+            </a:r>
+            <a:endParaRPr lang="en-US" sz="1350" dirty="0"/>
+          </a:p>
+        </p:txBody>
+      </p:sp>
+      <p:sp>
+        <p:nvSpPr>
+          <p:cNvPr id="9" name="Text 7"/>
+          <p:cNvSpPr/>
+          <p:nvPr/>
+        </p:nvSpPr>
+        <p:spPr>
+          <a:xfrm>
+            <a:off x="795528" y="1947672"/>
+            <a:ext cx="10600639" cy="365760"/>
+          </a:xfrm>
+          <a:prstGeom prst="rect">
+            <a:avLst/>
+          </a:prstGeom>
+          <a:noFill/>
+          <a:ln/>
+        </p:spPr>
+        <p:txBody>
+          <a:bodyPr wrap="square" lIns="0" tIns="0" rIns="0" bIns="0" rtlCol="0" anchor="ctr">
+            <a:normAutofit/>
+          </a:bodyPr>
+          <a:lstStyle/>
+          <a:p>
+            <a:pPr indent="0" marL="0">
+              <a:buNone/>
+            </a:pPr>
+            <a:r>
+              <a:rPr lang="en-US" sz="1250" b="1" dirty="0">
+                <a:solidFill>
+                  <a:srgbClr val="10161F"/>
+                </a:solidFill>
+                <a:latin typeface="Pretendard" pitchFamily="34" charset="0"/>
+                <a:ea typeface="Pretendard" pitchFamily="34" charset="-122"/>
+                <a:cs typeface="Pretendard" pitchFamily="34" charset="-120"/>
+              </a:rPr>
+              <a:t>36년</a:t>
+            </a:r>
+            <a:endParaRPr lang="en-US" sz="1250" dirty="0"/>
+          </a:p>
+        </p:txBody>
+      </p:sp>
+      <p:sp>
+        <p:nvSpPr>
+          <p:cNvPr id="10" name="Text 8"/>
+          <p:cNvSpPr/>
+          <p:nvPr/>
+        </p:nvSpPr>
+        <p:spPr>
+          <a:xfrm>
+            <a:off x="795528" y="2377440"/>
+            <a:ext cx="10600639" cy="2606040"/>
+          </a:xfrm>
+          <a:prstGeom prst="rect">
+            <a:avLst/>
+          </a:prstGeom>
+          <a:noFill/>
+          <a:ln/>
+        </p:spPr>
+        <p:txBody>
+          <a:bodyPr wrap="square" lIns="0" tIns="0" rIns="0" bIns="0" rtlCol="0" anchor="t">
+            <a:normAutofit/>
+          </a:bodyPr>
+          <a:lstStyle/>
+          <a:p>
+            <a:pPr marL="342900" indent="-342900">
+              <a:lnSpc>
+                <a:spcPct val="125000"/>
+              </a:lnSpc>
+              <a:buSzPct val="100000"/>
+              <a:buChar char="•"/>
+            </a:pPr>
+            <a:r>
+              <a:rPr lang="en-US" sz="1100" dirty="0">
+                <a:solidFill>
+                  <a:srgbClr val="10161F"/>
+                </a:solidFill>
+                <a:latin typeface="Pretendard" pitchFamily="34" charset="0"/>
+                <a:ea typeface="Pretendard" pitchFamily="34" charset="-122"/>
+                <a:cs typeface="Pretendard" pitchFamily="34" charset="-120"/>
+              </a:rPr>
+              <a:t>대수선 예산 반영</a:t>
+            </a:r>
+            <a:endParaRPr lang="en-US" sz="1100" dirty="0"/>
+          </a:p>
+        </p:txBody>
+      </p:sp>
+      <p:sp>
+        <p:nvSpPr>
+          <p:cNvPr id="11" name="Shape 9"/>
+          <p:cNvSpPr/>
+          <p:nvPr/>
+        </p:nvSpPr>
+        <p:spPr>
+          <a:xfrm>
+            <a:off x="566928" y="5193792"/>
+            <a:ext cx="11057839" cy="621792"/>
+          </a:xfrm>
+          <a:prstGeom prst="roundRect">
+            <a:avLst>
+              <a:gd name="adj" fmla="val 8824"/>
+            </a:avLst>
+          </a:prstGeom>
+          <a:solidFill>
+            <a:srgbClr val="F7FAFC"/>
+          </a:solidFill>
+          <a:ln w="6350">
+            <a:solidFill>
+              <a:srgbClr val="CBD5E0"/>
+            </a:solidFill>
+            <a:prstDash val="solid"/>
+          </a:ln>
+        </p:spPr>
+      </p:sp>
+      <p:sp>
+        <p:nvSpPr>
+          <p:cNvPr id="12" name="Text 10"/>
+          <p:cNvSpPr/>
+          <p:nvPr/>
+        </p:nvSpPr>
+        <p:spPr>
+          <a:xfrm>
+            <a:off x="795528" y="5193792"/>
+            <a:ext cx="10600639" cy="621792"/>
+          </a:xfrm>
+          <a:prstGeom prst="rect">
+            <a:avLst/>
+          </a:prstGeom>
+          <a:noFill/>
+          <a:ln/>
+        </p:spPr>
+        <p:txBody>
+          <a:bodyPr wrap="square" lIns="0" tIns="0" rIns="0" bIns="0" rtlCol="0" anchor="ctr"/>
+          <a:lstStyle/>
+          <a:p>
+            <a:pPr indent="0" marL="0">
+              <a:buNone/>
+            </a:pPr>
+            <a:r>
+              <a:rPr lang="en-US" sz="1100" dirty="0">
+                <a:solidFill>
+                  <a:srgbClr val="10161F"/>
+                </a:solidFill>
+                <a:latin typeface="Pretendard" pitchFamily="34" charset="0"/>
+                <a:ea typeface="Pretendard" pitchFamily="34" charset="-122"/>
+                <a:cs typeface="Pretendard" pitchFamily="34" charset="-120"/>
+              </a:rPr>
+              <a:t>※ 본 리스크 체크는 공부 및 브로커 확인 기반이며, 매수 전 전문 실사팀(변호사/건축사)을 통한 정밀 실사가 필요합니다.</a:t>
+            </a:r>
+            <a:endParaRPr lang="en-US" sz="1100" dirty="0"/>
+          </a:p>
+        </p:txBody>
+      </p:sp>
+      <p:sp>
+        <p:nvSpPr>
+          <p:cNvPr id="13" name="Text 11"/>
+          <p:cNvSpPr/>
+          <p:nvPr/>
+        </p:nvSpPr>
+        <p:spPr>
+          <a:xfrm>
+            <a:off x="566928" y="6382512"/>
+            <a:ext cx="7315200" cy="219456"/>
+          </a:xfrm>
+          <a:prstGeom prst="rect">
+            <a:avLst/>
+          </a:prstGeom>
+          <a:noFill/>
+          <a:ln/>
+        </p:spPr>
+        <p:txBody>
+          <a:bodyPr wrap="square" lIns="0" tIns="0" rIns="0" bIns="0" rtlCol="0" anchor="ctr"/>
+          <a:lstStyle/>
+          <a:p>
+            <a:pPr indent="0" marL="0">
+              <a:buNone/>
+            </a:pPr>
+            <a:r>
+              <a:rPr lang="en-US" sz="800" dirty="0">
+                <a:solidFill>
+                  <a:srgbClr val="718096"/>
+                </a:solidFill>
+                <a:latin typeface="Pretendard" pitchFamily="34" charset="0"/>
+                <a:ea typeface="Pretendard" pitchFamily="34" charset="-122"/>
+                <a:cs typeface="Pretendard" pitchFamily="34" charset="-120"/>
+              </a:rPr>
+              <a:t>크리딜   |   </a:t>
+            </a:r>
+            <a:endParaRPr lang="en-US" sz="800" dirty="0"/>
+          </a:p>
+        </p:txBody>
+      </p:sp>
+      <p:sp>
+        <p:nvSpPr>
+          <p:cNvPr id="14" name="Text 12"/>
+          <p:cNvSpPr/>
+          <p:nvPr/>
+        </p:nvSpPr>
+        <p:spPr>
+          <a:xfrm>
+            <a:off x="10710367" y="6382512"/>
+            <a:ext cx="914400" cy="219456"/>
+          </a:xfrm>
+          <a:prstGeom prst="rect">
+            <a:avLst/>
+          </a:prstGeom>
+          <a:noFill/>
+          <a:ln/>
+        </p:spPr>
+        <p:txBody>
+          <a:bodyPr wrap="square" lIns="0" tIns="0" rIns="0" bIns="0" rtlCol="0" anchor="ctr"/>
+          <a:lstStyle/>
+          <a:p>
+            <a:pPr algn="r" indent="0" marL="0">
+              <a:buNone/>
+            </a:pPr>
+            <a:r>
+              <a:rPr lang="en-US" sz="900" b="1" dirty="0">
+                <a:solidFill>
+                  <a:srgbClr val="B98A2E"/>
+                </a:solidFill>
+                <a:latin typeface="Arial" pitchFamily="34" charset="0"/>
+                <a:ea typeface="Arial" pitchFamily="34" charset="-122"/>
+                <a:cs typeface="Arial" pitchFamily="34" charset="-120"/>
+              </a:rPr>
+              <a:t>11</a:t>
+            </a:r>
+            <a:endParaRPr lang="en-US" sz="900" dirty="0"/>
+          </a:p>
+        </p:txBody>
+      </p:sp>
+    </p:spTree>
+  </p:cSld>
+  <p:clrMapOvr>
+    <a:masterClrMapping/>
+  </p:clrMapOvr>
+</p:sld>
+</file>
+
+<file path=ppt/slides/slide13.xml><?xml version="1.0" encoding="utf-8"?>
+<p:sld xmlns:a="http://schemas.openxmlformats.org/drawingml/2006/main" xmlns:r="http://schemas.openxmlformats.org/officeDocument/2006/relationships" xmlns:p="http://schemas.openxmlformats.org/presentationml/2006/main">
+  <p:cSld name="Slide 13">
+    <p:bg>
+      <p:bgPr>
+        <a:solidFill>
+          <a:srgbClr val="FFFFFF"/>
+        </a:solidFill>
+      </p:bgPr>
+    </p:bg>
+    <p:spTree>
+      <p:nvGrpSpPr>
+        <p:cNvPr id="1" name=""/>
+        <p:cNvGrpSpPr/>
+        <p:nvPr/>
+      </p:nvGrpSpPr>
+      <p:grpSpPr>
+        <a:xfrm>
+          <a:off x="0" y="0"/>
+          <a:ext cx="0" cy="0"/>
+          <a:chOff x="0" y="0"/>
+          <a:chExt cx="0" cy="0"/>
+        </a:xfrm>
+      </p:grpSpPr>
+      <p:sp>
+        <p:nvSpPr>
+          <p:cNvPr id="2" name="Shape 0"/>
+          <p:cNvSpPr/>
+          <p:nvPr/>
+        </p:nvSpPr>
+        <p:spPr>
+          <a:xfrm>
+            <a:off x="566928" y="457200"/>
+            <a:ext cx="384048" cy="384048"/>
+          </a:xfrm>
+          <a:prstGeom prst="ellipse">
+            <a:avLst/>
+          </a:prstGeom>
+          <a:solidFill>
+            <a:srgbClr val="B98A2E"/>
+          </a:solidFill>
+          <a:ln/>
+        </p:spPr>
+      </p:sp>
+      <p:sp>
+        <p:nvSpPr>
+          <p:cNvPr id="3" name="Text 1"/>
+          <p:cNvSpPr/>
+          <p:nvPr/>
+        </p:nvSpPr>
+        <p:spPr>
+          <a:xfrm>
+            <a:off x="566928" y="457200"/>
+            <a:ext cx="384048" cy="384048"/>
+          </a:xfrm>
+          <a:prstGeom prst="rect">
+            <a:avLst/>
+          </a:prstGeom>
+          <a:noFill/>
+          <a:ln/>
+        </p:spPr>
+        <p:txBody>
+          <a:bodyPr wrap="square" lIns="0" tIns="0" rIns="0" bIns="0" rtlCol="0" anchor="ctr"/>
+          <a:lstStyle/>
+          <a:p>
+            <a:pPr algn="ctr" indent="0" marL="0">
+              <a:buNone/>
+            </a:pPr>
+            <a:r>
+              <a:rPr lang="en-US" sz="1300" b="1" dirty="0">
+                <a:solidFill>
+                  <a:srgbClr val="FFFFFF"/>
+                </a:solidFill>
+                <a:latin typeface="Arial" pitchFamily="34" charset="0"/>
+                <a:ea typeface="Arial" pitchFamily="34" charset="-122"/>
+                <a:cs typeface="Arial" pitchFamily="34" charset="-120"/>
+              </a:rPr>
+              <a:t>12</a:t>
+            </a:r>
+            <a:endParaRPr lang="en-US" sz="1300" dirty="0"/>
+          </a:p>
+        </p:txBody>
+      </p:sp>
+      <p:sp>
+        <p:nvSpPr>
+          <p:cNvPr id="4" name="Text 2"/>
+          <p:cNvSpPr/>
+          <p:nvPr/>
+        </p:nvSpPr>
+        <p:spPr>
+          <a:xfrm>
+            <a:off x="1133856" y="457200"/>
+            <a:ext cx="10490911" cy="182880"/>
+          </a:xfrm>
+          <a:prstGeom prst="rect">
+            <a:avLst/>
+          </a:prstGeom>
+          <a:noFill/>
+          <a:ln/>
+        </p:spPr>
+        <p:txBody>
+          <a:bodyPr wrap="square" lIns="0" tIns="0" rIns="0" bIns="0" rtlCol="0" anchor="ctr"/>
+          <a:lstStyle/>
+          <a:p>
+            <a:pPr indent="0" marL="0">
+              <a:buNone/>
+            </a:pPr>
+            <a:r>
+              <a:rPr lang="en-US" sz="950" b="1" spc="200" kern="0" dirty="0">
+                <a:solidFill>
+                  <a:srgbClr val="B98A2E"/>
+                </a:solidFill>
+                <a:latin typeface="Arial" pitchFamily="34" charset="0"/>
+                <a:ea typeface="Arial" pitchFamily="34" charset="-122"/>
+                <a:cs typeface="Arial" pitchFamily="34" charset="-120"/>
+              </a:rPr>
+              <a:t>Checklist</a:t>
+            </a:r>
+            <a:endParaRPr lang="en-US" sz="950" dirty="0"/>
+          </a:p>
+        </p:txBody>
+      </p:sp>
+      <p:sp>
+        <p:nvSpPr>
+          <p:cNvPr id="5" name="Text 3"/>
+          <p:cNvSpPr/>
+          <p:nvPr/>
+        </p:nvSpPr>
+        <p:spPr>
+          <a:xfrm>
+            <a:off x="1133856" y="640080"/>
+            <a:ext cx="10490911" cy="365760"/>
+          </a:xfrm>
+          <a:prstGeom prst="rect">
+            <a:avLst/>
+          </a:prstGeom>
+          <a:noFill/>
+          <a:ln/>
+        </p:spPr>
+        <p:txBody>
+          <a:bodyPr wrap="square" lIns="0" tIns="0" rIns="0" bIns="0" rtlCol="0" anchor="ctr"/>
+          <a:lstStyle/>
+          <a:p>
+            <a:pPr indent="0" marL="0">
+              <a:buNone/>
+            </a:pPr>
+            <a:r>
+              <a:rPr lang="en-US" sz="2300" b="1" dirty="0">
+                <a:solidFill>
+                  <a:srgbClr val="10161F"/>
+                </a:solidFill>
+                <a:latin typeface="Pretendard" pitchFamily="34" charset="0"/>
+                <a:ea typeface="Pretendard" pitchFamily="34" charset="-122"/>
+                <a:cs typeface="Pretendard" pitchFamily="34" charset="-120"/>
+              </a:rPr>
+              <a:t>실사 및 확인 필요사항</a:t>
+            </a:r>
+            <a:endParaRPr lang="en-US" sz="2300" dirty="0"/>
+          </a:p>
+        </p:txBody>
+      </p:sp>
+      <p:sp>
+        <p:nvSpPr>
+          <p:cNvPr id="6" name="Text 4"/>
+          <p:cNvSpPr/>
+          <p:nvPr/>
+        </p:nvSpPr>
+        <p:spPr>
+          <a:xfrm>
+            <a:off x="566928" y="1371600"/>
+            <a:ext cx="11057839" cy="237744"/>
+          </a:xfrm>
+          <a:prstGeom prst="rect">
+            <a:avLst/>
+          </a:prstGeom>
+          <a:noFill/>
+          <a:ln/>
+        </p:spPr>
+        <p:txBody>
+          <a:bodyPr wrap="square" lIns="0" tIns="0" rIns="0" bIns="0" rtlCol="0" anchor="ctr"/>
+          <a:lstStyle/>
+          <a:p>
+            <a:pPr indent="0" marL="0">
+              <a:buNone/>
+            </a:pPr>
+            <a:r>
+              <a:rPr lang="en-US" sz="1100" b="1" dirty="0">
+                <a:solidFill>
+                  <a:srgbClr val="10161F"/>
+                </a:solidFill>
+                <a:latin typeface="Pretendard" pitchFamily="34" charset="0"/>
+                <a:ea typeface="Pretendard" pitchFamily="34" charset="-122"/>
+                <a:cs typeface="Pretendard" pitchFamily="34" charset="-120"/>
+              </a:rPr>
+              <a:t>거래 안정성 확보를 위한 필수 법률·물리·임대차 실사 점검 항목 (총 6건)</a:t>
+            </a:r>
+            <a:endParaRPr lang="en-US" sz="1100" dirty="0"/>
+          </a:p>
+        </p:txBody>
+      </p:sp>
+      <p:sp>
+        <p:nvSpPr>
+          <p:cNvPr id="7" name="Shape 5"/>
+          <p:cNvSpPr/>
+          <p:nvPr/>
+        </p:nvSpPr>
+        <p:spPr>
+          <a:xfrm>
+            <a:off x="566928" y="1719072"/>
+            <a:ext cx="5368900" cy="868680"/>
+          </a:xfrm>
+          <a:prstGeom prst="rect">
+            <a:avLst/>
+          </a:prstGeom>
+          <a:solidFill>
+            <a:srgbClr val="F7FAFC"/>
+          </a:solidFill>
+          <a:ln w="6350">
+            <a:solidFill>
+              <a:srgbClr val="D9B668"/>
+            </a:solidFill>
+            <a:prstDash val="solid"/>
+          </a:ln>
+        </p:spPr>
+      </p:sp>
+      <p:sp>
+        <p:nvSpPr>
+          <p:cNvPr id="8" name="Shape 6"/>
+          <p:cNvSpPr/>
+          <p:nvPr/>
+        </p:nvSpPr>
+        <p:spPr>
+          <a:xfrm>
+            <a:off x="704088" y="1883664"/>
+            <a:ext cx="320040" cy="320040"/>
+          </a:xfrm>
+          <a:prstGeom prst="rect">
+            <a:avLst/>
+          </a:prstGeom>
+          <a:solidFill>
+            <a:srgbClr val="977024"/>
+          </a:solidFill>
+          <a:ln/>
+        </p:spPr>
+      </p:sp>
+      <p:sp>
+        <p:nvSpPr>
+          <p:cNvPr id="9" name="Text 7"/>
+          <p:cNvSpPr/>
+          <p:nvPr/>
+        </p:nvSpPr>
+        <p:spPr>
+          <a:xfrm>
+            <a:off x="704088" y="1883664"/>
+            <a:ext cx="320040" cy="320040"/>
+          </a:xfrm>
+          <a:prstGeom prst="rect">
+            <a:avLst/>
+          </a:prstGeom>
+          <a:noFill/>
+          <a:ln/>
+        </p:spPr>
+        <p:txBody>
+          <a:bodyPr wrap="square" rtlCol="0" anchor="ctr"/>
+          <a:lstStyle/>
+          <a:p>
+            <a:pPr algn="ctr" indent="0" marL="0">
+              <a:buNone/>
+            </a:pPr>
+            <a:r>
+              <a:rPr lang="en-US" sz="1100" b="1" dirty="0">
+                <a:solidFill>
+                  <a:srgbClr val="000000"/>
+                </a:solidFill>
+                <a:latin typeface="Pretendard" pitchFamily="34" charset="0"/>
+                <a:ea typeface="Pretendard" pitchFamily="34" charset="-122"/>
+                <a:cs typeface="Pretendard" pitchFamily="34" charset="-120"/>
+              </a:rPr>
+              <a:t>✓</a:t>
+            </a:r>
+            <a:endParaRPr lang="en-US" sz="1100" dirty="0"/>
+          </a:p>
+        </p:txBody>
+      </p:sp>
+      <p:sp>
+        <p:nvSpPr>
+          <p:cNvPr id="10" name="Text 8"/>
+          <p:cNvSpPr/>
+          <p:nvPr/>
+        </p:nvSpPr>
+        <p:spPr>
+          <a:xfrm>
+            <a:off x="1115568" y="1828800"/>
+            <a:ext cx="4683100" cy="685800"/>
+          </a:xfrm>
+          <a:prstGeom prst="rect">
+            <a:avLst/>
+          </a:prstGeom>
+          <a:noFill/>
+          <a:ln/>
+        </p:spPr>
+        <p:txBody>
+          <a:bodyPr wrap="square" rtlCol="0" anchor="ctr"/>
+          <a:lstStyle/>
+          <a:p>
+            <a:pPr indent="0" marL="0">
+              <a:lnSpc>
+                <a:spcPct val="115000"/>
+              </a:lnSpc>
+              <a:buNone/>
+            </a:pPr>
+            <a:r>
+              <a:rPr lang="en-US" sz="1050" dirty="0">
+                <a:solidFill>
+                  <a:srgbClr val="10161F"/>
+                </a:solidFill>
+                <a:latin typeface="Pretendard" pitchFamily="34" charset="0"/>
+                <a:ea typeface="Pretendard" pitchFamily="34" charset="-122"/>
+                <a:cs typeface="Pretendard" pitchFamily="34" charset="-120"/>
+              </a:rPr>
+              <a:t>등기부등본 갑구/을구 권리관계 및 근저당 채권최고액 전액 말소 조건 원본 대조</a:t>
+            </a:r>
+            <a:endParaRPr lang="en-US" sz="1050" dirty="0"/>
+          </a:p>
+        </p:txBody>
+      </p:sp>
+      <p:sp>
+        <p:nvSpPr>
+          <p:cNvPr id="11" name="Shape 9"/>
+          <p:cNvSpPr/>
+          <p:nvPr/>
+        </p:nvSpPr>
+        <p:spPr>
+          <a:xfrm>
+            <a:off x="566928" y="2715768"/>
+            <a:ext cx="5368900" cy="868680"/>
+          </a:xfrm>
+          <a:prstGeom prst="rect">
+            <a:avLst/>
+          </a:prstGeom>
+          <a:solidFill>
+            <a:srgbClr val="F7FAFC"/>
+          </a:solidFill>
+          <a:ln w="6350">
+            <a:solidFill>
+              <a:srgbClr val="D9B668"/>
+            </a:solidFill>
+            <a:prstDash val="solid"/>
+          </a:ln>
+        </p:spPr>
+      </p:sp>
+      <p:sp>
+        <p:nvSpPr>
+          <p:cNvPr id="12" name="Shape 10"/>
+          <p:cNvSpPr/>
+          <p:nvPr/>
+        </p:nvSpPr>
+        <p:spPr>
+          <a:xfrm>
+            <a:off x="704088" y="2880360"/>
+            <a:ext cx="320040" cy="320040"/>
+          </a:xfrm>
+          <a:prstGeom prst="rect">
+            <a:avLst/>
+          </a:prstGeom>
+          <a:solidFill>
+            <a:srgbClr val="977024"/>
+          </a:solidFill>
+          <a:ln/>
+        </p:spPr>
+      </p:sp>
+      <p:sp>
+        <p:nvSpPr>
+          <p:cNvPr id="13" name="Text 11"/>
+          <p:cNvSpPr/>
+          <p:nvPr/>
+        </p:nvSpPr>
+        <p:spPr>
+          <a:xfrm>
+            <a:off x="704088" y="2880360"/>
+            <a:ext cx="320040" cy="320040"/>
+          </a:xfrm>
+          <a:prstGeom prst="rect">
+            <a:avLst/>
+          </a:prstGeom>
+          <a:noFill/>
+          <a:ln/>
+        </p:spPr>
+        <p:txBody>
+          <a:bodyPr wrap="square" rtlCol="0" anchor="ctr"/>
+          <a:lstStyle/>
+          <a:p>
+            <a:pPr algn="ctr" indent="0" marL="0">
+              <a:buNone/>
+            </a:pPr>
+            <a:r>
+              <a:rPr lang="en-US" sz="1100" b="1" dirty="0">
+                <a:solidFill>
+                  <a:srgbClr val="000000"/>
+                </a:solidFill>
+                <a:latin typeface="Pretendard" pitchFamily="34" charset="0"/>
+                <a:ea typeface="Pretendard" pitchFamily="34" charset="-122"/>
+                <a:cs typeface="Pretendard" pitchFamily="34" charset="-120"/>
+              </a:rPr>
+              <a:t>✓</a:t>
+            </a:r>
+            <a:endParaRPr lang="en-US" sz="1100" dirty="0"/>
+          </a:p>
+        </p:txBody>
+      </p:sp>
+      <p:sp>
+        <p:nvSpPr>
+          <p:cNvPr id="14" name="Text 12"/>
+          <p:cNvSpPr/>
+          <p:nvPr/>
+        </p:nvSpPr>
+        <p:spPr>
+          <a:xfrm>
+            <a:off x="1115568" y="2825496"/>
+            <a:ext cx="4683100" cy="685800"/>
+          </a:xfrm>
+          <a:prstGeom prst="rect">
+            <a:avLst/>
+          </a:prstGeom>
+          <a:noFill/>
+          <a:ln/>
+        </p:spPr>
+        <p:txBody>
+          <a:bodyPr wrap="square" rtlCol="0" anchor="ctr"/>
+          <a:lstStyle/>
+          <a:p>
+            <a:pPr indent="0" marL="0">
+              <a:lnSpc>
+                <a:spcPct val="115000"/>
+              </a:lnSpc>
+              <a:buNone/>
+            </a:pPr>
+            <a:r>
+              <a:rPr lang="en-US" sz="1050" dirty="0">
+                <a:solidFill>
+                  <a:srgbClr val="10161F"/>
+                </a:solidFill>
+                <a:latin typeface="Pretendard" pitchFamily="34" charset="0"/>
+                <a:ea typeface="Pretendard" pitchFamily="34" charset="-122"/>
+                <a:cs typeface="Pretendard" pitchFamily="34" charset="-120"/>
+              </a:rPr>
+              <a:t>임대차 원본 계약서 대조 (보증금, 월임대료, 관리비 실입금 내역 및 제소전화해조서)</a:t>
+            </a:r>
+            <a:endParaRPr lang="en-US" sz="1050" dirty="0"/>
+          </a:p>
+        </p:txBody>
+      </p:sp>
+      <p:sp>
+        <p:nvSpPr>
+          <p:cNvPr id="15" name="Shape 13"/>
+          <p:cNvSpPr/>
+          <p:nvPr/>
+        </p:nvSpPr>
+        <p:spPr>
+          <a:xfrm>
+            <a:off x="566928" y="3712464"/>
+            <a:ext cx="5368900" cy="868680"/>
+          </a:xfrm>
+          <a:prstGeom prst="rect">
+            <a:avLst/>
+          </a:prstGeom>
+          <a:solidFill>
+            <a:srgbClr val="F7FAFC"/>
+          </a:solidFill>
+          <a:ln w="6350">
+            <a:solidFill>
+              <a:srgbClr val="D9B668"/>
+            </a:solidFill>
+            <a:prstDash val="solid"/>
+          </a:ln>
+        </p:spPr>
+      </p:sp>
+      <p:sp>
+        <p:nvSpPr>
+          <p:cNvPr id="16" name="Shape 14"/>
+          <p:cNvSpPr/>
+          <p:nvPr/>
+        </p:nvSpPr>
+        <p:spPr>
+          <a:xfrm>
+            <a:off x="704088" y="3877056"/>
+            <a:ext cx="320040" cy="320040"/>
+          </a:xfrm>
+          <a:prstGeom prst="rect">
+            <a:avLst/>
+          </a:prstGeom>
+          <a:solidFill>
+            <a:srgbClr val="977024"/>
+          </a:solidFill>
+          <a:ln/>
+        </p:spPr>
+      </p:sp>
+      <p:sp>
+        <p:nvSpPr>
+          <p:cNvPr id="17" name="Text 15"/>
+          <p:cNvSpPr/>
+          <p:nvPr/>
+        </p:nvSpPr>
+        <p:spPr>
+          <a:xfrm>
+            <a:off x="704088" y="3877056"/>
+            <a:ext cx="320040" cy="320040"/>
+          </a:xfrm>
+          <a:prstGeom prst="rect">
+            <a:avLst/>
+          </a:prstGeom>
+          <a:noFill/>
+          <a:ln/>
+        </p:spPr>
+        <p:txBody>
+          <a:bodyPr wrap="square" rtlCol="0" anchor="ctr"/>
+          <a:lstStyle/>
+          <a:p>
+            <a:pPr algn="ctr" indent="0" marL="0">
+              <a:buNone/>
+            </a:pPr>
+            <a:r>
+              <a:rPr lang="en-US" sz="1100" b="1" dirty="0">
+                <a:solidFill>
+                  <a:srgbClr val="000000"/>
+                </a:solidFill>
+                <a:latin typeface="Pretendard" pitchFamily="34" charset="0"/>
+                <a:ea typeface="Pretendard" pitchFamily="34" charset="-122"/>
+                <a:cs typeface="Pretendard" pitchFamily="34" charset="-120"/>
+              </a:rPr>
+              <a:t>✓</a:t>
+            </a:r>
+            <a:endParaRPr lang="en-US" sz="1100" dirty="0"/>
+          </a:p>
+        </p:txBody>
+      </p:sp>
+      <p:sp>
+        <p:nvSpPr>
+          <p:cNvPr id="18" name="Text 16"/>
+          <p:cNvSpPr/>
+          <p:nvPr/>
+        </p:nvSpPr>
+        <p:spPr>
+          <a:xfrm>
+            <a:off x="1115568" y="3822192"/>
+            <a:ext cx="4683100" cy="685800"/>
+          </a:xfrm>
+          <a:prstGeom prst="rect">
+            <a:avLst/>
+          </a:prstGeom>
+          <a:noFill/>
+          <a:ln/>
+        </p:spPr>
+        <p:txBody>
+          <a:bodyPr wrap="square" rtlCol="0" anchor="ctr"/>
+          <a:lstStyle/>
+          <a:p>
+            <a:pPr indent="0" marL="0">
+              <a:lnSpc>
+                <a:spcPct val="115000"/>
+              </a:lnSpc>
+              <a:buNone/>
+            </a:pPr>
+            <a:r>
+              <a:rPr lang="en-US" sz="1050" dirty="0">
+                <a:solidFill>
+                  <a:srgbClr val="10161F"/>
+                </a:solidFill>
+                <a:latin typeface="Pretendard" pitchFamily="34" charset="0"/>
+                <a:ea typeface="Pretendard" pitchFamily="34" charset="-122"/>
+                <a:cs typeface="Pretendard" pitchFamily="34" charset="-120"/>
+              </a:rPr>
+              <a:t>건축물대장상 위반건축물 등재 여부 및 불법 증축·용도변경 이행강제금 납부 이력 점검</a:t>
+            </a:r>
+            <a:endParaRPr lang="en-US" sz="1050" dirty="0"/>
+          </a:p>
+        </p:txBody>
+      </p:sp>
+      <p:sp>
+        <p:nvSpPr>
+          <p:cNvPr id="19" name="Shape 17"/>
+          <p:cNvSpPr/>
+          <p:nvPr/>
+        </p:nvSpPr>
+        <p:spPr>
+          <a:xfrm>
+            <a:off x="6255868" y="1719072"/>
+            <a:ext cx="5368900" cy="868680"/>
+          </a:xfrm>
+          <a:prstGeom prst="rect">
+            <a:avLst/>
+          </a:prstGeom>
+          <a:solidFill>
+            <a:srgbClr val="F7FAFC"/>
+          </a:solidFill>
+          <a:ln w="6350">
+            <a:solidFill>
+              <a:srgbClr val="D9B668"/>
+            </a:solidFill>
+            <a:prstDash val="solid"/>
+          </a:ln>
+        </p:spPr>
+      </p:sp>
+      <p:sp>
+        <p:nvSpPr>
+          <p:cNvPr id="20" name="Shape 18"/>
+          <p:cNvSpPr/>
+          <p:nvPr/>
+        </p:nvSpPr>
+        <p:spPr>
+          <a:xfrm>
+            <a:off x="6393028" y="1883664"/>
+            <a:ext cx="320040" cy="320040"/>
+          </a:xfrm>
+          <a:prstGeom prst="rect">
+            <a:avLst/>
+          </a:prstGeom>
+          <a:solidFill>
+            <a:srgbClr val="977024"/>
+          </a:solidFill>
+          <a:ln/>
+        </p:spPr>
+      </p:sp>
+      <p:sp>
+        <p:nvSpPr>
+          <p:cNvPr id="21" name="Text 19"/>
+          <p:cNvSpPr/>
+          <p:nvPr/>
+        </p:nvSpPr>
+        <p:spPr>
+          <a:xfrm>
+            <a:off x="6393028" y="1883664"/>
+            <a:ext cx="320040" cy="320040"/>
+          </a:xfrm>
+          <a:prstGeom prst="rect">
+            <a:avLst/>
+          </a:prstGeom>
+          <a:noFill/>
+          <a:ln/>
+        </p:spPr>
+        <p:txBody>
+          <a:bodyPr wrap="square" rtlCol="0" anchor="ctr"/>
+          <a:lstStyle/>
+          <a:p>
+            <a:pPr algn="ctr" indent="0" marL="0">
+              <a:buNone/>
+            </a:pPr>
+            <a:r>
+              <a:rPr lang="en-US" sz="1100" b="1" dirty="0">
+                <a:solidFill>
+                  <a:srgbClr val="000000"/>
+                </a:solidFill>
+                <a:latin typeface="Pretendard" pitchFamily="34" charset="0"/>
+                <a:ea typeface="Pretendard" pitchFamily="34" charset="-122"/>
+                <a:cs typeface="Pretendard" pitchFamily="34" charset="-120"/>
+              </a:rPr>
+              <a:t>✓</a:t>
+            </a:r>
+            <a:endParaRPr lang="en-US" sz="1100" dirty="0"/>
+          </a:p>
+        </p:txBody>
+      </p:sp>
+      <p:sp>
+        <p:nvSpPr>
+          <p:cNvPr id="22" name="Text 20"/>
+          <p:cNvSpPr/>
+          <p:nvPr/>
+        </p:nvSpPr>
+        <p:spPr>
+          <a:xfrm>
+            <a:off x="6804508" y="1828800"/>
+            <a:ext cx="4683100" cy="685800"/>
+          </a:xfrm>
+          <a:prstGeom prst="rect">
+            <a:avLst/>
+          </a:prstGeom>
+          <a:noFill/>
+          <a:ln/>
+        </p:spPr>
+        <p:txBody>
+          <a:bodyPr wrap="square" rtlCol="0" anchor="ctr"/>
+          <a:lstStyle/>
+          <a:p>
+            <a:pPr indent="0" marL="0">
+              <a:lnSpc>
+                <a:spcPct val="115000"/>
+              </a:lnSpc>
+              <a:buNone/>
+            </a:pPr>
+            <a:r>
+              <a:rPr lang="en-US" sz="1050" dirty="0">
+                <a:solidFill>
+                  <a:srgbClr val="10161F"/>
+                </a:solidFill>
+                <a:latin typeface="Pretendard" pitchFamily="34" charset="0"/>
+                <a:ea typeface="Pretendard" pitchFamily="34" charset="-122"/>
+                <a:cs typeface="Pretendard" pitchFamily="34" charset="-120"/>
+              </a:rPr>
+              <a:t>토지이용계획확인원상 도시계획시설 저촉, 건축선 후퇴, 지구단위계획 특별계획구역 확인</a:t>
+            </a:r>
+            <a:endParaRPr lang="en-US" sz="1050" dirty="0"/>
+          </a:p>
+        </p:txBody>
+      </p:sp>
+      <p:sp>
+        <p:nvSpPr>
+          <p:cNvPr id="23" name="Shape 21"/>
+          <p:cNvSpPr/>
+          <p:nvPr/>
+        </p:nvSpPr>
+        <p:spPr>
+          <a:xfrm>
+            <a:off x="6255868" y="2715768"/>
+            <a:ext cx="5368900" cy="868680"/>
+          </a:xfrm>
+          <a:prstGeom prst="rect">
+            <a:avLst/>
+          </a:prstGeom>
+          <a:solidFill>
+            <a:srgbClr val="F7FAFC"/>
+          </a:solidFill>
+          <a:ln w="6350">
+            <a:solidFill>
+              <a:srgbClr val="D9B668"/>
+            </a:solidFill>
+            <a:prstDash val="solid"/>
+          </a:ln>
+        </p:spPr>
+      </p:sp>
+      <p:sp>
+        <p:nvSpPr>
+          <p:cNvPr id="24" name="Shape 22"/>
+          <p:cNvSpPr/>
+          <p:nvPr/>
+        </p:nvSpPr>
+        <p:spPr>
+          <a:xfrm>
+            <a:off x="6393028" y="2880360"/>
+            <a:ext cx="320040" cy="320040"/>
+          </a:xfrm>
+          <a:prstGeom prst="rect">
+            <a:avLst/>
+          </a:prstGeom>
+          <a:solidFill>
+            <a:srgbClr val="977024"/>
+          </a:solidFill>
+          <a:ln/>
+        </p:spPr>
+      </p:sp>
+      <p:sp>
+        <p:nvSpPr>
+          <p:cNvPr id="25" name="Text 23"/>
+          <p:cNvSpPr/>
+          <p:nvPr/>
+        </p:nvSpPr>
+        <p:spPr>
+          <a:xfrm>
+            <a:off x="6393028" y="2880360"/>
+            <a:ext cx="320040" cy="320040"/>
+          </a:xfrm>
+          <a:prstGeom prst="rect">
+            <a:avLst/>
+          </a:prstGeom>
+          <a:noFill/>
+          <a:ln/>
+        </p:spPr>
+        <p:txBody>
+          <a:bodyPr wrap="square" rtlCol="0" anchor="ctr"/>
+          <a:lstStyle/>
+          <a:p>
+            <a:pPr algn="ctr" indent="0" marL="0">
+              <a:buNone/>
+            </a:pPr>
+            <a:r>
+              <a:rPr lang="en-US" sz="1100" b="1" dirty="0">
+                <a:solidFill>
+                  <a:srgbClr val="000000"/>
+                </a:solidFill>
+                <a:latin typeface="Pretendard" pitchFamily="34" charset="0"/>
+                <a:ea typeface="Pretendard" pitchFamily="34" charset="-122"/>
+                <a:cs typeface="Pretendard" pitchFamily="34" charset="-120"/>
+              </a:rPr>
+              <a:t>✓</a:t>
+            </a:r>
+            <a:endParaRPr lang="en-US" sz="1100" dirty="0"/>
+          </a:p>
+        </p:txBody>
+      </p:sp>
+      <p:sp>
+        <p:nvSpPr>
+          <p:cNvPr id="26" name="Text 24"/>
+          <p:cNvSpPr/>
+          <p:nvPr/>
+        </p:nvSpPr>
+        <p:spPr>
+          <a:xfrm>
+            <a:off x="6804508" y="2825496"/>
+            <a:ext cx="4683100" cy="685800"/>
+          </a:xfrm>
+          <a:prstGeom prst="rect">
+            <a:avLst/>
+          </a:prstGeom>
+          <a:noFill/>
+          <a:ln/>
+        </p:spPr>
+        <p:txBody>
+          <a:bodyPr wrap="square" rtlCol="0" anchor="ctr"/>
+          <a:lstStyle/>
+          <a:p>
+            <a:pPr indent="0" marL="0">
+              <a:lnSpc>
+                <a:spcPct val="115000"/>
+              </a:lnSpc>
+              <a:buNone/>
+            </a:pPr>
+            <a:r>
+              <a:rPr lang="en-US" sz="1050" dirty="0">
+                <a:solidFill>
+                  <a:srgbClr val="10161F"/>
+                </a:solidFill>
+                <a:latin typeface="Pretendard" pitchFamily="34" charset="0"/>
+                <a:ea typeface="Pretendard" pitchFamily="34" charset="-122"/>
+                <a:cs typeface="Pretendard" pitchFamily="34" charset="-120"/>
+              </a:rPr>
+              <a:t>기계식 주차기 정기 안전점검 합격증, 승강기 검사필증, 소방 완비증명서 실물 실사</a:t>
+            </a:r>
+            <a:endParaRPr lang="en-US" sz="1050" dirty="0"/>
+          </a:p>
+        </p:txBody>
+      </p:sp>
+      <p:sp>
+        <p:nvSpPr>
+          <p:cNvPr id="27" name="Shape 25"/>
+          <p:cNvSpPr/>
+          <p:nvPr/>
+        </p:nvSpPr>
+        <p:spPr>
+          <a:xfrm>
+            <a:off x="6255868" y="3712464"/>
+            <a:ext cx="5368900" cy="868680"/>
+          </a:xfrm>
+          <a:prstGeom prst="rect">
+            <a:avLst/>
+          </a:prstGeom>
+          <a:solidFill>
+            <a:srgbClr val="F7FAFC"/>
+          </a:solidFill>
+          <a:ln w="6350">
+            <a:solidFill>
+              <a:srgbClr val="D9B668"/>
+            </a:solidFill>
+            <a:prstDash val="solid"/>
+          </a:ln>
+        </p:spPr>
+      </p:sp>
+      <p:sp>
+        <p:nvSpPr>
+          <p:cNvPr id="28" name="Shape 26"/>
+          <p:cNvSpPr/>
+          <p:nvPr/>
+        </p:nvSpPr>
+        <p:spPr>
+          <a:xfrm>
+            <a:off x="6393028" y="3877056"/>
+            <a:ext cx="320040" cy="320040"/>
+          </a:xfrm>
+          <a:prstGeom prst="rect">
+            <a:avLst/>
+          </a:prstGeom>
+          <a:solidFill>
+            <a:srgbClr val="977024"/>
+          </a:solidFill>
+          <a:ln/>
+        </p:spPr>
+      </p:sp>
+      <p:sp>
+        <p:nvSpPr>
+          <p:cNvPr id="29" name="Text 27"/>
+          <p:cNvSpPr/>
+          <p:nvPr/>
+        </p:nvSpPr>
+        <p:spPr>
+          <a:xfrm>
+            <a:off x="6393028" y="3877056"/>
+            <a:ext cx="320040" cy="320040"/>
+          </a:xfrm>
+          <a:prstGeom prst="rect">
+            <a:avLst/>
+          </a:prstGeom>
+          <a:noFill/>
+          <a:ln/>
+        </p:spPr>
+        <p:txBody>
+          <a:bodyPr wrap="square" rtlCol="0" anchor="ctr"/>
+          <a:lstStyle/>
+          <a:p>
+            <a:pPr algn="ctr" indent="0" marL="0">
+              <a:buNone/>
+            </a:pPr>
+            <a:r>
+              <a:rPr lang="en-US" sz="1100" b="1" dirty="0">
+                <a:solidFill>
+                  <a:srgbClr val="000000"/>
+                </a:solidFill>
+                <a:latin typeface="Pretendard" pitchFamily="34" charset="0"/>
+                <a:ea typeface="Pretendard" pitchFamily="34" charset="-122"/>
+                <a:cs typeface="Pretendard" pitchFamily="34" charset="-120"/>
+              </a:rPr>
+              <a:t>✓</a:t>
+            </a:r>
+            <a:endParaRPr lang="en-US" sz="1100" dirty="0"/>
+          </a:p>
+        </p:txBody>
+      </p:sp>
+      <p:sp>
+        <p:nvSpPr>
+          <p:cNvPr id="30" name="Text 28"/>
+          <p:cNvSpPr/>
+          <p:nvPr/>
+        </p:nvSpPr>
+        <p:spPr>
+          <a:xfrm>
+            <a:off x="6804508" y="3822192"/>
+            <a:ext cx="4683100" cy="685800"/>
+          </a:xfrm>
+          <a:prstGeom prst="rect">
+            <a:avLst/>
+          </a:prstGeom>
+          <a:noFill/>
+          <a:ln/>
+        </p:spPr>
+        <p:txBody>
+          <a:bodyPr wrap="square" rtlCol="0" anchor="ctr"/>
+          <a:lstStyle/>
+          <a:p>
+            <a:pPr indent="0" marL="0">
+              <a:lnSpc>
+                <a:spcPct val="115000"/>
+              </a:lnSpc>
+              <a:buNone/>
+            </a:pPr>
+            <a:r>
+              <a:rPr lang="en-US" sz="1050" dirty="0">
+                <a:solidFill>
+                  <a:srgbClr val="10161F"/>
+                </a:solidFill>
+                <a:latin typeface="Pretendard" pitchFamily="34" charset="0"/>
+                <a:ea typeface="Pretendard" pitchFamily="34" charset="-122"/>
+                <a:cs typeface="Pretendard" pitchFamily="34" charset="-120"/>
+              </a:rPr>
+              <a:t>정화조 용량 대비 현 업종 적합성 및 하수도 원인자부담금 추가 부과 대상 여부 확인</a:t>
+            </a:r>
+            <a:endParaRPr lang="en-US" sz="1050" dirty="0"/>
+          </a:p>
+        </p:txBody>
+      </p:sp>
+      <p:sp>
+        <p:nvSpPr>
+          <p:cNvPr id="31" name="Shape 29"/>
+          <p:cNvSpPr/>
+          <p:nvPr/>
+        </p:nvSpPr>
+        <p:spPr>
+          <a:xfrm>
+            <a:off x="566928" y="5760720"/>
+            <a:ext cx="11057839" cy="594360"/>
+          </a:xfrm>
+          <a:prstGeom prst="rect">
+            <a:avLst/>
+          </a:prstGeom>
+          <a:solidFill>
+            <a:srgbClr val="D9B668"/>
+          </a:solidFill>
+          <a:ln/>
+        </p:spPr>
+      </p:sp>
+      <p:sp>
+        <p:nvSpPr>
+          <p:cNvPr id="32" name="Text 30"/>
+          <p:cNvSpPr/>
+          <p:nvPr/>
+        </p:nvSpPr>
+        <p:spPr>
+          <a:xfrm>
+            <a:off x="749808" y="5833872"/>
+            <a:ext cx="10692079" cy="448056"/>
+          </a:xfrm>
+          <a:prstGeom prst="rect">
+            <a:avLst/>
+          </a:prstGeom>
+          <a:noFill/>
+          <a:ln/>
+        </p:spPr>
+        <p:txBody>
+          <a:bodyPr wrap="square" rtlCol="0" anchor="ctr"/>
+          <a:lstStyle/>
+          <a:p>
+            <a:pPr indent="0" marL="0">
+              <a:buNone/>
+            </a:pPr>
+            <a:r>
+              <a:rPr lang="en-US" sz="950" b="1" dirty="0">
+                <a:solidFill>
+                  <a:srgbClr val="977024"/>
+                </a:solidFill>
+                <a:latin typeface="Pretendard" pitchFamily="34" charset="0"/>
+                <a:ea typeface="Pretendard" pitchFamily="34" charset="-122"/>
+                <a:cs typeface="Pretendard" pitchFamily="34" charset="-120"/>
+              </a:rPr>
+              <a:t>※ 본 체크리스트는 계약 전 매수인의 안전한 자산 인수를 위한 필수 확인 사항이며, 실사(Due Diligence) 결과에 따라 매매 조건 및 잔금 일정이 조정될 수 있습니다.</a:t>
+            </a:r>
+            <a:endParaRPr lang="en-US" sz="950" dirty="0"/>
+          </a:p>
+        </p:txBody>
+      </p:sp>
+      <p:sp>
+        <p:nvSpPr>
+          <p:cNvPr id="33" name="Text 31"/>
+          <p:cNvSpPr/>
+          <p:nvPr/>
+        </p:nvSpPr>
+        <p:spPr>
+          <a:xfrm>
+            <a:off x="566928" y="6382512"/>
+            <a:ext cx="7315200" cy="219456"/>
+          </a:xfrm>
+          <a:prstGeom prst="rect">
+            <a:avLst/>
+          </a:prstGeom>
+          <a:noFill/>
+          <a:ln/>
+        </p:spPr>
+        <p:txBody>
+          <a:bodyPr wrap="square" lIns="0" tIns="0" rIns="0" bIns="0" rtlCol="0" anchor="ctr"/>
+          <a:lstStyle/>
+          <a:p>
+            <a:pPr indent="0" marL="0">
+              <a:buNone/>
+            </a:pPr>
+            <a:r>
+              <a:rPr lang="en-US" sz="800" dirty="0">
+                <a:solidFill>
+                  <a:srgbClr val="718096"/>
+                </a:solidFill>
+                <a:latin typeface="Pretendard" pitchFamily="34" charset="0"/>
+                <a:ea typeface="Pretendard" pitchFamily="34" charset="-122"/>
+                <a:cs typeface="Pretendard" pitchFamily="34" charset="-120"/>
+              </a:rPr>
+              <a:t>크리딜   |   </a:t>
+            </a:r>
+            <a:endParaRPr lang="en-US" sz="800" dirty="0"/>
+          </a:p>
+        </p:txBody>
+      </p:sp>
+      <p:sp>
+        <p:nvSpPr>
+          <p:cNvPr id="34" name="Text 32"/>
+          <p:cNvSpPr/>
+          <p:nvPr/>
+        </p:nvSpPr>
+        <p:spPr>
+          <a:xfrm>
+            <a:off x="10710367" y="6382512"/>
+            <a:ext cx="914400" cy="219456"/>
+          </a:xfrm>
+          <a:prstGeom prst="rect">
+            <a:avLst/>
+          </a:prstGeom>
+          <a:noFill/>
+          <a:ln/>
+        </p:spPr>
+        <p:txBody>
+          <a:bodyPr wrap="square" lIns="0" tIns="0" rIns="0" bIns="0" rtlCol="0" anchor="ctr"/>
+          <a:lstStyle/>
+          <a:p>
+            <a:pPr algn="r" indent="0" marL="0">
+              <a:buNone/>
+            </a:pPr>
+            <a:r>
+              <a:rPr lang="en-US" sz="900" b="1" dirty="0">
+                <a:solidFill>
+                  <a:srgbClr val="B98A2E"/>
+                </a:solidFill>
+                <a:latin typeface="Arial" pitchFamily="34" charset="0"/>
+                <a:ea typeface="Arial" pitchFamily="34" charset="-122"/>
+                <a:cs typeface="Arial" pitchFamily="34" charset="-120"/>
+              </a:rPr>
+              <a:t>12</a:t>
+            </a:r>
+            <a:endParaRPr lang="en-US" sz="900" dirty="0"/>
+          </a:p>
+        </p:txBody>
+      </p:sp>
+    </p:spTree>
+  </p:cSld>
+  <p:clrMapOvr>
+    <a:masterClrMapping/>
+  </p:clrMapOvr>
+</p:sld>
+</file>
+
+<file path=ppt/slides/slide14.xml><?xml version="1.0" encoding="utf-8"?>
+<p:sld xmlns:a="http://schemas.openxmlformats.org/drawingml/2006/main" xmlns:r="http://schemas.openxmlformats.org/officeDocument/2006/relationships" xmlns:p="http://schemas.openxmlformats.org/presentationml/2006/main">
+  <p:cSld name="Slide 14">
+    <p:bg>
+      <p:bgPr>
+        <a:solidFill>
+          <a:srgbClr val="FFFFFF"/>
+        </a:solidFill>
+      </p:bgPr>
+    </p:bg>
+    <p:spTree>
+      <p:nvGrpSpPr>
+        <p:cNvPr id="1" name=""/>
+        <p:cNvGrpSpPr/>
+        <p:nvPr/>
+      </p:nvGrpSpPr>
+      <p:grpSpPr>
+        <a:xfrm>
+          <a:off x="0" y="0"/>
+          <a:ext cx="0" cy="0"/>
+          <a:chOff x="0" y="0"/>
+          <a:chExt cx="0" cy="0"/>
+        </a:xfrm>
+      </p:grpSpPr>
+      <p:sp>
+        <p:nvSpPr>
+          <p:cNvPr id="2" name="Shape 0"/>
+          <p:cNvSpPr/>
+          <p:nvPr/>
+        </p:nvSpPr>
+        <p:spPr>
+          <a:xfrm>
+            <a:off x="566928" y="457200"/>
+            <a:ext cx="384048" cy="384048"/>
+          </a:xfrm>
+          <a:prstGeom prst="ellipse">
+            <a:avLst/>
+          </a:prstGeom>
+          <a:solidFill>
+            <a:srgbClr val="B98A2E"/>
+          </a:solidFill>
+          <a:ln/>
+        </p:spPr>
+      </p:sp>
+      <p:sp>
+        <p:nvSpPr>
+          <p:cNvPr id="3" name="Text 1"/>
+          <p:cNvSpPr/>
+          <p:nvPr/>
+        </p:nvSpPr>
+        <p:spPr>
+          <a:xfrm>
+            <a:off x="566928" y="457200"/>
+            <a:ext cx="384048" cy="384048"/>
+          </a:xfrm>
+          <a:prstGeom prst="rect">
+            <a:avLst/>
+          </a:prstGeom>
+          <a:noFill/>
+          <a:ln/>
+        </p:spPr>
+        <p:txBody>
+          <a:bodyPr wrap="square" lIns="0" tIns="0" rIns="0" bIns="0" rtlCol="0" anchor="ctr"/>
+          <a:lstStyle/>
+          <a:p>
+            <a:pPr algn="ctr" indent="0" marL="0">
+              <a:buNone/>
+            </a:pPr>
+            <a:r>
+              <a:rPr lang="en-US" sz="1300" b="1" dirty="0">
+                <a:solidFill>
+                  <a:srgbClr val="FFFFFF"/>
+                </a:solidFill>
+                <a:latin typeface="Arial" pitchFamily="34" charset="0"/>
+                <a:ea typeface="Arial" pitchFamily="34" charset="-122"/>
+                <a:cs typeface="Arial" pitchFamily="34" charset="-120"/>
+              </a:rPr>
+              <a:t>13</a:t>
+            </a:r>
+            <a:endParaRPr lang="en-US" sz="1300" dirty="0"/>
+          </a:p>
+        </p:txBody>
+      </p:sp>
+      <p:sp>
+        <p:nvSpPr>
+          <p:cNvPr id="4" name="Text 2"/>
+          <p:cNvSpPr/>
+          <p:nvPr/>
+        </p:nvSpPr>
+        <p:spPr>
+          <a:xfrm>
+            <a:off x="1133856" y="457200"/>
+            <a:ext cx="10490911" cy="182880"/>
+          </a:xfrm>
+          <a:prstGeom prst="rect">
+            <a:avLst/>
+          </a:prstGeom>
+          <a:noFill/>
+          <a:ln/>
+        </p:spPr>
+        <p:txBody>
+          <a:bodyPr wrap="square" lIns="0" tIns="0" rIns="0" bIns="0" rtlCol="0" anchor="ctr"/>
+          <a:lstStyle/>
+          <a:p>
+            <a:pPr indent="0" marL="0">
+              <a:buNone/>
+            </a:pPr>
+            <a:r>
+              <a:rPr lang="en-US" sz="950" b="1" spc="200" kern="0" dirty="0">
+                <a:solidFill>
+                  <a:srgbClr val="B98A2E"/>
+                </a:solidFill>
+                <a:latin typeface="Arial" pitchFamily="34" charset="0"/>
+                <a:ea typeface="Arial" pitchFamily="34" charset="-122"/>
+                <a:cs typeface="Arial" pitchFamily="34" charset="-120"/>
+              </a:rPr>
+              <a:t>Process</a:t>
+            </a:r>
+            <a:endParaRPr lang="en-US" sz="950" dirty="0"/>
+          </a:p>
+        </p:txBody>
+      </p:sp>
+      <p:sp>
+        <p:nvSpPr>
+          <p:cNvPr id="5" name="Text 3"/>
+          <p:cNvSpPr/>
+          <p:nvPr/>
+        </p:nvSpPr>
+        <p:spPr>
+          <a:xfrm>
+            <a:off x="1133856" y="640080"/>
+            <a:ext cx="10490911" cy="365760"/>
+          </a:xfrm>
+          <a:prstGeom prst="rect">
+            <a:avLst/>
+          </a:prstGeom>
+          <a:noFill/>
+          <a:ln/>
+        </p:spPr>
+        <p:txBody>
+          <a:bodyPr wrap="square" lIns="0" tIns="0" rIns="0" bIns="0" rtlCol="0" anchor="ctr"/>
+          <a:lstStyle/>
+          <a:p>
+            <a:pPr indent="0" marL="0">
+              <a:buNone/>
+            </a:pPr>
+            <a:r>
+              <a:rPr lang="en-US" sz="2300" b="1" dirty="0">
+                <a:solidFill>
+                  <a:srgbClr val="10161F"/>
+                </a:solidFill>
+                <a:latin typeface="Pretendard" pitchFamily="34" charset="0"/>
+                <a:ea typeface="Pretendard" pitchFamily="34" charset="-122"/>
+                <a:cs typeface="Pretendard" pitchFamily="34" charset="-120"/>
+              </a:rPr>
+              <a:t>다음 단계</a:t>
+            </a:r>
+            <a:endParaRPr lang="en-US" sz="2300" dirty="0"/>
+          </a:p>
+        </p:txBody>
+      </p:sp>
+      <p:sp>
+        <p:nvSpPr>
+          <p:cNvPr id="6" name="Shape 4"/>
+          <p:cNvSpPr/>
+          <p:nvPr/>
+        </p:nvSpPr>
+        <p:spPr>
+          <a:xfrm>
+            <a:off x="566928" y="1572768"/>
+            <a:ext cx="11057839" cy="3200400"/>
+          </a:xfrm>
+          <a:prstGeom prst="roundRect">
+            <a:avLst>
+              <a:gd name="adj" fmla="val 1714"/>
+            </a:avLst>
+          </a:prstGeom>
+          <a:solidFill>
+            <a:srgbClr val="F7FAFC"/>
+          </a:solidFill>
+          <a:ln w="6350">
+            <a:solidFill>
+              <a:srgbClr val="CBD5E0"/>
+            </a:solidFill>
+            <a:prstDash val="solid"/>
+          </a:ln>
+        </p:spPr>
+      </p:sp>
+      <p:sp>
+        <p:nvSpPr>
+          <p:cNvPr id="7" name="Shape 5"/>
+          <p:cNvSpPr/>
+          <p:nvPr/>
+        </p:nvSpPr>
+        <p:spPr>
+          <a:xfrm>
+            <a:off x="786384" y="1792224"/>
+            <a:ext cx="438912" cy="438912"/>
+          </a:xfrm>
+          <a:prstGeom prst="ellipse">
+            <a:avLst/>
+          </a:prstGeom>
+          <a:solidFill>
+            <a:srgbClr val="B98A2E"/>
+          </a:solidFill>
+          <a:ln/>
+        </p:spPr>
+      </p:sp>
+      <p:sp>
+        <p:nvSpPr>
+          <p:cNvPr id="8" name="Text 6"/>
+          <p:cNvSpPr/>
+          <p:nvPr/>
+        </p:nvSpPr>
+        <p:spPr>
+          <a:xfrm>
+            <a:off x="786384" y="1792224"/>
+            <a:ext cx="438912" cy="438912"/>
+          </a:xfrm>
+          <a:prstGeom prst="rect">
+            <a:avLst/>
+          </a:prstGeom>
+          <a:noFill/>
+          <a:ln/>
+        </p:spPr>
+        <p:txBody>
+          <a:bodyPr wrap="square" lIns="0" tIns="0" rIns="0" bIns="0" rtlCol="0" anchor="ctr"/>
+          <a:lstStyle/>
+          <a:p>
+            <a:pPr algn="ctr" indent="0" marL="0">
+              <a:buNone/>
+            </a:pPr>
+            <a:r>
+              <a:rPr lang="en-US" sz="1400" b="1" dirty="0">
+                <a:solidFill>
+                  <a:srgbClr val="FFFFFF"/>
+                </a:solidFill>
+                <a:latin typeface="Arial" pitchFamily="34" charset="0"/>
+                <a:ea typeface="Arial" pitchFamily="34" charset="-122"/>
+                <a:cs typeface="Arial" pitchFamily="34" charset="-120"/>
+              </a:rPr>
+              <a:t>01</a:t>
+            </a:r>
+            <a:endParaRPr lang="en-US" sz="1400" dirty="0"/>
+          </a:p>
+        </p:txBody>
+      </p:sp>
+      <p:sp>
+        <p:nvSpPr>
+          <p:cNvPr id="9" name="Text 7"/>
+          <p:cNvSpPr/>
+          <p:nvPr/>
+        </p:nvSpPr>
+        <p:spPr>
+          <a:xfrm>
+            <a:off x="786384" y="2304288"/>
+            <a:ext cx="10618927" cy="365760"/>
+          </a:xfrm>
+          <a:prstGeom prst="rect">
+            <a:avLst/>
+          </a:prstGeom>
+          <a:noFill/>
+          <a:ln/>
+        </p:spPr>
+        <p:txBody>
+          <a:bodyPr wrap="square" rtlCol="0" anchor="ctr"/>
+          <a:lstStyle/>
+          <a:p>
+            <a:pPr indent="0" marL="0">
+              <a:buNone/>
+            </a:pPr>
+            <a:r>
+              <a:rPr lang="en-US" sz="1600" b="1" dirty="0">
+                <a:solidFill>
+                  <a:srgbClr val="10161F"/>
+                </a:solidFill>
+                <a:latin typeface="Pretendard" pitchFamily="34" charset="0"/>
+                <a:ea typeface="Pretendard" pitchFamily="34" charset="-122"/>
+                <a:cs typeface="Pretendard" pitchFamily="34" charset="-120"/>
+              </a:rPr>
+              <a:t>1단계</a:t>
+            </a:r>
+            <a:endParaRPr lang="en-US" sz="1600" dirty="0"/>
+          </a:p>
+        </p:txBody>
+      </p:sp>
+      <p:sp>
+        <p:nvSpPr>
+          <p:cNvPr id="10" name="Text 8"/>
+          <p:cNvSpPr/>
+          <p:nvPr/>
+        </p:nvSpPr>
+        <p:spPr>
+          <a:xfrm>
+            <a:off x="786384" y="2761488"/>
+            <a:ext cx="10618927" cy="1828800"/>
+          </a:xfrm>
+          <a:prstGeom prst="rect">
+            <a:avLst/>
+          </a:prstGeom>
+          <a:noFill/>
+          <a:ln/>
+        </p:spPr>
+        <p:txBody>
+          <a:bodyPr wrap="square" rtlCol="0" anchor="t"/>
+          <a:lstStyle/>
+          <a:p>
+            <a:pPr indent="0" marL="0">
+              <a:buNone/>
+            </a:pPr>
+            <a:r>
+              <a:rPr lang="en-US" sz="1100" dirty="0">
+                <a:solidFill>
+                  <a:srgbClr val="10161F"/>
+                </a:solidFill>
+                <a:latin typeface="Pretendard" pitchFamily="34" charset="0"/>
+                <a:ea typeface="Pretendard" pitchFamily="34" charset="-122"/>
+                <a:cs typeface="Pretendard" pitchFamily="34" charset="-120"/>
+              </a:rPr>
+              <a:t>건축사 사전 상담 및 대수선 비용 산정을 권장합니다.</a:t>
+            </a:r>
+            <a:endParaRPr lang="en-US" sz="1100" dirty="0"/>
+          </a:p>
+          <a:p>
+            <a:pPr indent="0" marL="0">
+              <a:buNone/>
+            </a:pPr>
+            <a:r>
+              <a:rPr lang="en-US" sz="1100" dirty="0">
+                <a:solidFill>
+                  <a:srgbClr val="10161F"/>
+                </a:solidFill>
+                <a:latin typeface="Pretendard" pitchFamily="34" charset="0"/>
+                <a:ea typeface="Pretendard" pitchFamily="34" charset="-122"/>
+                <a:cs typeface="Pretendard" pitchFamily="34" charset="-120"/>
+              </a:rPr>
+              <a:t>건축사 사전 상담 및 대수선 비용 산정을 권장합니다.</a:t>
+            </a:r>
+            <a:endParaRPr lang="en-US" sz="1100" dirty="0"/>
+          </a:p>
+        </p:txBody>
+      </p:sp>
+      <p:sp>
+        <p:nvSpPr>
+          <p:cNvPr id="11" name="Text 9"/>
+          <p:cNvSpPr/>
+          <p:nvPr/>
+        </p:nvSpPr>
+        <p:spPr>
+          <a:xfrm>
+            <a:off x="566928" y="6382512"/>
+            <a:ext cx="7315200" cy="219456"/>
+          </a:xfrm>
+          <a:prstGeom prst="rect">
+            <a:avLst/>
+          </a:prstGeom>
+          <a:noFill/>
+          <a:ln/>
+        </p:spPr>
+        <p:txBody>
+          <a:bodyPr wrap="square" lIns="0" tIns="0" rIns="0" bIns="0" rtlCol="0" anchor="ctr"/>
+          <a:lstStyle/>
+          <a:p>
+            <a:pPr indent="0" marL="0">
+              <a:buNone/>
+            </a:pPr>
+            <a:r>
+              <a:rPr lang="en-US" sz="800" dirty="0">
+                <a:solidFill>
+                  <a:srgbClr val="718096"/>
+                </a:solidFill>
+                <a:latin typeface="Pretendard" pitchFamily="34" charset="0"/>
+                <a:ea typeface="Pretendard" pitchFamily="34" charset="-122"/>
+                <a:cs typeface="Pretendard" pitchFamily="34" charset="-120"/>
+              </a:rPr>
+              <a:t>크리딜   |   </a:t>
+            </a:r>
+            <a:endParaRPr lang="en-US" sz="800" dirty="0"/>
+          </a:p>
+        </p:txBody>
+      </p:sp>
+      <p:sp>
+        <p:nvSpPr>
+          <p:cNvPr id="12" name="Text 10"/>
+          <p:cNvSpPr/>
+          <p:nvPr/>
+        </p:nvSpPr>
+        <p:spPr>
+          <a:xfrm>
+            <a:off x="10710367" y="6382512"/>
+            <a:ext cx="914400" cy="219456"/>
+          </a:xfrm>
+          <a:prstGeom prst="rect">
+            <a:avLst/>
+          </a:prstGeom>
+          <a:noFill/>
+          <a:ln/>
+        </p:spPr>
+        <p:txBody>
+          <a:bodyPr wrap="square" lIns="0" tIns="0" rIns="0" bIns="0" rtlCol="0" anchor="ctr"/>
+          <a:lstStyle/>
+          <a:p>
+            <a:pPr algn="r" indent="0" marL="0">
+              <a:buNone/>
+            </a:pPr>
+            <a:r>
+              <a:rPr lang="en-US" sz="900" b="1" dirty="0">
+                <a:solidFill>
+                  <a:srgbClr val="B98A2E"/>
+                </a:solidFill>
+                <a:latin typeface="Arial" pitchFamily="34" charset="0"/>
+                <a:ea typeface="Arial" pitchFamily="34" charset="-122"/>
+                <a:cs typeface="Arial" pitchFamily="34" charset="-120"/>
+              </a:rPr>
+              <a:t>13</a:t>
+            </a:r>
+            <a:endParaRPr lang="en-US" sz="900" dirty="0"/>
+          </a:p>
+        </p:txBody>
+      </p:sp>
+    </p:spTree>
+  </p:cSld>
+  <p:clrMapOvr>
+    <a:masterClrMapping/>
+  </p:clrMapOvr>
+</p:sld>
+</file>
+
+<file path=ppt/slides/slide15.xml><?xml version="1.0" encoding="utf-8"?>
+<p:sld xmlns:a="http://schemas.openxmlformats.org/drawingml/2006/main" xmlns:r="http://schemas.openxmlformats.org/officeDocument/2006/relationships" xmlns:p="http://schemas.openxmlformats.org/presentationml/2006/main">
+  <p:cSld name="Slide 15">
     <p:bg>
       <p:bgPr>
         <a:solidFill>
@@ -2418,7 +7974,7 @@
                 <a:ea typeface="Arial" pitchFamily="34" charset="-122"/>
                 <a:cs typeface="Arial" pitchFamily="34" charset="-120"/>
               </a:rPr>
-              <a:t>10</a:t>
+              <a:t>14</a:t>
             </a:r>
             <a:endParaRPr lang="en-US" sz="1300" dirty="0"/>
           </a:p>
@@ -2457,7 +8013,7 @@
                 <a:ea typeface="Arial" pitchFamily="34" charset="-122"/>
                 <a:cs typeface="Arial" pitchFamily="34" charset="-120"/>
               </a:rPr>
-              <a:t>Disclaimer</a:t>
+              <a:t>Closing</a:t>
             </a:r>
             <a:endParaRPr lang="en-US" sz="950" dirty="0"/>
           </a:p>
@@ -2647,7 +8203,7 @@
               <a:buNone/>
             </a:pPr>
             <a:r>
-              <a:rPr lang="en-US" sz="850" dirty="0">
+              <a:rPr lang="en-US" sz="900" dirty="0">
                 <a:solidFill>
                   <a:srgbClr val="A0AEC0"/>
                 </a:solidFill>
@@ -2657,7 +8213,7 @@
               </a:rPr>
               <a:t>담당 중개사에게 초기 관심 표명 및 상담 요청</a:t>
             </a:r>
-            <a:endParaRPr lang="en-US" sz="850" dirty="0"/>
+            <a:endParaRPr lang="en-US" sz="900" dirty="0"/>
           </a:p>
         </p:txBody>
       </p:sp>
@@ -2845,7 +8401,7 @@
               <a:buNone/>
             </a:pPr>
             <a:r>
-              <a:rPr lang="en-US" sz="850" dirty="0">
+              <a:rPr lang="en-US" sz="900" dirty="0">
                 <a:solidFill>
                   <a:srgbClr val="A0AEC0"/>
                 </a:solidFill>
@@ -2855,7 +8411,7 @@
               </a:rPr>
               <a:t>비밀유지계약 후 상세 임대차·재무 자료 제공</a:t>
             </a:r>
-            <a:endParaRPr lang="en-US" sz="850" dirty="0"/>
+            <a:endParaRPr lang="en-US" sz="900" dirty="0"/>
           </a:p>
         </p:txBody>
       </p:sp>
@@ -3043,7 +8599,7 @@
               <a:buNone/>
             </a:pPr>
             <a:r>
-              <a:rPr lang="en-US" sz="850" dirty="0">
+              <a:rPr lang="en-US" sz="900" dirty="0">
                 <a:solidFill>
                   <a:srgbClr val="A0AEC0"/>
                 </a:solidFill>
@@ -3053,7 +8609,7 @@
               </a:rPr>
               <a:t>건물 컨디션 및 설비 직접 확인 후 의향서(LOI) 제출</a:t>
             </a:r>
-            <a:endParaRPr lang="en-US" sz="850" dirty="0"/>
+            <a:endParaRPr lang="en-US" sz="900" dirty="0"/>
           </a:p>
         </p:txBody>
       </p:sp>
@@ -3143,7 +8699,7 @@
               <a:buNone/>
             </a:pPr>
             <a:r>
-              <a:rPr lang="en-US" sz="850" b="1" dirty="0">
+              <a:rPr lang="en-US" sz="900" b="1" dirty="0">
                 <a:solidFill>
                   <a:srgbClr val="FFFFFF"/>
                 </a:solidFill>
@@ -3153,7 +8709,7 @@
               </a:rPr>
               <a:t>✓ 공부확인</a:t>
             </a:r>
-            <a:endParaRPr lang="en-US" sz="850" dirty="0"/>
+            <a:endParaRPr lang="en-US" sz="900" dirty="0"/>
           </a:p>
         </p:txBody>
       </p:sp>
@@ -3243,7 +8799,7 @@
               <a:buNone/>
             </a:pPr>
             <a:r>
-              <a:rPr lang="en-US" sz="850" b="1" dirty="0">
+              <a:rPr lang="en-US" sz="900" b="1" dirty="0">
                 <a:solidFill>
                   <a:srgbClr val="FFFFFF"/>
                 </a:solidFill>
@@ -3253,7 +8809,7 @@
               </a:rPr>
               <a:t>★ 전문가검증</a:t>
             </a:r>
-            <a:endParaRPr lang="en-US" sz="850" dirty="0"/>
+            <a:endParaRPr lang="en-US" sz="900" dirty="0"/>
           </a:p>
         </p:txBody>
       </p:sp>
@@ -3343,7 +8899,7 @@
               <a:buNone/>
             </a:pPr>
             <a:r>
-              <a:rPr lang="en-US" sz="850" b="1" dirty="0">
+              <a:rPr lang="en-US" sz="900" b="1" dirty="0">
                 <a:solidFill>
                   <a:srgbClr val="FFFFFF"/>
                 </a:solidFill>
@@ -3353,7 +8909,7 @@
               </a:rPr>
               <a:t>▲ 매도인고지</a:t>
             </a:r>
-            <a:endParaRPr lang="en-US" sz="850" dirty="0"/>
+            <a:endParaRPr lang="en-US" sz="900" dirty="0"/>
           </a:p>
         </p:txBody>
       </p:sp>
@@ -3443,7 +8999,7 @@
               <a:buNone/>
             </a:pPr>
             <a:r>
-              <a:rPr lang="en-US" sz="850" b="1" dirty="0">
+              <a:rPr lang="en-US" sz="900" b="1" dirty="0">
                 <a:solidFill>
                   <a:srgbClr val="FFFFFF"/>
                 </a:solidFill>
@@ -3453,7 +9009,7 @@
               </a:rPr>
               <a:t>● 중개인입력</a:t>
             </a:r>
-            <a:endParaRPr lang="en-US" sz="850" dirty="0"/>
+            <a:endParaRPr lang="en-US" sz="900" dirty="0"/>
           </a:p>
         </p:txBody>
       </p:sp>
@@ -3543,7 +9099,7 @@
               <a:buNone/>
             </a:pPr>
             <a:r>
-              <a:rPr lang="en-US" sz="850" b="1" dirty="0">
+              <a:rPr lang="en-US" sz="900" b="1" dirty="0">
                 <a:solidFill>
                   <a:srgbClr val="FFFFFF"/>
                 </a:solidFill>
@@ -3553,7 +9109,7 @@
               </a:rPr>
               <a:t>◇ AI추정·가정</a:t>
             </a:r>
-            <a:endParaRPr lang="en-US" sz="850" dirty="0"/>
+            <a:endParaRPr lang="en-US" sz="900" dirty="0"/>
           </a:p>
         </p:txBody>
       </p:sp>
@@ -3685,7 +9241,7 @@
               <a:buNone/>
             </a:pPr>
             <a:r>
-              <a:rPr lang="en-US" sz="850" dirty="0">
+              <a:rPr lang="en-US" sz="900" dirty="0">
                 <a:solidFill>
                   <a:srgbClr val="A0AEC0"/>
                 </a:solidFill>
@@ -3695,7 +9251,7 @@
               </a:rPr>
               <a:t>본 자료는 투자 권유가 아니며, 기재된 정보의 정확성을 보증하지 않습니다.</a:t>
             </a:r>
-            <a:endParaRPr lang="en-US" sz="850" dirty="0"/>
+            <a:endParaRPr lang="en-US" sz="900" dirty="0"/>
           </a:p>
         </p:txBody>
       </p:sp>
@@ -3830,7 +9386,7 @@
                 <a:ea typeface="Arial" pitchFamily="34" charset="-122"/>
                 <a:cs typeface="Arial" pitchFamily="34" charset="-120"/>
               </a:rPr>
-              <a:t>10</a:t>
+              <a:t>14</a:t>
             </a:r>
             <a:endParaRPr lang="en-US" sz="900" dirty="0"/>
           </a:p>
@@ -4141,7 +9697,7 @@
         </p:nvSpPr>
         <p:spPr>
           <a:xfrm>
-            <a:off x="731520" y="2276856"/>
+            <a:off x="731520" y="2313432"/>
             <a:ext cx="3234842" cy="402336"/>
           </a:xfrm>
           <a:prstGeom prst="rect">
@@ -4248,7 +9804,7 @@
         </p:nvSpPr>
         <p:spPr>
           <a:xfrm>
-            <a:off x="4478426" y="2276856"/>
+            <a:off x="4478426" y="2313432"/>
             <a:ext cx="3234842" cy="402336"/>
           </a:xfrm>
           <a:prstGeom prst="rect">
@@ -4355,7 +9911,7 @@
         </p:nvSpPr>
         <p:spPr>
           <a:xfrm>
-            <a:off x="8225333" y="2276856"/>
+            <a:off x="8225333" y="2313432"/>
             <a:ext cx="3234842" cy="402336"/>
           </a:xfrm>
           <a:prstGeom prst="rect">
@@ -5070,40 +10626,16 @@
           </a:p>
         </p:txBody>
       </p:sp>
-      <p:pic>
-        <p:nvPicPr>
-          <p:cNvPr id="6" name="Image 0" descr="preencoded.png">    </p:cNvPr>
-          <p:cNvPicPr>
-            <a:picLocks noChangeAspect="1"/>
-          </p:cNvPicPr>
-          <p:nvPr/>
-        </p:nvPicPr>
-        <p:blipFill>
-          <a:blip r:embed="rId1"/>
-          <a:stretch>
-            <a:fillRect/>
-          </a:stretch>
-        </p:blipFill>
-        <p:spPr>
-          <a:xfrm>
-            <a:off x="566928" y="1481328"/>
-            <a:ext cx="5120640" cy="4114800"/>
-          </a:xfrm>
-          <a:prstGeom prst="rect">
-            <a:avLst/>
-          </a:prstGeom>
-        </p:spPr>
-      </p:pic>
-      <p:sp>
-        <p:nvSpPr>
-          <p:cNvPr id="7" name="Text 4"/>
-          <p:cNvSpPr/>
-          <p:nvPr/>
-        </p:nvSpPr>
-        <p:spPr>
-          <a:xfrm>
-            <a:off x="6053328" y="1481328"/>
-            <a:ext cx="2117147" cy="493776"/>
+      <p:sp>
+        <p:nvSpPr>
+          <p:cNvPr id="6" name="Text 4"/>
+          <p:cNvSpPr/>
+          <p:nvPr/>
+        </p:nvSpPr>
+        <p:spPr>
+          <a:xfrm>
+            <a:off x="566928" y="6382512"/>
+            <a:ext cx="7315200" cy="219456"/>
           </a:xfrm>
           <a:prstGeom prst="rect">
             <a:avLst/>
@@ -5116,13 +10648,10 @@
           <a:lstStyle/>
           <a:p>
             <a:pPr indent="0" marL="0">
-              <a:lnSpc>
-                <a:spcPct val="120000"/>
-              </a:lnSpc>
-              <a:buNone/>
-            </a:pPr>
-            <a:r>
-              <a:rPr lang="en-US" sz="1300" dirty="0">
+              <a:buNone/>
+            </a:pPr>
+            <a:r>
+              <a:rPr lang="en-US" sz="800" dirty="0">
                 <a:solidFill>
                   <a:srgbClr val="718096"/>
                 </a:solidFill>
@@ -5130,87 +10659,6 @@
                 <a:ea typeface="Pretendard" pitchFamily="34" charset="-122"/>
                 <a:cs typeface="Pretendard" pitchFamily="34" charset="-120"/>
               </a:rPr>
-              <a:t>교통 접근성</a:t>
-            </a:r>
-            <a:endParaRPr lang="en-US" sz="1300" dirty="0"/>
-          </a:p>
-        </p:txBody>
-      </p:sp>
-      <p:sp>
-        <p:nvSpPr>
-          <p:cNvPr id="8" name="Text 5"/>
-          <p:cNvSpPr/>
-          <p:nvPr/>
-        </p:nvSpPr>
-        <p:spPr>
-          <a:xfrm>
-            <a:off x="8170475" y="1481328"/>
-            <a:ext cx="3454292" cy="493776"/>
-          </a:xfrm>
-          <a:prstGeom prst="rect">
-            <a:avLst/>
-          </a:prstGeom>
-          <a:noFill/>
-          <a:ln/>
-        </p:spPr>
-        <p:txBody>
-          <a:bodyPr wrap="square" lIns="0" tIns="0" rIns="0" bIns="0" rtlCol="0" anchor="ctr"/>
-          <a:lstStyle/>
-          <a:p>
-            <a:pPr indent="0" marL="0">
-              <a:lnSpc>
-                <a:spcPct val="120000"/>
-              </a:lnSpc>
-              <a:buNone/>
-            </a:pPr>
-            <a:r>
-              <a:rPr lang="en-US" sz="1300" b="1" dirty="0">
-                <a:solidFill>
-                  <a:srgbClr val="10161F"/>
-                </a:solidFill>
-                <a:latin typeface="Pretendard" pitchFamily="34" charset="0"/>
-                <a:ea typeface="Pretendard" pitchFamily="34" charset="-122"/>
-                <a:cs typeface="Pretendard" pitchFamily="34" charset="-120"/>
-              </a:rPr>
-              <a:t>신사역 도보 5분, 가로수길 세로수길 상권 접면입니다.</a:t>
-            </a:r>
-            <a:endParaRPr lang="en-US" sz="1300" dirty="0"/>
-          </a:p>
-        </p:txBody>
-      </p:sp>
-      <p:sp>
-        <p:nvSpPr>
-          <p:cNvPr id="9" name="Text 6"/>
-          <p:cNvSpPr/>
-          <p:nvPr/>
-        </p:nvSpPr>
-        <p:spPr>
-          <a:xfrm>
-            <a:off x="566928" y="6382512"/>
-            <a:ext cx="7315200" cy="219456"/>
-          </a:xfrm>
-          <a:prstGeom prst="rect">
-            <a:avLst/>
-          </a:prstGeom>
-          <a:noFill/>
-          <a:ln/>
-        </p:spPr>
-        <p:txBody>
-          <a:bodyPr wrap="square" lIns="0" tIns="0" rIns="0" bIns="0" rtlCol="0" anchor="ctr"/>
-          <a:lstStyle/>
-          <a:p>
-            <a:pPr indent="0" marL="0">
-              <a:buNone/>
-            </a:pPr>
-            <a:r>
-              <a:rPr lang="en-US" sz="800" dirty="0">
-                <a:solidFill>
-                  <a:srgbClr val="718096"/>
-                </a:solidFill>
-                <a:latin typeface="Pretendard" pitchFamily="34" charset="0"/>
-                <a:ea typeface="Pretendard" pitchFamily="34" charset="-122"/>
-                <a:cs typeface="Pretendard" pitchFamily="34" charset="-120"/>
-              </a:rPr>
               <a:t>크리딜   |   </a:t>
             </a:r>
             <a:endParaRPr lang="en-US" sz="800" dirty="0"/>
@@ -5219,7 +10667,7 @@
       </p:sp>
       <p:sp>
         <p:nvSpPr>
-          <p:cNvPr id="10" name="Text 7"/>
+          <p:cNvPr id="7" name="Text 5"/>
           <p:cNvSpPr/>
           <p:nvPr/>
         </p:nvSpPr>
@@ -5253,45 +10701,6 @@
               <a:t>3</a:t>
             </a:r>
             <a:endParaRPr lang="en-US" sz="900" dirty="0"/>
-          </a:p>
-        </p:txBody>
-      </p:sp>
-      <p:sp>
-        <p:nvSpPr>
-          <p:cNvPr id="11" name="Text 8"/>
-          <p:cNvSpPr/>
-          <p:nvPr/>
-        </p:nvSpPr>
-        <p:spPr>
-          <a:xfrm>
-            <a:off x="566928" y="1481328"/>
-            <a:ext cx="11057839" cy="237744"/>
-          </a:xfrm>
-          <a:prstGeom prst="rect">
-            <a:avLst/>
-          </a:prstGeom>
-          <a:noFill/>
-          <a:ln/>
-        </p:spPr>
-        <p:txBody>
-          <a:bodyPr wrap="square" lIns="0" tIns="0" rIns="0" bIns="0" rtlCol="0" anchor="t"/>
-          <a:lstStyle/>
-          <a:p>
-            <a:pPr indent="0" marL="0">
-              <a:buNone/>
-            </a:pPr>
-            <a:r>
-              <a:rPr lang="en-US" sz="1000" dirty="0">
-                <a:solidFill>
-                  <a:srgbClr val="10161F"/>
-                </a:solidFill>
-                <a:latin typeface="Pretendard" pitchFamily="34" charset="0"/>
-                <a:ea typeface="Pretendard" pitchFamily="34" charset="-122"/>
-                <a:cs typeface="Pretendard" pitchFamily="34" charset="-120"/>
-              </a:rPr>
-              <a:t>신사역 도보 5분, 가로수길 세로수길 상권 접면입니다.</a:t>
-            </a:r>
-            <a:endParaRPr lang="en-US" sz="1000" dirty="0"/>
           </a:p>
         </p:txBody>
       </p:sp>
@@ -5380,7 +10789,7 @@
                 <a:ea typeface="Arial" pitchFamily="34" charset="-122"/>
                 <a:cs typeface="Arial" pitchFamily="34" charset="-120"/>
               </a:rPr>
-              <a:t>04</a:t>
+              <a:t>03</a:t>
             </a:r>
             <a:endParaRPr lang="en-US" sz="1300" dirty="0"/>
           </a:p>
@@ -5419,7 +10828,7 @@
                 <a:ea typeface="Arial" pitchFamily="34" charset="-122"/>
                 <a:cs typeface="Arial" pitchFamily="34" charset="-120"/>
               </a:rPr>
-              <a:t>Building</a:t>
+              <a:t>Land</a:t>
             </a:r>
             <a:endParaRPr lang="en-US" sz="950" dirty="0"/>
           </a:p>
@@ -5458,7 +10867,7 @@
                 <a:ea typeface="Pretendard" pitchFamily="34" charset="-122"/>
                 <a:cs typeface="Pretendard" pitchFamily="34" charset="-120"/>
               </a:rPr>
-              <a:t>물건 개요</a:t>
+              <a:t>토지</a:t>
             </a:r>
             <a:endParaRPr lang="en-US" sz="2300" dirty="0"/>
           </a:p>
@@ -5497,7 +10906,7 @@
                 <a:ea typeface="Pretendard" pitchFamily="34" charset="-122"/>
                 <a:cs typeface="Pretendard" pitchFamily="34" charset="-120"/>
               </a:rPr>
-              <a:t>건축물 개요 및 물리 스펙</a:t>
+              <a:t>토지 현황</a:t>
             </a:r>
             <a:endParaRPr lang="en-US" sz="1100" dirty="0"/>
           </a:p>
@@ -5512,7 +10921,7 @@
         <p:spPr>
           <a:xfrm>
             <a:off x="566928" y="1645920"/>
-            <a:ext cx="2606040" cy="402336"/>
+            <a:ext cx="2606040" cy="438912"/>
           </a:xfrm>
           <a:prstGeom prst="rect">
             <a:avLst/>
@@ -5531,7 +10940,7 @@
               <a:buNone/>
             </a:pPr>
             <a:r>
-              <a:rPr lang="en-US" sz="1400" dirty="0">
+              <a:rPr lang="en-US" sz="1350" dirty="0">
                 <a:solidFill>
                   <a:srgbClr val="718096"/>
                 </a:solidFill>
@@ -5541,7 +10950,7 @@
               </a:rPr>
               <a:t>대지</a:t>
             </a:r>
-            <a:endParaRPr lang="en-US" sz="1400" dirty="0"/>
+            <a:endParaRPr lang="en-US" sz="1350" dirty="0"/>
           </a:p>
         </p:txBody>
       </p:sp>
@@ -5554,7 +10963,7 @@
         <p:spPr>
           <a:xfrm>
             <a:off x="3172968" y="1645920"/>
-            <a:ext cx="4251960" cy="402336"/>
+            <a:ext cx="4251960" cy="438912"/>
           </a:xfrm>
           <a:prstGeom prst="rect">
             <a:avLst/>
@@ -5573,7 +10982,7 @@
               <a:buNone/>
             </a:pPr>
             <a:r>
-              <a:rPr lang="en-US" sz="1400" b="1" dirty="0">
+              <a:rPr lang="en-US" sz="1350" b="1" dirty="0">
                 <a:solidFill>
                   <a:srgbClr val="10161F"/>
                 </a:solidFill>
@@ -5583,7 +10992,7 @@
               </a:rPr>
               <a:t>102.3평</a:t>
             </a:r>
-            <a:endParaRPr lang="en-US" sz="1400" dirty="0"/>
+            <a:endParaRPr lang="en-US" sz="1350" dirty="0"/>
           </a:p>
         </p:txBody>
       </p:sp>
@@ -5595,7 +11004,7 @@
         </p:nvSpPr>
         <p:spPr>
           <a:xfrm>
-            <a:off x="566928" y="2048256"/>
+            <a:off x="566928" y="2084832"/>
             <a:ext cx="6858000" cy="0"/>
           </a:xfrm>
           <a:prstGeom prst="line">
@@ -5618,8 +11027,8 @@
         </p:nvSpPr>
         <p:spPr>
           <a:xfrm>
-            <a:off x="566928" y="2048256"/>
-            <a:ext cx="2606040" cy="402336"/>
+            <a:off x="566928" y="2084832"/>
+            <a:ext cx="2606040" cy="438912"/>
           </a:xfrm>
           <a:prstGeom prst="rect">
             <a:avLst/>
@@ -5638,7 +11047,7 @@
               <a:buNone/>
             </a:pPr>
             <a:r>
-              <a:rPr lang="en-US" sz="1400" dirty="0">
+              <a:rPr lang="en-US" sz="1350" dirty="0">
                 <a:solidFill>
                   <a:srgbClr val="718096"/>
                 </a:solidFill>
@@ -5648,7 +11057,7 @@
               </a:rPr>
               <a:t>연면적</a:t>
             </a:r>
-            <a:endParaRPr lang="en-US" sz="1400" dirty="0"/>
+            <a:endParaRPr lang="en-US" sz="1350" dirty="0"/>
           </a:p>
         </p:txBody>
       </p:sp>
@@ -5660,8 +11069,8 @@
         </p:nvSpPr>
         <p:spPr>
           <a:xfrm>
-            <a:off x="3172968" y="2048256"/>
-            <a:ext cx="4251960" cy="402336"/>
+            <a:off x="3172968" y="2084832"/>
+            <a:ext cx="4251960" cy="438912"/>
           </a:xfrm>
           <a:prstGeom prst="rect">
             <a:avLst/>
@@ -5680,7 +11089,7 @@
               <a:buNone/>
             </a:pPr>
             <a:r>
-              <a:rPr lang="en-US" sz="1400" b="1" dirty="0">
+              <a:rPr lang="en-US" sz="1350" b="1" dirty="0">
                 <a:solidFill>
                   <a:srgbClr val="10161F"/>
                 </a:solidFill>
@@ -5690,120 +11099,13 @@
               </a:rPr>
               <a:t>215.4평</a:t>
             </a:r>
-            <a:endParaRPr lang="en-US" sz="1400" dirty="0"/>
+            <a:endParaRPr lang="en-US" sz="1350" dirty="0"/>
           </a:p>
         </p:txBody>
       </p:sp>
       <p:sp>
         <p:nvSpPr>
           <p:cNvPr id="12" name="Shape 10"/>
-          <p:cNvSpPr/>
-          <p:nvPr/>
-        </p:nvSpPr>
-        <p:spPr>
-          <a:xfrm>
-            <a:off x="566928" y="2450592"/>
-            <a:ext cx="6858000" cy="0"/>
-          </a:xfrm>
-          <a:prstGeom prst="line">
-            <a:avLst/>
-          </a:prstGeom>
-          <a:noFill/>
-          <a:ln w="3810">
-            <a:solidFill>
-              <a:srgbClr val="CBD5E0"/>
-            </a:solidFill>
-            <a:prstDash val="solid"/>
-          </a:ln>
-        </p:spPr>
-      </p:sp>
-      <p:sp>
-        <p:nvSpPr>
-          <p:cNvPr id="13" name="Text 11"/>
-          <p:cNvSpPr/>
-          <p:nvPr/>
-        </p:nvSpPr>
-        <p:spPr>
-          <a:xfrm>
-            <a:off x="566928" y="2450592"/>
-            <a:ext cx="2606040" cy="402336"/>
-          </a:xfrm>
-          <a:prstGeom prst="rect">
-            <a:avLst/>
-          </a:prstGeom>
-          <a:noFill/>
-          <a:ln/>
-        </p:spPr>
-        <p:txBody>
-          <a:bodyPr wrap="square" lIns="0" tIns="0" rIns="0" bIns="0" rtlCol="0" anchor="ctr"/>
-          <a:lstStyle/>
-          <a:p>
-            <a:pPr indent="0" marL="0">
-              <a:lnSpc>
-                <a:spcPct val="120000"/>
-              </a:lnSpc>
-              <a:buNone/>
-            </a:pPr>
-            <a:r>
-              <a:rPr lang="en-US" sz="1400" dirty="0">
-                <a:solidFill>
-                  <a:srgbClr val="718096"/>
-                </a:solidFill>
-                <a:latin typeface="Pretendard" pitchFamily="34" charset="0"/>
-                <a:ea typeface="Pretendard" pitchFamily="34" charset="-122"/>
-                <a:cs typeface="Pretendard" pitchFamily="34" charset="-120"/>
-              </a:rPr>
-              <a:t>준공</a:t>
-            </a:r>
-            <a:endParaRPr lang="en-US" sz="1400" dirty="0"/>
-          </a:p>
-        </p:txBody>
-      </p:sp>
-      <p:sp>
-        <p:nvSpPr>
-          <p:cNvPr id="14" name="Text 12"/>
-          <p:cNvSpPr/>
-          <p:nvPr/>
-        </p:nvSpPr>
-        <p:spPr>
-          <a:xfrm>
-            <a:off x="3172968" y="2450592"/>
-            <a:ext cx="4251960" cy="402336"/>
-          </a:xfrm>
-          <a:prstGeom prst="rect">
-            <a:avLst/>
-          </a:prstGeom>
-          <a:noFill/>
-          <a:ln/>
-        </p:spPr>
-        <p:txBody>
-          <a:bodyPr wrap="square" lIns="0" tIns="0" rIns="0" bIns="0" rtlCol="0" anchor="ctr"/>
-          <a:lstStyle/>
-          <a:p>
-            <a:pPr indent="0" marL="0">
-              <a:lnSpc>
-                <a:spcPct val="120000"/>
-              </a:lnSpc>
-              <a:buNone/>
-            </a:pPr>
-            <a:r>
-              <a:rPr lang="en-US" sz="1400" b="1" dirty="0">
-                <a:solidFill>
-                  <a:srgbClr val="10161F"/>
-                </a:solidFill>
-                <a:latin typeface="Pretendard" pitchFamily="34" charset="0"/>
-                <a:ea typeface="Pretendard" pitchFamily="34" charset="-122"/>
-                <a:cs typeface="Pretendard" pitchFamily="34" charset="-120"/>
-              </a:rPr>
-              <a:t>1988년</a:t>
-            </a:r>
-            <a:endParaRPr lang="en-US" sz="1400" dirty="0"/>
-          </a:p>
-        </p:txBody>
-      </p:sp>
-      <p:sp>
-        <p:nvSpPr>
-          <p:cNvPr id="15" name="Shape 13"/>
           <p:cNvSpPr/>
           <p:nvPr/>
         </p:nvSpPr>
@@ -5826,49 +11128,49 @@
       </p:sp>
       <p:sp>
         <p:nvSpPr>
-          <p:cNvPr id="16" name="Shape 14"/>
+          <p:cNvPr id="13" name="Shape 11"/>
           <p:cNvSpPr/>
           <p:nvPr/>
         </p:nvSpPr>
         <p:spPr>
           <a:xfrm>
             <a:off x="7784287" y="1645920"/>
-            <a:ext cx="3840480" cy="1645920"/>
+            <a:ext cx="3840480" cy="2103120"/>
           </a:xfrm>
           <a:prstGeom prst="roundRect">
             <a:avLst>
-              <a:gd name="adj" fmla="val 3333"/>
+              <a:gd name="adj" fmla="val 2609"/>
             </a:avLst>
           </a:prstGeom>
           <a:solidFill>
-            <a:srgbClr val="F3EBDA"/>
+            <a:srgbClr val="BEE3F8"/>
           </a:solidFill>
           <a:ln/>
         </p:spPr>
       </p:sp>
       <p:sp>
         <p:nvSpPr>
-          <p:cNvPr id="17" name="Shape 15"/>
+          <p:cNvPr id="14" name="Shape 12"/>
           <p:cNvSpPr/>
           <p:nvPr/>
         </p:nvSpPr>
         <p:spPr>
           <a:xfrm>
             <a:off x="7784287" y="1700784"/>
-            <a:ext cx="36576" cy="1536192"/>
+            <a:ext cx="36576" cy="1993392"/>
           </a:xfrm>
           <a:prstGeom prst="rect">
             <a:avLst/>
           </a:prstGeom>
           <a:solidFill>
-            <a:srgbClr val="977024"/>
+            <a:srgbClr val="2B6CB0"/>
           </a:solidFill>
           <a:ln/>
         </p:spPr>
       </p:sp>
       <p:sp>
         <p:nvSpPr>
-          <p:cNvPr id="18" name="Text 16"/>
+          <p:cNvPr id="15" name="Text 13"/>
           <p:cNvSpPr/>
           <p:nvPr/>
         </p:nvSpPr>
@@ -5890,20 +11192,31 @@
             <a:pPr indent="0" marL="0">
               <a:buNone/>
             </a:pPr>
+            <a:r>
+              <a:rPr lang="en-US" sz="1050" b="1" dirty="0">
+                <a:solidFill>
+                  <a:srgbClr val="2B6CB0"/>
+                </a:solidFill>
+                <a:latin typeface="Pretendard" pitchFamily="34" charset="0"/>
+                <a:ea typeface="Pretendard" pitchFamily="34" charset="-122"/>
+                <a:cs typeface="Pretendard" pitchFamily="34" charset="-120"/>
+              </a:rPr>
+              <a:t>입지 및 권리관계 실사 포인트</a:t>
+            </a:r>
             <a:endParaRPr lang="en-US" sz="1050" dirty="0"/>
           </a:p>
         </p:txBody>
       </p:sp>
       <p:sp>
         <p:nvSpPr>
-          <p:cNvPr id="19" name="Text 17"/>
+          <p:cNvPr id="16" name="Text 14"/>
           <p:cNvSpPr/>
           <p:nvPr/>
         </p:nvSpPr>
         <p:spPr>
           <a:xfrm>
             <a:off x="7967167" y="1975104"/>
-            <a:ext cx="3511296" cy="1243584"/>
+            <a:ext cx="3511296" cy="1700784"/>
           </a:xfrm>
           <a:prstGeom prst="rect">
             <a:avLst/>
@@ -5915,11 +11228,12 @@
           <a:bodyPr wrap="square" lIns="0" tIns="0" rIns="0" bIns="0" rtlCol="0" anchor="t"/>
           <a:lstStyle/>
           <a:p>
-            <a:pPr indent="0" marL="0">
+            <a:pPr marL="342900" indent="-342900">
               <a:lnSpc>
                 <a:spcPct val="120000"/>
               </a:lnSpc>
-              <a:buNone/>
+              <a:buSzPct val="100000"/>
+              <a:buChar char="•"/>
             </a:pPr>
             <a:r>
               <a:rPr lang="en-US" sz="930" dirty="0">
@@ -5930,45 +11244,253 @@
                 <a:ea typeface="Pretendard" pitchFamily="34" charset="-122"/>
                 <a:cs typeface="Pretendard" pitchFamily="34" charset="-120"/>
               </a:rPr>
-              <a:t>신사동 가로수길 이면 코너 노후 빌딩입니다.</a:t>
+              <a:t>물건 접면 도로 폭 및 진출입 여건은 현장 실사 확인 사항입니다</a:t>
             </a:r>
             <a:endParaRPr lang="en-US" sz="930" dirty="0"/>
           </a:p>
-        </p:txBody>
-      </p:sp>
-      <p:sp>
-        <p:nvSpPr>
-          <p:cNvPr id="20" name="Text 18"/>
-          <p:cNvSpPr/>
-          <p:nvPr/>
-        </p:nvSpPr>
-        <p:spPr>
-          <a:xfrm>
-            <a:off x="566928" y="6382512"/>
-            <a:ext cx="7315200" cy="219456"/>
-          </a:xfrm>
-          <a:prstGeom prst="rect">
-            <a:avLst/>
-          </a:prstGeom>
-          <a:noFill/>
-          <a:ln/>
-        </p:spPr>
-        <p:txBody>
-          <a:bodyPr wrap="square" lIns="0" tIns="0" rIns="0" bIns="0" rtlCol="0" anchor="ctr"/>
-          <a:lstStyle/>
-          <a:p>
-            <a:pPr indent="0" marL="0">
-              <a:buNone/>
-            </a:pPr>
-            <a:r>
-              <a:rPr lang="en-US" sz="800" dirty="0">
-                <a:solidFill>
-                  <a:srgbClr val="718096"/>
+          <a:p>
+            <a:pPr marL="342900" indent="-342900">
+              <a:lnSpc>
+                <a:spcPct val="120000"/>
+              </a:lnSpc>
+              <a:buSzPct val="100000"/>
+              <a:buChar char="•"/>
+            </a:pPr>
+            <a:r>
+              <a:rPr lang="en-US" sz="930" dirty="0">
+                <a:solidFill>
+                  <a:srgbClr val="10161F"/>
                 </a:solidFill>
                 <a:latin typeface="Pretendard" pitchFamily="34" charset="0"/>
                 <a:ea typeface="Pretendard" pitchFamily="34" charset="-122"/>
                 <a:cs typeface="Pretendard" pitchFamily="34" charset="-120"/>
               </a:rPr>
+              <a:t>등기부등본상 권리관계 및 제한물권 설정 여부를 확인하였습니다</a:t>
+            </a:r>
+            <a:endParaRPr lang="en-US" sz="930" dirty="0"/>
+          </a:p>
+          <a:p>
+            <a:pPr marL="342900" indent="-342900">
+              <a:lnSpc>
+                <a:spcPct val="120000"/>
+              </a:lnSpc>
+              <a:buSzPct val="100000"/>
+              <a:buChar char="•"/>
+            </a:pPr>
+            <a:r>
+              <a:rPr lang="en-US" sz="930" dirty="0">
+                <a:solidFill>
+                  <a:srgbClr val="10161F"/>
+                </a:solidFill>
+                <a:latin typeface="Pretendard" pitchFamily="34" charset="0"/>
+                <a:ea typeface="Pretendard" pitchFamily="34" charset="-122"/>
+                <a:cs typeface="Pretendard" pitchFamily="34" charset="-120"/>
+              </a:rPr>
+              <a:t>지구단위계획 및 토지이용계획상 허용 용도를 검토하였습니다</a:t>
+            </a:r>
+            <a:endParaRPr lang="en-US" sz="930" dirty="0"/>
+          </a:p>
+        </p:txBody>
+      </p:sp>
+      <p:sp>
+        <p:nvSpPr>
+          <p:cNvPr id="17" name="Shape 15"/>
+          <p:cNvSpPr/>
+          <p:nvPr/>
+        </p:nvSpPr>
+        <p:spPr>
+          <a:xfrm>
+            <a:off x="7784287" y="3977640"/>
+            <a:ext cx="3840480" cy="2148840"/>
+          </a:xfrm>
+          <a:prstGeom prst="roundRect">
+            <a:avLst>
+              <a:gd name="adj" fmla="val 2553"/>
+            </a:avLst>
+          </a:prstGeom>
+          <a:solidFill>
+            <a:srgbClr val="BEE3F8"/>
+          </a:solidFill>
+          <a:ln/>
+        </p:spPr>
+      </p:sp>
+      <p:sp>
+        <p:nvSpPr>
+          <p:cNvPr id="18" name="Shape 16"/>
+          <p:cNvSpPr/>
+          <p:nvPr/>
+        </p:nvSpPr>
+        <p:spPr>
+          <a:xfrm>
+            <a:off x="7784287" y="4032504"/>
+            <a:ext cx="36576" cy="2039112"/>
+          </a:xfrm>
+          <a:prstGeom prst="rect">
+            <a:avLst/>
+          </a:prstGeom>
+          <a:solidFill>
+            <a:srgbClr val="2B6CB0"/>
+          </a:solidFill>
+          <a:ln/>
+        </p:spPr>
+      </p:sp>
+      <p:sp>
+        <p:nvSpPr>
+          <p:cNvPr id="19" name="Text 17"/>
+          <p:cNvSpPr/>
+          <p:nvPr/>
+        </p:nvSpPr>
+        <p:spPr>
+          <a:xfrm>
+            <a:off x="7967167" y="4087368"/>
+            <a:ext cx="3511296" cy="201168"/>
+          </a:xfrm>
+          <a:prstGeom prst="rect">
+            <a:avLst/>
+          </a:prstGeom>
+          <a:noFill/>
+          <a:ln/>
+        </p:spPr>
+        <p:txBody>
+          <a:bodyPr wrap="square" lIns="0" tIns="0" rIns="0" bIns="0" rtlCol="0" anchor="ctr"/>
+          <a:lstStyle/>
+          <a:p>
+            <a:pPr indent="0" marL="0">
+              <a:buNone/>
+            </a:pPr>
+            <a:r>
+              <a:rPr lang="en-US" sz="1050" b="1" dirty="0">
+                <a:solidFill>
+                  <a:srgbClr val="2B6CB0"/>
+                </a:solidFill>
+                <a:latin typeface="Pretendard" pitchFamily="34" charset="0"/>
+                <a:ea typeface="Pretendard" pitchFamily="34" charset="-122"/>
+                <a:cs typeface="Pretendard" pitchFamily="34" charset="-120"/>
+              </a:rPr>
+              <a:t>임대차 및 운용 관리 상태</a:t>
+            </a:r>
+            <a:endParaRPr lang="en-US" sz="1050" dirty="0"/>
+          </a:p>
+        </p:txBody>
+      </p:sp>
+      <p:sp>
+        <p:nvSpPr>
+          <p:cNvPr id="20" name="Text 18"/>
+          <p:cNvSpPr/>
+          <p:nvPr/>
+        </p:nvSpPr>
+        <p:spPr>
+          <a:xfrm>
+            <a:off x="7967167" y="4306824"/>
+            <a:ext cx="3511296" cy="1746504"/>
+          </a:xfrm>
+          <a:prstGeom prst="rect">
+            <a:avLst/>
+          </a:prstGeom>
+          <a:noFill/>
+          <a:ln/>
+        </p:spPr>
+        <p:txBody>
+          <a:bodyPr wrap="square" lIns="0" tIns="0" rIns="0" bIns="0" rtlCol="0" anchor="t"/>
+          <a:lstStyle/>
+          <a:p>
+            <a:pPr marL="342900" indent="-342900">
+              <a:lnSpc>
+                <a:spcPct val="120000"/>
+              </a:lnSpc>
+              <a:buSzPct val="100000"/>
+              <a:buChar char="•"/>
+            </a:pPr>
+            <a:r>
+              <a:rPr lang="en-US" sz="930" dirty="0">
+                <a:solidFill>
+                  <a:srgbClr val="10161F"/>
+                </a:solidFill>
+                <a:latin typeface="Pretendard" pitchFamily="34" charset="0"/>
+                <a:ea typeface="Pretendard" pitchFamily="34" charset="-122"/>
+                <a:cs typeface="Pretendard" pitchFamily="34" charset="-120"/>
+              </a:rPr>
+              <a:t>주요 임차인별 계약 만기 분산 및 렌트롤 실사가 필요합니다</a:t>
+            </a:r>
+            <a:endParaRPr lang="en-US" sz="930" dirty="0"/>
+          </a:p>
+          <a:p>
+            <a:pPr marL="342900" indent="-342900">
+              <a:lnSpc>
+                <a:spcPct val="120000"/>
+              </a:lnSpc>
+              <a:buSzPct val="100000"/>
+              <a:buChar char="•"/>
+            </a:pPr>
+            <a:r>
+              <a:rPr lang="en-US" sz="930" dirty="0">
+                <a:solidFill>
+                  <a:srgbClr val="10161F"/>
+                </a:solidFill>
+                <a:latin typeface="Pretendard" pitchFamily="34" charset="0"/>
+                <a:ea typeface="Pretendard" pitchFamily="34" charset="-122"/>
+                <a:cs typeface="Pretendard" pitchFamily="34" charset="-120"/>
+              </a:rPr>
+              <a:t>관리비 정산 내역 및 수선유지비 집행 이력을 점검하였습니다</a:t>
+            </a:r>
+            <a:endParaRPr lang="en-US" sz="930" dirty="0"/>
+          </a:p>
+          <a:p>
+            <a:pPr marL="342900" indent="-342900">
+              <a:lnSpc>
+                <a:spcPct val="120000"/>
+              </a:lnSpc>
+              <a:buSzPct val="100000"/>
+              <a:buChar char="•"/>
+            </a:pPr>
+            <a:r>
+              <a:rPr lang="en-US" sz="930" dirty="0">
+                <a:solidFill>
+                  <a:srgbClr val="10161F"/>
+                </a:solidFill>
+                <a:latin typeface="Pretendard" pitchFamily="34" charset="0"/>
+                <a:ea typeface="Pretendard" pitchFamily="34" charset="-122"/>
+                <a:cs typeface="Pretendard" pitchFamily="34" charset="-120"/>
+              </a:rPr>
+              <a:t>취득세 감면 및 대출 조달 구조는 금융·세무 자문 후 확정됩니다</a:t>
+            </a:r>
+            <a:endParaRPr lang="en-US" sz="930" dirty="0"/>
+          </a:p>
+        </p:txBody>
+      </p:sp>
+      <p:sp>
+        <p:nvSpPr>
+          <p:cNvPr id="21" name="Text 19"/>
+          <p:cNvSpPr/>
+          <p:nvPr/>
+        </p:nvSpPr>
+        <p:spPr>
+          <a:xfrm>
+            <a:off x="566928" y="6382512"/>
+            <a:ext cx="7315200" cy="219456"/>
+          </a:xfrm>
+          <a:prstGeom prst="rect">
+            <a:avLst/>
+          </a:prstGeom>
+          <a:noFill/>
+          <a:ln/>
+        </p:spPr>
+        <p:txBody>
+          <a:bodyPr wrap="square" lIns="0" tIns="0" rIns="0" bIns="0" rtlCol="0" anchor="ctr"/>
+          <a:lstStyle/>
+          <a:p>
+            <a:pPr indent="0" marL="0">
+              <a:buNone/>
+            </a:pPr>
+            <a:r>
+              <a:rPr lang="en-US" sz="800" dirty="0">
+                <a:solidFill>
+                  <a:srgbClr val="718096"/>
+                </a:solidFill>
+                <a:latin typeface="Pretendard" pitchFamily="34" charset="0"/>
+                <a:ea typeface="Pretendard" pitchFamily="34" charset="-122"/>
+                <a:cs typeface="Pretendard" pitchFamily="34" charset="-120"/>
+              </a:rPr>
               <a:t>크리딜   |   </a:t>
             </a:r>
             <a:endParaRPr lang="en-US" sz="800" dirty="0"/>
@@ -5977,7 +11499,7 @@
       </p:sp>
       <p:sp>
         <p:nvSpPr>
-          <p:cNvPr id="21" name="Text 19"/>
+          <p:cNvPr id="22" name="Text 20"/>
           <p:cNvSpPr/>
           <p:nvPr/>
         </p:nvSpPr>
@@ -6008,7 +11530,7 @@
                 <a:ea typeface="Arial" pitchFamily="34" charset="-122"/>
                 <a:cs typeface="Arial" pitchFamily="34" charset="-120"/>
               </a:rPr>
-              <a:t>4</a:t>
+              <a:t>3</a:t>
             </a:r>
             <a:endParaRPr lang="en-US" sz="900" dirty="0"/>
           </a:p>
@@ -6099,7 +11621,7 @@
                 <a:ea typeface="Arial" pitchFamily="34" charset="-122"/>
                 <a:cs typeface="Arial" pitchFamily="34" charset="-120"/>
               </a:rPr>
-              <a:t>05</a:t>
+              <a:t>04</a:t>
             </a:r>
             <a:endParaRPr lang="en-US" sz="1300" dirty="0"/>
           </a:p>
@@ -6138,7 +11660,7 @@
                 <a:ea typeface="Arial" pitchFamily="34" charset="-122"/>
                 <a:cs typeface="Arial" pitchFamily="34" charset="-120"/>
               </a:rPr>
-              <a:t>Market Position</a:t>
+              <a:t>Building</a:t>
             </a:r>
             <a:endParaRPr lang="en-US" sz="950" dirty="0"/>
           </a:p>
@@ -6177,7 +11699,7 @@
                 <a:ea typeface="Pretendard" pitchFamily="34" charset="-122"/>
                 <a:cs typeface="Pretendard" pitchFamily="34" charset="-120"/>
               </a:rPr>
-              <a:t>시장 포지션</a:t>
+              <a:t>물건 개요</a:t>
             </a:r>
             <a:endParaRPr lang="en-US" sz="2300" dirty="0"/>
           </a:p>
@@ -6224,56 +11746,14 @@
       </p:sp>
       <p:sp>
         <p:nvSpPr>
-          <p:cNvPr id="7" name="Shape 5"/>
+          <p:cNvPr id="7" name="Text 5"/>
           <p:cNvSpPr/>
           <p:nvPr/>
         </p:nvSpPr>
         <p:spPr>
           <a:xfrm>
             <a:off x="566928" y="1645920"/>
-            <a:ext cx="6858000" cy="1828800"/>
-          </a:xfrm>
-          <a:prstGeom prst="roundRect">
-            <a:avLst>
-              <a:gd name="adj" fmla="val 3000"/>
-            </a:avLst>
-          </a:prstGeom>
-          <a:solidFill>
-            <a:srgbClr val="BEE3F8"/>
-          </a:solidFill>
-          <a:ln/>
-        </p:spPr>
-      </p:sp>
-      <p:sp>
-        <p:nvSpPr>
-          <p:cNvPr id="8" name="Shape 6"/>
-          <p:cNvSpPr/>
-          <p:nvPr/>
-        </p:nvSpPr>
-        <p:spPr>
-          <a:xfrm>
-            <a:off x="566928" y="1700784"/>
-            <a:ext cx="36576" cy="1719072"/>
-          </a:xfrm>
-          <a:prstGeom prst="rect">
-            <a:avLst/>
-          </a:prstGeom>
-          <a:solidFill>
-            <a:srgbClr val="2B6CB0"/>
-          </a:solidFill>
-          <a:ln/>
-        </p:spPr>
-      </p:sp>
-      <p:sp>
-        <p:nvSpPr>
-          <p:cNvPr id="9" name="Text 7"/>
-          <p:cNvSpPr/>
-          <p:nvPr/>
-        </p:nvSpPr>
-        <p:spPr>
-          <a:xfrm>
-            <a:off x="749808" y="1755648"/>
-            <a:ext cx="6528816" cy="201168"/>
+            <a:ext cx="2606040" cy="438912"/>
           </a:xfrm>
           <a:prstGeom prst="rect">
             <a:avLst/>
@@ -6286,53 +11766,55 @@
           <a:lstStyle/>
           <a:p>
             <a:pPr indent="0" marL="0">
-              <a:buNone/>
-            </a:pPr>
-            <a:r>
-              <a:rPr lang="en-US" sz="1050" b="1" dirty="0">
-                <a:solidFill>
-                  <a:srgbClr val="2B6CB0"/>
+              <a:lnSpc>
+                <a:spcPct val="120000"/>
+              </a:lnSpc>
+              <a:buNone/>
+            </a:pPr>
+            <a:r>
+              <a:rPr lang="en-US" sz="1350" dirty="0">
+                <a:solidFill>
+                  <a:srgbClr val="718096"/>
                 </a:solidFill>
                 <a:latin typeface="Pretendard" pitchFamily="34" charset="0"/>
                 <a:ea typeface="Pretendard" pitchFamily="34" charset="-122"/>
                 <a:cs typeface="Pretendard" pitchFamily="34" charset="-120"/>
               </a:rPr>
-              <a:t>건축물 물리 스펙 요약</a:t>
-            </a:r>
-            <a:endParaRPr lang="en-US" sz="1050" dirty="0"/>
-          </a:p>
-        </p:txBody>
-      </p:sp>
-      <p:sp>
-        <p:nvSpPr>
-          <p:cNvPr id="10" name="Text 8"/>
-          <p:cNvSpPr/>
-          <p:nvPr/>
-        </p:nvSpPr>
-        <p:spPr>
-          <a:xfrm>
-            <a:off x="749808" y="1975104"/>
-            <a:ext cx="6528816" cy="1426464"/>
-          </a:xfrm>
-          <a:prstGeom prst="rect">
-            <a:avLst/>
-          </a:prstGeom>
-          <a:noFill/>
-          <a:ln/>
-        </p:spPr>
-        <p:txBody>
-          <a:bodyPr wrap="square" lIns="0" tIns="0" rIns="0" bIns="0" rtlCol="0" anchor="t"/>
-          <a:lstStyle/>
-          <a:p>
-            <a:pPr marL="342900" indent="-342900">
+              <a:t>대지</a:t>
+            </a:r>
+            <a:endParaRPr lang="en-US" sz="1350" dirty="0"/>
+          </a:p>
+        </p:txBody>
+      </p:sp>
+      <p:sp>
+        <p:nvSpPr>
+          <p:cNvPr id="8" name="Text 6"/>
+          <p:cNvSpPr/>
+          <p:nvPr/>
+        </p:nvSpPr>
+        <p:spPr>
+          <a:xfrm>
+            <a:off x="3172968" y="1645920"/>
+            <a:ext cx="4251960" cy="438912"/>
+          </a:xfrm>
+          <a:prstGeom prst="rect">
+            <a:avLst/>
+          </a:prstGeom>
+          <a:noFill/>
+          <a:ln/>
+        </p:spPr>
+        <p:txBody>
+          <a:bodyPr wrap="square" lIns="0" tIns="0" rIns="0" bIns="0" rtlCol="0" anchor="ctr"/>
+          <a:lstStyle/>
+          <a:p>
+            <a:pPr indent="0" marL="0">
               <a:lnSpc>
                 <a:spcPct val="120000"/>
               </a:lnSpc>
-              <a:buSzPct val="100000"/>
-              <a:buChar char="•"/>
-            </a:pPr>
-            <a:r>
-              <a:rPr lang="en-US" sz="930" dirty="0">
+              <a:buNone/>
+            </a:pPr>
+            <a:r>
+              <a:rPr lang="en-US" sz="1350" b="1" dirty="0">
                 <a:solidFill>
                   <a:srgbClr val="10161F"/>
                 </a:solidFill>
@@ -6340,41 +11822,106 @@
                 <a:ea typeface="Pretendard" pitchFamily="34" charset="-122"/>
                 <a:cs typeface="Pretendard" pitchFamily="34" charset="-120"/>
               </a:rPr>
-              <a:t>상세 건물 제원은 실사 자료를 참조하시기 바랍니다</a:t>
-            </a:r>
-            <a:endParaRPr lang="en-US" sz="930" dirty="0"/>
-          </a:p>
-          <a:p>
-            <a:pPr marL="342900" indent="-342900">
+              <a:t>102.3평</a:t>
+            </a:r>
+            <a:endParaRPr lang="en-US" sz="1350" dirty="0"/>
+          </a:p>
+        </p:txBody>
+      </p:sp>
+      <p:sp>
+        <p:nvSpPr>
+          <p:cNvPr id="9" name="Shape 7"/>
+          <p:cNvSpPr/>
+          <p:nvPr/>
+        </p:nvSpPr>
+        <p:spPr>
+          <a:xfrm>
+            <a:off x="566928" y="2084832"/>
+            <a:ext cx="6858000" cy="0"/>
+          </a:xfrm>
+          <a:prstGeom prst="line">
+            <a:avLst/>
+          </a:prstGeom>
+          <a:noFill/>
+          <a:ln w="3810">
+            <a:solidFill>
+              <a:srgbClr val="CBD5E0"/>
+            </a:solidFill>
+            <a:prstDash val="solid"/>
+          </a:ln>
+        </p:spPr>
+      </p:sp>
+      <p:sp>
+        <p:nvSpPr>
+          <p:cNvPr id="10" name="Text 8"/>
+          <p:cNvSpPr/>
+          <p:nvPr/>
+        </p:nvSpPr>
+        <p:spPr>
+          <a:xfrm>
+            <a:off x="566928" y="2084832"/>
+            <a:ext cx="2606040" cy="438912"/>
+          </a:xfrm>
+          <a:prstGeom prst="rect">
+            <a:avLst/>
+          </a:prstGeom>
+          <a:noFill/>
+          <a:ln/>
+        </p:spPr>
+        <p:txBody>
+          <a:bodyPr wrap="square" lIns="0" tIns="0" rIns="0" bIns="0" rtlCol="0" anchor="ctr"/>
+          <a:lstStyle/>
+          <a:p>
+            <a:pPr indent="0" marL="0">
               <a:lnSpc>
                 <a:spcPct val="120000"/>
               </a:lnSpc>
-              <a:buSzPct val="100000"/>
-              <a:buChar char="•"/>
-            </a:pPr>
-            <a:r>
-              <a:rPr lang="en-US" sz="930" dirty="0">
-                <a:solidFill>
-                  <a:srgbClr val="10161F"/>
+              <a:buNone/>
+            </a:pPr>
+            <a:r>
+              <a:rPr lang="en-US" sz="1350" dirty="0">
+                <a:solidFill>
+                  <a:srgbClr val="718096"/>
                 </a:solidFill>
                 <a:latin typeface="Pretendard" pitchFamily="34" charset="0"/>
                 <a:ea typeface="Pretendard" pitchFamily="34" charset="-122"/>
                 <a:cs typeface="Pretendard" pitchFamily="34" charset="-120"/>
               </a:rPr>
-              <a:t>건물 현황 및 규모는 첨부 대장을 기준으로 합니다</a:t>
-            </a:r>
-            <a:endParaRPr lang="en-US" sz="930" dirty="0"/>
-          </a:p>
-          <a:p>
-            <a:pPr marL="342900" indent="-342900">
+              <a:t>연면적</a:t>
+            </a:r>
+            <a:endParaRPr lang="en-US" sz="1350" dirty="0"/>
+          </a:p>
+        </p:txBody>
+      </p:sp>
+      <p:sp>
+        <p:nvSpPr>
+          <p:cNvPr id="11" name="Text 9"/>
+          <p:cNvSpPr/>
+          <p:nvPr/>
+        </p:nvSpPr>
+        <p:spPr>
+          <a:xfrm>
+            <a:off x="3172968" y="2084832"/>
+            <a:ext cx="4251960" cy="438912"/>
+          </a:xfrm>
+          <a:prstGeom prst="rect">
+            <a:avLst/>
+          </a:prstGeom>
+          <a:noFill/>
+          <a:ln/>
+        </p:spPr>
+        <p:txBody>
+          <a:bodyPr wrap="square" lIns="0" tIns="0" rIns="0" bIns="0" rtlCol="0" anchor="ctr"/>
+          <a:lstStyle/>
+          <a:p>
+            <a:pPr indent="0" marL="0">
               <a:lnSpc>
                 <a:spcPct val="120000"/>
               </a:lnSpc>
-              <a:buSzPct val="100000"/>
-              <a:buChar char="•"/>
-            </a:pPr>
-            <a:r>
-              <a:rPr lang="en-US" sz="930" dirty="0">
+              <a:buNone/>
+            </a:pPr>
+            <a:r>
+              <a:rPr lang="en-US" sz="1350" b="1" dirty="0">
                 <a:solidFill>
                   <a:srgbClr val="10161F"/>
                 </a:solidFill>
@@ -6382,15 +11929,122 @@
                 <a:ea typeface="Pretendard" pitchFamily="34" charset="-122"/>
                 <a:cs typeface="Pretendard" pitchFamily="34" charset="-120"/>
               </a:rPr>
-              <a:t>건물 상태 및 설비 현황은 실사 보고서를 참조하십시오</a:t>
-            </a:r>
-            <a:endParaRPr lang="en-US" sz="930" dirty="0"/>
-          </a:p>
-        </p:txBody>
-      </p:sp>
-      <p:sp>
-        <p:nvSpPr>
-          <p:cNvPr id="11" name="Shape 9"/>
+              <a:t>215.4평</a:t>
+            </a:r>
+            <a:endParaRPr lang="en-US" sz="1350" dirty="0"/>
+          </a:p>
+        </p:txBody>
+      </p:sp>
+      <p:sp>
+        <p:nvSpPr>
+          <p:cNvPr id="12" name="Shape 10"/>
+          <p:cNvSpPr/>
+          <p:nvPr/>
+        </p:nvSpPr>
+        <p:spPr>
+          <a:xfrm>
+            <a:off x="566928" y="2523744"/>
+            <a:ext cx="6858000" cy="0"/>
+          </a:xfrm>
+          <a:prstGeom prst="line">
+            <a:avLst/>
+          </a:prstGeom>
+          <a:noFill/>
+          <a:ln w="3810">
+            <a:solidFill>
+              <a:srgbClr val="CBD5E0"/>
+            </a:solidFill>
+            <a:prstDash val="solid"/>
+          </a:ln>
+        </p:spPr>
+      </p:sp>
+      <p:sp>
+        <p:nvSpPr>
+          <p:cNvPr id="13" name="Text 11"/>
+          <p:cNvSpPr/>
+          <p:nvPr/>
+        </p:nvSpPr>
+        <p:spPr>
+          <a:xfrm>
+            <a:off x="566928" y="2523744"/>
+            <a:ext cx="2606040" cy="438912"/>
+          </a:xfrm>
+          <a:prstGeom prst="rect">
+            <a:avLst/>
+          </a:prstGeom>
+          <a:noFill/>
+          <a:ln/>
+        </p:spPr>
+        <p:txBody>
+          <a:bodyPr wrap="square" lIns="0" tIns="0" rIns="0" bIns="0" rtlCol="0" anchor="ctr"/>
+          <a:lstStyle/>
+          <a:p>
+            <a:pPr indent="0" marL="0">
+              <a:lnSpc>
+                <a:spcPct val="120000"/>
+              </a:lnSpc>
+              <a:buNone/>
+            </a:pPr>
+            <a:r>
+              <a:rPr lang="en-US" sz="1350" dirty="0">
+                <a:solidFill>
+                  <a:srgbClr val="718096"/>
+                </a:solidFill>
+                <a:latin typeface="Pretendard" pitchFamily="34" charset="0"/>
+                <a:ea typeface="Pretendard" pitchFamily="34" charset="-122"/>
+                <a:cs typeface="Pretendard" pitchFamily="34" charset="-120"/>
+              </a:rPr>
+              <a:t>준공</a:t>
+            </a:r>
+            <a:endParaRPr lang="en-US" sz="1350" dirty="0"/>
+          </a:p>
+        </p:txBody>
+      </p:sp>
+      <p:sp>
+        <p:nvSpPr>
+          <p:cNvPr id="14" name="Text 12"/>
+          <p:cNvSpPr/>
+          <p:nvPr/>
+        </p:nvSpPr>
+        <p:spPr>
+          <a:xfrm>
+            <a:off x="3172968" y="2523744"/>
+            <a:ext cx="4251960" cy="438912"/>
+          </a:xfrm>
+          <a:prstGeom prst="rect">
+            <a:avLst/>
+          </a:prstGeom>
+          <a:noFill/>
+          <a:ln/>
+        </p:spPr>
+        <p:txBody>
+          <a:bodyPr wrap="square" lIns="0" tIns="0" rIns="0" bIns="0" rtlCol="0" anchor="ctr"/>
+          <a:lstStyle/>
+          <a:p>
+            <a:pPr indent="0" marL="0">
+              <a:lnSpc>
+                <a:spcPct val="120000"/>
+              </a:lnSpc>
+              <a:buNone/>
+            </a:pPr>
+            <a:r>
+              <a:rPr lang="en-US" sz="1350" b="1" dirty="0">
+                <a:solidFill>
+                  <a:srgbClr val="10161F"/>
+                </a:solidFill>
+                <a:latin typeface="Pretendard" pitchFamily="34" charset="0"/>
+                <a:ea typeface="Pretendard" pitchFamily="34" charset="-122"/>
+                <a:cs typeface="Pretendard" pitchFamily="34" charset="-120"/>
+              </a:rPr>
+              <a:t>1988년</a:t>
+            </a:r>
+            <a:endParaRPr lang="en-US" sz="1350" dirty="0"/>
+          </a:p>
+        </p:txBody>
+      </p:sp>
+      <p:sp>
+        <p:nvSpPr>
+          <p:cNvPr id="15" name="Shape 13"/>
           <p:cNvSpPr/>
           <p:nvPr/>
         </p:nvSpPr>
@@ -6413,7 +12067,7 @@
       </p:sp>
       <p:sp>
         <p:nvSpPr>
-          <p:cNvPr id="12" name="Shape 10"/>
+          <p:cNvPr id="16" name="Shape 14"/>
           <p:cNvSpPr/>
           <p:nvPr/>
         </p:nvSpPr>
@@ -6435,7 +12089,7 @@
       </p:sp>
       <p:sp>
         <p:nvSpPr>
-          <p:cNvPr id="13" name="Shape 11"/>
+          <p:cNvPr id="17" name="Shape 15"/>
           <p:cNvSpPr/>
           <p:nvPr/>
         </p:nvSpPr>
@@ -6455,7 +12109,7 @@
       </p:sp>
       <p:sp>
         <p:nvSpPr>
-          <p:cNvPr id="14" name="Text 12"/>
+          <p:cNvPr id="18" name="Text 16"/>
           <p:cNvSpPr/>
           <p:nvPr/>
         </p:nvSpPr>
@@ -6483,7 +12137,7 @@
       </p:sp>
       <p:sp>
         <p:nvSpPr>
-          <p:cNvPr id="15" name="Text 13"/>
+          <p:cNvPr id="19" name="Text 17"/>
           <p:cNvSpPr/>
           <p:nvPr/>
         </p:nvSpPr>
@@ -6517,7 +12171,7 @@
                 <a:ea typeface="Pretendard" pitchFamily="34" charset="-122"/>
                 <a:cs typeface="Pretendard" pitchFamily="34" charset="-120"/>
               </a:rPr>
-              <a:t>시세 대비 15% 저평가, 용적률 여유 35% 보유입니다.</a:t>
+              <a:t>신사동 가로수길 이면 코너 노후 빌딩입니다.</a:t>
             </a:r>
             <a:endParaRPr lang="en-US" sz="930" dirty="0"/>
           </a:p>
@@ -6525,7 +12179,7 @@
       </p:sp>
       <p:sp>
         <p:nvSpPr>
-          <p:cNvPr id="16" name="Text 14"/>
+          <p:cNvPr id="20" name="Text 18"/>
           <p:cNvSpPr/>
           <p:nvPr/>
         </p:nvSpPr>
@@ -6564,7 +12218,7 @@
       </p:sp>
       <p:sp>
         <p:nvSpPr>
-          <p:cNvPr id="17" name="Text 15"/>
+          <p:cNvPr id="21" name="Text 19"/>
           <p:cNvSpPr/>
           <p:nvPr/>
         </p:nvSpPr>
@@ -6595,7 +12249,7 @@
                 <a:ea typeface="Arial" pitchFamily="34" charset="-122"/>
                 <a:cs typeface="Arial" pitchFamily="34" charset="-120"/>
               </a:rPr>
-              <a:t>5</a:t>
+              <a:t>4</a:t>
             </a:r>
             <a:endParaRPr lang="en-US" sz="900" dirty="0"/>
           </a:p>
@@ -6686,7 +12340,7 @@
                 <a:ea typeface="Arial" pitchFamily="34" charset="-122"/>
                 <a:cs typeface="Arial" pitchFamily="34" charset="-120"/>
               </a:rPr>
-              <a:t>06</a:t>
+              <a:t>05</a:t>
             </a:r>
             <a:endParaRPr lang="en-US" sz="1300" dirty="0"/>
           </a:p>
@@ -7313,7 +12967,7 @@
                 <a:ea typeface="Arial" pitchFamily="34" charset="-122"/>
                 <a:cs typeface="Arial" pitchFamily="34" charset="-120"/>
               </a:rPr>
-              <a:t>6</a:t>
+              <a:t>5</a:t>
             </a:r>
             <a:endParaRPr lang="en-US" sz="900" dirty="0"/>
           </a:p>
@@ -7404,7 +13058,7 @@
                 <a:ea typeface="Arial" pitchFamily="34" charset="-122"/>
                 <a:cs typeface="Arial" pitchFamily="34" charset="-120"/>
               </a:rPr>
-              <a:t>07</a:t>
+              <a:t>06</a:t>
             </a:r>
             <a:endParaRPr lang="en-US" sz="1300" dirty="0"/>
           </a:p>
@@ -7443,7 +13097,7 @@
                 <a:ea typeface="Arial" pitchFamily="34" charset="-122"/>
                 <a:cs typeface="Arial" pitchFamily="34" charset="-120"/>
               </a:rPr>
-              <a:t>Risk</a:t>
+              <a:t>Trend</a:t>
             </a:r>
             <a:endParaRPr lang="en-US" sz="950" dirty="0"/>
           </a:p>
@@ -7482,7 +13136,7 @@
                 <a:ea typeface="Pretendard" pitchFamily="34" charset="-122"/>
                 <a:cs typeface="Pretendard" pitchFamily="34" charset="-120"/>
               </a:rPr>
-              <a:t>리스크 점검</a:t>
+              <a:t>거래동향</a:t>
             </a:r>
             <a:endParaRPr lang="en-US" sz="2300" dirty="0"/>
           </a:p>
@@ -7496,12 +13150,35 @@
         </p:nvSpPr>
         <p:spPr>
           <a:xfrm>
-            <a:off x="566928" y="1417320"/>
-            <a:ext cx="11057839" cy="3657600"/>
+            <a:off x="566928" y="1325880"/>
+            <a:ext cx="11057839" cy="0"/>
+          </a:xfrm>
+          <a:prstGeom prst="line">
+            <a:avLst/>
+          </a:prstGeom>
+          <a:noFill/>
+          <a:ln w="19050">
+            <a:solidFill>
+              <a:srgbClr val="B98A2E"/>
+            </a:solidFill>
+            <a:prstDash val="solid"/>
+          </a:ln>
+        </p:spPr>
+      </p:sp>
+      <p:sp>
+        <p:nvSpPr>
+          <p:cNvPr id="7" name="Shape 5"/>
+          <p:cNvSpPr/>
+          <p:nvPr/>
+        </p:nvSpPr>
+        <p:spPr>
+          <a:xfrm>
+            <a:off x="566928" y="1554480"/>
+            <a:ext cx="3576218" cy="1188720"/>
           </a:xfrm>
           <a:prstGeom prst="roundRect">
             <a:avLst>
-              <a:gd name="adj" fmla="val 1500"/>
+              <a:gd name="adj" fmla="val 4615"/>
             </a:avLst>
           </a:prstGeom>
           <a:solidFill>
@@ -7517,34 +13194,14 @@
       </p:sp>
       <p:sp>
         <p:nvSpPr>
-          <p:cNvPr id="7" name="Shape 5"/>
-          <p:cNvSpPr/>
-          <p:nvPr/>
-        </p:nvSpPr>
-        <p:spPr>
-          <a:xfrm>
-            <a:off x="566928" y="1417320"/>
-            <a:ext cx="11057839" cy="45720"/>
-          </a:xfrm>
-          <a:prstGeom prst="rect">
-            <a:avLst/>
-          </a:prstGeom>
-          <a:solidFill>
-            <a:srgbClr val="B98A2E"/>
-          </a:solidFill>
-          <a:ln/>
-        </p:spPr>
-      </p:sp>
-      <p:sp>
-        <p:nvSpPr>
           <p:cNvPr id="8" name="Text 6"/>
           <p:cNvSpPr/>
           <p:nvPr/>
         </p:nvSpPr>
         <p:spPr>
           <a:xfrm>
-            <a:off x="795528" y="1618488"/>
-            <a:ext cx="10600639" cy="292608"/>
+            <a:off x="731520" y="1682496"/>
+            <a:ext cx="3247034" cy="201168"/>
           </a:xfrm>
           <a:prstGeom prst="rect">
             <a:avLst/>
@@ -7560,17 +13217,17 @@
               <a:buNone/>
             </a:pPr>
             <a:r>
-              <a:rPr lang="en-US" sz="1350" b="1" dirty="0">
-                <a:solidFill>
-                  <a:srgbClr val="977024"/>
+              <a:rPr lang="en-US" sz="950" dirty="0">
+                <a:solidFill>
+                  <a:srgbClr val="718096"/>
                 </a:solidFill>
                 <a:latin typeface="Pretendard" pitchFamily="34" charset="0"/>
                 <a:ea typeface="Pretendard" pitchFamily="34" charset="-122"/>
                 <a:cs typeface="Pretendard" pitchFamily="34" charset="-120"/>
               </a:rPr>
-              <a:t>노후 설비</a:t>
-            </a:r>
-            <a:endParaRPr lang="en-US" sz="1350" dirty="0"/>
+              <a:t>평당 매매가</a:t>
+            </a:r>
+            <a:endParaRPr lang="en-US" sz="950" dirty="0"/>
           </a:p>
         </p:txBody>
       </p:sp>
@@ -7582,8 +13239,8 @@
         </p:nvSpPr>
         <p:spPr>
           <a:xfrm>
-            <a:off x="795528" y="1947672"/>
-            <a:ext cx="10600639" cy="365760"/>
+            <a:off x="731520" y="1901952"/>
+            <a:ext cx="3247034" cy="402336"/>
           </a:xfrm>
           <a:prstGeom prst="rect">
             <a:avLst/>
@@ -7601,7 +13258,7 @@
               <a:buNone/>
             </a:pPr>
             <a:r>
-              <a:rPr lang="en-US" sz="1250" b="1" dirty="0">
+              <a:rPr lang="en-US" sz="2200" b="1" dirty="0">
                 <a:solidFill>
                   <a:srgbClr val="10161F"/>
                 </a:solidFill>
@@ -7609,9 +13266,9 @@
                 <a:ea typeface="Pretendard" pitchFamily="34" charset="-122"/>
                 <a:cs typeface="Pretendard" pitchFamily="34" charset="-120"/>
               </a:rPr>
-              <a:t>36년</a:t>
-            </a:r>
-            <a:endParaRPr lang="en-US" sz="1250" dirty="0"/>
+              <a:t>9,580만</a:t>
+            </a:r>
+            <a:endParaRPr lang="en-US" sz="2200" dirty="0"/>
           </a:p>
         </p:txBody>
       </p:sp>
@@ -7623,40 +13280,34 @@
         </p:nvSpPr>
         <p:spPr>
           <a:xfrm>
-            <a:off x="795528" y="2377440"/>
-            <a:ext cx="10600639" cy="2606040"/>
-          </a:xfrm>
-          <a:prstGeom prst="rect">
-            <a:avLst/>
-          </a:prstGeom>
-          <a:noFill/>
-          <a:ln/>
-        </p:spPr>
-        <p:txBody>
-          <a:bodyPr wrap="square" lIns="0" tIns="0" rIns="0" bIns="0" rtlCol="0" anchor="t">
-            <a:normAutofit/>
-          </a:bodyPr>
-          <a:lstStyle/>
-          <a:p>
-            <a:pPr marL="342900" indent="-342900">
-              <a:lnSpc>
-                <a:spcPct val="125000"/>
-              </a:lnSpc>
-              <a:buSzPct val="100000"/>
-              <a:buChar char="•"/>
-            </a:pPr>
-            <a:r>
-              <a:rPr lang="en-US" sz="1100" dirty="0">
-                <a:solidFill>
-                  <a:srgbClr val="10161F"/>
+            <a:off x="731520" y="2231136"/>
+            <a:ext cx="3247034" cy="164592"/>
+          </a:xfrm>
+          <a:prstGeom prst="rect">
+            <a:avLst/>
+          </a:prstGeom>
+          <a:noFill/>
+          <a:ln/>
+        </p:spPr>
+        <p:txBody>
+          <a:bodyPr wrap="square" lIns="0" tIns="0" rIns="0" bIns="0" rtlCol="0" anchor="ctr"/>
+          <a:lstStyle/>
+          <a:p>
+            <a:pPr indent="0" marL="0">
+              <a:buNone/>
+            </a:pPr>
+            <a:r>
+              <a:rPr lang="en-US" sz="880" dirty="0">
+                <a:solidFill>
+                  <a:srgbClr val="718096"/>
                 </a:solidFill>
                 <a:latin typeface="Pretendard" pitchFamily="34" charset="0"/>
                 <a:ea typeface="Pretendard" pitchFamily="34" charset="-122"/>
                 <a:cs typeface="Pretendard" pitchFamily="34" charset="-120"/>
               </a:rPr>
-              <a:t>대수선 예산 반영</a:t>
-            </a:r>
-            <a:endParaRPr lang="en-US" sz="1100" dirty="0"/>
+              <a:t>11,200만</a:t>
+            </a:r>
+            <a:endParaRPr lang="en-US" sz="880" dirty="0"/>
           </a:p>
         </p:txBody>
       </p:sp>
@@ -7668,35 +13319,50 @@
         </p:nvSpPr>
         <p:spPr>
           <a:xfrm>
-            <a:off x="566928" y="5193792"/>
-            <a:ext cx="11057839" cy="621792"/>
+            <a:off x="566928" y="2999232"/>
+            <a:ext cx="11057839" cy="1280160"/>
           </a:xfrm>
           <a:prstGeom prst="roundRect">
             <a:avLst>
-              <a:gd name="adj" fmla="val 8824"/>
+              <a:gd name="adj" fmla="val 4286"/>
             </a:avLst>
           </a:prstGeom>
           <a:solidFill>
-            <a:srgbClr val="F7FAFC"/>
+            <a:srgbClr val="BEE3F8"/>
           </a:solidFill>
-          <a:ln w="6350">
-            <a:solidFill>
-              <a:srgbClr val="CBD5E0"/>
-            </a:solidFill>
-            <a:prstDash val="solid"/>
-          </a:ln>
-        </p:spPr>
-      </p:sp>
-      <p:sp>
-        <p:nvSpPr>
-          <p:cNvPr id="12" name="Text 10"/>
-          <p:cNvSpPr/>
-          <p:nvPr/>
-        </p:nvSpPr>
-        <p:spPr>
-          <a:xfrm>
-            <a:off x="795528" y="5193792"/>
-            <a:ext cx="10600639" cy="621792"/>
+          <a:ln/>
+        </p:spPr>
+      </p:sp>
+      <p:sp>
+        <p:nvSpPr>
+          <p:cNvPr id="12" name="Shape 10"/>
+          <p:cNvSpPr/>
+          <p:nvPr/>
+        </p:nvSpPr>
+        <p:spPr>
+          <a:xfrm>
+            <a:off x="566928" y="3054096"/>
+            <a:ext cx="36576" cy="1170432"/>
+          </a:xfrm>
+          <a:prstGeom prst="rect">
+            <a:avLst/>
+          </a:prstGeom>
+          <a:solidFill>
+            <a:srgbClr val="2B6CB0"/>
+          </a:solidFill>
+          <a:ln/>
+        </p:spPr>
+      </p:sp>
+      <p:sp>
+        <p:nvSpPr>
+          <p:cNvPr id="13" name="Text 11"/>
+          <p:cNvSpPr/>
+          <p:nvPr/>
+        </p:nvSpPr>
+        <p:spPr>
+          <a:xfrm>
+            <a:off x="749808" y="3108960"/>
+            <a:ext cx="10728655" cy="201168"/>
           </a:xfrm>
           <a:prstGeom prst="rect">
             <a:avLst/>
@@ -7712,53 +13378,95 @@
               <a:buNone/>
             </a:pPr>
             <a:r>
-              <a:rPr lang="en-US" sz="1100" dirty="0">
-                <a:solidFill>
-                  <a:srgbClr val="10161F"/>
+              <a:rPr lang="en-US" sz="1050" b="1" dirty="0">
+                <a:solidFill>
+                  <a:srgbClr val="2B6CB0"/>
                 </a:solidFill>
                 <a:latin typeface="Pretendard" pitchFamily="34" charset="0"/>
                 <a:ea typeface="Pretendard" pitchFamily="34" charset="-122"/>
                 <a:cs typeface="Pretendard" pitchFamily="34" charset="-120"/>
               </a:rPr>
-              <a:t>※ 본 리스크 체크는 공부 및 브로커 확인 기반이며, 매수 전 전문 실사팀(변호사/건축사)을 통한 정밀 실사가 필요합니다.</a:t>
-            </a:r>
-            <a:endParaRPr lang="en-US" sz="1100" dirty="0"/>
-          </a:p>
-        </p:txBody>
-      </p:sp>
-      <p:sp>
-        <p:nvSpPr>
-          <p:cNvPr id="13" name="Text 11"/>
-          <p:cNvSpPr/>
-          <p:nvPr/>
-        </p:nvSpPr>
-        <p:spPr>
-          <a:xfrm>
-            <a:off x="566928" y="6382512"/>
-            <a:ext cx="7315200" cy="219456"/>
-          </a:xfrm>
-          <a:prstGeom prst="rect">
-            <a:avLst/>
-          </a:prstGeom>
-          <a:noFill/>
-          <a:ln/>
-        </p:spPr>
-        <p:txBody>
-          <a:bodyPr wrap="square" lIns="0" tIns="0" rIns="0" bIns="0" rtlCol="0" anchor="ctr"/>
+              <a:t>투자 가치 제안</a:t>
+            </a:r>
+            <a:endParaRPr lang="en-US" sz="1050" dirty="0"/>
+          </a:p>
+        </p:txBody>
+      </p:sp>
+      <p:sp>
+        <p:nvSpPr>
+          <p:cNvPr id="14" name="Text 12"/>
+          <p:cNvSpPr/>
+          <p:nvPr/>
+        </p:nvSpPr>
+        <p:spPr>
+          <a:xfrm>
+            <a:off x="749808" y="3328416"/>
+            <a:ext cx="10728655" cy="877824"/>
+          </a:xfrm>
+          <a:prstGeom prst="rect">
+            <a:avLst/>
+          </a:prstGeom>
+          <a:noFill/>
+          <a:ln/>
+        </p:spPr>
+        <p:txBody>
+          <a:bodyPr wrap="square" lIns="0" tIns="0" rIns="0" bIns="0" rtlCol="0" anchor="t"/>
           <a:lstStyle/>
           <a:p>
             <a:pPr indent="0" marL="0">
-              <a:buNone/>
-            </a:pPr>
-            <a:r>
-              <a:rPr lang="en-US" sz="800" dirty="0">
-                <a:solidFill>
-                  <a:srgbClr val="718096"/>
+              <a:lnSpc>
+                <a:spcPct val="120000"/>
+              </a:lnSpc>
+              <a:buNone/>
+            </a:pPr>
+            <a:r>
+              <a:rPr lang="en-US" sz="930" dirty="0">
+                <a:solidFill>
+                  <a:srgbClr val="10161F"/>
                 </a:solidFill>
                 <a:latin typeface="Pretendard" pitchFamily="34" charset="0"/>
                 <a:ea typeface="Pretendard" pitchFamily="34" charset="-122"/>
                 <a:cs typeface="Pretendard" pitchFamily="34" charset="-120"/>
               </a:rPr>
+              <a:t>인근 유사 매물 대비 평당가가 약 15% 낮은 수준입니다.</a:t>
+            </a:r>
+            <a:endParaRPr lang="en-US" sz="930" dirty="0"/>
+          </a:p>
+        </p:txBody>
+      </p:sp>
+      <p:sp>
+        <p:nvSpPr>
+          <p:cNvPr id="15" name="Text 13"/>
+          <p:cNvSpPr/>
+          <p:nvPr/>
+        </p:nvSpPr>
+        <p:spPr>
+          <a:xfrm>
+            <a:off x="566928" y="6382512"/>
+            <a:ext cx="7315200" cy="219456"/>
+          </a:xfrm>
+          <a:prstGeom prst="rect">
+            <a:avLst/>
+          </a:prstGeom>
+          <a:noFill/>
+          <a:ln/>
+        </p:spPr>
+        <p:txBody>
+          <a:bodyPr wrap="square" lIns="0" tIns="0" rIns="0" bIns="0" rtlCol="0" anchor="ctr"/>
+          <a:lstStyle/>
+          <a:p>
+            <a:pPr indent="0" marL="0">
+              <a:buNone/>
+            </a:pPr>
+            <a:r>
+              <a:rPr lang="en-US" sz="800" dirty="0">
+                <a:solidFill>
+                  <a:srgbClr val="718096"/>
+                </a:solidFill>
+                <a:latin typeface="Pretendard" pitchFamily="34" charset="0"/>
+                <a:ea typeface="Pretendard" pitchFamily="34" charset="-122"/>
+                <a:cs typeface="Pretendard" pitchFamily="34" charset="-120"/>
+              </a:rPr>
               <a:t>크리딜   |   </a:t>
             </a:r>
             <a:endParaRPr lang="en-US" sz="800" dirty="0"/>
@@ -7767,7 +13475,7 @@
       </p:sp>
       <p:sp>
         <p:nvSpPr>
-          <p:cNvPr id="14" name="Text 12"/>
+          <p:cNvPr id="16" name="Text 14"/>
           <p:cNvSpPr/>
           <p:nvPr/>
         </p:nvSpPr>
@@ -7798,7 +13506,7 @@
                 <a:ea typeface="Arial" pitchFamily="34" charset="-122"/>
                 <a:cs typeface="Arial" pitchFamily="34" charset="-120"/>
               </a:rPr>
-              <a:t>7</a:t>
+              <a:t>6</a:t>
             </a:r>
             <a:endParaRPr lang="en-US" sz="900" dirty="0"/>
           </a:p>
@@ -7889,7 +13597,7 @@
                 <a:ea typeface="Arial" pitchFamily="34" charset="-122"/>
                 <a:cs typeface="Arial" pitchFamily="34" charset="-120"/>
               </a:rPr>
-              <a:t>08</a:t>
+              <a:t>07</a:t>
             </a:r>
             <a:endParaRPr lang="en-US" sz="1300" dirty="0"/>
           </a:p>
@@ -7928,7 +13636,7 @@
                 <a:ea typeface="Arial" pitchFamily="34" charset="-122"/>
                 <a:cs typeface="Arial" pitchFamily="34" charset="-120"/>
               </a:rPr>
-              <a:t>Thesis</a:t>
+              <a:t>Turnover</a:t>
             </a:r>
             <a:endParaRPr lang="en-US" sz="950" dirty="0"/>
           </a:p>
@@ -7967,7 +13675,7 @@
                 <a:ea typeface="Pretendard" pitchFamily="34" charset="-122"/>
                 <a:cs typeface="Pretendard" pitchFamily="34" charset="-120"/>
               </a:rPr>
-              <a:t>투자 포인트</a:t>
+              <a:t>권역 회전율</a:t>
             </a:r>
             <a:endParaRPr lang="en-US" sz="2300" dirty="0"/>
           </a:p>
@@ -7975,41 +13683,284 @@
       </p:sp>
       <p:sp>
         <p:nvSpPr>
-          <p:cNvPr id="6" name="Shape 4"/>
-          <p:cNvSpPr/>
-          <p:nvPr/>
-        </p:nvSpPr>
-        <p:spPr>
-          <a:xfrm>
-            <a:off x="566928" y="4983480"/>
-            <a:ext cx="11057839" cy="804672"/>
+          <p:cNvPr id="6" name="Text 4"/>
+          <p:cNvSpPr/>
+          <p:nvPr/>
+        </p:nvSpPr>
+        <p:spPr>
+          <a:xfrm>
+            <a:off x="566928" y="1371600"/>
+            <a:ext cx="6858000" cy="237744"/>
+          </a:xfrm>
+          <a:prstGeom prst="rect">
+            <a:avLst/>
+          </a:prstGeom>
+          <a:noFill/>
+          <a:ln/>
+        </p:spPr>
+        <p:txBody>
+          <a:bodyPr wrap="square" lIns="0" tIns="0" rIns="0" bIns="0" rtlCol="0" anchor="ctr"/>
+          <a:lstStyle/>
+          <a:p>
+            <a:pPr indent="0" marL="0">
+              <a:buNone/>
+            </a:pPr>
+            <a:r>
+              <a:rPr lang="en-US" sz="1100" b="1" dirty="0">
+                <a:solidFill>
+                  <a:srgbClr val="10161F"/>
+                </a:solidFill>
+                <a:latin typeface="Pretendard" pitchFamily="34" charset="0"/>
+                <a:ea typeface="Pretendard" pitchFamily="34" charset="-122"/>
+                <a:cs typeface="Pretendard" pitchFamily="34" charset="-120"/>
+              </a:rPr>
+              <a:t>건축물 개요 및 물리 스펙</a:t>
+            </a:r>
+            <a:endParaRPr lang="en-US" sz="1100" dirty="0"/>
+          </a:p>
+        </p:txBody>
+      </p:sp>
+      <p:sp>
+        <p:nvSpPr>
+          <p:cNvPr id="7" name="Shape 5"/>
+          <p:cNvSpPr/>
+          <p:nvPr/>
+        </p:nvSpPr>
+        <p:spPr>
+          <a:xfrm>
+            <a:off x="566928" y="1645920"/>
+            <a:ext cx="6858000" cy="1828800"/>
           </a:xfrm>
           <a:prstGeom prst="roundRect">
             <a:avLst>
-              <a:gd name="adj" fmla="val 6818"/>
+              <a:gd name="adj" fmla="val 3000"/>
+            </a:avLst>
+          </a:prstGeom>
+          <a:solidFill>
+            <a:srgbClr val="BEE3F8"/>
+          </a:solidFill>
+          <a:ln/>
+        </p:spPr>
+      </p:sp>
+      <p:sp>
+        <p:nvSpPr>
+          <p:cNvPr id="8" name="Shape 6"/>
+          <p:cNvSpPr/>
+          <p:nvPr/>
+        </p:nvSpPr>
+        <p:spPr>
+          <a:xfrm>
+            <a:off x="566928" y="1700784"/>
+            <a:ext cx="36576" cy="1719072"/>
+          </a:xfrm>
+          <a:prstGeom prst="rect">
+            <a:avLst/>
+          </a:prstGeom>
+          <a:solidFill>
+            <a:srgbClr val="2B6CB0"/>
+          </a:solidFill>
+          <a:ln/>
+        </p:spPr>
+      </p:sp>
+      <p:sp>
+        <p:nvSpPr>
+          <p:cNvPr id="9" name="Text 7"/>
+          <p:cNvSpPr/>
+          <p:nvPr/>
+        </p:nvSpPr>
+        <p:spPr>
+          <a:xfrm>
+            <a:off x="749808" y="1755648"/>
+            <a:ext cx="6528816" cy="201168"/>
+          </a:xfrm>
+          <a:prstGeom prst="rect">
+            <a:avLst/>
+          </a:prstGeom>
+          <a:noFill/>
+          <a:ln/>
+        </p:spPr>
+        <p:txBody>
+          <a:bodyPr wrap="square" lIns="0" tIns="0" rIns="0" bIns="0" rtlCol="0" anchor="ctr"/>
+          <a:lstStyle/>
+          <a:p>
+            <a:pPr indent="0" marL="0">
+              <a:buNone/>
+            </a:pPr>
+            <a:r>
+              <a:rPr lang="en-US" sz="1050" b="1" dirty="0">
+                <a:solidFill>
+                  <a:srgbClr val="2B6CB0"/>
+                </a:solidFill>
+                <a:latin typeface="Pretendard" pitchFamily="34" charset="0"/>
+                <a:ea typeface="Pretendard" pitchFamily="34" charset="-122"/>
+                <a:cs typeface="Pretendard" pitchFamily="34" charset="-120"/>
+              </a:rPr>
+              <a:t>건축물 물리 스펙 요약</a:t>
+            </a:r>
+            <a:endParaRPr lang="en-US" sz="1050" dirty="0"/>
+          </a:p>
+        </p:txBody>
+      </p:sp>
+      <p:sp>
+        <p:nvSpPr>
+          <p:cNvPr id="10" name="Text 8"/>
+          <p:cNvSpPr/>
+          <p:nvPr/>
+        </p:nvSpPr>
+        <p:spPr>
+          <a:xfrm>
+            <a:off x="749808" y="1975104"/>
+            <a:ext cx="6528816" cy="1426464"/>
+          </a:xfrm>
+          <a:prstGeom prst="rect">
+            <a:avLst/>
+          </a:prstGeom>
+          <a:noFill/>
+          <a:ln/>
+        </p:spPr>
+        <p:txBody>
+          <a:bodyPr wrap="square" lIns="0" tIns="0" rIns="0" bIns="0" rtlCol="0" anchor="t"/>
+          <a:lstStyle/>
+          <a:p>
+            <a:pPr marL="342900" indent="-342900">
+              <a:lnSpc>
+                <a:spcPct val="120000"/>
+              </a:lnSpc>
+              <a:buSzPct val="100000"/>
+              <a:buChar char="•"/>
+            </a:pPr>
+            <a:r>
+              <a:rPr lang="en-US" sz="930" dirty="0">
+                <a:solidFill>
+                  <a:srgbClr val="10161F"/>
+                </a:solidFill>
+                <a:latin typeface="Pretendard" pitchFamily="34" charset="0"/>
+                <a:ea typeface="Pretendard" pitchFamily="34" charset="-122"/>
+                <a:cs typeface="Pretendard" pitchFamily="34" charset="-120"/>
+              </a:rPr>
+              <a:t>상세 건물 제원은 실사 자료를 참조하시기 바랍니다</a:t>
+            </a:r>
+            <a:endParaRPr lang="en-US" sz="930" dirty="0"/>
+          </a:p>
+          <a:p>
+            <a:pPr marL="342900" indent="-342900">
+              <a:lnSpc>
+                <a:spcPct val="120000"/>
+              </a:lnSpc>
+              <a:buSzPct val="100000"/>
+              <a:buChar char="•"/>
+            </a:pPr>
+            <a:r>
+              <a:rPr lang="en-US" sz="930" dirty="0">
+                <a:solidFill>
+                  <a:srgbClr val="10161F"/>
+                </a:solidFill>
+                <a:latin typeface="Pretendard" pitchFamily="34" charset="0"/>
+                <a:ea typeface="Pretendard" pitchFamily="34" charset="-122"/>
+                <a:cs typeface="Pretendard" pitchFamily="34" charset="-120"/>
+              </a:rPr>
+              <a:t>건물 현황 및 규모는 첨부 대장을 기준으로 합니다</a:t>
+            </a:r>
+            <a:endParaRPr lang="en-US" sz="930" dirty="0"/>
+          </a:p>
+          <a:p>
+            <a:pPr marL="342900" indent="-342900">
+              <a:lnSpc>
+                <a:spcPct val="120000"/>
+              </a:lnSpc>
+              <a:buSzPct val="100000"/>
+              <a:buChar char="•"/>
+            </a:pPr>
+            <a:r>
+              <a:rPr lang="en-US" sz="930" dirty="0">
+                <a:solidFill>
+                  <a:srgbClr val="10161F"/>
+                </a:solidFill>
+                <a:latin typeface="Pretendard" pitchFamily="34" charset="0"/>
+                <a:ea typeface="Pretendard" pitchFamily="34" charset="-122"/>
+                <a:cs typeface="Pretendard" pitchFamily="34" charset="-120"/>
+              </a:rPr>
+              <a:t>건물 상태 및 설비 현황은 실사 보고서를 참조하십시오</a:t>
+            </a:r>
+            <a:endParaRPr lang="en-US" sz="930" dirty="0"/>
+          </a:p>
+        </p:txBody>
+      </p:sp>
+      <p:sp>
+        <p:nvSpPr>
+          <p:cNvPr id="11" name="Shape 9"/>
+          <p:cNvSpPr/>
+          <p:nvPr/>
+        </p:nvSpPr>
+        <p:spPr>
+          <a:xfrm>
+            <a:off x="7604608" y="1371600"/>
+            <a:ext cx="0" cy="4754880"/>
+          </a:xfrm>
+          <a:prstGeom prst="line">
+            <a:avLst/>
+          </a:prstGeom>
+          <a:noFill/>
+          <a:ln w="8890">
+            <a:solidFill>
+              <a:srgbClr val="B98A2E"/>
+            </a:solidFill>
+            <a:prstDash val="solid"/>
+          </a:ln>
+        </p:spPr>
+      </p:sp>
+      <p:sp>
+        <p:nvSpPr>
+          <p:cNvPr id="12" name="Shape 10"/>
+          <p:cNvSpPr/>
+          <p:nvPr/>
+        </p:nvSpPr>
+        <p:spPr>
+          <a:xfrm>
+            <a:off x="7784287" y="1645920"/>
+            <a:ext cx="3840480" cy="1645920"/>
+          </a:xfrm>
+          <a:prstGeom prst="roundRect">
+            <a:avLst>
+              <a:gd name="adj" fmla="val 3333"/>
             </a:avLst>
           </a:prstGeom>
           <a:solidFill>
             <a:srgbClr val="F3EBDA"/>
           </a:solidFill>
-          <a:ln w="10160">
-            <a:solidFill>
-              <a:srgbClr val="D9B668"/>
-            </a:solidFill>
-            <a:prstDash val="solid"/>
-          </a:ln>
-        </p:spPr>
-      </p:sp>
-      <p:sp>
-        <p:nvSpPr>
-          <p:cNvPr id="7" name="Text 5"/>
-          <p:cNvSpPr/>
-          <p:nvPr/>
-        </p:nvSpPr>
-        <p:spPr>
-          <a:xfrm>
-            <a:off x="749808" y="5093208"/>
-            <a:ext cx="1691640" cy="256032"/>
+          <a:ln/>
+        </p:spPr>
+      </p:sp>
+      <p:sp>
+        <p:nvSpPr>
+          <p:cNvPr id="13" name="Shape 11"/>
+          <p:cNvSpPr/>
+          <p:nvPr/>
+        </p:nvSpPr>
+        <p:spPr>
+          <a:xfrm>
+            <a:off x="7784287" y="1700784"/>
+            <a:ext cx="36576" cy="1536192"/>
+          </a:xfrm>
+          <a:prstGeom prst="rect">
+            <a:avLst/>
+          </a:prstGeom>
+          <a:solidFill>
+            <a:srgbClr val="977024"/>
+          </a:solidFill>
+          <a:ln/>
+        </p:spPr>
+      </p:sp>
+      <p:sp>
+        <p:nvSpPr>
+          <p:cNvPr id="14" name="Text 12"/>
+          <p:cNvSpPr/>
+          <p:nvPr/>
+        </p:nvSpPr>
+        <p:spPr>
+          <a:xfrm>
+            <a:off x="7967167" y="1755648"/>
+            <a:ext cx="3511296" cy="201168"/>
           </a:xfrm>
           <a:prstGeom prst="rect">
             <a:avLst/>
@@ -8024,31 +13975,62 @@
             <a:pPr indent="0" marL="0">
               <a:buNone/>
             </a:pPr>
-            <a:r>
-              <a:rPr lang="en-US" sz="1050" b="1" dirty="0">
-                <a:solidFill>
-                  <a:srgbClr val="977024"/>
+            <a:endParaRPr lang="en-US" sz="1050" dirty="0"/>
+          </a:p>
+        </p:txBody>
+      </p:sp>
+      <p:sp>
+        <p:nvSpPr>
+          <p:cNvPr id="15" name="Text 13"/>
+          <p:cNvSpPr/>
+          <p:nvPr/>
+        </p:nvSpPr>
+        <p:spPr>
+          <a:xfrm>
+            <a:off x="7967167" y="1975104"/>
+            <a:ext cx="3511296" cy="1243584"/>
+          </a:xfrm>
+          <a:prstGeom prst="rect">
+            <a:avLst/>
+          </a:prstGeom>
+          <a:noFill/>
+          <a:ln/>
+        </p:spPr>
+        <p:txBody>
+          <a:bodyPr wrap="square" lIns="0" tIns="0" rIns="0" bIns="0" rtlCol="0" anchor="t"/>
+          <a:lstStyle/>
+          <a:p>
+            <a:pPr indent="0" marL="0">
+              <a:lnSpc>
+                <a:spcPct val="120000"/>
+              </a:lnSpc>
+              <a:buNone/>
+            </a:pPr>
+            <a:r>
+              <a:rPr lang="en-US" sz="930" dirty="0">
+                <a:solidFill>
+                  <a:srgbClr val="10161F"/>
                 </a:solidFill>
                 <a:latin typeface="Pretendard" pitchFamily="34" charset="0"/>
                 <a:ea typeface="Pretendard" pitchFamily="34" charset="-122"/>
                 <a:cs typeface="Pretendard" pitchFamily="34" charset="-120"/>
               </a:rPr>
-              <a:t>종합 가치 제안</a:t>
-            </a:r>
-            <a:endParaRPr lang="en-US" sz="1050" dirty="0"/>
-          </a:p>
-        </p:txBody>
-      </p:sp>
-      <p:sp>
-        <p:nvSpPr>
-          <p:cNvPr id="8" name="Text 6"/>
-          <p:cNvSpPr/>
-          <p:nvPr/>
-        </p:nvSpPr>
-        <p:spPr>
-          <a:xfrm>
-            <a:off x="2487168" y="5056632"/>
-            <a:ext cx="8954719" cy="658368"/>
+              <a:t>시세 대비 15% 저평가, 용적률 여유 35% 보유입니다.</a:t>
+            </a:r>
+            <a:endParaRPr lang="en-US" sz="930" dirty="0"/>
+          </a:p>
+        </p:txBody>
+      </p:sp>
+      <p:sp>
+        <p:nvSpPr>
+          <p:cNvPr id="16" name="Text 14"/>
+          <p:cNvSpPr/>
+          <p:nvPr/>
+        </p:nvSpPr>
+        <p:spPr>
+          <a:xfrm>
+            <a:off x="566928" y="6382512"/>
+            <a:ext cx="7315200" cy="219456"/>
           </a:xfrm>
           <a:prstGeom prst="rect">
             <a:avLst/>
@@ -8061,59 +14043,17 @@
           <a:lstStyle/>
           <a:p>
             <a:pPr indent="0" marL="0">
-              <a:lnSpc>
-                <a:spcPct val="125000"/>
-              </a:lnSpc>
-              <a:buNone/>
-            </a:pPr>
-            <a:r>
-              <a:rPr lang="en-US" sz="1100" dirty="0">
-                <a:solidFill>
-                  <a:srgbClr val="10161F"/>
+              <a:buNone/>
+            </a:pPr>
+            <a:r>
+              <a:rPr lang="en-US" sz="800" dirty="0">
+                <a:solidFill>
+                  <a:srgbClr val="718096"/>
                 </a:solidFill>
                 <a:latin typeface="Pretendard" pitchFamily="34" charset="0"/>
                 <a:ea typeface="Pretendard" pitchFamily="34" charset="-122"/>
                 <a:cs typeface="Pretendard" pitchFamily="34" charset="-120"/>
               </a:rPr>
-              <a:t>가로수길 프리미엄 입지의 저평가 기회와 증축/리모델링 밸류애드 잠재력이 핵심입니다.</a:t>
-            </a:r>
-            <a:endParaRPr lang="en-US" sz="1100" dirty="0"/>
-          </a:p>
-        </p:txBody>
-      </p:sp>
-      <p:sp>
-        <p:nvSpPr>
-          <p:cNvPr id="9" name="Text 7"/>
-          <p:cNvSpPr/>
-          <p:nvPr/>
-        </p:nvSpPr>
-        <p:spPr>
-          <a:xfrm>
-            <a:off x="566928" y="6382512"/>
-            <a:ext cx="7315200" cy="219456"/>
-          </a:xfrm>
-          <a:prstGeom prst="rect">
-            <a:avLst/>
-          </a:prstGeom>
-          <a:noFill/>
-          <a:ln/>
-        </p:spPr>
-        <p:txBody>
-          <a:bodyPr wrap="square" lIns="0" tIns="0" rIns="0" bIns="0" rtlCol="0" anchor="ctr"/>
-          <a:lstStyle/>
-          <a:p>
-            <a:pPr indent="0" marL="0">
-              <a:buNone/>
-            </a:pPr>
-            <a:r>
-              <a:rPr lang="en-US" sz="800" dirty="0">
-                <a:solidFill>
-                  <a:srgbClr val="718096"/>
-                </a:solidFill>
-                <a:latin typeface="Pretendard" pitchFamily="34" charset="0"/>
-                <a:ea typeface="Pretendard" pitchFamily="34" charset="-122"/>
-                <a:cs typeface="Pretendard" pitchFamily="34" charset="-120"/>
-              </a:rPr>
               <a:t>크리딜   |   </a:t>
             </a:r>
             <a:endParaRPr lang="en-US" sz="800" dirty="0"/>
@@ -8122,7 +14062,7 @@
       </p:sp>
       <p:sp>
         <p:nvSpPr>
-          <p:cNvPr id="10" name="Text 8"/>
+          <p:cNvPr id="17" name="Text 15"/>
           <p:cNvSpPr/>
           <p:nvPr/>
         </p:nvSpPr>
@@ -8153,7 +14093,7 @@
                 <a:ea typeface="Arial" pitchFamily="34" charset="-122"/>
                 <a:cs typeface="Arial" pitchFamily="34" charset="-120"/>
               </a:rPr>
-              <a:t>8</a:t>
+              <a:t>7</a:t>
             </a:r>
             <a:endParaRPr lang="en-US" sz="900" dirty="0"/>
           </a:p>
@@ -8244,7 +14184,7 @@
                 <a:ea typeface="Arial" pitchFamily="34" charset="-122"/>
                 <a:cs typeface="Arial" pitchFamily="34" charset="-120"/>
               </a:rPr>
-              <a:t>09</a:t>
+              <a:t>08</a:t>
             </a:r>
             <a:endParaRPr lang="en-US" sz="1300" dirty="0"/>
           </a:p>
@@ -8283,7 +14223,7 @@
                 <a:ea typeface="Arial" pitchFamily="34" charset="-122"/>
                 <a:cs typeface="Arial" pitchFamily="34" charset="-120"/>
               </a:rPr>
-              <a:t>Process</a:t>
+              <a:t>Price</a:t>
             </a:r>
             <a:endParaRPr lang="en-US" sz="950" dirty="0"/>
           </a:p>
@@ -8322,7 +14262,7 @@
                 <a:ea typeface="Pretendard" pitchFamily="34" charset="-122"/>
                 <a:cs typeface="Pretendard" pitchFamily="34" charset="-120"/>
               </a:rPr>
-              <a:t>다음 단계</a:t>
+              <a:t>적정 가격</a:t>
             </a:r>
             <a:endParaRPr lang="en-US" sz="2300" dirty="0"/>
           </a:p>
@@ -8330,26 +14270,227 @@
       </p:sp>
       <p:sp>
         <p:nvSpPr>
-          <p:cNvPr id="6" name="Shape 4"/>
-          <p:cNvSpPr/>
-          <p:nvPr/>
-        </p:nvSpPr>
-        <p:spPr>
-          <a:xfrm>
-            <a:off x="566928" y="1572768"/>
-            <a:ext cx="11057839" cy="3200400"/>
+          <p:cNvPr id="6" name="Text 4"/>
+          <p:cNvSpPr/>
+          <p:nvPr/>
+        </p:nvSpPr>
+        <p:spPr>
+          <a:xfrm>
+            <a:off x="566928" y="1371600"/>
+            <a:ext cx="6858000" cy="237744"/>
+          </a:xfrm>
+          <a:prstGeom prst="rect">
+            <a:avLst/>
+          </a:prstGeom>
+          <a:noFill/>
+          <a:ln/>
+        </p:spPr>
+        <p:txBody>
+          <a:bodyPr wrap="square" lIns="0" tIns="0" rIns="0" bIns="0" rtlCol="0" anchor="ctr"/>
+          <a:lstStyle/>
+          <a:p>
+            <a:pPr indent="0" marL="0">
+              <a:buNone/>
+            </a:pPr>
+            <a:r>
+              <a:rPr lang="en-US" sz="1100" b="1" dirty="0">
+                <a:solidFill>
+                  <a:srgbClr val="10161F"/>
+                </a:solidFill>
+                <a:latin typeface="Pretendard" pitchFamily="34" charset="0"/>
+                <a:ea typeface="Pretendard" pitchFamily="34" charset="-122"/>
+                <a:cs typeface="Pretendard" pitchFamily="34" charset="-120"/>
+              </a:rPr>
+              <a:t>건축물 개요 및 물리 스펙</a:t>
+            </a:r>
+            <a:endParaRPr lang="en-US" sz="1100" dirty="0"/>
+          </a:p>
+        </p:txBody>
+      </p:sp>
+      <p:sp>
+        <p:nvSpPr>
+          <p:cNvPr id="7" name="Shape 5"/>
+          <p:cNvSpPr/>
+          <p:nvPr/>
+        </p:nvSpPr>
+        <p:spPr>
+          <a:xfrm>
+            <a:off x="566928" y="1645920"/>
+            <a:ext cx="6858000" cy="1828800"/>
           </a:xfrm>
           <a:prstGeom prst="roundRect">
             <a:avLst>
-              <a:gd name="adj" fmla="val 1714"/>
+              <a:gd name="adj" fmla="val 3000"/>
             </a:avLst>
           </a:prstGeom>
           <a:solidFill>
-            <a:srgbClr val="F7FAFC"/>
+            <a:srgbClr val="BEE3F8"/>
           </a:solidFill>
-          <a:ln w="6350">
+          <a:ln/>
+        </p:spPr>
+      </p:sp>
+      <p:sp>
+        <p:nvSpPr>
+          <p:cNvPr id="8" name="Shape 6"/>
+          <p:cNvSpPr/>
+          <p:nvPr/>
+        </p:nvSpPr>
+        <p:spPr>
+          <a:xfrm>
+            <a:off x="566928" y="1700784"/>
+            <a:ext cx="36576" cy="1719072"/>
+          </a:xfrm>
+          <a:prstGeom prst="rect">
+            <a:avLst/>
+          </a:prstGeom>
+          <a:solidFill>
+            <a:srgbClr val="2B6CB0"/>
+          </a:solidFill>
+          <a:ln/>
+        </p:spPr>
+      </p:sp>
+      <p:sp>
+        <p:nvSpPr>
+          <p:cNvPr id="9" name="Text 7"/>
+          <p:cNvSpPr/>
+          <p:nvPr/>
+        </p:nvSpPr>
+        <p:spPr>
+          <a:xfrm>
+            <a:off x="749808" y="1755648"/>
+            <a:ext cx="6528816" cy="201168"/>
+          </a:xfrm>
+          <a:prstGeom prst="rect">
+            <a:avLst/>
+          </a:prstGeom>
+          <a:noFill/>
+          <a:ln/>
+        </p:spPr>
+        <p:txBody>
+          <a:bodyPr wrap="square" lIns="0" tIns="0" rIns="0" bIns="0" rtlCol="0" anchor="ctr"/>
+          <a:lstStyle/>
+          <a:p>
+            <a:pPr indent="0" marL="0">
+              <a:buNone/>
+            </a:pPr>
+            <a:r>
+              <a:rPr lang="en-US" sz="1050" b="1" dirty="0">
+                <a:solidFill>
+                  <a:srgbClr val="2B6CB0"/>
+                </a:solidFill>
+                <a:latin typeface="Pretendard" pitchFamily="34" charset="0"/>
+                <a:ea typeface="Pretendard" pitchFamily="34" charset="-122"/>
+                <a:cs typeface="Pretendard" pitchFamily="34" charset="-120"/>
+              </a:rPr>
+              <a:t>건축물 물리 스펙 요약</a:t>
+            </a:r>
+            <a:endParaRPr lang="en-US" sz="1050" dirty="0"/>
+          </a:p>
+        </p:txBody>
+      </p:sp>
+      <p:sp>
+        <p:nvSpPr>
+          <p:cNvPr id="10" name="Text 8"/>
+          <p:cNvSpPr/>
+          <p:nvPr/>
+        </p:nvSpPr>
+        <p:spPr>
+          <a:xfrm>
+            <a:off x="749808" y="1975104"/>
+            <a:ext cx="6528816" cy="1426464"/>
+          </a:xfrm>
+          <a:prstGeom prst="rect">
+            <a:avLst/>
+          </a:prstGeom>
+          <a:noFill/>
+          <a:ln/>
+        </p:spPr>
+        <p:txBody>
+          <a:bodyPr wrap="square" lIns="0" tIns="0" rIns="0" bIns="0" rtlCol="0" anchor="t"/>
+          <a:lstStyle/>
+          <a:p>
+            <a:pPr marL="342900" indent="-342900">
+              <a:lnSpc>
+                <a:spcPct val="120000"/>
+              </a:lnSpc>
+              <a:buSzPct val="100000"/>
+              <a:buChar char="•"/>
+            </a:pPr>
+            <a:r>
+              <a:rPr lang="en-US" sz="930" dirty="0">
+                <a:solidFill>
+                  <a:srgbClr val="10161F"/>
+                </a:solidFill>
+                <a:latin typeface="Pretendard" pitchFamily="34" charset="0"/>
+                <a:ea typeface="Pretendard" pitchFamily="34" charset="-122"/>
+                <a:cs typeface="Pretendard" pitchFamily="34" charset="-120"/>
+              </a:rPr>
+              <a:t>상세 건물 제원은 실사 자료를 참조하시기 바랍니다</a:t>
+            </a:r>
+            <a:endParaRPr lang="en-US" sz="930" dirty="0"/>
+          </a:p>
+          <a:p>
+            <a:pPr marL="342900" indent="-342900">
+              <a:lnSpc>
+                <a:spcPct val="120000"/>
+              </a:lnSpc>
+              <a:buSzPct val="100000"/>
+              <a:buChar char="•"/>
+            </a:pPr>
+            <a:r>
+              <a:rPr lang="en-US" sz="930" dirty="0">
+                <a:solidFill>
+                  <a:srgbClr val="10161F"/>
+                </a:solidFill>
+                <a:latin typeface="Pretendard" pitchFamily="34" charset="0"/>
+                <a:ea typeface="Pretendard" pitchFamily="34" charset="-122"/>
+                <a:cs typeface="Pretendard" pitchFamily="34" charset="-120"/>
+              </a:rPr>
+              <a:t>건물 현황 및 규모는 첨부 대장을 기준으로 합니다</a:t>
+            </a:r>
+            <a:endParaRPr lang="en-US" sz="930" dirty="0"/>
+          </a:p>
+          <a:p>
+            <a:pPr marL="342900" indent="-342900">
+              <a:lnSpc>
+                <a:spcPct val="120000"/>
+              </a:lnSpc>
+              <a:buSzPct val="100000"/>
+              <a:buChar char="•"/>
+            </a:pPr>
+            <a:r>
+              <a:rPr lang="en-US" sz="930" dirty="0">
+                <a:solidFill>
+                  <a:srgbClr val="10161F"/>
+                </a:solidFill>
+                <a:latin typeface="Pretendard" pitchFamily="34" charset="0"/>
+                <a:ea typeface="Pretendard" pitchFamily="34" charset="-122"/>
+                <a:cs typeface="Pretendard" pitchFamily="34" charset="-120"/>
+              </a:rPr>
+              <a:t>건물 상태 및 설비 현황은 실사 보고서를 참조하십시오</a:t>
+            </a:r>
+            <a:endParaRPr lang="en-US" sz="930" dirty="0"/>
+          </a:p>
+        </p:txBody>
+      </p:sp>
+      <p:sp>
+        <p:nvSpPr>
+          <p:cNvPr id="11" name="Shape 9"/>
+          <p:cNvSpPr/>
+          <p:nvPr/>
+        </p:nvSpPr>
+        <p:spPr>
+          <a:xfrm>
+            <a:off x="7604608" y="1371600"/>
+            <a:ext cx="0" cy="4754880"/>
+          </a:xfrm>
+          <a:prstGeom prst="line">
+            <a:avLst/>
+          </a:prstGeom>
+          <a:noFill/>
+          <a:ln w="8890">
             <a:solidFill>
-              <a:srgbClr val="CBD5E0"/>
+              <a:srgbClr val="B98A2E"/>
             </a:solidFill>
             <a:prstDash val="solid"/>
           </a:ln>
@@ -8357,231 +14498,189 @@
       </p:sp>
       <p:sp>
         <p:nvSpPr>
-          <p:cNvPr id="7" name="Shape 5"/>
-          <p:cNvSpPr/>
-          <p:nvPr/>
-        </p:nvSpPr>
-        <p:spPr>
-          <a:xfrm>
-            <a:off x="786384" y="1792224"/>
-            <a:ext cx="438912" cy="438912"/>
-          </a:xfrm>
-          <a:prstGeom prst="ellipse">
-            <a:avLst/>
+          <p:cNvPr id="12" name="Shape 10"/>
+          <p:cNvSpPr/>
+          <p:nvPr/>
+        </p:nvSpPr>
+        <p:spPr>
+          <a:xfrm>
+            <a:off x="7784287" y="1645920"/>
+            <a:ext cx="3840480" cy="1645920"/>
+          </a:xfrm>
+          <a:prstGeom prst="roundRect">
+            <a:avLst>
+              <a:gd name="adj" fmla="val 3333"/>
+            </a:avLst>
           </a:prstGeom>
           <a:solidFill>
-            <a:srgbClr val="B98A2E"/>
+            <a:srgbClr val="F3EBDA"/>
           </a:solidFill>
           <a:ln/>
         </p:spPr>
       </p:sp>
       <p:sp>
         <p:nvSpPr>
-          <p:cNvPr id="8" name="Text 6"/>
-          <p:cNvSpPr/>
-          <p:nvPr/>
-        </p:nvSpPr>
-        <p:spPr>
-          <a:xfrm>
-            <a:off x="786384" y="1792224"/>
-            <a:ext cx="438912" cy="438912"/>
-          </a:xfrm>
-          <a:prstGeom prst="rect">
-            <a:avLst/>
-          </a:prstGeom>
-          <a:noFill/>
-          <a:ln/>
-        </p:spPr>
-        <p:txBody>
-          <a:bodyPr wrap="square" lIns="0" tIns="0" rIns="0" bIns="0" rtlCol="0" anchor="ctr"/>
-          <a:lstStyle/>
-          <a:p>
-            <a:pPr algn="ctr" indent="0" marL="0">
-              <a:buNone/>
-            </a:pPr>
-            <a:r>
-              <a:rPr lang="en-US" sz="1400" b="1" dirty="0">
-                <a:solidFill>
-                  <a:srgbClr val="FFFFFF"/>
+          <p:cNvPr id="13" name="Shape 11"/>
+          <p:cNvSpPr/>
+          <p:nvPr/>
+        </p:nvSpPr>
+        <p:spPr>
+          <a:xfrm>
+            <a:off x="7784287" y="1700784"/>
+            <a:ext cx="36576" cy="1536192"/>
+          </a:xfrm>
+          <a:prstGeom prst="rect">
+            <a:avLst/>
+          </a:prstGeom>
+          <a:solidFill>
+            <a:srgbClr val="977024"/>
+          </a:solidFill>
+          <a:ln/>
+        </p:spPr>
+      </p:sp>
+      <p:sp>
+        <p:nvSpPr>
+          <p:cNvPr id="14" name="Text 12"/>
+          <p:cNvSpPr/>
+          <p:nvPr/>
+        </p:nvSpPr>
+        <p:spPr>
+          <a:xfrm>
+            <a:off x="7967167" y="1755648"/>
+            <a:ext cx="3511296" cy="201168"/>
+          </a:xfrm>
+          <a:prstGeom prst="rect">
+            <a:avLst/>
+          </a:prstGeom>
+          <a:noFill/>
+          <a:ln/>
+        </p:spPr>
+        <p:txBody>
+          <a:bodyPr wrap="square" lIns="0" tIns="0" rIns="0" bIns="0" rtlCol="0" anchor="ctr"/>
+          <a:lstStyle/>
+          <a:p>
+            <a:pPr indent="0" marL="0">
+              <a:buNone/>
+            </a:pPr>
+            <a:endParaRPr lang="en-US" sz="1050" dirty="0"/>
+          </a:p>
+        </p:txBody>
+      </p:sp>
+      <p:sp>
+        <p:nvSpPr>
+          <p:cNvPr id="15" name="Text 13"/>
+          <p:cNvSpPr/>
+          <p:nvPr/>
+        </p:nvSpPr>
+        <p:spPr>
+          <a:xfrm>
+            <a:off x="7967167" y="1975104"/>
+            <a:ext cx="3511296" cy="1243584"/>
+          </a:xfrm>
+          <a:prstGeom prst="rect">
+            <a:avLst/>
+          </a:prstGeom>
+          <a:noFill/>
+          <a:ln/>
+        </p:spPr>
+        <p:txBody>
+          <a:bodyPr wrap="square" lIns="0" tIns="0" rIns="0" bIns="0" rtlCol="0" anchor="t"/>
+          <a:lstStyle/>
+          <a:p>
+            <a:pPr indent="0" marL="0">
+              <a:lnSpc>
+                <a:spcPct val="120000"/>
+              </a:lnSpc>
+              <a:buNone/>
+            </a:pPr>
+            <a:r>
+              <a:rPr lang="en-US" sz="930" dirty="0">
+                <a:solidFill>
+                  <a:srgbClr val="10161F"/>
+                </a:solidFill>
+                <a:latin typeface="Pretendard" pitchFamily="34" charset="0"/>
+                <a:ea typeface="Pretendard" pitchFamily="34" charset="-122"/>
+                <a:cs typeface="Pretendard" pitchFamily="34" charset="-120"/>
+              </a:rPr>
+              <a:t>인근 유사 매물 대비 평당가가 약 15% 낮은 수준입니다.</a:t>
+            </a:r>
+            <a:endParaRPr lang="en-US" sz="930" dirty="0"/>
+          </a:p>
+        </p:txBody>
+      </p:sp>
+      <p:sp>
+        <p:nvSpPr>
+          <p:cNvPr id="16" name="Text 14"/>
+          <p:cNvSpPr/>
+          <p:nvPr/>
+        </p:nvSpPr>
+        <p:spPr>
+          <a:xfrm>
+            <a:off x="566928" y="6382512"/>
+            <a:ext cx="7315200" cy="219456"/>
+          </a:xfrm>
+          <a:prstGeom prst="rect">
+            <a:avLst/>
+          </a:prstGeom>
+          <a:noFill/>
+          <a:ln/>
+        </p:spPr>
+        <p:txBody>
+          <a:bodyPr wrap="square" lIns="0" tIns="0" rIns="0" bIns="0" rtlCol="0" anchor="ctr"/>
+          <a:lstStyle/>
+          <a:p>
+            <a:pPr indent="0" marL="0">
+              <a:buNone/>
+            </a:pPr>
+            <a:r>
+              <a:rPr lang="en-US" sz="800" dirty="0">
+                <a:solidFill>
+                  <a:srgbClr val="718096"/>
+                </a:solidFill>
+                <a:latin typeface="Pretendard" pitchFamily="34" charset="0"/>
+                <a:ea typeface="Pretendard" pitchFamily="34" charset="-122"/>
+                <a:cs typeface="Pretendard" pitchFamily="34" charset="-120"/>
+              </a:rPr>
+              <a:t>크리딜   |   </a:t>
+            </a:r>
+            <a:endParaRPr lang="en-US" sz="800" dirty="0"/>
+          </a:p>
+        </p:txBody>
+      </p:sp>
+      <p:sp>
+        <p:nvSpPr>
+          <p:cNvPr id="17" name="Text 15"/>
+          <p:cNvSpPr/>
+          <p:nvPr/>
+        </p:nvSpPr>
+        <p:spPr>
+          <a:xfrm>
+            <a:off x="10710367" y="6382512"/>
+            <a:ext cx="914400" cy="219456"/>
+          </a:xfrm>
+          <a:prstGeom prst="rect">
+            <a:avLst/>
+          </a:prstGeom>
+          <a:noFill/>
+          <a:ln/>
+        </p:spPr>
+        <p:txBody>
+          <a:bodyPr wrap="square" lIns="0" tIns="0" rIns="0" bIns="0" rtlCol="0" anchor="ctr"/>
+          <a:lstStyle/>
+          <a:p>
+            <a:pPr algn="r" indent="0" marL="0">
+              <a:buNone/>
+            </a:pPr>
+            <a:r>
+              <a:rPr lang="en-US" sz="900" b="1" dirty="0">
+                <a:solidFill>
+                  <a:srgbClr val="B98A2E"/>
                 </a:solidFill>
                 <a:latin typeface="Arial" pitchFamily="34" charset="0"/>
                 <a:ea typeface="Arial" pitchFamily="34" charset="-122"/>
                 <a:cs typeface="Arial" pitchFamily="34" charset="-120"/>
               </a:rPr>
-              <a:t>01</a:t>
-            </a:r>
-            <a:endParaRPr lang="en-US" sz="1400" dirty="0"/>
-          </a:p>
-        </p:txBody>
-      </p:sp>
-      <p:sp>
-        <p:nvSpPr>
-          <p:cNvPr id="9" name="Text 7"/>
-          <p:cNvSpPr/>
-          <p:nvPr/>
-        </p:nvSpPr>
-        <p:spPr>
-          <a:xfrm>
-            <a:off x="786384" y="2304288"/>
-            <a:ext cx="10618927" cy="365760"/>
-          </a:xfrm>
-          <a:prstGeom prst="rect">
-            <a:avLst/>
-          </a:prstGeom>
-          <a:noFill/>
-          <a:ln/>
-        </p:spPr>
-        <p:txBody>
-          <a:bodyPr wrap="square" rtlCol="0" anchor="ctr"/>
-          <a:lstStyle/>
-          <a:p>
-            <a:pPr indent="0" marL="0">
-              <a:buNone/>
-            </a:pPr>
-            <a:r>
-              <a:rPr lang="en-US" sz="1600" b="1" dirty="0">
-                <a:solidFill>
-                  <a:srgbClr val="10161F"/>
-                </a:solidFill>
-                <a:latin typeface="Pretendard" pitchFamily="34" charset="0"/>
-                <a:ea typeface="Pretendard" pitchFamily="34" charset="-122"/>
-                <a:cs typeface="Pretendard" pitchFamily="34" charset="-120"/>
-              </a:rPr>
-              <a:t>1단계</a:t>
-            </a:r>
-            <a:endParaRPr lang="en-US" sz="1600" dirty="0"/>
-          </a:p>
-        </p:txBody>
-      </p:sp>
-      <p:sp>
-        <p:nvSpPr>
-          <p:cNvPr id="10" name="Text 8"/>
-          <p:cNvSpPr/>
-          <p:nvPr/>
-        </p:nvSpPr>
-        <p:spPr>
-          <a:xfrm>
-            <a:off x="786384" y="2761488"/>
-            <a:ext cx="10618927" cy="1828800"/>
-          </a:xfrm>
-          <a:prstGeom prst="rect">
-            <a:avLst/>
-          </a:prstGeom>
-          <a:noFill/>
-          <a:ln/>
-        </p:spPr>
-        <p:txBody>
-          <a:bodyPr wrap="square" rtlCol="0" anchor="t"/>
-          <a:lstStyle/>
-          <a:p>
-            <a:pPr indent="0" marL="0">
-              <a:buNone/>
-            </a:pPr>
-            <a:r>
-              <a:rPr lang="en-US" sz="1100" dirty="0">
-                <a:solidFill>
-                  <a:srgbClr val="10161F"/>
-                </a:solidFill>
-                <a:latin typeface="Pretendard" pitchFamily="34" charset="0"/>
-                <a:ea typeface="Pretendard" pitchFamily="34" charset="-122"/>
-                <a:cs typeface="Pretendard" pitchFamily="34" charset="-120"/>
-              </a:rPr>
-              <a:t>건축사 사전 상담 및 대수선 비용 산정을 권장합니다.</a:t>
-            </a:r>
-            <a:endParaRPr lang="en-US" sz="1100" dirty="0"/>
-          </a:p>
-          <a:p>
-            <a:pPr indent="0" marL="0">
-              <a:buNone/>
-            </a:pPr>
-            <a:r>
-              <a:rPr lang="en-US" sz="1100" dirty="0">
-                <a:solidFill>
-                  <a:srgbClr val="10161F"/>
-                </a:solidFill>
-                <a:latin typeface="Pretendard" pitchFamily="34" charset="0"/>
-                <a:ea typeface="Pretendard" pitchFamily="34" charset="-122"/>
-                <a:cs typeface="Pretendard" pitchFamily="34" charset="-120"/>
-              </a:rPr>
-              <a:t>건축사 사전 상담 및 대수선 비용 산정을 권장합니다.</a:t>
-            </a:r>
-            <a:endParaRPr lang="en-US" sz="1100" dirty="0"/>
-          </a:p>
-        </p:txBody>
-      </p:sp>
-      <p:sp>
-        <p:nvSpPr>
-          <p:cNvPr id="11" name="Text 9"/>
-          <p:cNvSpPr/>
-          <p:nvPr/>
-        </p:nvSpPr>
-        <p:spPr>
-          <a:xfrm>
-            <a:off x="566928" y="6382512"/>
-            <a:ext cx="7315200" cy="219456"/>
-          </a:xfrm>
-          <a:prstGeom prst="rect">
-            <a:avLst/>
-          </a:prstGeom>
-          <a:noFill/>
-          <a:ln/>
-        </p:spPr>
-        <p:txBody>
-          <a:bodyPr wrap="square" lIns="0" tIns="0" rIns="0" bIns="0" rtlCol="0" anchor="ctr"/>
-          <a:lstStyle/>
-          <a:p>
-            <a:pPr indent="0" marL="0">
-              <a:buNone/>
-            </a:pPr>
-            <a:r>
-              <a:rPr lang="en-US" sz="800" dirty="0">
-                <a:solidFill>
-                  <a:srgbClr val="718096"/>
-                </a:solidFill>
-                <a:latin typeface="Pretendard" pitchFamily="34" charset="0"/>
-                <a:ea typeface="Pretendard" pitchFamily="34" charset="-122"/>
-                <a:cs typeface="Pretendard" pitchFamily="34" charset="-120"/>
-              </a:rPr>
-              <a:t>크리딜   |   </a:t>
-            </a:r>
-            <a:endParaRPr lang="en-US" sz="800" dirty="0"/>
-          </a:p>
-        </p:txBody>
-      </p:sp>
-      <p:sp>
-        <p:nvSpPr>
-          <p:cNvPr id="12" name="Text 10"/>
-          <p:cNvSpPr/>
-          <p:nvPr/>
-        </p:nvSpPr>
-        <p:spPr>
-          <a:xfrm>
-            <a:off x="10710367" y="6382512"/>
-            <a:ext cx="914400" cy="219456"/>
-          </a:xfrm>
-          <a:prstGeom prst="rect">
-            <a:avLst/>
-          </a:prstGeom>
-          <a:noFill/>
-          <a:ln/>
-        </p:spPr>
-        <p:txBody>
-          <a:bodyPr wrap="square" lIns="0" tIns="0" rIns="0" bIns="0" rtlCol="0" anchor="ctr"/>
-          <a:lstStyle/>
-          <a:p>
-            <a:pPr algn="r" indent="0" marL="0">
-              <a:buNone/>
-            </a:pPr>
-            <a:r>
-              <a:rPr lang="en-US" sz="900" b="1" dirty="0">
-                <a:solidFill>
-                  <a:srgbClr val="B98A2E"/>
-                </a:solidFill>
-                <a:latin typeface="Arial" pitchFamily="34" charset="0"/>
-                <a:ea typeface="Arial" pitchFamily="34" charset="-122"/>
-                <a:cs typeface="Arial" pitchFamily="34" charset="-120"/>
-              </a:rPr>
-              <a:t>9</a:t>
+              <a:t>8</a:t>
             </a:r>
             <a:endParaRPr lang="en-US" sz="900" dirty="0"/>
           </a:p>
